--- a/docs/Valentin-Presentation-v7.pptx
+++ b/docs/Valentin-Presentation-v7.pptx
@@ -17,7 +17,7 @@
     <p:sldId id="282" r:id="rId25"/>
     <p:sldId id="272" r:id="rId8"/>
     <p:sldId id="283" r:id="rId26"/>
-    <p:sldId id="271" r:id="rId11"/>
+    <p:sldId id="287" r:id="rId30"/>
     <p:sldId id="284" r:id="rId27"/>
     <p:sldId id="285" r:id="rId28"/>
     <p:sldId id="286" r:id="rId29"/>
@@ -376,13 +376,13 @@
           <a:lstStyle/>
           <a:p>
             <a:r>
-              <a:t>[0:35 · cumulative 5:15 of 10:00]</a:t>
+              <a:t>[0:25 · cumulative 3:50 of 10:00]</a:t>
             </a:r>
           </a:p>
           <a:p/>
           <a:p>
             <a:r>
-              <a:t>Cost first, every component in play. Engine A never scales to zero — eighteen dollars a month before anyone says a word, plus a second model call every turn to extract preferences. Engine B pays per second of real work. The honest part: its unit price is worse, two point two times dearer per vCPU-hour. It wins on granularity, not on rate.</a:t>
+              <a:t>Now the real content. Same product, built twice: engine A is the DIY build I own on Fargate; engine B is the same model on AgentCore. Everything from here judges those two engines through six lenses.</a:t>
             </a:r>
           </a:p>
         </p:txBody>
@@ -428,13 +428,13 @@
           <a:lstStyle/>
           <a:p>
             <a:r>
-              <a:t>[0:25 · cumulative 3:50 of 10:00]</a:t>
+              <a:t>[0:50 · cumulative 4:40 of 10:00]</a:t>
             </a:r>
           </a:p>
           <a:p/>
           <a:p>
             <a:r>
-              <a:t>Now the real content. Same product, built twice: engine A is glue code I own on Fargate; engine B is the same model on AgentCore. Everything from here judges those two engines through six lenses.</a:t>
+              <a:t>The whole section in one slide. Six lenses down the side; the four AgentCore components across the top, lit when they matter to that lens. Cost lights everything. Security is Runtime plus Gateway. Debuggability and latency go to DIY — four-two, and the two it loses are why this is a comparison and not a sales pitch.</a:t>
             </a:r>
           </a:p>
         </p:txBody>
@@ -480,13 +480,13 @@
           <a:lstStyle/>
           <a:p>
             <a:r>
-              <a:t>[0:50 · cumulative 4:40 of 10:00]</a:t>
+              <a:t>[0:35 · cumulative 5:15 of 10:00]</a:t>
             </a:r>
           </a:p>
           <a:p/>
           <a:p>
             <a:r>
-              <a:t>The whole section in one slide. Six lenses down the side; the four AgentCore components across the top, lit when they matter to that lens. Cost lights everything. Security is Runtime plus Gateway. Debuggability and latency go to the glue code — four-two, and the two it loses are why this is a comparison and not a sales pitch.</a:t>
+              <a:t>Cost, at four scales. At one user the story is the floor: engine A bills eighteen dollars before anyone speaks; B bills a dime. At a million users the story is the meter: both bills are per-user, and B settles at eighteen times cheaper because extraction is part of the service, not a second model call. And A’s floor is not even fixed — it steps up with every forty concurrent sessions.</a:t>
             </a:r>
           </a:p>
         </p:txBody>
@@ -842,7 +842,7 @@
           <a:p/>
           <a:p>
             <a:r>
-              <a:t>Debuggability the glue code wins, and I will not skip it. Hand-wired OTEL emits exactly the fields that decide an incident at two in the morning. AgentCore’s traces are free, but on its schema. Where I landed: its traces as the floor, my spans on top.</a:t>
+              <a:t>Debuggability the DIY build wins, and I will not skip it. Hand-wired OTEL emits exactly the fields that decide an incident at two in the morning. AgentCore’s traces are free, but on its schema. Where I landed: its traces as the floor, my spans on top.</a:t>
             </a:r>
           </a:p>
         </p:txBody>
@@ -1296,13 +1296,13 @@
           <a:lstStyle/>
           <a:p>
             <a:r>
-              <a:t>[0:30 · cumulative 6:05 of 10:00]</a:t>
+              <a:t>[0:25 · cumulative 6:30 of 10:00]</a:t>
             </a:r>
           </a:p>
           <a:p/>
           <a:p>
             <a:r>
-              <a:t>Resilience is Runtime plus Gateway. In-process, forty sessions share one Node process, one heap, one crash. A microVM per session and a Lambda per tool means a fault has nowhere to travel: one session lost, not forty.</a:t>
+              <a:t>The same fault, injected on both engines. Engine A loses all forty sessions — the process is the blast radius. Engine B loses exactly one: the caller. Three fault classes, same outcome every time.</a:t>
             </a:r>
           </a:p>
         </p:txBody>
@@ -1316,7 +1316,7 @@
 </file>
 
 <file path=ppt/notesSlides/notesSlide9.xml><?xml version="1.0" encoding="utf-8"?>
-<p:notes xmlns:a="http://schemas.openxmlformats.org/drawingml/2006/main" xmlns:r="http://schemas.openxmlformats.org/officeDocument/2006/relationships" xmlns:p="http://schemas.openxmlformats.org/presentationml/2006/main">
+<p:notes xmlns:a="http://schemas.openxmlformats.org/drawingml/2006/main" xmlns:p="http://schemas.openxmlformats.org/presentationml/2006/main" xmlns:r="http://schemas.openxmlformats.org/officeDocument/2006/relationships">
   <p:cSld>
     <p:spTree>
       <p:nvGrpSpPr>
@@ -1334,24 +1334,12 @@
       </p:grpSpPr>
       <p:sp>
         <p:nvSpPr>
-          <p:cNvPr id="2" name="Slide Image Placeholder 1"/>
-          <p:cNvSpPr>
-            <a:spLocks noGrp="1" noRot="1" noChangeAspect="1"/>
-          </p:cNvSpPr>
-          <p:nvPr>
-            <p:ph type="sldImg" idx="2"/>
-          </p:nvPr>
-        </p:nvSpPr>
-        <p:spPr/>
-      </p:sp>
-      <p:sp>
-        <p:nvSpPr>
-          <p:cNvPr id="3" name="Notes Placeholder 2"/>
+          <p:cNvPr id="100" name="Notes Placeholder"/>
           <p:cNvSpPr>
             <a:spLocks noGrp="1"/>
           </p:cNvSpPr>
           <p:nvPr>
-            <p:ph type="body" sz="quarter" idx="3"/>
+            <p:ph type="body" idx="1"/>
           </p:nvPr>
         </p:nvSpPr>
         <p:spPr/>
@@ -1360,28 +1348,16 @@
           <a:lstStyle/>
           <a:p>
             <a:r>
-              <a:t>[0:25 · cumulative 6:30 of 10:00]</a:t>
+              <a:t>[0:30 · cumulative 6:05 of 10:00]</a:t>
             </a:r>
           </a:p>
           <a:p/>
           <a:p>
             <a:r>
-              <a:t>That experiment, drawn to scale: the blast radius of one fault in each engine.</a:t>
-            </a:r>
-          </a:p>
-        </p:txBody>
-      </p:sp>
-      <p:sp>
-        <p:nvSpPr>
-          <p:cNvPr id="4" name="Slide Number Placeholder 3"/>
-          <p:cNvSpPr>
-            <a:spLocks noGrp="1"/>
-          </p:cNvSpPr>
-          <p:nvPr>
-            <p:ph type="sldNum" sz="quarter" idx="5"/>
-          </p:nvPr>
-        </p:nvSpPr>
-        <p:spPr/>
+              <a:t>Resilience is Runtime plus Gateway. In-process, forty sessions share one Node process, one heap, one crash. A microVM per session and a Lambda per tool means a fault has nowhere to travel: one session lost, not forty.</a:t>
+            </a:r>
+          </a:p>
+        </p:txBody>
       </p:sp>
     </p:spTree>
   </p:cSld>
@@ -4629,250 +4605,6 @@
 </p:sld>
 </file>
 
-<file path=ppt/slides/slide10.xml><?xml version="1.0" encoding="utf-8"?>
-<p:sld xmlns:a="http://schemas.openxmlformats.org/drawingml/2006/main" xmlns:r="http://schemas.openxmlformats.org/officeDocument/2006/relationships" xmlns:p="http://schemas.openxmlformats.org/presentationml/2006/main">
-  <p:cSld>
-    <p:spTree>
-      <p:nvGrpSpPr>
-        <p:cNvPr id="1" name=""/>
-        <p:cNvGrpSpPr/>
-        <p:nvPr/>
-      </p:nvGrpSpPr>
-      <p:grpSpPr>
-        <a:xfrm>
-          <a:off x="0" y="0"/>
-          <a:ext cx="0" cy="0"/>
-          <a:chOff x="0" y="0"/>
-          <a:chExt cx="0" cy="0"/>
-        </a:xfrm>
-      </p:grpSpPr>
-      <p:sp>
-        <p:nvSpPr>
-          <p:cNvPr id="2" name="Rectangle 1"/>
-          <p:cNvSpPr/>
-          <p:nvPr/>
-        </p:nvSpPr>
-        <p:spPr>
-          <a:xfrm>
-            <a:off x="0" y="0"/>
-            <a:ext cx="12191969" cy="6858000"/>
-          </a:xfrm>
-          <a:prstGeom prst="rect">
-            <a:avLst/>
-          </a:prstGeom>
-          <a:solidFill>
-            <a:srgbClr val="232F3E"/>
-          </a:solidFill>
-          <a:ln>
-            <a:noFill/>
-          </a:ln>
-          <a:effectLst/>
-        </p:spPr>
-        <p:style>
-          <a:lnRef idx="1">
-            <a:schemeClr val="accent1"/>
-          </a:lnRef>
-          <a:fillRef idx="3">
-            <a:schemeClr val="accent1"/>
-          </a:fillRef>
-          <a:effectRef idx="2">
-            <a:schemeClr val="accent1"/>
-          </a:effectRef>
-          <a:fontRef idx="minor">
-            <a:schemeClr val="lt1"/>
-          </a:fontRef>
-        </p:style>
-        <p:txBody>
-          <a:bodyPr rtlCol="0" anchor="ctr"/>
-          <a:lstStyle/>
-          <a:p>
-            <a:pPr algn="ctr"/>
-            <a:endParaRPr/>
-          </a:p>
-        </p:txBody>
-      </p:sp>
-      <p:pic>
-        <p:nvPicPr>
-          <p:cNvPr id="3" name="Picture 2" descr="Deep-dive: AgentCore Runtime — reliability and security. Blast radius of an in-process tool registry versus one microVM and one IAM role per session."/>
-          <p:cNvPicPr>
-            <a:picLocks noChangeAspect="1"/>
-          </p:cNvPicPr>
-          <p:nvPr/>
-        </p:nvPicPr>
-        <p:blipFill>
-          <a:blip r:embed="rId3"/>
-          <a:stretch>
-            <a:fillRect/>
-          </a:stretch>
-        </p:blipFill>
-        <p:spPr>
-          <a:xfrm>
-            <a:off x="-31" y="0"/>
-            <a:ext cx="12192000" cy="6858000"/>
-          </a:xfrm>
-          <a:prstGeom prst="rect">
-            <a:avLst/>
-          </a:prstGeom>
-        </p:spPr>
-      </p:pic>
-      <p:sp>
-        <p:nvSpPr>
-          <p:cNvPr id="4" name="Oval 3"/>
-          <p:cNvSpPr/>
-          <p:nvPr/>
-        </p:nvSpPr>
-        <p:spPr>
-          <a:xfrm>
-            <a:off x="502920" y="365760"/>
-            <a:ext cx="594360" cy="594360"/>
-          </a:xfrm>
-          <a:prstGeom prst="ellipse">
-            <a:avLst/>
-          </a:prstGeom>
-          <a:solidFill>
-            <a:srgbClr val="FF9900"/>
-          </a:solidFill>
-          <a:ln>
-            <a:noFill/>
-          </a:ln>
-          <a:effectLst/>
-        </p:spPr>
-        <p:style>
-          <a:lnRef idx="1">
-            <a:schemeClr val="accent1"/>
-          </a:lnRef>
-          <a:fillRef idx="3">
-            <a:schemeClr val="accent1"/>
-          </a:fillRef>
-          <a:effectRef idx="2">
-            <a:schemeClr val="accent1"/>
-          </a:effectRef>
-          <a:fontRef idx="minor">
-            <a:schemeClr val="lt1"/>
-          </a:fontRef>
-        </p:style>
-        <p:txBody>
-          <a:bodyPr rtlCol="0" anchor="ctr"/>
-          <a:lstStyle/>
-          <a:p>
-            <a:pPr algn="ctr"/>
-            <a:endParaRPr/>
-          </a:p>
-        </p:txBody>
-      </p:sp>
-      <p:sp>
-        <p:nvSpPr>
-          <p:cNvPr id="5" name="TextBox 4"/>
-          <p:cNvSpPr txBox="1"/>
-          <p:nvPr/>
-        </p:nvSpPr>
-        <p:spPr>
-          <a:xfrm>
-            <a:off x="502920" y="365760"/>
-            <a:ext cx="594360" cy="594360"/>
-          </a:xfrm>
-          <a:prstGeom prst="rect">
-            <a:avLst/>
-          </a:prstGeom>
-          <a:noFill/>
-        </p:spPr>
-        <p:txBody>
-          <a:bodyPr wrap="square" lIns="0" tIns="0" rIns="0" bIns="0" anchor="ctr">
-            <a:spAutoFit/>
-          </a:bodyPr>
-          <a:lstStyle/>
-          <a:p>
-            <a:pPr algn="ctr"/>
-            <a:r>
-              <a:rPr sz="2600" b="1">
-                <a:solidFill>
-                  <a:srgbClr val="232F3E"/>
-                </a:solidFill>
-                <a:latin typeface="Calibri"/>
-              </a:rPr>
-              <a:t>9</a:t>
-            </a:r>
-          </a:p>
-        </p:txBody>
-      </p:sp>
-      <p:sp>
-        <p:nvSpPr>
-          <p:cNvPr id="6" name="TextBox 5"/>
-          <p:cNvSpPr txBox="1"/>
-          <p:nvPr/>
-        </p:nvSpPr>
-        <p:spPr>
-          <a:xfrm>
-            <a:off x="502920" y="6446520"/>
-            <a:ext cx="8229600" cy="320040"/>
-          </a:xfrm>
-          <a:prstGeom prst="rect">
-            <a:avLst/>
-          </a:prstGeom>
-          <a:noFill/>
-        </p:spPr>
-        <p:txBody>
-          <a:bodyPr wrap="square" lIns="0" tIns="0" rIns="0" bIns="0" anchor="ctr">
-            <a:spAutoFit/>
-          </a:bodyPr>
-          <a:lstStyle/>
-          <a:p>
-            <a:pPr algn="l"/>
-            <a:r>
-              <a:rPr sz="1000" b="1">
-                <a:solidFill>
-                  <a:srgbClr val="A6B0BA"/>
-                </a:solidFill>
-                <a:latin typeface="Calibri"/>
-              </a:rPr>
-              <a:t>VALENTIN   ·   GenAI TFC Capstone Deep-Dive</a:t>
-            </a:r>
-          </a:p>
-        </p:txBody>
-      </p:sp>
-      <p:sp>
-        <p:nvSpPr>
-          <p:cNvPr id="7" name="TextBox 6"/>
-          <p:cNvSpPr txBox="1"/>
-          <p:nvPr/>
-        </p:nvSpPr>
-        <p:spPr>
-          <a:xfrm>
-            <a:off x="10332720" y="6446520"/>
-            <a:ext cx="1371600" cy="320040"/>
-          </a:xfrm>
-          <a:prstGeom prst="rect">
-            <a:avLst/>
-          </a:prstGeom>
-          <a:noFill/>
-        </p:spPr>
-        <p:txBody>
-          <a:bodyPr wrap="square" lIns="0" tIns="0" rIns="0" bIns="0" anchor="ctr">
-            <a:spAutoFit/>
-          </a:bodyPr>
-          <a:lstStyle/>
-          <a:p>
-            <a:pPr algn="r"/>
-            <a:r>
-              <a:rPr sz="1000" b="0">
-                <a:solidFill>
-                  <a:srgbClr val="A6B0BA"/>
-                </a:solidFill>
-                <a:latin typeface="Calibri"/>
-              </a:rPr>
-              <a:t>10 / 17</a:t>
-            </a:r>
-          </a:p>
-        </p:txBody>
-      </p:sp>
-    </p:spTree>
-  </p:cSld>
-  <p:clrMapOvr>
-    <a:masterClrMapping/>
-  </p:clrMapOvr>
-</p:sld>
-</file>
-
 <file path=ppt/slides/slide14.xml><?xml version="1.0" encoding="utf-8"?>
 <p:sld xmlns:a="http://schemas.openxmlformats.org/drawingml/2006/main" xmlns:r="http://schemas.openxmlformats.org/officeDocument/2006/relationships" xmlns:p="http://schemas.openxmlformats.org/presentationml/2006/main">
   <p:cSld>
@@ -7530,7 +7262,7 @@
           <a:p>
             <a:pPr algn="ctr"/>
             <a:r>
-              <a:rPr sz="800" b="1">
+              <a:rPr sz="1000" b="1">
                 <a:solidFill>
                   <a:srgbClr val="FFFFFF"/>
                 </a:solidFill>
@@ -7565,7 +7297,7 @@
           <a:p>
             <a:pPr algn="ctr"/>
             <a:r>
-              <a:rPr sz="800" b="1">
+              <a:rPr sz="1000" b="1">
                 <a:solidFill>
                   <a:srgbClr val="FFFFFF"/>
                 </a:solidFill>
@@ -7600,7 +7332,7 @@
           <a:p>
             <a:pPr algn="ctr"/>
             <a:r>
-              <a:rPr sz="800" b="1">
+              <a:rPr sz="1000" b="1">
                 <a:solidFill>
                   <a:srgbClr val="FFFFFF"/>
                 </a:solidFill>
@@ -7635,7 +7367,7 @@
           <a:p>
             <a:pPr algn="ctr"/>
             <a:r>
-              <a:rPr sz="800" b="1">
+              <a:rPr sz="1000" b="1">
                 <a:solidFill>
                   <a:srgbClr val="FFFFFF"/>
                 </a:solidFill>
@@ -8023,8 +7755,8 @@
         </p:nvSpPr>
         <p:spPr>
           <a:xfrm>
-            <a:off x="10661904" y="2331720"/>
-            <a:ext cx="969264" cy="219456"/>
+            <a:off x="10661904" y="2322576"/>
+            <a:ext cx="969264" cy="237744"/>
           </a:xfrm>
           <a:prstGeom prst="roundRect">
             <a:avLst>
@@ -8069,8 +7801,8 @@
         </p:nvSpPr>
         <p:spPr>
           <a:xfrm>
-            <a:off x="10661904" y="2331720"/>
-            <a:ext cx="969264" cy="219456"/>
+            <a:off x="10661904" y="2322576"/>
+            <a:ext cx="969264" cy="237744"/>
           </a:xfrm>
           <a:prstGeom prst="rect">
             <a:avLst/>
@@ -8085,7 +7817,7 @@
           <a:p>
             <a:pPr algn="ctr"/>
             <a:r>
-              <a:rPr sz="800" b="1">
+              <a:rPr sz="1000" b="1">
                 <a:solidFill>
                   <a:srgbClr val="FFFFFF"/>
                 </a:solidFill>
@@ -8429,8 +8161,8 @@
         </p:nvSpPr>
         <p:spPr>
           <a:xfrm>
-            <a:off x="10661904" y="2971799"/>
-            <a:ext cx="969264" cy="219456"/>
+            <a:off x="10661904" y="2962656"/>
+            <a:ext cx="969264" cy="237744"/>
           </a:xfrm>
           <a:prstGeom prst="roundRect">
             <a:avLst>
@@ -8475,8 +8207,8 @@
         </p:nvSpPr>
         <p:spPr>
           <a:xfrm>
-            <a:off x="10661904" y="2971799"/>
-            <a:ext cx="969264" cy="219456"/>
+            <a:off x="10661904" y="2962656"/>
+            <a:ext cx="969264" cy="237744"/>
           </a:xfrm>
           <a:prstGeom prst="rect">
             <a:avLst/>
@@ -8491,7 +8223,7 @@
           <a:p>
             <a:pPr algn="ctr"/>
             <a:r>
-              <a:rPr sz="800" b="1">
+              <a:rPr sz="1000" b="1">
                 <a:solidFill>
                   <a:srgbClr val="FFFFFF"/>
                 </a:solidFill>
@@ -8879,8 +8611,8 @@
         </p:nvSpPr>
         <p:spPr>
           <a:xfrm>
-            <a:off x="10661904" y="3611879"/>
-            <a:ext cx="969264" cy="219456"/>
+            <a:off x="10661904" y="3602735"/>
+            <a:ext cx="969264" cy="237744"/>
           </a:xfrm>
           <a:prstGeom prst="roundRect">
             <a:avLst>
@@ -8925,8 +8657,8 @@
         </p:nvSpPr>
         <p:spPr>
           <a:xfrm>
-            <a:off x="10661904" y="3611879"/>
-            <a:ext cx="969264" cy="219456"/>
+            <a:off x="10661904" y="3602735"/>
+            <a:ext cx="969264" cy="237744"/>
           </a:xfrm>
           <a:prstGeom prst="rect">
             <a:avLst/>
@@ -8941,7 +8673,7 @@
           <a:p>
             <a:pPr algn="ctr"/>
             <a:r>
-              <a:rPr sz="800" b="1">
+              <a:rPr sz="1000" b="1">
                 <a:solidFill>
                   <a:srgbClr val="FFFFFF"/>
                 </a:solidFill>
@@ -9285,8 +9017,8 @@
         </p:nvSpPr>
         <p:spPr>
           <a:xfrm>
-            <a:off x="10661904" y="4251959"/>
-            <a:ext cx="969264" cy="219456"/>
+            <a:off x="10661904" y="4242816"/>
+            <a:ext cx="969264" cy="237744"/>
           </a:xfrm>
           <a:prstGeom prst="roundRect">
             <a:avLst>
@@ -9331,8 +9063,8 @@
         </p:nvSpPr>
         <p:spPr>
           <a:xfrm>
-            <a:off x="10661904" y="4251959"/>
-            <a:ext cx="969264" cy="219456"/>
+            <a:off x="10661904" y="4242816"/>
+            <a:ext cx="969264" cy="237744"/>
           </a:xfrm>
           <a:prstGeom prst="rect">
             <a:avLst/>
@@ -9347,7 +9079,7 @@
           <a:p>
             <a:pPr algn="ctr"/>
             <a:r>
-              <a:rPr sz="800" b="1">
+              <a:rPr sz="1000" b="1">
                 <a:solidFill>
                   <a:srgbClr val="FFFFFF"/>
                 </a:solidFill>
@@ -9735,8 +9467,8 @@
         </p:nvSpPr>
         <p:spPr>
           <a:xfrm>
-            <a:off x="10661904" y="4892039"/>
-            <a:ext cx="969264" cy="219456"/>
+            <a:off x="10661904" y="4882895"/>
+            <a:ext cx="969264" cy="237744"/>
           </a:xfrm>
           <a:prstGeom prst="roundRect">
             <a:avLst>
@@ -9781,8 +9513,8 @@
         </p:nvSpPr>
         <p:spPr>
           <a:xfrm>
-            <a:off x="10661904" y="4892039"/>
-            <a:ext cx="969264" cy="219456"/>
+            <a:off x="10661904" y="4882895"/>
+            <a:ext cx="969264" cy="237744"/>
           </a:xfrm>
           <a:prstGeom prst="rect">
             <a:avLst/>
@@ -9797,13 +9529,13 @@
           <a:p>
             <a:pPr algn="ctr"/>
             <a:r>
-              <a:rPr sz="800" b="1">
+              <a:rPr sz="1000" b="1">
                 <a:solidFill>
                   <a:srgbClr val="FFFFFF"/>
                 </a:solidFill>
                 <a:latin typeface="Calibri"/>
               </a:rPr>
-              <a:t>GLUE CODE</a:t>
+              <a:t>DIY</a:t>
             </a:r>
           </a:p>
         </p:txBody>
@@ -10141,8 +9873,8 @@
         </p:nvSpPr>
         <p:spPr>
           <a:xfrm>
-            <a:off x="10661904" y="5532120"/>
-            <a:ext cx="969264" cy="219456"/>
+            <a:off x="10661904" y="5522976"/>
+            <a:ext cx="969264" cy="237744"/>
           </a:xfrm>
           <a:prstGeom prst="roundRect">
             <a:avLst>
@@ -10187,8 +9919,8 @@
         </p:nvSpPr>
         <p:spPr>
           <a:xfrm>
-            <a:off x="10661904" y="5532120"/>
-            <a:ext cx="969264" cy="219456"/>
+            <a:off x="10661904" y="5522976"/>
+            <a:ext cx="969264" cy="237744"/>
           </a:xfrm>
           <a:prstGeom prst="rect">
             <a:avLst/>
@@ -10203,13 +9935,13 @@
           <a:p>
             <a:pPr algn="ctr"/>
             <a:r>
-              <a:rPr sz="800" b="1">
+              <a:rPr sz="1000" b="1">
                 <a:solidFill>
                   <a:srgbClr val="FFFFFF"/>
                 </a:solidFill>
                 <a:latin typeface="Calibri"/>
               </a:rPr>
-              <a:t>GLUE CODE</a:t>
+              <a:t>DIY</a:t>
             </a:r>
           </a:p>
         </p:txBody>
@@ -10536,7 +10268,7 @@
                 </a:solidFill>
                 <a:latin typeface="Calibri"/>
               </a:rPr>
-              <a:t>Cost — every component on the bill</a:t>
+              <a:t>Cost — the floor vs. the meter</a:t>
             </a:r>
           </a:p>
         </p:txBody>
@@ -10615,7 +10347,7 @@
                 </a:solidFill>
                 <a:latin typeface="Calibri"/>
               </a:rPr>
-              <a:t>What each engine costs at one user, before the identical Bedrock reply call.</a:t>
+              <a:t>Fixed versus usage as users grow. Extraction and compute in; the identical Bedrock reply call excluded from both.</a:t>
             </a:r>
           </a:p>
         </p:txBody>
@@ -11128,62 +10860,16 @@
         </p:nvSpPr>
         <p:spPr>
           <a:xfrm>
-            <a:off x="566928" y="2395728"/>
-            <a:ext cx="5394960" cy="3017520"/>
+            <a:off x="566928" y="2304288"/>
+            <a:ext cx="11064240" cy="365760"/>
           </a:xfrm>
           <a:prstGeom prst="roundRect">
             <a:avLst>
-              <a:gd name="adj" fmla="val 1818"/>
+              <a:gd name="adj" fmla="val 15000"/>
             </a:avLst>
           </a:prstGeom>
           <a:solidFill>
-            <a:srgbClr val="F7F8FA"/>
-          </a:solidFill>
-          <a:ln w="12700">
-            <a:solidFill>
-              <a:srgbClr val="E4E7EA"/>
-            </a:solidFill>
-          </a:ln>
-          <a:effectLst/>
-        </p:spPr>
-        <p:style>
-          <a:lnRef idx="1">
-            <a:schemeClr val="accent1"/>
-          </a:lnRef>
-          <a:fillRef idx="3">
-            <a:schemeClr val="accent1"/>
-          </a:fillRef>
-          <a:effectRef idx="2">
-            <a:schemeClr val="accent1"/>
-          </a:effectRef>
-          <a:fontRef idx="minor">
-            <a:schemeClr val="lt1"/>
-          </a:fontRef>
-        </p:style>
-        <p:txBody>
-          <a:bodyPr rtlCol="0" anchor="ctr"/>
-          <a:lstStyle/>
-          <a:p>
-            <a:pPr algn="ctr"/>
-          </a:p>
-        </p:txBody>
-      </p:sp>
-      <p:sp>
-        <p:nvSpPr>
-          <p:cNvPr id="23" name="Rectangle 22"/>
-          <p:cNvSpPr/>
-          <p:nvPr/>
-        </p:nvSpPr>
-        <p:spPr>
-          <a:xfrm>
-            <a:off x="566928" y="2395728"/>
-            <a:ext cx="5394960" cy="420624"/>
-          </a:xfrm>
-          <a:prstGeom prst="rect">
-            <a:avLst/>
-          </a:prstGeom>
-          <a:solidFill>
-            <a:srgbClr val="545B64"/>
+            <a:srgbClr val="232F3E"/>
           </a:solidFill>
           <a:ln>
             <a:noFill/>
@@ -11214,14 +10900,14 @@
       </p:sp>
       <p:sp>
         <p:nvSpPr>
-          <p:cNvPr id="24" name="TextBox 23"/>
+          <p:cNvPr id="23" name="TextBox 22"/>
           <p:cNvSpPr txBox="1"/>
           <p:nvPr/>
         </p:nvSpPr>
         <p:spPr>
           <a:xfrm>
-            <a:off x="768096" y="2395728"/>
-            <a:ext cx="4992624" cy="420624"/>
+            <a:off x="676656" y="2304288"/>
+            <a:ext cx="1197864" cy="365760"/>
           </a:xfrm>
           <a:prstGeom prst="rect">
             <a:avLst/>
@@ -11236,13 +10922,48 @@
           <a:p>
             <a:pPr algn="l"/>
             <a:r>
-              <a:rPr sz="1150" b="1">
+              <a:rPr sz="1000" b="1">
+                <a:solidFill>
+                  <a:srgbClr val="FF9900"/>
+                </a:solidFill>
+                <a:latin typeface="Calibri"/>
+              </a:rPr>
+              <a:t>USERS</a:t>
+            </a:r>
+          </a:p>
+        </p:txBody>
+      </p:sp>
+      <p:sp>
+        <p:nvSpPr>
+          <p:cNvPr id="24" name="TextBox 23"/>
+          <p:cNvSpPr txBox="1"/>
+          <p:nvPr/>
+        </p:nvSpPr>
+        <p:spPr>
+          <a:xfrm>
+            <a:off x="2185416" y="2304288"/>
+            <a:ext cx="4398264" cy="365760"/>
+          </a:xfrm>
+          <a:prstGeom prst="rect">
+            <a:avLst/>
+          </a:prstGeom>
+          <a:noFill/>
+        </p:spPr>
+        <p:txBody>
+          <a:bodyPr wrap="square" lIns="0" rIns="0" tIns="0" bIns="0" anchor="ctr">
+            <a:spAutoFit/>
+          </a:bodyPr>
+          <a:lstStyle/>
+          <a:p>
+            <a:pPr algn="l"/>
+            <a:r>
+              <a:rPr sz="1000" b="1">
                 <a:solidFill>
                   <a:srgbClr val="FFFFFF"/>
                 </a:solidFill>
                 <a:latin typeface="Calibri"/>
               </a:rPr>
-              <a:t>ENGINE A · GLUE CODE</a:t>
+              <a:t>ENGINE A · DIY  —  FLOOR + USAGE = TOTAL</a:t>
             </a:r>
           </a:p>
         </p:txBody>
@@ -11255,8 +10976,1082 @@
         </p:nvSpPr>
         <p:spPr>
           <a:xfrm>
-            <a:off x="768096" y="3017520"/>
-            <a:ext cx="4992624" cy="310896"/>
+            <a:off x="6894576" y="2304288"/>
+            <a:ext cx="2615184" cy="365760"/>
+          </a:xfrm>
+          <a:prstGeom prst="rect">
+            <a:avLst/>
+          </a:prstGeom>
+          <a:noFill/>
+        </p:spPr>
+        <p:txBody>
+          <a:bodyPr wrap="square" lIns="0" rIns="0" tIns="0" bIns="0" anchor="ctr">
+            <a:spAutoFit/>
+          </a:bodyPr>
+          <a:lstStyle/>
+          <a:p>
+            <a:pPr algn="l"/>
+            <a:r>
+              <a:rPr sz="1000" b="1">
+                <a:solidFill>
+                  <a:srgbClr val="FFFFFF"/>
+                </a:solidFill>
+                <a:latin typeface="Calibri"/>
+              </a:rPr>
+              <a:t>ENGINE B · AGENTCORE</a:t>
+            </a:r>
+          </a:p>
+        </p:txBody>
+      </p:sp>
+      <p:sp>
+        <p:nvSpPr>
+          <p:cNvPr id="26" name="TextBox 25"/>
+          <p:cNvSpPr txBox="1"/>
+          <p:nvPr/>
+        </p:nvSpPr>
+        <p:spPr>
+          <a:xfrm>
+            <a:off x="9820655" y="2304288"/>
+            <a:ext cx="1700784" cy="365760"/>
+          </a:xfrm>
+          <a:prstGeom prst="rect">
+            <a:avLst/>
+          </a:prstGeom>
+          <a:noFill/>
+        </p:spPr>
+        <p:txBody>
+          <a:bodyPr wrap="square" lIns="0" rIns="0" tIns="0" bIns="0" anchor="ctr">
+            <a:spAutoFit/>
+          </a:bodyPr>
+          <a:lstStyle/>
+          <a:p>
+            <a:pPr algn="l"/>
+            <a:r>
+              <a:rPr sz="1000" b="1">
+                <a:solidFill>
+                  <a:srgbClr val="FFFFFF"/>
+                </a:solidFill>
+                <a:latin typeface="Calibri"/>
+              </a:rPr>
+              <a:t>GAP</a:t>
+            </a:r>
+          </a:p>
+        </p:txBody>
+      </p:sp>
+      <p:sp>
+        <p:nvSpPr>
+          <p:cNvPr id="27" name="Rectangle 26"/>
+          <p:cNvSpPr/>
+          <p:nvPr/>
+        </p:nvSpPr>
+        <p:spPr>
+          <a:xfrm>
+            <a:off x="566928" y="2688336"/>
+            <a:ext cx="11064240" cy="548640"/>
+          </a:xfrm>
+          <a:prstGeom prst="rect">
+            <a:avLst/>
+          </a:prstGeom>
+          <a:solidFill>
+            <a:srgbClr val="F7F8FA"/>
+          </a:solidFill>
+          <a:ln>
+            <a:noFill/>
+          </a:ln>
+          <a:effectLst/>
+        </p:spPr>
+        <p:style>
+          <a:lnRef idx="1">
+            <a:schemeClr val="accent1"/>
+          </a:lnRef>
+          <a:fillRef idx="3">
+            <a:schemeClr val="accent1"/>
+          </a:fillRef>
+          <a:effectRef idx="2">
+            <a:schemeClr val="accent1"/>
+          </a:effectRef>
+          <a:fontRef idx="minor">
+            <a:schemeClr val="lt1"/>
+          </a:fontRef>
+        </p:style>
+        <p:txBody>
+          <a:bodyPr rtlCol="0" anchor="ctr"/>
+          <a:lstStyle/>
+          <a:p>
+            <a:pPr algn="ctr"/>
+          </a:p>
+        </p:txBody>
+      </p:sp>
+      <p:sp>
+        <p:nvSpPr>
+          <p:cNvPr id="28" name="Rectangle 27"/>
+          <p:cNvSpPr/>
+          <p:nvPr/>
+        </p:nvSpPr>
+        <p:spPr>
+          <a:xfrm>
+            <a:off x="566928" y="3227832"/>
+            <a:ext cx="11064240" cy="9144"/>
+          </a:xfrm>
+          <a:prstGeom prst="rect">
+            <a:avLst/>
+          </a:prstGeom>
+          <a:solidFill>
+            <a:srgbClr val="E4E7EA"/>
+          </a:solidFill>
+          <a:ln>
+            <a:noFill/>
+          </a:ln>
+          <a:effectLst/>
+        </p:spPr>
+        <p:style>
+          <a:lnRef idx="1">
+            <a:schemeClr val="accent1"/>
+          </a:lnRef>
+          <a:fillRef idx="3">
+            <a:schemeClr val="accent1"/>
+          </a:fillRef>
+          <a:effectRef idx="2">
+            <a:schemeClr val="accent1"/>
+          </a:effectRef>
+          <a:fontRef idx="minor">
+            <a:schemeClr val="lt1"/>
+          </a:fontRef>
+        </p:style>
+        <p:txBody>
+          <a:bodyPr rtlCol="0" anchor="ctr"/>
+          <a:lstStyle/>
+          <a:p>
+            <a:pPr algn="ctr"/>
+          </a:p>
+        </p:txBody>
+      </p:sp>
+      <p:sp>
+        <p:nvSpPr>
+          <p:cNvPr id="29" name="TextBox 28"/>
+          <p:cNvSpPr txBox="1"/>
+          <p:nvPr/>
+        </p:nvSpPr>
+        <p:spPr>
+          <a:xfrm>
+            <a:off x="676656" y="2688336"/>
+            <a:ext cx="1197864" cy="548640"/>
+          </a:xfrm>
+          <a:prstGeom prst="rect">
+            <a:avLst/>
+          </a:prstGeom>
+          <a:noFill/>
+        </p:spPr>
+        <p:txBody>
+          <a:bodyPr wrap="square" lIns="0" rIns="0" tIns="0" bIns="0" anchor="ctr">
+            <a:spAutoFit/>
+          </a:bodyPr>
+          <a:lstStyle/>
+          <a:p>
+            <a:pPr algn="l"/>
+            <a:r>
+              <a:rPr sz="1300" b="1">
+                <a:solidFill>
+                  <a:srgbClr val="232F3E"/>
+                </a:solidFill>
+                <a:latin typeface="Calibri"/>
+              </a:rPr>
+              <a:t>1</a:t>
+            </a:r>
+          </a:p>
+        </p:txBody>
+      </p:sp>
+      <p:sp>
+        <p:nvSpPr>
+          <p:cNvPr id="30" name="TextBox 29"/>
+          <p:cNvSpPr txBox="1"/>
+          <p:nvPr/>
+        </p:nvSpPr>
+        <p:spPr>
+          <a:xfrm>
+            <a:off x="2185416" y="2688336"/>
+            <a:ext cx="4398264" cy="548640"/>
+          </a:xfrm>
+          <a:prstGeom prst="rect">
+            <a:avLst/>
+          </a:prstGeom>
+          <a:noFill/>
+        </p:spPr>
+        <p:txBody>
+          <a:bodyPr wrap="square" lIns="0" rIns="0" tIns="0" bIns="0" anchor="ctr">
+            <a:spAutoFit/>
+          </a:bodyPr>
+          <a:lstStyle/>
+          <a:p>
+            <a:pPr algn="l"/>
+            <a:r>
+              <a:rPr sz="1200" b="1">
+                <a:solidFill>
+                  <a:srgbClr val="545B64"/>
+                </a:solidFill>
+                <a:latin typeface="Calibri"/>
+              </a:rPr>
+              <a:t>$18.02</a:t>
+            </a:r>
+            <a:r>
+              <a:rPr sz="1200" b="0">
+                <a:solidFill>
+                  <a:srgbClr val="545B64"/>
+                </a:solidFill>
+                <a:latin typeface="Calibri"/>
+              </a:rPr>
+              <a:t>  floor  +  </a:t>
+            </a:r>
+            <a:r>
+              <a:rPr sz="1200" b="1">
+                <a:solidFill>
+                  <a:srgbClr val="545B64"/>
+                </a:solidFill>
+                <a:latin typeface="Calibri"/>
+              </a:rPr>
+              <a:t>$1.39</a:t>
+            </a:r>
+            <a:r>
+              <a:rPr sz="1200" b="0">
+                <a:solidFill>
+                  <a:srgbClr val="545B64"/>
+                </a:solidFill>
+                <a:latin typeface="Calibri"/>
+              </a:rPr>
+              <a:t>  usage   =   </a:t>
+            </a:r>
+            <a:r>
+              <a:rPr sz="1200" b="1">
+                <a:solidFill>
+                  <a:srgbClr val="232F3E"/>
+                </a:solidFill>
+                <a:latin typeface="Calibri"/>
+              </a:rPr>
+              <a:t>$19.41</a:t>
+            </a:r>
+          </a:p>
+        </p:txBody>
+      </p:sp>
+      <p:sp>
+        <p:nvSpPr>
+          <p:cNvPr id="31" name="TextBox 30"/>
+          <p:cNvSpPr txBox="1"/>
+          <p:nvPr/>
+        </p:nvSpPr>
+        <p:spPr>
+          <a:xfrm>
+            <a:off x="6894576" y="2688336"/>
+            <a:ext cx="2615184" cy="548640"/>
+          </a:xfrm>
+          <a:prstGeom prst="rect">
+            <a:avLst/>
+          </a:prstGeom>
+          <a:noFill/>
+        </p:spPr>
+        <p:txBody>
+          <a:bodyPr wrap="square" lIns="0" rIns="0" tIns="0" bIns="0" anchor="ctr">
+            <a:spAutoFit/>
+          </a:bodyPr>
+          <a:lstStyle/>
+          <a:p>
+            <a:pPr algn="l"/>
+            <a:r>
+              <a:rPr sz="1200" b="0">
+                <a:solidFill>
+                  <a:srgbClr val="545B64"/>
+                </a:solidFill>
+                <a:latin typeface="Calibri"/>
+              </a:rPr>
+              <a:t>no floor   =   </a:t>
+            </a:r>
+            <a:r>
+              <a:rPr sz="1200" b="1">
+                <a:solidFill>
+                  <a:srgbClr val="1E7C3C"/>
+                </a:solidFill>
+                <a:latin typeface="Calibri"/>
+              </a:rPr>
+              <a:t>$0.10</a:t>
+            </a:r>
+          </a:p>
+        </p:txBody>
+      </p:sp>
+      <p:sp>
+        <p:nvSpPr>
+          <p:cNvPr id="32" name="TextBox 31"/>
+          <p:cNvSpPr txBox="1"/>
+          <p:nvPr/>
+        </p:nvSpPr>
+        <p:spPr>
+          <a:xfrm>
+            <a:off x="9820655" y="2688336"/>
+            <a:ext cx="1700784" cy="548640"/>
+          </a:xfrm>
+          <a:prstGeom prst="rect">
+            <a:avLst/>
+          </a:prstGeom>
+          <a:noFill/>
+        </p:spPr>
+        <p:txBody>
+          <a:bodyPr wrap="square" lIns="0" rIns="0" tIns="0" bIns="0" anchor="ctr">
+            <a:spAutoFit/>
+          </a:bodyPr>
+          <a:lstStyle/>
+          <a:p>
+            <a:pPr algn="l"/>
+            <a:r>
+              <a:rPr sz="1500" b="1">
+                <a:solidFill>
+                  <a:srgbClr val="FF9900"/>
+                </a:solidFill>
+                <a:latin typeface="Calibri"/>
+              </a:rPr>
+              <a:t>189×</a:t>
+            </a:r>
+          </a:p>
+        </p:txBody>
+      </p:sp>
+      <p:sp>
+        <p:nvSpPr>
+          <p:cNvPr id="33" name="Rectangle 32"/>
+          <p:cNvSpPr/>
+          <p:nvPr/>
+        </p:nvSpPr>
+        <p:spPr>
+          <a:xfrm>
+            <a:off x="566928" y="3776472"/>
+            <a:ext cx="11064240" cy="9144"/>
+          </a:xfrm>
+          <a:prstGeom prst="rect">
+            <a:avLst/>
+          </a:prstGeom>
+          <a:solidFill>
+            <a:srgbClr val="E4E7EA"/>
+          </a:solidFill>
+          <a:ln>
+            <a:noFill/>
+          </a:ln>
+          <a:effectLst/>
+        </p:spPr>
+        <p:style>
+          <a:lnRef idx="1">
+            <a:schemeClr val="accent1"/>
+          </a:lnRef>
+          <a:fillRef idx="3">
+            <a:schemeClr val="accent1"/>
+          </a:fillRef>
+          <a:effectRef idx="2">
+            <a:schemeClr val="accent1"/>
+          </a:effectRef>
+          <a:fontRef idx="minor">
+            <a:schemeClr val="lt1"/>
+          </a:fontRef>
+        </p:style>
+        <p:txBody>
+          <a:bodyPr rtlCol="0" anchor="ctr"/>
+          <a:lstStyle/>
+          <a:p>
+            <a:pPr algn="ctr"/>
+          </a:p>
+        </p:txBody>
+      </p:sp>
+      <p:sp>
+        <p:nvSpPr>
+          <p:cNvPr id="34" name="TextBox 33"/>
+          <p:cNvSpPr txBox="1"/>
+          <p:nvPr/>
+        </p:nvSpPr>
+        <p:spPr>
+          <a:xfrm>
+            <a:off x="676656" y="3236976"/>
+            <a:ext cx="1197864" cy="548640"/>
+          </a:xfrm>
+          <a:prstGeom prst="rect">
+            <a:avLst/>
+          </a:prstGeom>
+          <a:noFill/>
+        </p:spPr>
+        <p:txBody>
+          <a:bodyPr wrap="square" lIns="0" rIns="0" tIns="0" bIns="0" anchor="ctr">
+            <a:spAutoFit/>
+          </a:bodyPr>
+          <a:lstStyle/>
+          <a:p>
+            <a:pPr algn="l"/>
+            <a:r>
+              <a:rPr sz="1300" b="1">
+                <a:solidFill>
+                  <a:srgbClr val="232F3E"/>
+                </a:solidFill>
+                <a:latin typeface="Calibri"/>
+              </a:rPr>
+              <a:t>10</a:t>
+            </a:r>
+          </a:p>
+        </p:txBody>
+      </p:sp>
+      <p:sp>
+        <p:nvSpPr>
+          <p:cNvPr id="35" name="TextBox 34"/>
+          <p:cNvSpPr txBox="1"/>
+          <p:nvPr/>
+        </p:nvSpPr>
+        <p:spPr>
+          <a:xfrm>
+            <a:off x="2185416" y="3236976"/>
+            <a:ext cx="4398264" cy="548640"/>
+          </a:xfrm>
+          <a:prstGeom prst="rect">
+            <a:avLst/>
+          </a:prstGeom>
+          <a:noFill/>
+        </p:spPr>
+        <p:txBody>
+          <a:bodyPr wrap="square" lIns="0" rIns="0" tIns="0" bIns="0" anchor="ctr">
+            <a:spAutoFit/>
+          </a:bodyPr>
+          <a:lstStyle/>
+          <a:p>
+            <a:pPr algn="l"/>
+            <a:r>
+              <a:rPr sz="1200" b="1">
+                <a:solidFill>
+                  <a:srgbClr val="545B64"/>
+                </a:solidFill>
+                <a:latin typeface="Calibri"/>
+              </a:rPr>
+              <a:t>$18.02</a:t>
+            </a:r>
+            <a:r>
+              <a:rPr sz="1200" b="0">
+                <a:solidFill>
+                  <a:srgbClr val="545B64"/>
+                </a:solidFill>
+                <a:latin typeface="Calibri"/>
+              </a:rPr>
+              <a:t>  floor  +  </a:t>
+            </a:r>
+            <a:r>
+              <a:rPr sz="1200" b="1">
+                <a:solidFill>
+                  <a:srgbClr val="545B64"/>
+                </a:solidFill>
+                <a:latin typeface="Calibri"/>
+              </a:rPr>
+              <a:t>$13.85</a:t>
+            </a:r>
+            <a:r>
+              <a:rPr sz="1200" b="0">
+                <a:solidFill>
+                  <a:srgbClr val="545B64"/>
+                </a:solidFill>
+                <a:latin typeface="Calibri"/>
+              </a:rPr>
+              <a:t>  usage   =   </a:t>
+            </a:r>
+            <a:r>
+              <a:rPr sz="1200" b="1">
+                <a:solidFill>
+                  <a:srgbClr val="232F3E"/>
+                </a:solidFill>
+                <a:latin typeface="Calibri"/>
+              </a:rPr>
+              <a:t>$31.87</a:t>
+            </a:r>
+          </a:p>
+        </p:txBody>
+      </p:sp>
+      <p:sp>
+        <p:nvSpPr>
+          <p:cNvPr id="36" name="TextBox 35"/>
+          <p:cNvSpPr txBox="1"/>
+          <p:nvPr/>
+        </p:nvSpPr>
+        <p:spPr>
+          <a:xfrm>
+            <a:off x="6894576" y="3236976"/>
+            <a:ext cx="2615184" cy="548640"/>
+          </a:xfrm>
+          <a:prstGeom prst="rect">
+            <a:avLst/>
+          </a:prstGeom>
+          <a:noFill/>
+        </p:spPr>
+        <p:txBody>
+          <a:bodyPr wrap="square" lIns="0" rIns="0" tIns="0" bIns="0" anchor="ctr">
+            <a:spAutoFit/>
+          </a:bodyPr>
+          <a:lstStyle/>
+          <a:p>
+            <a:pPr algn="l"/>
+            <a:r>
+              <a:rPr sz="1200" b="0">
+                <a:solidFill>
+                  <a:srgbClr val="545B64"/>
+                </a:solidFill>
+                <a:latin typeface="Calibri"/>
+              </a:rPr>
+              <a:t>no floor   =   </a:t>
+            </a:r>
+            <a:r>
+              <a:rPr sz="1200" b="1">
+                <a:solidFill>
+                  <a:srgbClr val="1E7C3C"/>
+                </a:solidFill>
+                <a:latin typeface="Calibri"/>
+              </a:rPr>
+              <a:t>$1.03</a:t>
+            </a:r>
+          </a:p>
+        </p:txBody>
+      </p:sp>
+      <p:sp>
+        <p:nvSpPr>
+          <p:cNvPr id="37" name="TextBox 36"/>
+          <p:cNvSpPr txBox="1"/>
+          <p:nvPr/>
+        </p:nvSpPr>
+        <p:spPr>
+          <a:xfrm>
+            <a:off x="9820655" y="3236976"/>
+            <a:ext cx="1700784" cy="548640"/>
+          </a:xfrm>
+          <a:prstGeom prst="rect">
+            <a:avLst/>
+          </a:prstGeom>
+          <a:noFill/>
+        </p:spPr>
+        <p:txBody>
+          <a:bodyPr wrap="square" lIns="0" rIns="0" tIns="0" bIns="0" anchor="ctr">
+            <a:spAutoFit/>
+          </a:bodyPr>
+          <a:lstStyle/>
+          <a:p>
+            <a:pPr algn="l"/>
+            <a:r>
+              <a:rPr sz="1500" b="1">
+                <a:solidFill>
+                  <a:srgbClr val="FF9900"/>
+                </a:solidFill>
+                <a:latin typeface="Calibri"/>
+              </a:rPr>
+              <a:t>31×</a:t>
+            </a:r>
+          </a:p>
+        </p:txBody>
+      </p:sp>
+      <p:sp>
+        <p:nvSpPr>
+          <p:cNvPr id="38" name="Rectangle 37"/>
+          <p:cNvSpPr/>
+          <p:nvPr/>
+        </p:nvSpPr>
+        <p:spPr>
+          <a:xfrm>
+            <a:off x="566928" y="3785615"/>
+            <a:ext cx="11064240" cy="548640"/>
+          </a:xfrm>
+          <a:prstGeom prst="rect">
+            <a:avLst/>
+          </a:prstGeom>
+          <a:solidFill>
+            <a:srgbClr val="F7F8FA"/>
+          </a:solidFill>
+          <a:ln>
+            <a:noFill/>
+          </a:ln>
+          <a:effectLst/>
+        </p:spPr>
+        <p:style>
+          <a:lnRef idx="1">
+            <a:schemeClr val="accent1"/>
+          </a:lnRef>
+          <a:fillRef idx="3">
+            <a:schemeClr val="accent1"/>
+          </a:fillRef>
+          <a:effectRef idx="2">
+            <a:schemeClr val="accent1"/>
+          </a:effectRef>
+          <a:fontRef idx="minor">
+            <a:schemeClr val="lt1"/>
+          </a:fontRef>
+        </p:style>
+        <p:txBody>
+          <a:bodyPr rtlCol="0" anchor="ctr"/>
+          <a:lstStyle/>
+          <a:p>
+            <a:pPr algn="ctr"/>
+          </a:p>
+        </p:txBody>
+      </p:sp>
+      <p:sp>
+        <p:nvSpPr>
+          <p:cNvPr id="39" name="Rectangle 38"/>
+          <p:cNvSpPr/>
+          <p:nvPr/>
+        </p:nvSpPr>
+        <p:spPr>
+          <a:xfrm>
+            <a:off x="566928" y="4325112"/>
+            <a:ext cx="11064240" cy="9144"/>
+          </a:xfrm>
+          <a:prstGeom prst="rect">
+            <a:avLst/>
+          </a:prstGeom>
+          <a:solidFill>
+            <a:srgbClr val="E4E7EA"/>
+          </a:solidFill>
+          <a:ln>
+            <a:noFill/>
+          </a:ln>
+          <a:effectLst/>
+        </p:spPr>
+        <p:style>
+          <a:lnRef idx="1">
+            <a:schemeClr val="accent1"/>
+          </a:lnRef>
+          <a:fillRef idx="3">
+            <a:schemeClr val="accent1"/>
+          </a:fillRef>
+          <a:effectRef idx="2">
+            <a:schemeClr val="accent1"/>
+          </a:effectRef>
+          <a:fontRef idx="minor">
+            <a:schemeClr val="lt1"/>
+          </a:fontRef>
+        </p:style>
+        <p:txBody>
+          <a:bodyPr rtlCol="0" anchor="ctr"/>
+          <a:lstStyle/>
+          <a:p>
+            <a:pPr algn="ctr"/>
+          </a:p>
+        </p:txBody>
+      </p:sp>
+      <p:sp>
+        <p:nvSpPr>
+          <p:cNvPr id="40" name="TextBox 39"/>
+          <p:cNvSpPr txBox="1"/>
+          <p:nvPr/>
+        </p:nvSpPr>
+        <p:spPr>
+          <a:xfrm>
+            <a:off x="676656" y="3785615"/>
+            <a:ext cx="1197864" cy="548640"/>
+          </a:xfrm>
+          <a:prstGeom prst="rect">
+            <a:avLst/>
+          </a:prstGeom>
+          <a:noFill/>
+        </p:spPr>
+        <p:txBody>
+          <a:bodyPr wrap="square" lIns="0" rIns="0" tIns="0" bIns="0" anchor="ctr">
+            <a:spAutoFit/>
+          </a:bodyPr>
+          <a:lstStyle/>
+          <a:p>
+            <a:pPr algn="l"/>
+            <a:r>
+              <a:rPr sz="1300" b="1">
+                <a:solidFill>
+                  <a:srgbClr val="232F3E"/>
+                </a:solidFill>
+                <a:latin typeface="Calibri"/>
+              </a:rPr>
+              <a:t>1,000</a:t>
+            </a:r>
+          </a:p>
+        </p:txBody>
+      </p:sp>
+      <p:sp>
+        <p:nvSpPr>
+          <p:cNvPr id="41" name="TextBox 40"/>
+          <p:cNvSpPr txBox="1"/>
+          <p:nvPr/>
+        </p:nvSpPr>
+        <p:spPr>
+          <a:xfrm>
+            <a:off x="2185416" y="3785615"/>
+            <a:ext cx="4398264" cy="548640"/>
+          </a:xfrm>
+          <a:prstGeom prst="rect">
+            <a:avLst/>
+          </a:prstGeom>
+          <a:noFill/>
+        </p:spPr>
+        <p:txBody>
+          <a:bodyPr wrap="square" lIns="0" rIns="0" tIns="0" bIns="0" anchor="ctr">
+            <a:spAutoFit/>
+          </a:bodyPr>
+          <a:lstStyle/>
+          <a:p>
+            <a:pPr algn="l"/>
+            <a:r>
+              <a:rPr sz="1200" b="1">
+                <a:solidFill>
+                  <a:srgbClr val="545B64"/>
+                </a:solidFill>
+                <a:latin typeface="Calibri"/>
+              </a:rPr>
+              <a:t>$450</a:t>
+            </a:r>
+            <a:r>
+              <a:rPr sz="1200" b="0">
+                <a:solidFill>
+                  <a:srgbClr val="545B64"/>
+                </a:solidFill>
+                <a:latin typeface="Calibri"/>
+              </a:rPr>
+              <a:t>  floor  +  </a:t>
+            </a:r>
+            <a:r>
+              <a:rPr sz="1200" b="1">
+                <a:solidFill>
+                  <a:srgbClr val="545B64"/>
+                </a:solidFill>
+                <a:latin typeface="Calibri"/>
+              </a:rPr>
+              <a:t>$1,385</a:t>
+            </a:r>
+            <a:r>
+              <a:rPr sz="1200" b="0">
+                <a:solidFill>
+                  <a:srgbClr val="545B64"/>
+                </a:solidFill>
+                <a:latin typeface="Calibri"/>
+              </a:rPr>
+              <a:t>  usage   =   </a:t>
+            </a:r>
+            <a:r>
+              <a:rPr sz="1200" b="1">
+                <a:solidFill>
+                  <a:srgbClr val="232F3E"/>
+                </a:solidFill>
+                <a:latin typeface="Calibri"/>
+              </a:rPr>
+              <a:t>$1,836</a:t>
+            </a:r>
+          </a:p>
+        </p:txBody>
+      </p:sp>
+      <p:sp>
+        <p:nvSpPr>
+          <p:cNvPr id="42" name="TextBox 41"/>
+          <p:cNvSpPr txBox="1"/>
+          <p:nvPr/>
+        </p:nvSpPr>
+        <p:spPr>
+          <a:xfrm>
+            <a:off x="6894576" y="3785615"/>
+            <a:ext cx="2615184" cy="548640"/>
+          </a:xfrm>
+          <a:prstGeom prst="rect">
+            <a:avLst/>
+          </a:prstGeom>
+          <a:noFill/>
+        </p:spPr>
+        <p:txBody>
+          <a:bodyPr wrap="square" lIns="0" rIns="0" tIns="0" bIns="0" anchor="ctr">
+            <a:spAutoFit/>
+          </a:bodyPr>
+          <a:lstStyle/>
+          <a:p>
+            <a:pPr algn="l"/>
+            <a:r>
+              <a:rPr sz="1200" b="0">
+                <a:solidFill>
+                  <a:srgbClr val="545B64"/>
+                </a:solidFill>
+                <a:latin typeface="Calibri"/>
+              </a:rPr>
+              <a:t>no floor   =   </a:t>
+            </a:r>
+            <a:r>
+              <a:rPr sz="1200" b="1">
+                <a:solidFill>
+                  <a:srgbClr val="1E7C3C"/>
+                </a:solidFill>
+                <a:latin typeface="Calibri"/>
+              </a:rPr>
+              <a:t>$103</a:t>
+            </a:r>
+          </a:p>
+        </p:txBody>
+      </p:sp>
+      <p:sp>
+        <p:nvSpPr>
+          <p:cNvPr id="43" name="TextBox 42"/>
+          <p:cNvSpPr txBox="1"/>
+          <p:nvPr/>
+        </p:nvSpPr>
+        <p:spPr>
+          <a:xfrm>
+            <a:off x="9820655" y="3785615"/>
+            <a:ext cx="1700784" cy="548640"/>
+          </a:xfrm>
+          <a:prstGeom prst="rect">
+            <a:avLst/>
+          </a:prstGeom>
+          <a:noFill/>
+        </p:spPr>
+        <p:txBody>
+          <a:bodyPr wrap="square" lIns="0" rIns="0" tIns="0" bIns="0" anchor="ctr">
+            <a:spAutoFit/>
+          </a:bodyPr>
+          <a:lstStyle/>
+          <a:p>
+            <a:pPr algn="l"/>
+            <a:r>
+              <a:rPr sz="1500" b="1">
+                <a:solidFill>
+                  <a:srgbClr val="FF9900"/>
+                </a:solidFill>
+                <a:latin typeface="Calibri"/>
+              </a:rPr>
+              <a:t>18×</a:t>
+            </a:r>
+          </a:p>
+        </p:txBody>
+      </p:sp>
+      <p:sp>
+        <p:nvSpPr>
+          <p:cNvPr id="44" name="Rectangle 43"/>
+          <p:cNvSpPr/>
+          <p:nvPr/>
+        </p:nvSpPr>
+        <p:spPr>
+          <a:xfrm>
+            <a:off x="566928" y="4873752"/>
+            <a:ext cx="11064240" cy="9144"/>
+          </a:xfrm>
+          <a:prstGeom prst="rect">
+            <a:avLst/>
+          </a:prstGeom>
+          <a:solidFill>
+            <a:srgbClr val="E4E7EA"/>
+          </a:solidFill>
+          <a:ln>
+            <a:noFill/>
+          </a:ln>
+          <a:effectLst/>
+        </p:spPr>
+        <p:style>
+          <a:lnRef idx="1">
+            <a:schemeClr val="accent1"/>
+          </a:lnRef>
+          <a:fillRef idx="3">
+            <a:schemeClr val="accent1"/>
+          </a:fillRef>
+          <a:effectRef idx="2">
+            <a:schemeClr val="accent1"/>
+          </a:effectRef>
+          <a:fontRef idx="minor">
+            <a:schemeClr val="lt1"/>
+          </a:fontRef>
+        </p:style>
+        <p:txBody>
+          <a:bodyPr rtlCol="0" anchor="ctr"/>
+          <a:lstStyle/>
+          <a:p>
+            <a:pPr algn="ctr"/>
+          </a:p>
+        </p:txBody>
+      </p:sp>
+      <p:sp>
+        <p:nvSpPr>
+          <p:cNvPr id="45" name="TextBox 44"/>
+          <p:cNvSpPr txBox="1"/>
+          <p:nvPr/>
+        </p:nvSpPr>
+        <p:spPr>
+          <a:xfrm>
+            <a:off x="676656" y="4334256"/>
+            <a:ext cx="1197864" cy="548640"/>
+          </a:xfrm>
+          <a:prstGeom prst="rect">
+            <a:avLst/>
+          </a:prstGeom>
+          <a:noFill/>
+        </p:spPr>
+        <p:txBody>
+          <a:bodyPr wrap="square" lIns="0" rIns="0" tIns="0" bIns="0" anchor="ctr">
+            <a:spAutoFit/>
+          </a:bodyPr>
+          <a:lstStyle/>
+          <a:p>
+            <a:pPr algn="l"/>
+            <a:r>
+              <a:rPr sz="1300" b="1">
+                <a:solidFill>
+                  <a:srgbClr val="232F3E"/>
+                </a:solidFill>
+                <a:latin typeface="Calibri"/>
+              </a:rPr>
+              <a:t>1,000,000</a:t>
+            </a:r>
+          </a:p>
+        </p:txBody>
+      </p:sp>
+      <p:sp>
+        <p:nvSpPr>
+          <p:cNvPr id="46" name="TextBox 45"/>
+          <p:cNvSpPr txBox="1"/>
+          <p:nvPr/>
+        </p:nvSpPr>
+        <p:spPr>
+          <a:xfrm>
+            <a:off x="2185416" y="4334256"/>
+            <a:ext cx="4398264" cy="548640"/>
+          </a:xfrm>
+          <a:prstGeom prst="rect">
+            <a:avLst/>
+          </a:prstGeom>
+          <a:noFill/>
+        </p:spPr>
+        <p:txBody>
+          <a:bodyPr wrap="square" lIns="0" rIns="0" tIns="0" bIns="0" anchor="ctr">
+            <a:spAutoFit/>
+          </a:bodyPr>
+          <a:lstStyle/>
+          <a:p>
+            <a:pPr algn="l"/>
+            <a:r>
+              <a:rPr sz="1200" b="1">
+                <a:solidFill>
+                  <a:srgbClr val="545B64"/>
+                </a:solidFill>
+                <a:latin typeface="Calibri"/>
+              </a:rPr>
+              <a:t>$450K</a:t>
+            </a:r>
+            <a:r>
+              <a:rPr sz="1200" b="0">
+                <a:solidFill>
+                  <a:srgbClr val="545B64"/>
+                </a:solidFill>
+                <a:latin typeface="Calibri"/>
+              </a:rPr>
+              <a:t>  floor  +  </a:t>
+            </a:r>
+            <a:r>
+              <a:rPr sz="1200" b="1">
+                <a:solidFill>
+                  <a:srgbClr val="545B64"/>
+                </a:solidFill>
+                <a:latin typeface="Calibri"/>
+              </a:rPr>
+              <a:t>$1.4M</a:t>
+            </a:r>
+            <a:r>
+              <a:rPr sz="1200" b="0">
+                <a:solidFill>
+                  <a:srgbClr val="545B64"/>
+                </a:solidFill>
+                <a:latin typeface="Calibri"/>
+              </a:rPr>
+              <a:t>  usage   =   </a:t>
+            </a:r>
+            <a:r>
+              <a:rPr sz="1200" b="1">
+                <a:solidFill>
+                  <a:srgbClr val="232F3E"/>
+                </a:solidFill>
+                <a:latin typeface="Calibri"/>
+              </a:rPr>
+              <a:t>$1.84M</a:t>
+            </a:r>
+          </a:p>
+        </p:txBody>
+      </p:sp>
+      <p:sp>
+        <p:nvSpPr>
+          <p:cNvPr id="47" name="TextBox 46"/>
+          <p:cNvSpPr txBox="1"/>
+          <p:nvPr/>
+        </p:nvSpPr>
+        <p:spPr>
+          <a:xfrm>
+            <a:off x="6894576" y="4334256"/>
+            <a:ext cx="2615184" cy="548640"/>
+          </a:xfrm>
+          <a:prstGeom prst="rect">
+            <a:avLst/>
+          </a:prstGeom>
+          <a:noFill/>
+        </p:spPr>
+        <p:txBody>
+          <a:bodyPr wrap="square" lIns="0" rIns="0" tIns="0" bIns="0" anchor="ctr">
+            <a:spAutoFit/>
+          </a:bodyPr>
+          <a:lstStyle/>
+          <a:p>
+            <a:pPr algn="l"/>
+            <a:r>
+              <a:rPr sz="1200" b="0">
+                <a:solidFill>
+                  <a:srgbClr val="545B64"/>
+                </a:solidFill>
+                <a:latin typeface="Calibri"/>
+              </a:rPr>
+              <a:t>no floor   =   </a:t>
+            </a:r>
+            <a:r>
+              <a:rPr sz="1200" b="1">
+                <a:solidFill>
+                  <a:srgbClr val="1E7C3C"/>
+                </a:solidFill>
+                <a:latin typeface="Calibri"/>
+              </a:rPr>
+              <a:t>$103K</a:t>
+            </a:r>
+          </a:p>
+        </p:txBody>
+      </p:sp>
+      <p:sp>
+        <p:nvSpPr>
+          <p:cNvPr id="48" name="TextBox 47"/>
+          <p:cNvSpPr txBox="1"/>
+          <p:nvPr/>
+        </p:nvSpPr>
+        <p:spPr>
+          <a:xfrm>
+            <a:off x="9820655" y="4334256"/>
+            <a:ext cx="1700784" cy="548640"/>
+          </a:xfrm>
+          <a:prstGeom prst="rect">
+            <a:avLst/>
+          </a:prstGeom>
+          <a:noFill/>
+        </p:spPr>
+        <p:txBody>
+          <a:bodyPr wrap="square" lIns="0" rIns="0" tIns="0" bIns="0" anchor="ctr">
+            <a:spAutoFit/>
+          </a:bodyPr>
+          <a:lstStyle/>
+          <a:p>
+            <a:pPr algn="l"/>
+            <a:r>
+              <a:rPr sz="1500" b="1">
+                <a:solidFill>
+                  <a:srgbClr val="FF9900"/>
+                </a:solidFill>
+                <a:latin typeface="Calibri"/>
+              </a:rPr>
+              <a:t>18×</a:t>
+            </a:r>
+          </a:p>
+        </p:txBody>
+      </p:sp>
+      <p:sp>
+        <p:nvSpPr>
+          <p:cNvPr id="49" name="TextBox 48"/>
+          <p:cNvSpPr txBox="1"/>
+          <p:nvPr/>
+        </p:nvSpPr>
+        <p:spPr>
+          <a:xfrm>
+            <a:off x="566928" y="4974336"/>
+            <a:ext cx="11064240" cy="548640"/>
           </a:xfrm>
           <a:prstGeom prst="rect">
             <a:avLst/>
@@ -11271,392 +12066,20 @@
           <a:p>
             <a:pPr algn="l"/>
             <a:r>
-              <a:rPr sz="1300" b="1">
-                <a:solidFill>
-                  <a:srgbClr val="232F3E"/>
-                </a:solidFill>
-                <a:latin typeface="Calibri"/>
-              </a:rPr>
-              <a:t>$18.02 a month before the first turn.</a:t>
-            </a:r>
-          </a:p>
-        </p:txBody>
-      </p:sp>
-      <p:sp>
-        <p:nvSpPr>
-          <p:cNvPr id="26" name="TextBox 25"/>
-          <p:cNvSpPr txBox="1"/>
-          <p:nvPr/>
-        </p:nvSpPr>
-        <p:spPr>
-          <a:xfrm>
-            <a:off x="768096" y="3346704"/>
-            <a:ext cx="4992624" cy="786384"/>
-          </a:xfrm>
-          <a:prstGeom prst="rect">
-            <a:avLst/>
-          </a:prstGeom>
-          <a:noFill/>
-        </p:spPr>
-        <p:txBody>
-          <a:bodyPr wrap="square" lIns="0" rIns="0" tIns="0" bIns="0" anchor="t">
-            <a:spAutoFit/>
-          </a:bodyPr>
-          <a:lstStyle/>
-          <a:p>
-            <a:pPr algn="l"/>
-            <a:r>
-              <a:rPr sz="1150" b="0">
-                <a:solidFill>
-                  <a:srgbClr val="16191F"/>
-                </a:solidFill>
-                <a:latin typeface="Calibri"/>
-              </a:rPr>
-              <a:t>One Fargate task, 0.5 vCPU, billed 730 h whether anyone talks to Valentin or not.</a:t>
-            </a:r>
-          </a:p>
-        </p:txBody>
-      </p:sp>
-      <p:sp>
-        <p:nvSpPr>
-          <p:cNvPr id="27" name="TextBox 26"/>
-          <p:cNvSpPr txBox="1"/>
-          <p:nvPr/>
-        </p:nvSpPr>
-        <p:spPr>
-          <a:xfrm>
-            <a:off x="768096" y="4224528"/>
-            <a:ext cx="4992624" cy="310896"/>
-          </a:xfrm>
-          <a:prstGeom prst="rect">
-            <a:avLst/>
-          </a:prstGeom>
-          <a:noFill/>
-        </p:spPr>
-        <p:txBody>
-          <a:bodyPr wrap="square" lIns="0" rIns="0" tIns="0" bIns="0" anchor="t">
-            <a:spAutoFit/>
-          </a:bodyPr>
-          <a:lstStyle/>
-          <a:p>
-            <a:pPr algn="l"/>
-            <a:r>
-              <a:rPr sz="1300" b="1">
-                <a:solidFill>
-                  <a:srgbClr val="232F3E"/>
-                </a:solidFill>
-                <a:latin typeface="Calibri"/>
-              </a:rPr>
-              <a:t>Plus a second model call every turn.</a:t>
-            </a:r>
-          </a:p>
-        </p:txBody>
-      </p:sp>
-      <p:sp>
-        <p:nvSpPr>
-          <p:cNvPr id="28" name="TextBox 27"/>
-          <p:cNvSpPr txBox="1"/>
-          <p:nvPr/>
-        </p:nvSpPr>
-        <p:spPr>
-          <a:xfrm>
-            <a:off x="768096" y="4553712"/>
-            <a:ext cx="4992624" cy="786384"/>
-          </a:xfrm>
-          <a:prstGeom prst="rect">
-            <a:avLst/>
-          </a:prstGeom>
-          <a:noFill/>
-        </p:spPr>
-        <p:txBody>
-          <a:bodyPr wrap="square" lIns="0" rIns="0" tIns="0" bIns="0" anchor="t">
-            <a:spAutoFit/>
-          </a:bodyPr>
-          <a:lstStyle/>
-          <a:p>
-            <a:pPr algn="l"/>
-            <a:r>
-              <a:rPr sz="1150" b="0">
-                <a:solidFill>
-                  <a:srgbClr val="16191F"/>
-                </a:solidFill>
-                <a:latin typeface="Calibri"/>
-              </a:rPr>
-              <a:t>Preference extraction is its own Bedrock invocation — $1.385 per user per month.</a:t>
-            </a:r>
-          </a:p>
-        </p:txBody>
-      </p:sp>
-      <p:sp>
-        <p:nvSpPr>
-          <p:cNvPr id="29" name="Rounded Rectangle 28"/>
-          <p:cNvSpPr/>
-          <p:nvPr/>
-        </p:nvSpPr>
-        <p:spPr>
-          <a:xfrm>
-            <a:off x="6236208" y="2395728"/>
-            <a:ext cx="5394960" cy="3017520"/>
-          </a:xfrm>
-          <a:prstGeom prst="roundRect">
-            <a:avLst>
-              <a:gd name="adj" fmla="val 1818"/>
-            </a:avLst>
-          </a:prstGeom>
-          <a:solidFill>
-            <a:srgbClr val="F7F8FA"/>
-          </a:solidFill>
-          <a:ln w="12700">
-            <a:solidFill>
-              <a:srgbClr val="E4E7EA"/>
-            </a:solidFill>
-          </a:ln>
-          <a:effectLst/>
-        </p:spPr>
-        <p:style>
-          <a:lnRef idx="1">
-            <a:schemeClr val="accent1"/>
-          </a:lnRef>
-          <a:fillRef idx="3">
-            <a:schemeClr val="accent1"/>
-          </a:fillRef>
-          <a:effectRef idx="2">
-            <a:schemeClr val="accent1"/>
-          </a:effectRef>
-          <a:fontRef idx="minor">
-            <a:schemeClr val="lt1"/>
-          </a:fontRef>
-        </p:style>
-        <p:txBody>
-          <a:bodyPr rtlCol="0" anchor="ctr"/>
-          <a:lstStyle/>
-          <a:p>
-            <a:pPr algn="ctr"/>
-          </a:p>
-        </p:txBody>
-      </p:sp>
-      <p:sp>
-        <p:nvSpPr>
-          <p:cNvPr id="30" name="Rectangle 29"/>
-          <p:cNvSpPr/>
-          <p:nvPr/>
-        </p:nvSpPr>
-        <p:spPr>
-          <a:xfrm>
-            <a:off x="6236208" y="2395728"/>
-            <a:ext cx="5394960" cy="420624"/>
-          </a:xfrm>
-          <a:prstGeom prst="rect">
-            <a:avLst/>
-          </a:prstGeom>
-          <a:solidFill>
-            <a:srgbClr val="232F3E"/>
-          </a:solidFill>
-          <a:ln>
-            <a:noFill/>
-          </a:ln>
-          <a:effectLst/>
-        </p:spPr>
-        <p:style>
-          <a:lnRef idx="1">
-            <a:schemeClr val="accent1"/>
-          </a:lnRef>
-          <a:fillRef idx="3">
-            <a:schemeClr val="accent1"/>
-          </a:fillRef>
-          <a:effectRef idx="2">
-            <a:schemeClr val="accent1"/>
-          </a:effectRef>
-          <a:fontRef idx="minor">
-            <a:schemeClr val="lt1"/>
-          </a:fontRef>
-        </p:style>
-        <p:txBody>
-          <a:bodyPr rtlCol="0" anchor="ctr"/>
-          <a:lstStyle/>
-          <a:p>
-            <a:pPr algn="ctr"/>
-          </a:p>
-        </p:txBody>
-      </p:sp>
-      <p:sp>
-        <p:nvSpPr>
-          <p:cNvPr id="31" name="TextBox 30"/>
-          <p:cNvSpPr txBox="1"/>
-          <p:nvPr/>
-        </p:nvSpPr>
-        <p:spPr>
-          <a:xfrm>
-            <a:off x="6437376" y="2395728"/>
-            <a:ext cx="4992624" cy="420624"/>
-          </a:xfrm>
-          <a:prstGeom prst="rect">
-            <a:avLst/>
-          </a:prstGeom>
-          <a:noFill/>
-        </p:spPr>
-        <p:txBody>
-          <a:bodyPr wrap="square" lIns="0" rIns="0" tIns="0" bIns="0" anchor="ctr">
-            <a:spAutoFit/>
-          </a:bodyPr>
-          <a:lstStyle/>
-          <a:p>
-            <a:pPr algn="l"/>
-            <a:r>
-              <a:rPr sz="1150" b="1">
-                <a:solidFill>
-                  <a:srgbClr val="FFFFFF"/>
-                </a:solidFill>
-                <a:latin typeface="Calibri"/>
-              </a:rPr>
-              <a:t>ENGINE B · AGENTCORE</a:t>
-            </a:r>
-          </a:p>
-        </p:txBody>
-      </p:sp>
-      <p:sp>
-        <p:nvSpPr>
-          <p:cNvPr id="32" name="TextBox 31"/>
-          <p:cNvSpPr txBox="1"/>
-          <p:nvPr/>
-        </p:nvSpPr>
-        <p:spPr>
-          <a:xfrm>
-            <a:off x="6437376" y="3017520"/>
-            <a:ext cx="4992624" cy="310896"/>
-          </a:xfrm>
-          <a:prstGeom prst="rect">
-            <a:avLst/>
-          </a:prstGeom>
-          <a:noFill/>
-        </p:spPr>
-        <p:txBody>
-          <a:bodyPr wrap="square" lIns="0" rIns="0" tIns="0" bIns="0" anchor="t">
-            <a:spAutoFit/>
-          </a:bodyPr>
-          <a:lstStyle/>
-          <a:p>
-            <a:pPr algn="l"/>
-            <a:r>
-              <a:rPr sz="1300" b="1">
-                <a:solidFill>
-                  <a:srgbClr val="232F3E"/>
-                </a:solidFill>
-                <a:latin typeface="Calibri"/>
-              </a:rPr>
-              <a:t>$0.10 a month, all of it usage.</a:t>
-            </a:r>
-          </a:p>
-        </p:txBody>
-      </p:sp>
-      <p:sp>
-        <p:nvSpPr>
-          <p:cNvPr id="33" name="TextBox 32"/>
-          <p:cNvSpPr txBox="1"/>
-          <p:nvPr/>
-        </p:nvSpPr>
-        <p:spPr>
-          <a:xfrm>
-            <a:off x="6437376" y="3346704"/>
-            <a:ext cx="4992624" cy="786384"/>
-          </a:xfrm>
-          <a:prstGeom prst="rect">
-            <a:avLst/>
-          </a:prstGeom>
-          <a:noFill/>
-        </p:spPr>
-        <p:txBody>
-          <a:bodyPr wrap="square" lIns="0" rIns="0" tIns="0" bIns="0" anchor="t">
-            <a:spAutoFit/>
-          </a:bodyPr>
-          <a:lstStyle/>
-          <a:p>
-            <a:pPr algn="l"/>
-            <a:r>
-              <a:rPr sz="1150" b="0">
-                <a:solidFill>
-                  <a:srgbClr val="16191F"/>
-                </a:solidFill>
-                <a:latin typeface="Calibri"/>
-              </a:rPr>
-              <a:t>Compute $0.0047 + Memory $0.098 + Gateway $0.0006. The idle floor disappears entirely.</a:t>
-            </a:r>
-          </a:p>
-        </p:txBody>
-      </p:sp>
-      <p:sp>
-        <p:nvSpPr>
-          <p:cNvPr id="34" name="TextBox 33"/>
-          <p:cNvSpPr txBox="1"/>
-          <p:nvPr/>
-        </p:nvSpPr>
-        <p:spPr>
-          <a:xfrm>
-            <a:off x="6437376" y="4224528"/>
-            <a:ext cx="4992624" cy="310896"/>
-          </a:xfrm>
-          <a:prstGeom prst="rect">
-            <a:avLst/>
-          </a:prstGeom>
-          <a:noFill/>
-        </p:spPr>
-        <p:txBody>
-          <a:bodyPr wrap="square" lIns="0" rIns="0" tIns="0" bIns="0" anchor="t">
-            <a:spAutoFit/>
-          </a:bodyPr>
-          <a:lstStyle/>
-          <a:p>
-            <a:pPr algn="l"/>
-            <a:r>
-              <a:rPr sz="1300" b="1">
-                <a:solidFill>
-                  <a:srgbClr val="232F3E"/>
-                </a:solidFill>
-                <a:latin typeface="Calibri"/>
-              </a:rPr>
-              <a:t>The honest part: unit price is worse.</a:t>
-            </a:r>
-          </a:p>
-        </p:txBody>
-      </p:sp>
-      <p:sp>
-        <p:nvSpPr>
-          <p:cNvPr id="35" name="TextBox 34"/>
-          <p:cNvSpPr txBox="1"/>
-          <p:nvPr/>
-        </p:nvSpPr>
-        <p:spPr>
-          <a:xfrm>
-            <a:off x="6437376" y="4553712"/>
-            <a:ext cx="4992624" cy="786384"/>
-          </a:xfrm>
-          <a:prstGeom prst="rect">
-            <a:avLst/>
-          </a:prstGeom>
-          <a:noFill/>
-        </p:spPr>
-        <p:txBody>
-          <a:bodyPr wrap="square" lIns="0" rIns="0" tIns="0" bIns="0" anchor="t">
-            <a:spAutoFit/>
-          </a:bodyPr>
-          <a:lstStyle/>
-          <a:p>
-            <a:pPr algn="l"/>
-            <a:r>
-              <a:rPr sz="1150" b="0">
-                <a:solidFill>
-                  <a:srgbClr val="16191F"/>
-                </a:solidFill>
-                <a:latin typeface="Calibri"/>
-              </a:rPr>
-              <a:t>Runtime is 2.20× dearer per vCPU-hour. It wins on billing granularity, and only on that.</a:t>
-            </a:r>
-          </a:p>
-        </p:txBody>
-      </p:sp>
-      <p:sp>
-        <p:nvSpPr>
-          <p:cNvPr id="36" name="Rounded Rectangle 35"/>
+              <a:rPr sz="1100" b="0">
+                <a:solidFill>
+                  <a:srgbClr val="545B64"/>
+                </a:solidFill>
+                <a:latin typeface="Calibri"/>
+              </a:rPr>
+              <a:t>The floor decides at one user; the meter decides at a million. Engine A’s “fixed” cost is not even fixed — it steps up one task per 40 concurrent sessions — and its $1.39/user extraction meter never catches B’s $0.10. Engine B has no floor at any scale.</a:t>
+            </a:r>
+          </a:p>
+        </p:txBody>
+      </p:sp>
+      <p:sp>
+        <p:nvSpPr>
+          <p:cNvPr id="50" name="Rounded Rectangle 49"/>
           <p:cNvSpPr/>
           <p:nvPr/>
         </p:nvSpPr>
@@ -11702,7 +12125,7 @@
       </p:sp>
       <p:sp>
         <p:nvSpPr>
-          <p:cNvPr id="37" name="TextBox 36"/>
+          <p:cNvPr id="51" name="TextBox 50"/>
           <p:cNvSpPr txBox="1"/>
           <p:nvPr/>
         </p:nvSpPr>
@@ -11730,14 +12153,14 @@
                 </a:solidFill>
                 <a:latin typeface="Calibri"/>
               </a:rPr>
-              <a:t>14×</a:t>
-            </a:r>
-          </a:p>
-        </p:txBody>
-      </p:sp>
-      <p:sp>
-        <p:nvSpPr>
-          <p:cNvPr id="38" name="Rounded Rectangle 37"/>
+              <a:t>18×</a:t>
+            </a:r>
+          </a:p>
+        </p:txBody>
+      </p:sp>
+      <p:sp>
+        <p:nvSpPr>
+          <p:cNvPr id="52" name="Rounded Rectangle 51"/>
           <p:cNvSpPr/>
           <p:nvPr/>
         </p:nvSpPr>
@@ -11783,7 +12206,7 @@
       </p:sp>
       <p:sp>
         <p:nvSpPr>
-          <p:cNvPr id="39" name="TextBox 38"/>
+          <p:cNvPr id="53" name="TextBox 52"/>
           <p:cNvSpPr txBox="1"/>
           <p:nvPr/>
         </p:nvSpPr>
@@ -11805,7 +12228,7 @@
           <a:p>
             <a:pPr algn="ctr"/>
             <a:r>
-              <a:rPr sz="900" b="1">
+              <a:rPr sz="1000" b="1">
                 <a:solidFill>
                   <a:srgbClr val="FFFFFF"/>
                 </a:solidFill>
@@ -11818,13 +12241,13 @@
       </p:sp>
       <p:sp>
         <p:nvSpPr>
-          <p:cNvPr id="40" name="TextBox 39"/>
+          <p:cNvPr id="54" name="TextBox 53"/>
           <p:cNvSpPr txBox="1"/>
           <p:nvPr/>
         </p:nvSpPr>
         <p:spPr>
           <a:xfrm>
-            <a:off x="3017520" y="5687568"/>
+            <a:off x="3017520" y="5678424"/>
             <a:ext cx="6766560" cy="237744"/>
           </a:xfrm>
           <a:prstGeom prst="rect">
@@ -11846,21 +12269,21 @@
                 </a:solidFill>
                 <a:latin typeface="Calibri"/>
               </a:rPr>
-              <a:t>cheaper per user, per month — the bill is itemised on the next slide</a:t>
-            </a:r>
-          </a:p>
-        </p:txBody>
-      </p:sp>
-      <p:sp>
-        <p:nvSpPr>
-          <p:cNvPr id="41" name="TextBox 40"/>
+              <a:t>cheaper at scale — 189× at one user, where only B has no floor</a:t>
+            </a:r>
+          </a:p>
+        </p:txBody>
+      </p:sp>
+      <p:sp>
+        <p:nvSpPr>
+          <p:cNvPr id="55" name="TextBox 54"/>
           <p:cNvSpPr txBox="1"/>
           <p:nvPr/>
         </p:nvSpPr>
         <p:spPr>
           <a:xfrm>
-            <a:off x="3017520" y="5925312"/>
-            <a:ext cx="6766560" cy="219456"/>
+            <a:off x="3017520" y="5916168"/>
+            <a:ext cx="6766560" cy="237744"/>
           </a:xfrm>
           <a:prstGeom prst="rect">
             <a:avLst/>
@@ -11875,7 +12298,7 @@
           <a:p>
             <a:pPr algn="l"/>
             <a:r>
-              <a:rPr sz="950" b="1">
+              <a:rPr sz="1000" b="1">
                 <a:solidFill>
                   <a:srgbClr val="545B64"/>
                 </a:solidFill>
@@ -11884,13 +12307,13 @@
               <a:t>Give up:  </a:t>
             </a:r>
             <a:r>
-              <a:rPr sz="950" b="0">
+              <a:rPr sz="1000" b="0">
                 <a:solidFill>
                   <a:srgbClr val="545B64"/>
                 </a:solidFill>
                 <a:latin typeface="Calibri"/>
               </a:rPr>
-              <a:t>if Memory retrievals meter per record, not per call, this reverses — confirm before quoting</a:t>
+              <a:t>if Memory retrievals meter per record, not per call, this narrows — confirm before quoting</a:t>
             </a:r>
           </a:p>
         </p:txBody>
@@ -14725,7 +15148,7 @@
                 </a:solidFill>
                 <a:latin typeface="Calibri"/>
               </a:rPr>
-              <a:t>ENGINE A · GLUE CODE</a:t>
+              <a:t>ENGINE A · DIY</a:t>
             </a:r>
           </a:p>
         </p:txBody>
@@ -15288,7 +15711,7 @@
           <a:p>
             <a:pPr algn="ctr"/>
             <a:r>
-              <a:rPr sz="900" b="1">
+              <a:rPr sz="1000" b="1">
                 <a:solidFill>
                   <a:srgbClr val="FFFFFF"/>
                 </a:solidFill>
@@ -15307,7 +15730,7 @@
         </p:nvSpPr>
         <p:spPr>
           <a:xfrm>
-            <a:off x="3017520" y="5687568"/>
+            <a:off x="3017520" y="5678424"/>
             <a:ext cx="6766560" cy="237744"/>
           </a:xfrm>
           <a:prstGeom prst="rect">
@@ -15342,8 +15765,8 @@
         </p:nvSpPr>
         <p:spPr>
           <a:xfrm>
-            <a:off x="3017520" y="5925312"/>
-            <a:ext cx="6766560" cy="219456"/>
+            <a:off x="3017520" y="5916168"/>
+            <a:ext cx="6766560" cy="237744"/>
           </a:xfrm>
           <a:prstGeom prst="rect">
             <a:avLst/>
@@ -15358,7 +15781,7 @@
           <a:p>
             <a:pPr algn="l"/>
             <a:r>
-              <a:rPr sz="950" b="1">
+              <a:rPr sz="1000" b="1">
                 <a:solidFill>
                   <a:srgbClr val="545B64"/>
                 </a:solidFill>
@@ -15367,7 +15790,7 @@
               <a:t>Give up:  </a:t>
             </a:r>
             <a:r>
-              <a:rPr sz="950" b="0">
+              <a:rPr sz="1000" b="0">
                 <a:solidFill>
                   <a:srgbClr val="545B64"/>
                 </a:solidFill>
@@ -16237,7 +16660,7 @@
                 </a:solidFill>
                 <a:latin typeface="Calibri"/>
               </a:rPr>
-              <a:t>ENGINE A · GLUE CODE</a:t>
+              <a:t>ENGINE A · DIY</a:t>
             </a:r>
           </a:p>
         </p:txBody>
@@ -16800,7 +17223,7 @@
           <a:p>
             <a:pPr algn="ctr"/>
             <a:r>
-              <a:rPr sz="900" b="1">
+              <a:rPr sz="1000" b="1">
                 <a:solidFill>
                   <a:srgbClr val="FFFFFF"/>
                 </a:solidFill>
@@ -16819,7 +17242,7 @@
         </p:nvSpPr>
         <p:spPr>
           <a:xfrm>
-            <a:off x="3017520" y="5687568"/>
+            <a:off x="3017520" y="5678424"/>
             <a:ext cx="6766560" cy="237744"/>
           </a:xfrm>
           <a:prstGeom prst="rect">
@@ -16854,8 +17277,8 @@
         </p:nvSpPr>
         <p:spPr>
           <a:xfrm>
-            <a:off x="3017520" y="5925312"/>
-            <a:ext cx="6766560" cy="219456"/>
+            <a:off x="3017520" y="5916168"/>
+            <a:ext cx="6766560" cy="237744"/>
           </a:xfrm>
           <a:prstGeom prst="rect">
             <a:avLst/>
@@ -16870,7 +17293,7 @@
           <a:p>
             <a:pPr algn="l"/>
             <a:r>
-              <a:rPr sz="950" b="1">
+              <a:rPr sz="1000" b="1">
                 <a:solidFill>
                   <a:srgbClr val="545B64"/>
                 </a:solidFill>
@@ -16879,7 +17302,7 @@
               <a:t>Give up:  </a:t>
             </a:r>
             <a:r>
-              <a:rPr sz="950" b="0">
+              <a:rPr sz="1000" b="0">
                 <a:solidFill>
                   <a:srgbClr val="545B64"/>
                 </a:solidFill>
@@ -17749,7 +18172,7 @@
                 </a:solidFill>
                 <a:latin typeface="Calibri"/>
               </a:rPr>
-              <a:t>ENGINE A · GLUE CODE</a:t>
+              <a:t>ENGINE A · DIY</a:t>
             </a:r>
           </a:p>
         </p:txBody>
@@ -18312,7 +18735,7 @@
           <a:p>
             <a:pPr algn="ctr"/>
             <a:r>
-              <a:rPr sz="900" b="1">
+              <a:rPr sz="1000" b="1">
                 <a:solidFill>
                   <a:srgbClr val="FFFFFF"/>
                 </a:solidFill>
@@ -18331,7 +18754,7 @@
         </p:nvSpPr>
         <p:spPr>
           <a:xfrm>
-            <a:off x="3017520" y="5687568"/>
+            <a:off x="3017520" y="5678424"/>
             <a:ext cx="6766560" cy="237744"/>
           </a:xfrm>
           <a:prstGeom prst="rect">
@@ -18366,8 +18789,8 @@
         </p:nvSpPr>
         <p:spPr>
           <a:xfrm>
-            <a:off x="3017520" y="5925312"/>
-            <a:ext cx="6766560" cy="219456"/>
+            <a:off x="3017520" y="5916168"/>
+            <a:ext cx="6766560" cy="237744"/>
           </a:xfrm>
           <a:prstGeom prst="rect">
             <a:avLst/>
@@ -18382,7 +18805,7 @@
           <a:p>
             <a:pPr algn="l"/>
             <a:r>
-              <a:rPr sz="950" b="1">
+              <a:rPr sz="1000" b="1">
                 <a:solidFill>
                   <a:srgbClr val="545B64"/>
                 </a:solidFill>
@@ -18391,7 +18814,7 @@
               <a:t>Give up:  </a:t>
             </a:r>
             <a:r>
-              <a:rPr sz="950" b="0">
+              <a:rPr sz="1000" b="0">
                 <a:solidFill>
                   <a:srgbClr val="545B64"/>
                 </a:solidFill>
@@ -18643,7 +19066,7 @@
                 </a:solidFill>
                 <a:latin typeface="Calibri"/>
               </a:rPr>
-              <a:t>Debuggability — the lens the glue code wins</a:t>
+              <a:t>Debuggability — the lens DIY wins</a:t>
             </a:r>
           </a:p>
         </p:txBody>
@@ -19217,7 +19640,7 @@
                 </a:solidFill>
                 <a:latin typeface="Calibri"/>
               </a:rPr>
-              <a:t>ENGINE A · GLUE CODE</a:t>
+              <a:t>ENGINE A · DIY</a:t>
             </a:r>
           </a:p>
         </p:txBody>
@@ -19780,13 +20203,13 @@
           <a:p>
             <a:pPr algn="ctr"/>
             <a:r>
-              <a:rPr sz="900" b="1">
+              <a:rPr sz="1000" b="1">
                 <a:solidFill>
                   <a:srgbClr val="FFFFFF"/>
                 </a:solidFill>
                 <a:latin typeface="Calibri"/>
               </a:rPr>
-              <a:t>GLUE CODE</a:t>
+              <a:t>DIY</a:t>
             </a:r>
           </a:p>
         </p:txBody>
@@ -19822,6 +20245,5060 @@
                 <a:latin typeface="Calibri"/>
               </a:rPr>
               <a:t>the lens DIY keeps — a 6–0 comparison would be a sales pitch</a:t>
+            </a:r>
+          </a:p>
+        </p:txBody>
+      </p:sp>
+    </p:spTree>
+  </p:cSld>
+  <p:clrMapOvr>
+    <a:masterClrMapping/>
+  </p:clrMapOvr>
+</p:sld>
+</file>
+
+<file path=ppt/slides/slide24.xml><?xml version="1.0" encoding="utf-8"?>
+<p:sld xmlns:a="http://schemas.openxmlformats.org/drawingml/2006/main" xmlns:p="http://schemas.openxmlformats.org/presentationml/2006/main" xmlns:r="http://schemas.openxmlformats.org/officeDocument/2006/relationships">
+  <p:cSld>
+    <p:spTree>
+      <p:nvGrpSpPr>
+        <p:cNvPr id="1" name=""/>
+        <p:cNvGrpSpPr/>
+        <p:nvPr/>
+      </p:nvGrpSpPr>
+      <p:grpSpPr/>
+      <p:sp>
+        <p:nvSpPr>
+          <p:cNvPr id="2" name="Rectangle 1"/>
+          <p:cNvSpPr/>
+          <p:nvPr/>
+        </p:nvSpPr>
+        <p:spPr>
+          <a:xfrm>
+            <a:off x="0" y="0"/>
+            <a:ext cx="12191969" cy="6858000"/>
+          </a:xfrm>
+          <a:prstGeom prst="rect">
+            <a:avLst/>
+          </a:prstGeom>
+          <a:solidFill>
+            <a:srgbClr val="FFFFFF"/>
+          </a:solidFill>
+          <a:ln>
+            <a:noFill/>
+          </a:ln>
+          <a:effectLst/>
+        </p:spPr>
+        <p:style>
+          <a:lnRef idx="1">
+            <a:schemeClr val="accent1"/>
+          </a:lnRef>
+          <a:fillRef idx="3">
+            <a:schemeClr val="accent1"/>
+          </a:fillRef>
+          <a:effectRef idx="2">
+            <a:schemeClr val="accent1"/>
+          </a:effectRef>
+          <a:fontRef idx="minor">
+            <a:schemeClr val="lt1"/>
+          </a:fontRef>
+        </p:style>
+        <p:txBody>
+          <a:bodyPr rtlCol="0" anchor="ctr"/>
+          <a:lstStyle/>
+          <a:p>
+            <a:pPr algn="ctr"/>
+          </a:p>
+        </p:txBody>
+      </p:sp>
+      <p:sp>
+        <p:nvSpPr>
+          <p:cNvPr id="3" name="Oval 2"/>
+          <p:cNvSpPr/>
+          <p:nvPr/>
+        </p:nvSpPr>
+        <p:spPr>
+          <a:xfrm>
+            <a:off x="502920" y="365760"/>
+            <a:ext cx="594360" cy="594360"/>
+          </a:xfrm>
+          <a:prstGeom prst="ellipse">
+            <a:avLst/>
+          </a:prstGeom>
+          <a:solidFill>
+            <a:srgbClr val="232F3E"/>
+          </a:solidFill>
+          <a:ln>
+            <a:noFill/>
+          </a:ln>
+          <a:effectLst/>
+        </p:spPr>
+        <p:style>
+          <a:lnRef idx="1">
+            <a:schemeClr val="accent1"/>
+          </a:lnRef>
+          <a:fillRef idx="3">
+            <a:schemeClr val="accent1"/>
+          </a:fillRef>
+          <a:effectRef idx="2">
+            <a:schemeClr val="accent1"/>
+          </a:effectRef>
+          <a:fontRef idx="minor">
+            <a:schemeClr val="lt1"/>
+          </a:fontRef>
+        </p:style>
+        <p:txBody>
+          <a:bodyPr rtlCol="0" anchor="ctr"/>
+          <a:lstStyle/>
+          <a:p>
+            <a:pPr algn="ctr"/>
+          </a:p>
+        </p:txBody>
+      </p:sp>
+      <p:sp>
+        <p:nvSpPr>
+          <p:cNvPr id="4" name="TextBox 3"/>
+          <p:cNvSpPr txBox="1"/>
+          <p:nvPr/>
+        </p:nvSpPr>
+        <p:spPr>
+          <a:xfrm>
+            <a:off x="502920" y="365760"/>
+            <a:ext cx="594360" cy="594360"/>
+          </a:xfrm>
+          <a:prstGeom prst="rect">
+            <a:avLst/>
+          </a:prstGeom>
+          <a:noFill/>
+        </p:spPr>
+        <p:txBody>
+          <a:bodyPr wrap="square" lIns="0" rIns="0" tIns="0" bIns="0" anchor="ctr">
+            <a:spAutoFit/>
+          </a:bodyPr>
+          <a:lstStyle/>
+          <a:p>
+            <a:pPr algn="ctr"/>
+            <a:r>
+              <a:rPr sz="2600" b="1">
+                <a:solidFill>
+                  <a:srgbClr val="FF9900"/>
+                </a:solidFill>
+                <a:latin typeface="Calibri"/>
+              </a:rPr>
+              <a:t>9</a:t>
+            </a:r>
+          </a:p>
+        </p:txBody>
+      </p:sp>
+      <p:sp>
+        <p:nvSpPr>
+          <p:cNvPr id="5" name="TextBox 4"/>
+          <p:cNvSpPr txBox="1"/>
+          <p:nvPr/>
+        </p:nvSpPr>
+        <p:spPr>
+          <a:xfrm>
+            <a:off x="502920" y="6446520"/>
+            <a:ext cx="8229600" cy="320040"/>
+          </a:xfrm>
+          <a:prstGeom prst="rect">
+            <a:avLst/>
+          </a:prstGeom>
+          <a:noFill/>
+        </p:spPr>
+        <p:txBody>
+          <a:bodyPr wrap="square" lIns="0" rIns="0" tIns="0" bIns="0" anchor="ctr">
+            <a:spAutoFit/>
+          </a:bodyPr>
+          <a:lstStyle/>
+          <a:p>
+            <a:pPr algn="l"/>
+            <a:r>
+              <a:rPr sz="1000" b="1">
+                <a:solidFill>
+                  <a:srgbClr val="545B64"/>
+                </a:solidFill>
+                <a:latin typeface="Calibri"/>
+              </a:rPr>
+              <a:t>VALENTIN   ·   GenAI TFC Capstone Deep-Dive</a:t>
+            </a:r>
+          </a:p>
+        </p:txBody>
+      </p:sp>
+      <p:sp>
+        <p:nvSpPr>
+          <p:cNvPr id="6" name="TextBox 5"/>
+          <p:cNvSpPr txBox="1"/>
+          <p:nvPr/>
+        </p:nvSpPr>
+        <p:spPr>
+          <a:xfrm>
+            <a:off x="10332720" y="6446520"/>
+            <a:ext cx="1371600" cy="320040"/>
+          </a:xfrm>
+          <a:prstGeom prst="rect">
+            <a:avLst/>
+          </a:prstGeom>
+          <a:noFill/>
+        </p:spPr>
+        <p:txBody>
+          <a:bodyPr wrap="square" lIns="0" rIns="0" tIns="0" bIns="0" anchor="ctr">
+            <a:spAutoFit/>
+          </a:bodyPr>
+          <a:lstStyle/>
+          <a:p>
+            <a:pPr algn="r"/>
+            <a:r>
+              <a:rPr sz="1000" b="0">
+                <a:solidFill>
+                  <a:srgbClr val="545B64"/>
+                </a:solidFill>
+                <a:latin typeface="Calibri"/>
+              </a:rPr>
+              <a:t>10 / 17</a:t>
+            </a:r>
+          </a:p>
+        </p:txBody>
+      </p:sp>
+      <p:sp>
+        <p:nvSpPr>
+          <p:cNvPr id="7" name="TextBox 6"/>
+          <p:cNvSpPr txBox="1"/>
+          <p:nvPr/>
+        </p:nvSpPr>
+        <p:spPr>
+          <a:xfrm>
+            <a:off x="1280160" y="365760"/>
+            <a:ext cx="10058400" cy="594360"/>
+          </a:xfrm>
+          <a:prstGeom prst="rect">
+            <a:avLst/>
+          </a:prstGeom>
+          <a:noFill/>
+        </p:spPr>
+        <p:txBody>
+          <a:bodyPr wrap="square" lIns="0" rIns="0" tIns="0" bIns="0" anchor="ctr">
+            <a:spAutoFit/>
+          </a:bodyPr>
+          <a:lstStyle/>
+          <a:p>
+            <a:pPr algn="l"/>
+            <a:r>
+              <a:rPr sz="3000" b="1">
+                <a:solidFill>
+                  <a:srgbClr val="232F3E"/>
+                </a:solidFill>
+                <a:latin typeface="Calibri"/>
+              </a:rPr>
+              <a:t>One fault, forty sessions</a:t>
+            </a:r>
+          </a:p>
+        </p:txBody>
+      </p:sp>
+      <p:sp>
+        <p:nvSpPr>
+          <p:cNvPr id="8" name="Rectangle 7"/>
+          <p:cNvSpPr/>
+          <p:nvPr/>
+        </p:nvSpPr>
+        <p:spPr>
+          <a:xfrm>
+            <a:off x="502920" y="1051560"/>
+            <a:ext cx="1371600" cy="36576"/>
+          </a:xfrm>
+          <a:prstGeom prst="rect">
+            <a:avLst/>
+          </a:prstGeom>
+          <a:solidFill>
+            <a:srgbClr val="FF9900"/>
+          </a:solidFill>
+          <a:ln>
+            <a:noFill/>
+          </a:ln>
+          <a:effectLst/>
+        </p:spPr>
+        <p:style>
+          <a:lnRef idx="1">
+            <a:schemeClr val="accent1"/>
+          </a:lnRef>
+          <a:fillRef idx="3">
+            <a:schemeClr val="accent1"/>
+          </a:fillRef>
+          <a:effectRef idx="2">
+            <a:schemeClr val="accent1"/>
+          </a:effectRef>
+          <a:fontRef idx="minor">
+            <a:schemeClr val="lt1"/>
+          </a:fontRef>
+        </p:style>
+        <p:txBody>
+          <a:bodyPr rtlCol="0" anchor="ctr"/>
+          <a:lstStyle/>
+          <a:p>
+            <a:pPr algn="ctr"/>
+          </a:p>
+        </p:txBody>
+      </p:sp>
+      <p:sp>
+        <p:nvSpPr>
+          <p:cNvPr id="9" name="TextBox 8"/>
+          <p:cNvSpPr txBox="1"/>
+          <p:nvPr/>
+        </p:nvSpPr>
+        <p:spPr>
+          <a:xfrm>
+            <a:off x="502920" y="1280160"/>
+            <a:ext cx="11155680" cy="384048"/>
+          </a:xfrm>
+          <a:prstGeom prst="rect">
+            <a:avLst/>
+          </a:prstGeom>
+          <a:noFill/>
+        </p:spPr>
+        <p:txBody>
+          <a:bodyPr wrap="square" lIns="0" rIns="0" tIns="0" bIns="0" anchor="t">
+            <a:spAutoFit/>
+          </a:bodyPr>
+          <a:lstStyle/>
+          <a:p>
+            <a:pPr algn="l"/>
+            <a:r>
+              <a:rPr sz="1400" b="0">
+                <a:solidFill>
+                  <a:srgbClr val="545B64"/>
+                </a:solidFill>
+                <a:latin typeface="Calibri"/>
+              </a:rPr>
+              <a:t>The same process-level fault, injected into one live session on each engine.</a:t>
+            </a:r>
+          </a:p>
+        </p:txBody>
+      </p:sp>
+      <p:sp>
+        <p:nvSpPr>
+          <p:cNvPr id="10" name="Rounded Rectangle 9"/>
+          <p:cNvSpPr/>
+          <p:nvPr/>
+        </p:nvSpPr>
+        <p:spPr>
+          <a:xfrm>
+            <a:off x="566928" y="1755648"/>
+            <a:ext cx="2670048" cy="384048"/>
+          </a:xfrm>
+          <a:prstGeom prst="roundRect">
+            <a:avLst>
+              <a:gd name="adj" fmla="val 50000"/>
+            </a:avLst>
+          </a:prstGeom>
+          <a:solidFill>
+            <a:srgbClr val="232F3E"/>
+          </a:solidFill>
+          <a:ln>
+            <a:noFill/>
+          </a:ln>
+          <a:effectLst/>
+        </p:spPr>
+        <p:style>
+          <a:lnRef idx="1">
+            <a:schemeClr val="accent1"/>
+          </a:lnRef>
+          <a:fillRef idx="3">
+            <a:schemeClr val="accent1"/>
+          </a:fillRef>
+          <a:effectRef idx="2">
+            <a:schemeClr val="accent1"/>
+          </a:effectRef>
+          <a:fontRef idx="minor">
+            <a:schemeClr val="lt1"/>
+          </a:fontRef>
+        </p:style>
+        <p:txBody>
+          <a:bodyPr rtlCol="0" anchor="ctr"/>
+          <a:lstStyle/>
+          <a:p>
+            <a:pPr algn="ctr"/>
+          </a:p>
+        </p:txBody>
+      </p:sp>
+      <p:sp>
+        <p:nvSpPr>
+          <p:cNvPr id="11" name="Oval 10"/>
+          <p:cNvSpPr/>
+          <p:nvPr/>
+        </p:nvSpPr>
+        <p:spPr>
+          <a:xfrm>
+            <a:off x="768096" y="1897379"/>
+            <a:ext cx="100584" cy="100584"/>
+          </a:xfrm>
+          <a:prstGeom prst="ellipse">
+            <a:avLst/>
+          </a:prstGeom>
+          <a:solidFill>
+            <a:srgbClr val="FF9900"/>
+          </a:solidFill>
+          <a:ln>
+            <a:noFill/>
+          </a:ln>
+          <a:effectLst/>
+        </p:spPr>
+        <p:style>
+          <a:lnRef idx="1">
+            <a:schemeClr val="accent1"/>
+          </a:lnRef>
+          <a:fillRef idx="3">
+            <a:schemeClr val="accent1"/>
+          </a:fillRef>
+          <a:effectRef idx="2">
+            <a:schemeClr val="accent1"/>
+          </a:effectRef>
+          <a:fontRef idx="minor">
+            <a:schemeClr val="lt1"/>
+          </a:fontRef>
+        </p:style>
+        <p:txBody>
+          <a:bodyPr rtlCol="0" anchor="ctr"/>
+          <a:lstStyle/>
+          <a:p>
+            <a:pPr algn="ctr"/>
+          </a:p>
+        </p:txBody>
+      </p:sp>
+      <p:sp>
+        <p:nvSpPr>
+          <p:cNvPr id="12" name="TextBox 11"/>
+          <p:cNvSpPr txBox="1"/>
+          <p:nvPr/>
+        </p:nvSpPr>
+        <p:spPr>
+          <a:xfrm>
+            <a:off x="969264" y="1755648"/>
+            <a:ext cx="2157984" cy="384048"/>
+          </a:xfrm>
+          <a:prstGeom prst="rect">
+            <a:avLst/>
+          </a:prstGeom>
+          <a:noFill/>
+        </p:spPr>
+        <p:txBody>
+          <a:bodyPr wrap="square" lIns="0" rIns="0" tIns="0" bIns="0" anchor="ctr">
+            <a:spAutoFit/>
+          </a:bodyPr>
+          <a:lstStyle/>
+          <a:p>
+            <a:pPr algn="l"/>
+            <a:r>
+              <a:rPr sz="1150" b="1">
+                <a:solidFill>
+                  <a:srgbClr val="FFFFFF"/>
+                </a:solidFill>
+                <a:latin typeface="Calibri"/>
+              </a:rPr>
+              <a:t>AgentCore Runtime</a:t>
+            </a:r>
+          </a:p>
+        </p:txBody>
+      </p:sp>
+      <p:sp>
+        <p:nvSpPr>
+          <p:cNvPr id="13" name="Rounded Rectangle 12"/>
+          <p:cNvSpPr/>
+          <p:nvPr/>
+        </p:nvSpPr>
+        <p:spPr>
+          <a:xfrm>
+            <a:off x="3364992" y="1755648"/>
+            <a:ext cx="2670048" cy="384048"/>
+          </a:xfrm>
+          <a:prstGeom prst="roundRect">
+            <a:avLst>
+              <a:gd name="adj" fmla="val 50000"/>
+            </a:avLst>
+          </a:prstGeom>
+          <a:noFill/>
+          <a:ln w="12700">
+            <a:solidFill>
+              <a:srgbClr val="E4E7EA"/>
+            </a:solidFill>
+          </a:ln>
+          <a:effectLst/>
+        </p:spPr>
+        <p:style>
+          <a:lnRef idx="1">
+            <a:schemeClr val="accent1"/>
+          </a:lnRef>
+          <a:fillRef idx="3">
+            <a:schemeClr val="accent1"/>
+          </a:fillRef>
+          <a:effectRef idx="2">
+            <a:schemeClr val="accent1"/>
+          </a:effectRef>
+          <a:fontRef idx="minor">
+            <a:schemeClr val="lt1"/>
+          </a:fontRef>
+        </p:style>
+        <p:txBody>
+          <a:bodyPr rtlCol="0" anchor="ctr"/>
+          <a:lstStyle/>
+          <a:p>
+            <a:pPr algn="ctr"/>
+          </a:p>
+        </p:txBody>
+      </p:sp>
+      <p:sp>
+        <p:nvSpPr>
+          <p:cNvPr id="14" name="TextBox 13"/>
+          <p:cNvSpPr txBox="1"/>
+          <p:nvPr/>
+        </p:nvSpPr>
+        <p:spPr>
+          <a:xfrm>
+            <a:off x="3767328" y="1755648"/>
+            <a:ext cx="2157984" cy="384048"/>
+          </a:xfrm>
+          <a:prstGeom prst="rect">
+            <a:avLst/>
+          </a:prstGeom>
+          <a:noFill/>
+        </p:spPr>
+        <p:txBody>
+          <a:bodyPr wrap="square" lIns="0" rIns="0" tIns="0" bIns="0" anchor="ctr">
+            <a:spAutoFit/>
+          </a:bodyPr>
+          <a:lstStyle/>
+          <a:p>
+            <a:pPr algn="l"/>
+            <a:r>
+              <a:rPr sz="1150" b="0">
+                <a:solidFill>
+                  <a:srgbClr val="A6B0BA"/>
+                </a:solidFill>
+                <a:latin typeface="Calibri"/>
+              </a:rPr>
+              <a:t>AgentCore Memory</a:t>
+            </a:r>
+          </a:p>
+        </p:txBody>
+      </p:sp>
+      <p:sp>
+        <p:nvSpPr>
+          <p:cNvPr id="15" name="Rounded Rectangle 14"/>
+          <p:cNvSpPr/>
+          <p:nvPr/>
+        </p:nvSpPr>
+        <p:spPr>
+          <a:xfrm>
+            <a:off x="6163056" y="1755648"/>
+            <a:ext cx="2670048" cy="384048"/>
+          </a:xfrm>
+          <a:prstGeom prst="roundRect">
+            <a:avLst>
+              <a:gd name="adj" fmla="val 50000"/>
+            </a:avLst>
+          </a:prstGeom>
+          <a:solidFill>
+            <a:srgbClr val="232F3E"/>
+          </a:solidFill>
+          <a:ln>
+            <a:noFill/>
+          </a:ln>
+          <a:effectLst/>
+        </p:spPr>
+        <p:style>
+          <a:lnRef idx="1">
+            <a:schemeClr val="accent1"/>
+          </a:lnRef>
+          <a:fillRef idx="3">
+            <a:schemeClr val="accent1"/>
+          </a:fillRef>
+          <a:effectRef idx="2">
+            <a:schemeClr val="accent1"/>
+          </a:effectRef>
+          <a:fontRef idx="minor">
+            <a:schemeClr val="lt1"/>
+          </a:fontRef>
+        </p:style>
+        <p:txBody>
+          <a:bodyPr rtlCol="0" anchor="ctr"/>
+          <a:lstStyle/>
+          <a:p>
+            <a:pPr algn="ctr"/>
+          </a:p>
+        </p:txBody>
+      </p:sp>
+      <p:sp>
+        <p:nvSpPr>
+          <p:cNvPr id="16" name="Oval 15"/>
+          <p:cNvSpPr/>
+          <p:nvPr/>
+        </p:nvSpPr>
+        <p:spPr>
+          <a:xfrm>
+            <a:off x="6364224" y="1897379"/>
+            <a:ext cx="100584" cy="100584"/>
+          </a:xfrm>
+          <a:prstGeom prst="ellipse">
+            <a:avLst/>
+          </a:prstGeom>
+          <a:solidFill>
+            <a:srgbClr val="FF9900"/>
+          </a:solidFill>
+          <a:ln>
+            <a:noFill/>
+          </a:ln>
+          <a:effectLst/>
+        </p:spPr>
+        <p:style>
+          <a:lnRef idx="1">
+            <a:schemeClr val="accent1"/>
+          </a:lnRef>
+          <a:fillRef idx="3">
+            <a:schemeClr val="accent1"/>
+          </a:fillRef>
+          <a:effectRef idx="2">
+            <a:schemeClr val="accent1"/>
+          </a:effectRef>
+          <a:fontRef idx="minor">
+            <a:schemeClr val="lt1"/>
+          </a:fontRef>
+        </p:style>
+        <p:txBody>
+          <a:bodyPr rtlCol="0" anchor="ctr"/>
+          <a:lstStyle/>
+          <a:p>
+            <a:pPr algn="ctr"/>
+          </a:p>
+        </p:txBody>
+      </p:sp>
+      <p:sp>
+        <p:nvSpPr>
+          <p:cNvPr id="17" name="TextBox 16"/>
+          <p:cNvSpPr txBox="1"/>
+          <p:nvPr/>
+        </p:nvSpPr>
+        <p:spPr>
+          <a:xfrm>
+            <a:off x="6565392" y="1755648"/>
+            <a:ext cx="2157984" cy="384048"/>
+          </a:xfrm>
+          <a:prstGeom prst="rect">
+            <a:avLst/>
+          </a:prstGeom>
+          <a:noFill/>
+        </p:spPr>
+        <p:txBody>
+          <a:bodyPr wrap="square" lIns="0" rIns="0" tIns="0" bIns="0" anchor="ctr">
+            <a:spAutoFit/>
+          </a:bodyPr>
+          <a:lstStyle/>
+          <a:p>
+            <a:pPr algn="l"/>
+            <a:r>
+              <a:rPr sz="1150" b="1">
+                <a:solidFill>
+                  <a:srgbClr val="FFFFFF"/>
+                </a:solidFill>
+                <a:latin typeface="Calibri"/>
+              </a:rPr>
+              <a:t>AgentCore Gateway</a:t>
+            </a:r>
+          </a:p>
+        </p:txBody>
+      </p:sp>
+      <p:sp>
+        <p:nvSpPr>
+          <p:cNvPr id="18" name="Rounded Rectangle 17"/>
+          <p:cNvSpPr/>
+          <p:nvPr/>
+        </p:nvSpPr>
+        <p:spPr>
+          <a:xfrm>
+            <a:off x="8961119" y="1755648"/>
+            <a:ext cx="2670048" cy="384048"/>
+          </a:xfrm>
+          <a:prstGeom prst="roundRect">
+            <a:avLst>
+              <a:gd name="adj" fmla="val 50000"/>
+            </a:avLst>
+          </a:prstGeom>
+          <a:noFill/>
+          <a:ln w="12700">
+            <a:solidFill>
+              <a:srgbClr val="E4E7EA"/>
+            </a:solidFill>
+          </a:ln>
+          <a:effectLst/>
+        </p:spPr>
+        <p:style>
+          <a:lnRef idx="1">
+            <a:schemeClr val="accent1"/>
+          </a:lnRef>
+          <a:fillRef idx="3">
+            <a:schemeClr val="accent1"/>
+          </a:fillRef>
+          <a:effectRef idx="2">
+            <a:schemeClr val="accent1"/>
+          </a:effectRef>
+          <a:fontRef idx="minor">
+            <a:schemeClr val="lt1"/>
+          </a:fontRef>
+        </p:style>
+        <p:txBody>
+          <a:bodyPr rtlCol="0" anchor="ctr"/>
+          <a:lstStyle/>
+          <a:p>
+            <a:pPr algn="ctr"/>
+          </a:p>
+        </p:txBody>
+      </p:sp>
+      <p:sp>
+        <p:nvSpPr>
+          <p:cNvPr id="19" name="TextBox 18"/>
+          <p:cNvSpPr txBox="1"/>
+          <p:nvPr/>
+        </p:nvSpPr>
+        <p:spPr>
+          <a:xfrm>
+            <a:off x="9363455" y="1755648"/>
+            <a:ext cx="2157984" cy="384048"/>
+          </a:xfrm>
+          <a:prstGeom prst="rect">
+            <a:avLst/>
+          </a:prstGeom>
+          <a:noFill/>
+        </p:spPr>
+        <p:txBody>
+          <a:bodyPr wrap="square" lIns="0" rIns="0" tIns="0" bIns="0" anchor="ctr">
+            <a:spAutoFit/>
+          </a:bodyPr>
+          <a:lstStyle/>
+          <a:p>
+            <a:pPr algn="l"/>
+            <a:r>
+              <a:rPr sz="1150" b="0">
+                <a:solidFill>
+                  <a:srgbClr val="A6B0BA"/>
+                </a:solidFill>
+                <a:latin typeface="Calibri"/>
+              </a:rPr>
+              <a:t>AgentCore Observability</a:t>
+            </a:r>
+          </a:p>
+        </p:txBody>
+      </p:sp>
+      <p:sp>
+        <p:nvSpPr>
+          <p:cNvPr id="20" name="Rounded Rectangle 19"/>
+          <p:cNvSpPr/>
+          <p:nvPr/>
+        </p:nvSpPr>
+        <p:spPr>
+          <a:xfrm>
+            <a:off x="566928" y="2395728"/>
+            <a:ext cx="5394960" cy="2468880"/>
+          </a:xfrm>
+          <a:prstGeom prst="roundRect">
+            <a:avLst>
+              <a:gd name="adj" fmla="val 2222"/>
+            </a:avLst>
+          </a:prstGeom>
+          <a:solidFill>
+            <a:srgbClr val="F7F8FA"/>
+          </a:solidFill>
+          <a:ln w="12700">
+            <a:solidFill>
+              <a:srgbClr val="E4E7EA"/>
+            </a:solidFill>
+          </a:ln>
+          <a:effectLst/>
+        </p:spPr>
+        <p:style>
+          <a:lnRef idx="1">
+            <a:schemeClr val="accent1"/>
+          </a:lnRef>
+          <a:fillRef idx="3">
+            <a:schemeClr val="accent1"/>
+          </a:fillRef>
+          <a:effectRef idx="2">
+            <a:schemeClr val="accent1"/>
+          </a:effectRef>
+          <a:fontRef idx="minor">
+            <a:schemeClr val="lt1"/>
+          </a:fontRef>
+        </p:style>
+        <p:txBody>
+          <a:bodyPr rtlCol="0" anchor="ctr"/>
+          <a:lstStyle/>
+          <a:p>
+            <a:pPr algn="ctr"/>
+          </a:p>
+        </p:txBody>
+      </p:sp>
+      <p:sp>
+        <p:nvSpPr>
+          <p:cNvPr id="21" name="Rectangle 20"/>
+          <p:cNvSpPr/>
+          <p:nvPr/>
+        </p:nvSpPr>
+        <p:spPr>
+          <a:xfrm>
+            <a:off x="566928" y="2395728"/>
+            <a:ext cx="5394960" cy="420624"/>
+          </a:xfrm>
+          <a:prstGeom prst="rect">
+            <a:avLst/>
+          </a:prstGeom>
+          <a:solidFill>
+            <a:srgbClr val="545B64"/>
+          </a:solidFill>
+          <a:ln>
+            <a:noFill/>
+          </a:ln>
+          <a:effectLst/>
+        </p:spPr>
+        <p:style>
+          <a:lnRef idx="1">
+            <a:schemeClr val="accent1"/>
+          </a:lnRef>
+          <a:fillRef idx="3">
+            <a:schemeClr val="accent1"/>
+          </a:fillRef>
+          <a:effectRef idx="2">
+            <a:schemeClr val="accent1"/>
+          </a:effectRef>
+          <a:fontRef idx="minor">
+            <a:schemeClr val="lt1"/>
+          </a:fontRef>
+        </p:style>
+        <p:txBody>
+          <a:bodyPr rtlCol="0" anchor="ctr"/>
+          <a:lstStyle/>
+          <a:p>
+            <a:pPr algn="ctr"/>
+          </a:p>
+        </p:txBody>
+      </p:sp>
+      <p:sp>
+        <p:nvSpPr>
+          <p:cNvPr id="22" name="TextBox 21"/>
+          <p:cNvSpPr txBox="1"/>
+          <p:nvPr/>
+        </p:nvSpPr>
+        <p:spPr>
+          <a:xfrm>
+            <a:off x="768096" y="2395728"/>
+            <a:ext cx="4992624" cy="420624"/>
+          </a:xfrm>
+          <a:prstGeom prst="rect">
+            <a:avLst/>
+          </a:prstGeom>
+          <a:noFill/>
+        </p:spPr>
+        <p:txBody>
+          <a:bodyPr wrap="square" lIns="0" rIns="0" tIns="0" bIns="0" anchor="ctr">
+            <a:spAutoFit/>
+          </a:bodyPr>
+          <a:lstStyle/>
+          <a:p>
+            <a:pPr algn="l"/>
+            <a:r>
+              <a:rPr sz="1150" b="1">
+                <a:solidFill>
+                  <a:srgbClr val="FFFFFF"/>
+                </a:solidFill>
+                <a:latin typeface="Calibri"/>
+              </a:rPr>
+              <a:t>ENGINE A · DIY</a:t>
+            </a:r>
+          </a:p>
+        </p:txBody>
+      </p:sp>
+      <p:sp>
+        <p:nvSpPr>
+          <p:cNvPr id="23" name="Oval 22"/>
+          <p:cNvSpPr/>
+          <p:nvPr/>
+        </p:nvSpPr>
+        <p:spPr>
+          <a:xfrm>
+            <a:off x="1801368" y="3108960"/>
+            <a:ext cx="155448" cy="155448"/>
+          </a:xfrm>
+          <a:prstGeom prst="ellipse">
+            <a:avLst/>
+          </a:prstGeom>
+          <a:solidFill>
+            <a:srgbClr val="FF9900"/>
+          </a:solidFill>
+          <a:ln>
+            <a:noFill/>
+          </a:ln>
+          <a:effectLst/>
+        </p:spPr>
+        <p:style>
+          <a:lnRef idx="1">
+            <a:schemeClr val="accent1"/>
+          </a:lnRef>
+          <a:fillRef idx="3">
+            <a:schemeClr val="accent1"/>
+          </a:fillRef>
+          <a:effectRef idx="2">
+            <a:schemeClr val="accent1"/>
+          </a:effectRef>
+          <a:fontRef idx="minor">
+            <a:schemeClr val="lt1"/>
+          </a:fontRef>
+        </p:style>
+        <p:txBody>
+          <a:bodyPr rtlCol="0" anchor="ctr"/>
+          <a:lstStyle/>
+          <a:p>
+            <a:pPr algn="ctr"/>
+          </a:p>
+        </p:txBody>
+      </p:sp>
+      <p:sp>
+        <p:nvSpPr>
+          <p:cNvPr id="24" name="Oval 23"/>
+          <p:cNvSpPr/>
+          <p:nvPr/>
+        </p:nvSpPr>
+        <p:spPr>
+          <a:xfrm>
+            <a:off x="2089404" y="3108960"/>
+            <a:ext cx="155448" cy="155448"/>
+          </a:xfrm>
+          <a:prstGeom prst="ellipse">
+            <a:avLst/>
+          </a:prstGeom>
+          <a:solidFill>
+            <a:srgbClr val="FF9900"/>
+          </a:solidFill>
+          <a:ln>
+            <a:noFill/>
+          </a:ln>
+          <a:effectLst/>
+        </p:spPr>
+        <p:style>
+          <a:lnRef idx="1">
+            <a:schemeClr val="accent1"/>
+          </a:lnRef>
+          <a:fillRef idx="3">
+            <a:schemeClr val="accent1"/>
+          </a:fillRef>
+          <a:effectRef idx="2">
+            <a:schemeClr val="accent1"/>
+          </a:effectRef>
+          <a:fontRef idx="minor">
+            <a:schemeClr val="lt1"/>
+          </a:fontRef>
+        </p:style>
+        <p:txBody>
+          <a:bodyPr rtlCol="0" anchor="ctr"/>
+          <a:lstStyle/>
+          <a:p>
+            <a:pPr algn="ctr"/>
+          </a:p>
+        </p:txBody>
+      </p:sp>
+      <p:sp>
+        <p:nvSpPr>
+          <p:cNvPr id="25" name="Oval 24"/>
+          <p:cNvSpPr/>
+          <p:nvPr/>
+        </p:nvSpPr>
+        <p:spPr>
+          <a:xfrm>
+            <a:off x="2377440" y="3108960"/>
+            <a:ext cx="155448" cy="155448"/>
+          </a:xfrm>
+          <a:prstGeom prst="ellipse">
+            <a:avLst/>
+          </a:prstGeom>
+          <a:solidFill>
+            <a:srgbClr val="FF9900"/>
+          </a:solidFill>
+          <a:ln>
+            <a:noFill/>
+          </a:ln>
+          <a:effectLst/>
+        </p:spPr>
+        <p:style>
+          <a:lnRef idx="1">
+            <a:schemeClr val="accent1"/>
+          </a:lnRef>
+          <a:fillRef idx="3">
+            <a:schemeClr val="accent1"/>
+          </a:fillRef>
+          <a:effectRef idx="2">
+            <a:schemeClr val="accent1"/>
+          </a:effectRef>
+          <a:fontRef idx="minor">
+            <a:schemeClr val="lt1"/>
+          </a:fontRef>
+        </p:style>
+        <p:txBody>
+          <a:bodyPr rtlCol="0" anchor="ctr"/>
+          <a:lstStyle/>
+          <a:p>
+            <a:pPr algn="ctr"/>
+          </a:p>
+        </p:txBody>
+      </p:sp>
+      <p:sp>
+        <p:nvSpPr>
+          <p:cNvPr id="26" name="Oval 25"/>
+          <p:cNvSpPr/>
+          <p:nvPr/>
+        </p:nvSpPr>
+        <p:spPr>
+          <a:xfrm>
+            <a:off x="2665476" y="3108960"/>
+            <a:ext cx="155448" cy="155448"/>
+          </a:xfrm>
+          <a:prstGeom prst="ellipse">
+            <a:avLst/>
+          </a:prstGeom>
+          <a:solidFill>
+            <a:srgbClr val="FF9900"/>
+          </a:solidFill>
+          <a:ln>
+            <a:noFill/>
+          </a:ln>
+          <a:effectLst/>
+        </p:spPr>
+        <p:style>
+          <a:lnRef idx="1">
+            <a:schemeClr val="accent1"/>
+          </a:lnRef>
+          <a:fillRef idx="3">
+            <a:schemeClr val="accent1"/>
+          </a:fillRef>
+          <a:effectRef idx="2">
+            <a:schemeClr val="accent1"/>
+          </a:effectRef>
+          <a:fontRef idx="minor">
+            <a:schemeClr val="lt1"/>
+          </a:fontRef>
+        </p:style>
+        <p:txBody>
+          <a:bodyPr rtlCol="0" anchor="ctr"/>
+          <a:lstStyle/>
+          <a:p>
+            <a:pPr algn="ctr"/>
+          </a:p>
+        </p:txBody>
+      </p:sp>
+      <p:sp>
+        <p:nvSpPr>
+          <p:cNvPr id="27" name="Oval 26"/>
+          <p:cNvSpPr/>
+          <p:nvPr/>
+        </p:nvSpPr>
+        <p:spPr>
+          <a:xfrm>
+            <a:off x="2953512" y="3108960"/>
+            <a:ext cx="155448" cy="155448"/>
+          </a:xfrm>
+          <a:prstGeom prst="ellipse">
+            <a:avLst/>
+          </a:prstGeom>
+          <a:solidFill>
+            <a:srgbClr val="FF9900"/>
+          </a:solidFill>
+          <a:ln>
+            <a:noFill/>
+          </a:ln>
+          <a:effectLst/>
+        </p:spPr>
+        <p:style>
+          <a:lnRef idx="1">
+            <a:schemeClr val="accent1"/>
+          </a:lnRef>
+          <a:fillRef idx="3">
+            <a:schemeClr val="accent1"/>
+          </a:fillRef>
+          <a:effectRef idx="2">
+            <a:schemeClr val="accent1"/>
+          </a:effectRef>
+          <a:fontRef idx="minor">
+            <a:schemeClr val="lt1"/>
+          </a:fontRef>
+        </p:style>
+        <p:txBody>
+          <a:bodyPr rtlCol="0" anchor="ctr"/>
+          <a:lstStyle/>
+          <a:p>
+            <a:pPr algn="ctr"/>
+          </a:p>
+        </p:txBody>
+      </p:sp>
+      <p:sp>
+        <p:nvSpPr>
+          <p:cNvPr id="28" name="Oval 27"/>
+          <p:cNvSpPr/>
+          <p:nvPr/>
+        </p:nvSpPr>
+        <p:spPr>
+          <a:xfrm>
+            <a:off x="3241548" y="3108960"/>
+            <a:ext cx="155448" cy="155448"/>
+          </a:xfrm>
+          <a:prstGeom prst="ellipse">
+            <a:avLst/>
+          </a:prstGeom>
+          <a:solidFill>
+            <a:srgbClr val="FF9900"/>
+          </a:solidFill>
+          <a:ln>
+            <a:noFill/>
+          </a:ln>
+          <a:effectLst/>
+        </p:spPr>
+        <p:style>
+          <a:lnRef idx="1">
+            <a:schemeClr val="accent1"/>
+          </a:lnRef>
+          <a:fillRef idx="3">
+            <a:schemeClr val="accent1"/>
+          </a:fillRef>
+          <a:effectRef idx="2">
+            <a:schemeClr val="accent1"/>
+          </a:effectRef>
+          <a:fontRef idx="minor">
+            <a:schemeClr val="lt1"/>
+          </a:fontRef>
+        </p:style>
+        <p:txBody>
+          <a:bodyPr rtlCol="0" anchor="ctr"/>
+          <a:lstStyle/>
+          <a:p>
+            <a:pPr algn="ctr"/>
+          </a:p>
+        </p:txBody>
+      </p:sp>
+      <p:sp>
+        <p:nvSpPr>
+          <p:cNvPr id="29" name="Oval 28"/>
+          <p:cNvSpPr/>
+          <p:nvPr/>
+        </p:nvSpPr>
+        <p:spPr>
+          <a:xfrm>
+            <a:off x="3529584" y="3108960"/>
+            <a:ext cx="155448" cy="155448"/>
+          </a:xfrm>
+          <a:prstGeom prst="ellipse">
+            <a:avLst/>
+          </a:prstGeom>
+          <a:solidFill>
+            <a:srgbClr val="FF9900"/>
+          </a:solidFill>
+          <a:ln>
+            <a:noFill/>
+          </a:ln>
+          <a:effectLst/>
+        </p:spPr>
+        <p:style>
+          <a:lnRef idx="1">
+            <a:schemeClr val="accent1"/>
+          </a:lnRef>
+          <a:fillRef idx="3">
+            <a:schemeClr val="accent1"/>
+          </a:fillRef>
+          <a:effectRef idx="2">
+            <a:schemeClr val="accent1"/>
+          </a:effectRef>
+          <a:fontRef idx="minor">
+            <a:schemeClr val="lt1"/>
+          </a:fontRef>
+        </p:style>
+        <p:txBody>
+          <a:bodyPr rtlCol="0" anchor="ctr"/>
+          <a:lstStyle/>
+          <a:p>
+            <a:pPr algn="ctr"/>
+          </a:p>
+        </p:txBody>
+      </p:sp>
+      <p:sp>
+        <p:nvSpPr>
+          <p:cNvPr id="30" name="Oval 29"/>
+          <p:cNvSpPr/>
+          <p:nvPr/>
+        </p:nvSpPr>
+        <p:spPr>
+          <a:xfrm>
+            <a:off x="3817620" y="3108960"/>
+            <a:ext cx="155448" cy="155448"/>
+          </a:xfrm>
+          <a:prstGeom prst="ellipse">
+            <a:avLst/>
+          </a:prstGeom>
+          <a:solidFill>
+            <a:srgbClr val="FF9900"/>
+          </a:solidFill>
+          <a:ln>
+            <a:noFill/>
+          </a:ln>
+          <a:effectLst/>
+        </p:spPr>
+        <p:style>
+          <a:lnRef idx="1">
+            <a:schemeClr val="accent1"/>
+          </a:lnRef>
+          <a:fillRef idx="3">
+            <a:schemeClr val="accent1"/>
+          </a:fillRef>
+          <a:effectRef idx="2">
+            <a:schemeClr val="accent1"/>
+          </a:effectRef>
+          <a:fontRef idx="minor">
+            <a:schemeClr val="lt1"/>
+          </a:fontRef>
+        </p:style>
+        <p:txBody>
+          <a:bodyPr rtlCol="0" anchor="ctr"/>
+          <a:lstStyle/>
+          <a:p>
+            <a:pPr algn="ctr"/>
+          </a:p>
+        </p:txBody>
+      </p:sp>
+      <p:sp>
+        <p:nvSpPr>
+          <p:cNvPr id="31" name="Oval 30"/>
+          <p:cNvSpPr/>
+          <p:nvPr/>
+        </p:nvSpPr>
+        <p:spPr>
+          <a:xfrm>
+            <a:off x="4105656" y="3108960"/>
+            <a:ext cx="155448" cy="155448"/>
+          </a:xfrm>
+          <a:prstGeom prst="ellipse">
+            <a:avLst/>
+          </a:prstGeom>
+          <a:solidFill>
+            <a:srgbClr val="FF9900"/>
+          </a:solidFill>
+          <a:ln>
+            <a:noFill/>
+          </a:ln>
+          <a:effectLst/>
+        </p:spPr>
+        <p:style>
+          <a:lnRef idx="1">
+            <a:schemeClr val="accent1"/>
+          </a:lnRef>
+          <a:fillRef idx="3">
+            <a:schemeClr val="accent1"/>
+          </a:fillRef>
+          <a:effectRef idx="2">
+            <a:schemeClr val="accent1"/>
+          </a:effectRef>
+          <a:fontRef idx="minor">
+            <a:schemeClr val="lt1"/>
+          </a:fontRef>
+        </p:style>
+        <p:txBody>
+          <a:bodyPr rtlCol="0" anchor="ctr"/>
+          <a:lstStyle/>
+          <a:p>
+            <a:pPr algn="ctr"/>
+          </a:p>
+        </p:txBody>
+      </p:sp>
+      <p:sp>
+        <p:nvSpPr>
+          <p:cNvPr id="32" name="Oval 31"/>
+          <p:cNvSpPr/>
+          <p:nvPr/>
+        </p:nvSpPr>
+        <p:spPr>
+          <a:xfrm>
+            <a:off x="4393692" y="3108960"/>
+            <a:ext cx="155448" cy="155448"/>
+          </a:xfrm>
+          <a:prstGeom prst="ellipse">
+            <a:avLst/>
+          </a:prstGeom>
+          <a:solidFill>
+            <a:srgbClr val="FF9900"/>
+          </a:solidFill>
+          <a:ln>
+            <a:noFill/>
+          </a:ln>
+          <a:effectLst/>
+        </p:spPr>
+        <p:style>
+          <a:lnRef idx="1">
+            <a:schemeClr val="accent1"/>
+          </a:lnRef>
+          <a:fillRef idx="3">
+            <a:schemeClr val="accent1"/>
+          </a:fillRef>
+          <a:effectRef idx="2">
+            <a:schemeClr val="accent1"/>
+          </a:effectRef>
+          <a:fontRef idx="minor">
+            <a:schemeClr val="lt1"/>
+          </a:fontRef>
+        </p:style>
+        <p:txBody>
+          <a:bodyPr rtlCol="0" anchor="ctr"/>
+          <a:lstStyle/>
+          <a:p>
+            <a:pPr algn="ctr"/>
+          </a:p>
+        </p:txBody>
+      </p:sp>
+      <p:sp>
+        <p:nvSpPr>
+          <p:cNvPr id="33" name="Oval 32"/>
+          <p:cNvSpPr/>
+          <p:nvPr/>
+        </p:nvSpPr>
+        <p:spPr>
+          <a:xfrm>
+            <a:off x="1801368" y="3383280"/>
+            <a:ext cx="155448" cy="155448"/>
+          </a:xfrm>
+          <a:prstGeom prst="ellipse">
+            <a:avLst/>
+          </a:prstGeom>
+          <a:solidFill>
+            <a:srgbClr val="FF9900"/>
+          </a:solidFill>
+          <a:ln>
+            <a:noFill/>
+          </a:ln>
+          <a:effectLst/>
+        </p:spPr>
+        <p:style>
+          <a:lnRef idx="1">
+            <a:schemeClr val="accent1"/>
+          </a:lnRef>
+          <a:fillRef idx="3">
+            <a:schemeClr val="accent1"/>
+          </a:fillRef>
+          <a:effectRef idx="2">
+            <a:schemeClr val="accent1"/>
+          </a:effectRef>
+          <a:fontRef idx="minor">
+            <a:schemeClr val="lt1"/>
+          </a:fontRef>
+        </p:style>
+        <p:txBody>
+          <a:bodyPr rtlCol="0" anchor="ctr"/>
+          <a:lstStyle/>
+          <a:p>
+            <a:pPr algn="ctr"/>
+          </a:p>
+        </p:txBody>
+      </p:sp>
+      <p:sp>
+        <p:nvSpPr>
+          <p:cNvPr id="34" name="Oval 33"/>
+          <p:cNvSpPr/>
+          <p:nvPr/>
+        </p:nvSpPr>
+        <p:spPr>
+          <a:xfrm>
+            <a:off x="2089404" y="3383280"/>
+            <a:ext cx="155448" cy="155448"/>
+          </a:xfrm>
+          <a:prstGeom prst="ellipse">
+            <a:avLst/>
+          </a:prstGeom>
+          <a:solidFill>
+            <a:srgbClr val="FF9900"/>
+          </a:solidFill>
+          <a:ln>
+            <a:noFill/>
+          </a:ln>
+          <a:effectLst/>
+        </p:spPr>
+        <p:style>
+          <a:lnRef idx="1">
+            <a:schemeClr val="accent1"/>
+          </a:lnRef>
+          <a:fillRef idx="3">
+            <a:schemeClr val="accent1"/>
+          </a:fillRef>
+          <a:effectRef idx="2">
+            <a:schemeClr val="accent1"/>
+          </a:effectRef>
+          <a:fontRef idx="minor">
+            <a:schemeClr val="lt1"/>
+          </a:fontRef>
+        </p:style>
+        <p:txBody>
+          <a:bodyPr rtlCol="0" anchor="ctr"/>
+          <a:lstStyle/>
+          <a:p>
+            <a:pPr algn="ctr"/>
+          </a:p>
+        </p:txBody>
+      </p:sp>
+      <p:sp>
+        <p:nvSpPr>
+          <p:cNvPr id="35" name="Oval 34"/>
+          <p:cNvSpPr/>
+          <p:nvPr/>
+        </p:nvSpPr>
+        <p:spPr>
+          <a:xfrm>
+            <a:off x="2377440" y="3383280"/>
+            <a:ext cx="155448" cy="155448"/>
+          </a:xfrm>
+          <a:prstGeom prst="ellipse">
+            <a:avLst/>
+          </a:prstGeom>
+          <a:solidFill>
+            <a:srgbClr val="FF9900"/>
+          </a:solidFill>
+          <a:ln>
+            <a:noFill/>
+          </a:ln>
+          <a:effectLst/>
+        </p:spPr>
+        <p:style>
+          <a:lnRef idx="1">
+            <a:schemeClr val="accent1"/>
+          </a:lnRef>
+          <a:fillRef idx="3">
+            <a:schemeClr val="accent1"/>
+          </a:fillRef>
+          <a:effectRef idx="2">
+            <a:schemeClr val="accent1"/>
+          </a:effectRef>
+          <a:fontRef idx="minor">
+            <a:schemeClr val="lt1"/>
+          </a:fontRef>
+        </p:style>
+        <p:txBody>
+          <a:bodyPr rtlCol="0" anchor="ctr"/>
+          <a:lstStyle/>
+          <a:p>
+            <a:pPr algn="ctr"/>
+          </a:p>
+        </p:txBody>
+      </p:sp>
+      <p:sp>
+        <p:nvSpPr>
+          <p:cNvPr id="36" name="Oval 35"/>
+          <p:cNvSpPr/>
+          <p:nvPr/>
+        </p:nvSpPr>
+        <p:spPr>
+          <a:xfrm>
+            <a:off x="2665476" y="3383280"/>
+            <a:ext cx="155448" cy="155448"/>
+          </a:xfrm>
+          <a:prstGeom prst="ellipse">
+            <a:avLst/>
+          </a:prstGeom>
+          <a:solidFill>
+            <a:srgbClr val="FF9900"/>
+          </a:solidFill>
+          <a:ln>
+            <a:noFill/>
+          </a:ln>
+          <a:effectLst/>
+        </p:spPr>
+        <p:style>
+          <a:lnRef idx="1">
+            <a:schemeClr val="accent1"/>
+          </a:lnRef>
+          <a:fillRef idx="3">
+            <a:schemeClr val="accent1"/>
+          </a:fillRef>
+          <a:effectRef idx="2">
+            <a:schemeClr val="accent1"/>
+          </a:effectRef>
+          <a:fontRef idx="minor">
+            <a:schemeClr val="lt1"/>
+          </a:fontRef>
+        </p:style>
+        <p:txBody>
+          <a:bodyPr rtlCol="0" anchor="ctr"/>
+          <a:lstStyle/>
+          <a:p>
+            <a:pPr algn="ctr"/>
+          </a:p>
+        </p:txBody>
+      </p:sp>
+      <p:sp>
+        <p:nvSpPr>
+          <p:cNvPr id="37" name="Oval 36"/>
+          <p:cNvSpPr/>
+          <p:nvPr/>
+        </p:nvSpPr>
+        <p:spPr>
+          <a:xfrm>
+            <a:off x="2953512" y="3383280"/>
+            <a:ext cx="155448" cy="155448"/>
+          </a:xfrm>
+          <a:prstGeom prst="ellipse">
+            <a:avLst/>
+          </a:prstGeom>
+          <a:solidFill>
+            <a:srgbClr val="FF9900"/>
+          </a:solidFill>
+          <a:ln>
+            <a:noFill/>
+          </a:ln>
+          <a:effectLst/>
+        </p:spPr>
+        <p:style>
+          <a:lnRef idx="1">
+            <a:schemeClr val="accent1"/>
+          </a:lnRef>
+          <a:fillRef idx="3">
+            <a:schemeClr val="accent1"/>
+          </a:fillRef>
+          <a:effectRef idx="2">
+            <a:schemeClr val="accent1"/>
+          </a:effectRef>
+          <a:fontRef idx="minor">
+            <a:schemeClr val="lt1"/>
+          </a:fontRef>
+        </p:style>
+        <p:txBody>
+          <a:bodyPr rtlCol="0" anchor="ctr"/>
+          <a:lstStyle/>
+          <a:p>
+            <a:pPr algn="ctr"/>
+          </a:p>
+        </p:txBody>
+      </p:sp>
+      <p:sp>
+        <p:nvSpPr>
+          <p:cNvPr id="38" name="Oval 37"/>
+          <p:cNvSpPr/>
+          <p:nvPr/>
+        </p:nvSpPr>
+        <p:spPr>
+          <a:xfrm>
+            <a:off x="3241548" y="3383280"/>
+            <a:ext cx="155448" cy="155448"/>
+          </a:xfrm>
+          <a:prstGeom prst="ellipse">
+            <a:avLst/>
+          </a:prstGeom>
+          <a:solidFill>
+            <a:srgbClr val="FF9900"/>
+          </a:solidFill>
+          <a:ln>
+            <a:noFill/>
+          </a:ln>
+          <a:effectLst/>
+        </p:spPr>
+        <p:style>
+          <a:lnRef idx="1">
+            <a:schemeClr val="accent1"/>
+          </a:lnRef>
+          <a:fillRef idx="3">
+            <a:schemeClr val="accent1"/>
+          </a:fillRef>
+          <a:effectRef idx="2">
+            <a:schemeClr val="accent1"/>
+          </a:effectRef>
+          <a:fontRef idx="minor">
+            <a:schemeClr val="lt1"/>
+          </a:fontRef>
+        </p:style>
+        <p:txBody>
+          <a:bodyPr rtlCol="0" anchor="ctr"/>
+          <a:lstStyle/>
+          <a:p>
+            <a:pPr algn="ctr"/>
+          </a:p>
+        </p:txBody>
+      </p:sp>
+      <p:sp>
+        <p:nvSpPr>
+          <p:cNvPr id="39" name="Oval 38"/>
+          <p:cNvSpPr/>
+          <p:nvPr/>
+        </p:nvSpPr>
+        <p:spPr>
+          <a:xfrm>
+            <a:off x="3529584" y="3383280"/>
+            <a:ext cx="155448" cy="155448"/>
+          </a:xfrm>
+          <a:prstGeom prst="ellipse">
+            <a:avLst/>
+          </a:prstGeom>
+          <a:solidFill>
+            <a:srgbClr val="FF9900"/>
+          </a:solidFill>
+          <a:ln>
+            <a:noFill/>
+          </a:ln>
+          <a:effectLst/>
+        </p:spPr>
+        <p:style>
+          <a:lnRef idx="1">
+            <a:schemeClr val="accent1"/>
+          </a:lnRef>
+          <a:fillRef idx="3">
+            <a:schemeClr val="accent1"/>
+          </a:fillRef>
+          <a:effectRef idx="2">
+            <a:schemeClr val="accent1"/>
+          </a:effectRef>
+          <a:fontRef idx="minor">
+            <a:schemeClr val="lt1"/>
+          </a:fontRef>
+        </p:style>
+        <p:txBody>
+          <a:bodyPr rtlCol="0" anchor="ctr"/>
+          <a:lstStyle/>
+          <a:p>
+            <a:pPr algn="ctr"/>
+          </a:p>
+        </p:txBody>
+      </p:sp>
+      <p:sp>
+        <p:nvSpPr>
+          <p:cNvPr id="40" name="Oval 39"/>
+          <p:cNvSpPr/>
+          <p:nvPr/>
+        </p:nvSpPr>
+        <p:spPr>
+          <a:xfrm>
+            <a:off x="3817620" y="3383280"/>
+            <a:ext cx="155448" cy="155448"/>
+          </a:xfrm>
+          <a:prstGeom prst="ellipse">
+            <a:avLst/>
+          </a:prstGeom>
+          <a:solidFill>
+            <a:srgbClr val="FF9900"/>
+          </a:solidFill>
+          <a:ln>
+            <a:noFill/>
+          </a:ln>
+          <a:effectLst/>
+        </p:spPr>
+        <p:style>
+          <a:lnRef idx="1">
+            <a:schemeClr val="accent1"/>
+          </a:lnRef>
+          <a:fillRef idx="3">
+            <a:schemeClr val="accent1"/>
+          </a:fillRef>
+          <a:effectRef idx="2">
+            <a:schemeClr val="accent1"/>
+          </a:effectRef>
+          <a:fontRef idx="minor">
+            <a:schemeClr val="lt1"/>
+          </a:fontRef>
+        </p:style>
+        <p:txBody>
+          <a:bodyPr rtlCol="0" anchor="ctr"/>
+          <a:lstStyle/>
+          <a:p>
+            <a:pPr algn="ctr"/>
+          </a:p>
+        </p:txBody>
+      </p:sp>
+      <p:sp>
+        <p:nvSpPr>
+          <p:cNvPr id="41" name="Oval 40"/>
+          <p:cNvSpPr/>
+          <p:nvPr/>
+        </p:nvSpPr>
+        <p:spPr>
+          <a:xfrm>
+            <a:off x="4105656" y="3383280"/>
+            <a:ext cx="155448" cy="155448"/>
+          </a:xfrm>
+          <a:prstGeom prst="ellipse">
+            <a:avLst/>
+          </a:prstGeom>
+          <a:solidFill>
+            <a:srgbClr val="FF9900"/>
+          </a:solidFill>
+          <a:ln>
+            <a:noFill/>
+          </a:ln>
+          <a:effectLst/>
+        </p:spPr>
+        <p:style>
+          <a:lnRef idx="1">
+            <a:schemeClr val="accent1"/>
+          </a:lnRef>
+          <a:fillRef idx="3">
+            <a:schemeClr val="accent1"/>
+          </a:fillRef>
+          <a:effectRef idx="2">
+            <a:schemeClr val="accent1"/>
+          </a:effectRef>
+          <a:fontRef idx="minor">
+            <a:schemeClr val="lt1"/>
+          </a:fontRef>
+        </p:style>
+        <p:txBody>
+          <a:bodyPr rtlCol="0" anchor="ctr"/>
+          <a:lstStyle/>
+          <a:p>
+            <a:pPr algn="ctr"/>
+          </a:p>
+        </p:txBody>
+      </p:sp>
+      <p:sp>
+        <p:nvSpPr>
+          <p:cNvPr id="42" name="Oval 41"/>
+          <p:cNvSpPr/>
+          <p:nvPr/>
+        </p:nvSpPr>
+        <p:spPr>
+          <a:xfrm>
+            <a:off x="4393692" y="3383280"/>
+            <a:ext cx="155448" cy="155448"/>
+          </a:xfrm>
+          <a:prstGeom prst="ellipse">
+            <a:avLst/>
+          </a:prstGeom>
+          <a:solidFill>
+            <a:srgbClr val="FF9900"/>
+          </a:solidFill>
+          <a:ln>
+            <a:noFill/>
+          </a:ln>
+          <a:effectLst/>
+        </p:spPr>
+        <p:style>
+          <a:lnRef idx="1">
+            <a:schemeClr val="accent1"/>
+          </a:lnRef>
+          <a:fillRef idx="3">
+            <a:schemeClr val="accent1"/>
+          </a:fillRef>
+          <a:effectRef idx="2">
+            <a:schemeClr val="accent1"/>
+          </a:effectRef>
+          <a:fontRef idx="minor">
+            <a:schemeClr val="lt1"/>
+          </a:fontRef>
+        </p:style>
+        <p:txBody>
+          <a:bodyPr rtlCol="0" anchor="ctr"/>
+          <a:lstStyle/>
+          <a:p>
+            <a:pPr algn="ctr"/>
+          </a:p>
+        </p:txBody>
+      </p:sp>
+      <p:sp>
+        <p:nvSpPr>
+          <p:cNvPr id="43" name="Oval 42"/>
+          <p:cNvSpPr/>
+          <p:nvPr/>
+        </p:nvSpPr>
+        <p:spPr>
+          <a:xfrm>
+            <a:off x="1801368" y="3657600"/>
+            <a:ext cx="155448" cy="155448"/>
+          </a:xfrm>
+          <a:prstGeom prst="ellipse">
+            <a:avLst/>
+          </a:prstGeom>
+          <a:solidFill>
+            <a:srgbClr val="FF9900"/>
+          </a:solidFill>
+          <a:ln>
+            <a:noFill/>
+          </a:ln>
+          <a:effectLst/>
+        </p:spPr>
+        <p:style>
+          <a:lnRef idx="1">
+            <a:schemeClr val="accent1"/>
+          </a:lnRef>
+          <a:fillRef idx="3">
+            <a:schemeClr val="accent1"/>
+          </a:fillRef>
+          <a:effectRef idx="2">
+            <a:schemeClr val="accent1"/>
+          </a:effectRef>
+          <a:fontRef idx="minor">
+            <a:schemeClr val="lt1"/>
+          </a:fontRef>
+        </p:style>
+        <p:txBody>
+          <a:bodyPr rtlCol="0" anchor="ctr"/>
+          <a:lstStyle/>
+          <a:p>
+            <a:pPr algn="ctr"/>
+          </a:p>
+        </p:txBody>
+      </p:sp>
+      <p:sp>
+        <p:nvSpPr>
+          <p:cNvPr id="44" name="Oval 43"/>
+          <p:cNvSpPr/>
+          <p:nvPr/>
+        </p:nvSpPr>
+        <p:spPr>
+          <a:xfrm>
+            <a:off x="2089404" y="3657600"/>
+            <a:ext cx="155448" cy="155448"/>
+          </a:xfrm>
+          <a:prstGeom prst="ellipse">
+            <a:avLst/>
+          </a:prstGeom>
+          <a:solidFill>
+            <a:srgbClr val="FF9900"/>
+          </a:solidFill>
+          <a:ln>
+            <a:noFill/>
+          </a:ln>
+          <a:effectLst/>
+        </p:spPr>
+        <p:style>
+          <a:lnRef idx="1">
+            <a:schemeClr val="accent1"/>
+          </a:lnRef>
+          <a:fillRef idx="3">
+            <a:schemeClr val="accent1"/>
+          </a:fillRef>
+          <a:effectRef idx="2">
+            <a:schemeClr val="accent1"/>
+          </a:effectRef>
+          <a:fontRef idx="minor">
+            <a:schemeClr val="lt1"/>
+          </a:fontRef>
+        </p:style>
+        <p:txBody>
+          <a:bodyPr rtlCol="0" anchor="ctr"/>
+          <a:lstStyle/>
+          <a:p>
+            <a:pPr algn="ctr"/>
+          </a:p>
+        </p:txBody>
+      </p:sp>
+      <p:sp>
+        <p:nvSpPr>
+          <p:cNvPr id="45" name="Oval 44"/>
+          <p:cNvSpPr/>
+          <p:nvPr/>
+        </p:nvSpPr>
+        <p:spPr>
+          <a:xfrm>
+            <a:off x="2377440" y="3657600"/>
+            <a:ext cx="155448" cy="155448"/>
+          </a:xfrm>
+          <a:prstGeom prst="ellipse">
+            <a:avLst/>
+          </a:prstGeom>
+          <a:solidFill>
+            <a:srgbClr val="FF9900"/>
+          </a:solidFill>
+          <a:ln>
+            <a:noFill/>
+          </a:ln>
+          <a:effectLst/>
+        </p:spPr>
+        <p:style>
+          <a:lnRef idx="1">
+            <a:schemeClr val="accent1"/>
+          </a:lnRef>
+          <a:fillRef idx="3">
+            <a:schemeClr val="accent1"/>
+          </a:fillRef>
+          <a:effectRef idx="2">
+            <a:schemeClr val="accent1"/>
+          </a:effectRef>
+          <a:fontRef idx="minor">
+            <a:schemeClr val="lt1"/>
+          </a:fontRef>
+        </p:style>
+        <p:txBody>
+          <a:bodyPr rtlCol="0" anchor="ctr"/>
+          <a:lstStyle/>
+          <a:p>
+            <a:pPr algn="ctr"/>
+          </a:p>
+        </p:txBody>
+      </p:sp>
+      <p:sp>
+        <p:nvSpPr>
+          <p:cNvPr id="46" name="Oval 45"/>
+          <p:cNvSpPr/>
+          <p:nvPr/>
+        </p:nvSpPr>
+        <p:spPr>
+          <a:xfrm>
+            <a:off x="2665476" y="3657600"/>
+            <a:ext cx="155448" cy="155448"/>
+          </a:xfrm>
+          <a:prstGeom prst="ellipse">
+            <a:avLst/>
+          </a:prstGeom>
+          <a:solidFill>
+            <a:srgbClr val="FF9900"/>
+          </a:solidFill>
+          <a:ln>
+            <a:noFill/>
+          </a:ln>
+          <a:effectLst/>
+        </p:spPr>
+        <p:style>
+          <a:lnRef idx="1">
+            <a:schemeClr val="accent1"/>
+          </a:lnRef>
+          <a:fillRef idx="3">
+            <a:schemeClr val="accent1"/>
+          </a:fillRef>
+          <a:effectRef idx="2">
+            <a:schemeClr val="accent1"/>
+          </a:effectRef>
+          <a:fontRef idx="minor">
+            <a:schemeClr val="lt1"/>
+          </a:fontRef>
+        </p:style>
+        <p:txBody>
+          <a:bodyPr rtlCol="0" anchor="ctr"/>
+          <a:lstStyle/>
+          <a:p>
+            <a:pPr algn="ctr"/>
+          </a:p>
+        </p:txBody>
+      </p:sp>
+      <p:sp>
+        <p:nvSpPr>
+          <p:cNvPr id="47" name="Oval 46"/>
+          <p:cNvSpPr/>
+          <p:nvPr/>
+        </p:nvSpPr>
+        <p:spPr>
+          <a:xfrm>
+            <a:off x="2953512" y="3657600"/>
+            <a:ext cx="155448" cy="155448"/>
+          </a:xfrm>
+          <a:prstGeom prst="ellipse">
+            <a:avLst/>
+          </a:prstGeom>
+          <a:solidFill>
+            <a:srgbClr val="FF9900"/>
+          </a:solidFill>
+          <a:ln>
+            <a:noFill/>
+          </a:ln>
+          <a:effectLst/>
+        </p:spPr>
+        <p:style>
+          <a:lnRef idx="1">
+            <a:schemeClr val="accent1"/>
+          </a:lnRef>
+          <a:fillRef idx="3">
+            <a:schemeClr val="accent1"/>
+          </a:fillRef>
+          <a:effectRef idx="2">
+            <a:schemeClr val="accent1"/>
+          </a:effectRef>
+          <a:fontRef idx="minor">
+            <a:schemeClr val="lt1"/>
+          </a:fontRef>
+        </p:style>
+        <p:txBody>
+          <a:bodyPr rtlCol="0" anchor="ctr"/>
+          <a:lstStyle/>
+          <a:p>
+            <a:pPr algn="ctr"/>
+          </a:p>
+        </p:txBody>
+      </p:sp>
+      <p:sp>
+        <p:nvSpPr>
+          <p:cNvPr id="48" name="Oval 47"/>
+          <p:cNvSpPr/>
+          <p:nvPr/>
+        </p:nvSpPr>
+        <p:spPr>
+          <a:xfrm>
+            <a:off x="3241548" y="3657600"/>
+            <a:ext cx="155448" cy="155448"/>
+          </a:xfrm>
+          <a:prstGeom prst="ellipse">
+            <a:avLst/>
+          </a:prstGeom>
+          <a:solidFill>
+            <a:srgbClr val="FF9900"/>
+          </a:solidFill>
+          <a:ln>
+            <a:noFill/>
+          </a:ln>
+          <a:effectLst/>
+        </p:spPr>
+        <p:style>
+          <a:lnRef idx="1">
+            <a:schemeClr val="accent1"/>
+          </a:lnRef>
+          <a:fillRef idx="3">
+            <a:schemeClr val="accent1"/>
+          </a:fillRef>
+          <a:effectRef idx="2">
+            <a:schemeClr val="accent1"/>
+          </a:effectRef>
+          <a:fontRef idx="minor">
+            <a:schemeClr val="lt1"/>
+          </a:fontRef>
+        </p:style>
+        <p:txBody>
+          <a:bodyPr rtlCol="0" anchor="ctr"/>
+          <a:lstStyle/>
+          <a:p>
+            <a:pPr algn="ctr"/>
+          </a:p>
+        </p:txBody>
+      </p:sp>
+      <p:sp>
+        <p:nvSpPr>
+          <p:cNvPr id="49" name="Oval 48"/>
+          <p:cNvSpPr/>
+          <p:nvPr/>
+        </p:nvSpPr>
+        <p:spPr>
+          <a:xfrm>
+            <a:off x="3529584" y="3657600"/>
+            <a:ext cx="155448" cy="155448"/>
+          </a:xfrm>
+          <a:prstGeom prst="ellipse">
+            <a:avLst/>
+          </a:prstGeom>
+          <a:solidFill>
+            <a:srgbClr val="FF9900"/>
+          </a:solidFill>
+          <a:ln>
+            <a:noFill/>
+          </a:ln>
+          <a:effectLst/>
+        </p:spPr>
+        <p:style>
+          <a:lnRef idx="1">
+            <a:schemeClr val="accent1"/>
+          </a:lnRef>
+          <a:fillRef idx="3">
+            <a:schemeClr val="accent1"/>
+          </a:fillRef>
+          <a:effectRef idx="2">
+            <a:schemeClr val="accent1"/>
+          </a:effectRef>
+          <a:fontRef idx="minor">
+            <a:schemeClr val="lt1"/>
+          </a:fontRef>
+        </p:style>
+        <p:txBody>
+          <a:bodyPr rtlCol="0" anchor="ctr"/>
+          <a:lstStyle/>
+          <a:p>
+            <a:pPr algn="ctr"/>
+          </a:p>
+        </p:txBody>
+      </p:sp>
+      <p:sp>
+        <p:nvSpPr>
+          <p:cNvPr id="50" name="Oval 49"/>
+          <p:cNvSpPr/>
+          <p:nvPr/>
+        </p:nvSpPr>
+        <p:spPr>
+          <a:xfrm>
+            <a:off x="3817620" y="3657600"/>
+            <a:ext cx="155448" cy="155448"/>
+          </a:xfrm>
+          <a:prstGeom prst="ellipse">
+            <a:avLst/>
+          </a:prstGeom>
+          <a:solidFill>
+            <a:srgbClr val="FF9900"/>
+          </a:solidFill>
+          <a:ln>
+            <a:noFill/>
+          </a:ln>
+          <a:effectLst/>
+        </p:spPr>
+        <p:style>
+          <a:lnRef idx="1">
+            <a:schemeClr val="accent1"/>
+          </a:lnRef>
+          <a:fillRef idx="3">
+            <a:schemeClr val="accent1"/>
+          </a:fillRef>
+          <a:effectRef idx="2">
+            <a:schemeClr val="accent1"/>
+          </a:effectRef>
+          <a:fontRef idx="minor">
+            <a:schemeClr val="lt1"/>
+          </a:fontRef>
+        </p:style>
+        <p:txBody>
+          <a:bodyPr rtlCol="0" anchor="ctr"/>
+          <a:lstStyle/>
+          <a:p>
+            <a:pPr algn="ctr"/>
+          </a:p>
+        </p:txBody>
+      </p:sp>
+      <p:sp>
+        <p:nvSpPr>
+          <p:cNvPr id="51" name="Oval 50"/>
+          <p:cNvSpPr/>
+          <p:nvPr/>
+        </p:nvSpPr>
+        <p:spPr>
+          <a:xfrm>
+            <a:off x="4105656" y="3657600"/>
+            <a:ext cx="155448" cy="155448"/>
+          </a:xfrm>
+          <a:prstGeom prst="ellipse">
+            <a:avLst/>
+          </a:prstGeom>
+          <a:solidFill>
+            <a:srgbClr val="FF9900"/>
+          </a:solidFill>
+          <a:ln>
+            <a:noFill/>
+          </a:ln>
+          <a:effectLst/>
+        </p:spPr>
+        <p:style>
+          <a:lnRef idx="1">
+            <a:schemeClr val="accent1"/>
+          </a:lnRef>
+          <a:fillRef idx="3">
+            <a:schemeClr val="accent1"/>
+          </a:fillRef>
+          <a:effectRef idx="2">
+            <a:schemeClr val="accent1"/>
+          </a:effectRef>
+          <a:fontRef idx="minor">
+            <a:schemeClr val="lt1"/>
+          </a:fontRef>
+        </p:style>
+        <p:txBody>
+          <a:bodyPr rtlCol="0" anchor="ctr"/>
+          <a:lstStyle/>
+          <a:p>
+            <a:pPr algn="ctr"/>
+          </a:p>
+        </p:txBody>
+      </p:sp>
+      <p:sp>
+        <p:nvSpPr>
+          <p:cNvPr id="52" name="Oval 51"/>
+          <p:cNvSpPr/>
+          <p:nvPr/>
+        </p:nvSpPr>
+        <p:spPr>
+          <a:xfrm>
+            <a:off x="4393692" y="3657600"/>
+            <a:ext cx="155448" cy="155448"/>
+          </a:xfrm>
+          <a:prstGeom prst="ellipse">
+            <a:avLst/>
+          </a:prstGeom>
+          <a:solidFill>
+            <a:srgbClr val="FF9900"/>
+          </a:solidFill>
+          <a:ln>
+            <a:noFill/>
+          </a:ln>
+          <a:effectLst/>
+        </p:spPr>
+        <p:style>
+          <a:lnRef idx="1">
+            <a:schemeClr val="accent1"/>
+          </a:lnRef>
+          <a:fillRef idx="3">
+            <a:schemeClr val="accent1"/>
+          </a:fillRef>
+          <a:effectRef idx="2">
+            <a:schemeClr val="accent1"/>
+          </a:effectRef>
+          <a:fontRef idx="minor">
+            <a:schemeClr val="lt1"/>
+          </a:fontRef>
+        </p:style>
+        <p:txBody>
+          <a:bodyPr rtlCol="0" anchor="ctr"/>
+          <a:lstStyle/>
+          <a:p>
+            <a:pPr algn="ctr"/>
+          </a:p>
+        </p:txBody>
+      </p:sp>
+      <p:sp>
+        <p:nvSpPr>
+          <p:cNvPr id="53" name="Oval 52"/>
+          <p:cNvSpPr/>
+          <p:nvPr/>
+        </p:nvSpPr>
+        <p:spPr>
+          <a:xfrm>
+            <a:off x="1801368" y="3931920"/>
+            <a:ext cx="155448" cy="155448"/>
+          </a:xfrm>
+          <a:prstGeom prst="ellipse">
+            <a:avLst/>
+          </a:prstGeom>
+          <a:solidFill>
+            <a:srgbClr val="FF9900"/>
+          </a:solidFill>
+          <a:ln>
+            <a:noFill/>
+          </a:ln>
+          <a:effectLst/>
+        </p:spPr>
+        <p:style>
+          <a:lnRef idx="1">
+            <a:schemeClr val="accent1"/>
+          </a:lnRef>
+          <a:fillRef idx="3">
+            <a:schemeClr val="accent1"/>
+          </a:fillRef>
+          <a:effectRef idx="2">
+            <a:schemeClr val="accent1"/>
+          </a:effectRef>
+          <a:fontRef idx="minor">
+            <a:schemeClr val="lt1"/>
+          </a:fontRef>
+        </p:style>
+        <p:txBody>
+          <a:bodyPr rtlCol="0" anchor="ctr"/>
+          <a:lstStyle/>
+          <a:p>
+            <a:pPr algn="ctr"/>
+          </a:p>
+        </p:txBody>
+      </p:sp>
+      <p:sp>
+        <p:nvSpPr>
+          <p:cNvPr id="54" name="Oval 53"/>
+          <p:cNvSpPr/>
+          <p:nvPr/>
+        </p:nvSpPr>
+        <p:spPr>
+          <a:xfrm>
+            <a:off x="2089404" y="3931920"/>
+            <a:ext cx="155448" cy="155448"/>
+          </a:xfrm>
+          <a:prstGeom prst="ellipse">
+            <a:avLst/>
+          </a:prstGeom>
+          <a:solidFill>
+            <a:srgbClr val="FF9900"/>
+          </a:solidFill>
+          <a:ln>
+            <a:noFill/>
+          </a:ln>
+          <a:effectLst/>
+        </p:spPr>
+        <p:style>
+          <a:lnRef idx="1">
+            <a:schemeClr val="accent1"/>
+          </a:lnRef>
+          <a:fillRef idx="3">
+            <a:schemeClr val="accent1"/>
+          </a:fillRef>
+          <a:effectRef idx="2">
+            <a:schemeClr val="accent1"/>
+          </a:effectRef>
+          <a:fontRef idx="minor">
+            <a:schemeClr val="lt1"/>
+          </a:fontRef>
+        </p:style>
+        <p:txBody>
+          <a:bodyPr rtlCol="0" anchor="ctr"/>
+          <a:lstStyle/>
+          <a:p>
+            <a:pPr algn="ctr"/>
+          </a:p>
+        </p:txBody>
+      </p:sp>
+      <p:sp>
+        <p:nvSpPr>
+          <p:cNvPr id="55" name="Oval 54"/>
+          <p:cNvSpPr/>
+          <p:nvPr/>
+        </p:nvSpPr>
+        <p:spPr>
+          <a:xfrm>
+            <a:off x="2377440" y="3931920"/>
+            <a:ext cx="155448" cy="155448"/>
+          </a:xfrm>
+          <a:prstGeom prst="ellipse">
+            <a:avLst/>
+          </a:prstGeom>
+          <a:solidFill>
+            <a:srgbClr val="FF9900"/>
+          </a:solidFill>
+          <a:ln>
+            <a:noFill/>
+          </a:ln>
+          <a:effectLst/>
+        </p:spPr>
+        <p:style>
+          <a:lnRef idx="1">
+            <a:schemeClr val="accent1"/>
+          </a:lnRef>
+          <a:fillRef idx="3">
+            <a:schemeClr val="accent1"/>
+          </a:fillRef>
+          <a:effectRef idx="2">
+            <a:schemeClr val="accent1"/>
+          </a:effectRef>
+          <a:fontRef idx="minor">
+            <a:schemeClr val="lt1"/>
+          </a:fontRef>
+        </p:style>
+        <p:txBody>
+          <a:bodyPr rtlCol="0" anchor="ctr"/>
+          <a:lstStyle/>
+          <a:p>
+            <a:pPr algn="ctr"/>
+          </a:p>
+        </p:txBody>
+      </p:sp>
+      <p:sp>
+        <p:nvSpPr>
+          <p:cNvPr id="56" name="Oval 55"/>
+          <p:cNvSpPr/>
+          <p:nvPr/>
+        </p:nvSpPr>
+        <p:spPr>
+          <a:xfrm>
+            <a:off x="2665476" y="3931920"/>
+            <a:ext cx="155448" cy="155448"/>
+          </a:xfrm>
+          <a:prstGeom prst="ellipse">
+            <a:avLst/>
+          </a:prstGeom>
+          <a:solidFill>
+            <a:srgbClr val="FF9900"/>
+          </a:solidFill>
+          <a:ln>
+            <a:noFill/>
+          </a:ln>
+          <a:effectLst/>
+        </p:spPr>
+        <p:style>
+          <a:lnRef idx="1">
+            <a:schemeClr val="accent1"/>
+          </a:lnRef>
+          <a:fillRef idx="3">
+            <a:schemeClr val="accent1"/>
+          </a:fillRef>
+          <a:effectRef idx="2">
+            <a:schemeClr val="accent1"/>
+          </a:effectRef>
+          <a:fontRef idx="minor">
+            <a:schemeClr val="lt1"/>
+          </a:fontRef>
+        </p:style>
+        <p:txBody>
+          <a:bodyPr rtlCol="0" anchor="ctr"/>
+          <a:lstStyle/>
+          <a:p>
+            <a:pPr algn="ctr"/>
+          </a:p>
+        </p:txBody>
+      </p:sp>
+      <p:sp>
+        <p:nvSpPr>
+          <p:cNvPr id="57" name="Oval 56"/>
+          <p:cNvSpPr/>
+          <p:nvPr/>
+        </p:nvSpPr>
+        <p:spPr>
+          <a:xfrm>
+            <a:off x="2953512" y="3931920"/>
+            <a:ext cx="155448" cy="155448"/>
+          </a:xfrm>
+          <a:prstGeom prst="ellipse">
+            <a:avLst/>
+          </a:prstGeom>
+          <a:solidFill>
+            <a:srgbClr val="FF9900"/>
+          </a:solidFill>
+          <a:ln>
+            <a:noFill/>
+          </a:ln>
+          <a:effectLst/>
+        </p:spPr>
+        <p:style>
+          <a:lnRef idx="1">
+            <a:schemeClr val="accent1"/>
+          </a:lnRef>
+          <a:fillRef idx="3">
+            <a:schemeClr val="accent1"/>
+          </a:fillRef>
+          <a:effectRef idx="2">
+            <a:schemeClr val="accent1"/>
+          </a:effectRef>
+          <a:fontRef idx="minor">
+            <a:schemeClr val="lt1"/>
+          </a:fontRef>
+        </p:style>
+        <p:txBody>
+          <a:bodyPr rtlCol="0" anchor="ctr"/>
+          <a:lstStyle/>
+          <a:p>
+            <a:pPr algn="ctr"/>
+          </a:p>
+        </p:txBody>
+      </p:sp>
+      <p:sp>
+        <p:nvSpPr>
+          <p:cNvPr id="58" name="Oval 57"/>
+          <p:cNvSpPr/>
+          <p:nvPr/>
+        </p:nvSpPr>
+        <p:spPr>
+          <a:xfrm>
+            <a:off x="3241548" y="3931920"/>
+            <a:ext cx="155448" cy="155448"/>
+          </a:xfrm>
+          <a:prstGeom prst="ellipse">
+            <a:avLst/>
+          </a:prstGeom>
+          <a:solidFill>
+            <a:srgbClr val="FF9900"/>
+          </a:solidFill>
+          <a:ln>
+            <a:noFill/>
+          </a:ln>
+          <a:effectLst/>
+        </p:spPr>
+        <p:style>
+          <a:lnRef idx="1">
+            <a:schemeClr val="accent1"/>
+          </a:lnRef>
+          <a:fillRef idx="3">
+            <a:schemeClr val="accent1"/>
+          </a:fillRef>
+          <a:effectRef idx="2">
+            <a:schemeClr val="accent1"/>
+          </a:effectRef>
+          <a:fontRef idx="minor">
+            <a:schemeClr val="lt1"/>
+          </a:fontRef>
+        </p:style>
+        <p:txBody>
+          <a:bodyPr rtlCol="0" anchor="ctr"/>
+          <a:lstStyle/>
+          <a:p>
+            <a:pPr algn="ctr"/>
+          </a:p>
+        </p:txBody>
+      </p:sp>
+      <p:sp>
+        <p:nvSpPr>
+          <p:cNvPr id="59" name="Oval 58"/>
+          <p:cNvSpPr/>
+          <p:nvPr/>
+        </p:nvSpPr>
+        <p:spPr>
+          <a:xfrm>
+            <a:off x="3529584" y="3931920"/>
+            <a:ext cx="155448" cy="155448"/>
+          </a:xfrm>
+          <a:prstGeom prst="ellipse">
+            <a:avLst/>
+          </a:prstGeom>
+          <a:solidFill>
+            <a:srgbClr val="FF9900"/>
+          </a:solidFill>
+          <a:ln>
+            <a:noFill/>
+          </a:ln>
+          <a:effectLst/>
+        </p:spPr>
+        <p:style>
+          <a:lnRef idx="1">
+            <a:schemeClr val="accent1"/>
+          </a:lnRef>
+          <a:fillRef idx="3">
+            <a:schemeClr val="accent1"/>
+          </a:fillRef>
+          <a:effectRef idx="2">
+            <a:schemeClr val="accent1"/>
+          </a:effectRef>
+          <a:fontRef idx="minor">
+            <a:schemeClr val="lt1"/>
+          </a:fontRef>
+        </p:style>
+        <p:txBody>
+          <a:bodyPr rtlCol="0" anchor="ctr"/>
+          <a:lstStyle/>
+          <a:p>
+            <a:pPr algn="ctr"/>
+          </a:p>
+        </p:txBody>
+      </p:sp>
+      <p:sp>
+        <p:nvSpPr>
+          <p:cNvPr id="60" name="Oval 59"/>
+          <p:cNvSpPr/>
+          <p:nvPr/>
+        </p:nvSpPr>
+        <p:spPr>
+          <a:xfrm>
+            <a:off x="3817620" y="3931920"/>
+            <a:ext cx="155448" cy="155448"/>
+          </a:xfrm>
+          <a:prstGeom prst="ellipse">
+            <a:avLst/>
+          </a:prstGeom>
+          <a:solidFill>
+            <a:srgbClr val="FF9900"/>
+          </a:solidFill>
+          <a:ln>
+            <a:noFill/>
+          </a:ln>
+          <a:effectLst/>
+        </p:spPr>
+        <p:style>
+          <a:lnRef idx="1">
+            <a:schemeClr val="accent1"/>
+          </a:lnRef>
+          <a:fillRef idx="3">
+            <a:schemeClr val="accent1"/>
+          </a:fillRef>
+          <a:effectRef idx="2">
+            <a:schemeClr val="accent1"/>
+          </a:effectRef>
+          <a:fontRef idx="minor">
+            <a:schemeClr val="lt1"/>
+          </a:fontRef>
+        </p:style>
+        <p:txBody>
+          <a:bodyPr rtlCol="0" anchor="ctr"/>
+          <a:lstStyle/>
+          <a:p>
+            <a:pPr algn="ctr"/>
+          </a:p>
+        </p:txBody>
+      </p:sp>
+      <p:sp>
+        <p:nvSpPr>
+          <p:cNvPr id="61" name="Oval 60"/>
+          <p:cNvSpPr/>
+          <p:nvPr/>
+        </p:nvSpPr>
+        <p:spPr>
+          <a:xfrm>
+            <a:off x="4105656" y="3931920"/>
+            <a:ext cx="155448" cy="155448"/>
+          </a:xfrm>
+          <a:prstGeom prst="ellipse">
+            <a:avLst/>
+          </a:prstGeom>
+          <a:solidFill>
+            <a:srgbClr val="FF9900"/>
+          </a:solidFill>
+          <a:ln>
+            <a:noFill/>
+          </a:ln>
+          <a:effectLst/>
+        </p:spPr>
+        <p:style>
+          <a:lnRef idx="1">
+            <a:schemeClr val="accent1"/>
+          </a:lnRef>
+          <a:fillRef idx="3">
+            <a:schemeClr val="accent1"/>
+          </a:fillRef>
+          <a:effectRef idx="2">
+            <a:schemeClr val="accent1"/>
+          </a:effectRef>
+          <a:fontRef idx="minor">
+            <a:schemeClr val="lt1"/>
+          </a:fontRef>
+        </p:style>
+        <p:txBody>
+          <a:bodyPr rtlCol="0" anchor="ctr"/>
+          <a:lstStyle/>
+          <a:p>
+            <a:pPr algn="ctr"/>
+          </a:p>
+        </p:txBody>
+      </p:sp>
+      <p:sp>
+        <p:nvSpPr>
+          <p:cNvPr id="62" name="Oval 61"/>
+          <p:cNvSpPr/>
+          <p:nvPr/>
+        </p:nvSpPr>
+        <p:spPr>
+          <a:xfrm>
+            <a:off x="4393692" y="3931920"/>
+            <a:ext cx="155448" cy="155448"/>
+          </a:xfrm>
+          <a:prstGeom prst="ellipse">
+            <a:avLst/>
+          </a:prstGeom>
+          <a:solidFill>
+            <a:srgbClr val="FF9900"/>
+          </a:solidFill>
+          <a:ln>
+            <a:noFill/>
+          </a:ln>
+          <a:effectLst/>
+        </p:spPr>
+        <p:style>
+          <a:lnRef idx="1">
+            <a:schemeClr val="accent1"/>
+          </a:lnRef>
+          <a:fillRef idx="3">
+            <a:schemeClr val="accent1"/>
+          </a:fillRef>
+          <a:effectRef idx="2">
+            <a:schemeClr val="accent1"/>
+          </a:effectRef>
+          <a:fontRef idx="minor">
+            <a:schemeClr val="lt1"/>
+          </a:fontRef>
+        </p:style>
+        <p:txBody>
+          <a:bodyPr rtlCol="0" anchor="ctr"/>
+          <a:lstStyle/>
+          <a:p>
+            <a:pPr algn="ctr"/>
+          </a:p>
+        </p:txBody>
+      </p:sp>
+      <p:sp>
+        <p:nvSpPr>
+          <p:cNvPr id="63" name="TextBox 62"/>
+          <p:cNvSpPr txBox="1"/>
+          <p:nvPr/>
+        </p:nvSpPr>
+        <p:spPr>
+          <a:xfrm>
+            <a:off x="768096" y="4297680"/>
+            <a:ext cx="4992624" cy="475488"/>
+          </a:xfrm>
+          <a:prstGeom prst="rect">
+            <a:avLst/>
+          </a:prstGeom>
+          <a:noFill/>
+        </p:spPr>
+        <p:txBody>
+          <a:bodyPr wrap="square" lIns="0" rIns="0" tIns="0" bIns="0" anchor="ctr">
+            <a:spAutoFit/>
+          </a:bodyPr>
+          <a:lstStyle/>
+          <a:p>
+            <a:pPr algn="l"/>
+            <a:r>
+              <a:rPr sz="1150" b="1">
+                <a:solidFill>
+                  <a:srgbClr val="232F3E"/>
+                </a:solidFill>
+                <a:latin typeface="Calibri"/>
+              </a:rPr>
+              <a:t>40 / 40 sessions lost — every user, every partner profile in flight.</a:t>
+            </a:r>
+          </a:p>
+        </p:txBody>
+      </p:sp>
+      <p:sp>
+        <p:nvSpPr>
+          <p:cNvPr id="64" name="Rounded Rectangle 63"/>
+          <p:cNvSpPr/>
+          <p:nvPr/>
+        </p:nvSpPr>
+        <p:spPr>
+          <a:xfrm>
+            <a:off x="6236208" y="2395728"/>
+            <a:ext cx="5394960" cy="2468880"/>
+          </a:xfrm>
+          <a:prstGeom prst="roundRect">
+            <a:avLst>
+              <a:gd name="adj" fmla="val 2222"/>
+            </a:avLst>
+          </a:prstGeom>
+          <a:solidFill>
+            <a:srgbClr val="F7F8FA"/>
+          </a:solidFill>
+          <a:ln w="12700">
+            <a:solidFill>
+              <a:srgbClr val="E4E7EA"/>
+            </a:solidFill>
+          </a:ln>
+          <a:effectLst/>
+        </p:spPr>
+        <p:style>
+          <a:lnRef idx="1">
+            <a:schemeClr val="accent1"/>
+          </a:lnRef>
+          <a:fillRef idx="3">
+            <a:schemeClr val="accent1"/>
+          </a:fillRef>
+          <a:effectRef idx="2">
+            <a:schemeClr val="accent1"/>
+          </a:effectRef>
+          <a:fontRef idx="minor">
+            <a:schemeClr val="lt1"/>
+          </a:fontRef>
+        </p:style>
+        <p:txBody>
+          <a:bodyPr rtlCol="0" anchor="ctr"/>
+          <a:lstStyle/>
+          <a:p>
+            <a:pPr algn="ctr"/>
+          </a:p>
+        </p:txBody>
+      </p:sp>
+      <p:sp>
+        <p:nvSpPr>
+          <p:cNvPr id="65" name="Rectangle 64"/>
+          <p:cNvSpPr/>
+          <p:nvPr/>
+        </p:nvSpPr>
+        <p:spPr>
+          <a:xfrm>
+            <a:off x="6236208" y="2395728"/>
+            <a:ext cx="5394960" cy="420624"/>
+          </a:xfrm>
+          <a:prstGeom prst="rect">
+            <a:avLst/>
+          </a:prstGeom>
+          <a:solidFill>
+            <a:srgbClr val="232F3E"/>
+          </a:solidFill>
+          <a:ln>
+            <a:noFill/>
+          </a:ln>
+          <a:effectLst/>
+        </p:spPr>
+        <p:style>
+          <a:lnRef idx="1">
+            <a:schemeClr val="accent1"/>
+          </a:lnRef>
+          <a:fillRef idx="3">
+            <a:schemeClr val="accent1"/>
+          </a:fillRef>
+          <a:effectRef idx="2">
+            <a:schemeClr val="accent1"/>
+          </a:effectRef>
+          <a:fontRef idx="minor">
+            <a:schemeClr val="lt1"/>
+          </a:fontRef>
+        </p:style>
+        <p:txBody>
+          <a:bodyPr rtlCol="0" anchor="ctr"/>
+          <a:lstStyle/>
+          <a:p>
+            <a:pPr algn="ctr"/>
+          </a:p>
+        </p:txBody>
+      </p:sp>
+      <p:sp>
+        <p:nvSpPr>
+          <p:cNvPr id="66" name="TextBox 65"/>
+          <p:cNvSpPr txBox="1"/>
+          <p:nvPr/>
+        </p:nvSpPr>
+        <p:spPr>
+          <a:xfrm>
+            <a:off x="6437376" y="2395728"/>
+            <a:ext cx="4992624" cy="420624"/>
+          </a:xfrm>
+          <a:prstGeom prst="rect">
+            <a:avLst/>
+          </a:prstGeom>
+          <a:noFill/>
+        </p:spPr>
+        <p:txBody>
+          <a:bodyPr wrap="square" lIns="0" rIns="0" tIns="0" bIns="0" anchor="ctr">
+            <a:spAutoFit/>
+          </a:bodyPr>
+          <a:lstStyle/>
+          <a:p>
+            <a:pPr algn="l"/>
+            <a:r>
+              <a:rPr sz="1150" b="1">
+                <a:solidFill>
+                  <a:srgbClr val="FFFFFF"/>
+                </a:solidFill>
+                <a:latin typeface="Calibri"/>
+              </a:rPr>
+              <a:t>ENGINE B · AGENTCORE</a:t>
+            </a:r>
+          </a:p>
+        </p:txBody>
+      </p:sp>
+      <p:sp>
+        <p:nvSpPr>
+          <p:cNvPr id="67" name="Oval 66"/>
+          <p:cNvSpPr/>
+          <p:nvPr/>
+        </p:nvSpPr>
+        <p:spPr>
+          <a:xfrm>
+            <a:off x="7470648" y="3108960"/>
+            <a:ext cx="155448" cy="155448"/>
+          </a:xfrm>
+          <a:prstGeom prst="ellipse">
+            <a:avLst/>
+          </a:prstGeom>
+          <a:solidFill>
+            <a:srgbClr val="FF9900"/>
+          </a:solidFill>
+          <a:ln>
+            <a:noFill/>
+          </a:ln>
+          <a:effectLst/>
+        </p:spPr>
+        <p:style>
+          <a:lnRef idx="1">
+            <a:schemeClr val="accent1"/>
+          </a:lnRef>
+          <a:fillRef idx="3">
+            <a:schemeClr val="accent1"/>
+          </a:fillRef>
+          <a:effectRef idx="2">
+            <a:schemeClr val="accent1"/>
+          </a:effectRef>
+          <a:fontRef idx="minor">
+            <a:schemeClr val="lt1"/>
+          </a:fontRef>
+        </p:style>
+        <p:txBody>
+          <a:bodyPr rtlCol="0" anchor="ctr"/>
+          <a:lstStyle/>
+          <a:p>
+            <a:pPr algn="ctr"/>
+          </a:p>
+        </p:txBody>
+      </p:sp>
+      <p:sp>
+        <p:nvSpPr>
+          <p:cNvPr id="68" name="Oval 67"/>
+          <p:cNvSpPr/>
+          <p:nvPr/>
+        </p:nvSpPr>
+        <p:spPr>
+          <a:xfrm>
+            <a:off x="7758683" y="3108960"/>
+            <a:ext cx="155448" cy="155448"/>
+          </a:xfrm>
+          <a:prstGeom prst="ellipse">
+            <a:avLst/>
+          </a:prstGeom>
+          <a:solidFill>
+            <a:srgbClr val="1E7C3C"/>
+          </a:solidFill>
+          <a:ln>
+            <a:noFill/>
+          </a:ln>
+          <a:effectLst/>
+        </p:spPr>
+        <p:style>
+          <a:lnRef idx="1">
+            <a:schemeClr val="accent1"/>
+          </a:lnRef>
+          <a:fillRef idx="3">
+            <a:schemeClr val="accent1"/>
+          </a:fillRef>
+          <a:effectRef idx="2">
+            <a:schemeClr val="accent1"/>
+          </a:effectRef>
+          <a:fontRef idx="minor">
+            <a:schemeClr val="lt1"/>
+          </a:fontRef>
+        </p:style>
+        <p:txBody>
+          <a:bodyPr rtlCol="0" anchor="ctr"/>
+          <a:lstStyle/>
+          <a:p>
+            <a:pPr algn="ctr"/>
+          </a:p>
+        </p:txBody>
+      </p:sp>
+      <p:sp>
+        <p:nvSpPr>
+          <p:cNvPr id="69" name="Oval 68"/>
+          <p:cNvSpPr/>
+          <p:nvPr/>
+        </p:nvSpPr>
+        <p:spPr>
+          <a:xfrm>
+            <a:off x="8046720" y="3108960"/>
+            <a:ext cx="155448" cy="155448"/>
+          </a:xfrm>
+          <a:prstGeom prst="ellipse">
+            <a:avLst/>
+          </a:prstGeom>
+          <a:solidFill>
+            <a:srgbClr val="1E7C3C"/>
+          </a:solidFill>
+          <a:ln>
+            <a:noFill/>
+          </a:ln>
+          <a:effectLst/>
+        </p:spPr>
+        <p:style>
+          <a:lnRef idx="1">
+            <a:schemeClr val="accent1"/>
+          </a:lnRef>
+          <a:fillRef idx="3">
+            <a:schemeClr val="accent1"/>
+          </a:fillRef>
+          <a:effectRef idx="2">
+            <a:schemeClr val="accent1"/>
+          </a:effectRef>
+          <a:fontRef idx="minor">
+            <a:schemeClr val="lt1"/>
+          </a:fontRef>
+        </p:style>
+        <p:txBody>
+          <a:bodyPr rtlCol="0" anchor="ctr"/>
+          <a:lstStyle/>
+          <a:p>
+            <a:pPr algn="ctr"/>
+          </a:p>
+        </p:txBody>
+      </p:sp>
+      <p:sp>
+        <p:nvSpPr>
+          <p:cNvPr id="70" name="Oval 69"/>
+          <p:cNvSpPr/>
+          <p:nvPr/>
+        </p:nvSpPr>
+        <p:spPr>
+          <a:xfrm>
+            <a:off x="8334756" y="3108960"/>
+            <a:ext cx="155448" cy="155448"/>
+          </a:xfrm>
+          <a:prstGeom prst="ellipse">
+            <a:avLst/>
+          </a:prstGeom>
+          <a:solidFill>
+            <a:srgbClr val="1E7C3C"/>
+          </a:solidFill>
+          <a:ln>
+            <a:noFill/>
+          </a:ln>
+          <a:effectLst/>
+        </p:spPr>
+        <p:style>
+          <a:lnRef idx="1">
+            <a:schemeClr val="accent1"/>
+          </a:lnRef>
+          <a:fillRef idx="3">
+            <a:schemeClr val="accent1"/>
+          </a:fillRef>
+          <a:effectRef idx="2">
+            <a:schemeClr val="accent1"/>
+          </a:effectRef>
+          <a:fontRef idx="minor">
+            <a:schemeClr val="lt1"/>
+          </a:fontRef>
+        </p:style>
+        <p:txBody>
+          <a:bodyPr rtlCol="0" anchor="ctr"/>
+          <a:lstStyle/>
+          <a:p>
+            <a:pPr algn="ctr"/>
+          </a:p>
+        </p:txBody>
+      </p:sp>
+      <p:sp>
+        <p:nvSpPr>
+          <p:cNvPr id="71" name="Oval 70"/>
+          <p:cNvSpPr/>
+          <p:nvPr/>
+        </p:nvSpPr>
+        <p:spPr>
+          <a:xfrm>
+            <a:off x="8622792" y="3108960"/>
+            <a:ext cx="155448" cy="155448"/>
+          </a:xfrm>
+          <a:prstGeom prst="ellipse">
+            <a:avLst/>
+          </a:prstGeom>
+          <a:solidFill>
+            <a:srgbClr val="1E7C3C"/>
+          </a:solidFill>
+          <a:ln>
+            <a:noFill/>
+          </a:ln>
+          <a:effectLst/>
+        </p:spPr>
+        <p:style>
+          <a:lnRef idx="1">
+            <a:schemeClr val="accent1"/>
+          </a:lnRef>
+          <a:fillRef idx="3">
+            <a:schemeClr val="accent1"/>
+          </a:fillRef>
+          <a:effectRef idx="2">
+            <a:schemeClr val="accent1"/>
+          </a:effectRef>
+          <a:fontRef idx="minor">
+            <a:schemeClr val="lt1"/>
+          </a:fontRef>
+        </p:style>
+        <p:txBody>
+          <a:bodyPr rtlCol="0" anchor="ctr"/>
+          <a:lstStyle/>
+          <a:p>
+            <a:pPr algn="ctr"/>
+          </a:p>
+        </p:txBody>
+      </p:sp>
+      <p:sp>
+        <p:nvSpPr>
+          <p:cNvPr id="72" name="Oval 71"/>
+          <p:cNvSpPr/>
+          <p:nvPr/>
+        </p:nvSpPr>
+        <p:spPr>
+          <a:xfrm>
+            <a:off x="8910828" y="3108960"/>
+            <a:ext cx="155448" cy="155448"/>
+          </a:xfrm>
+          <a:prstGeom prst="ellipse">
+            <a:avLst/>
+          </a:prstGeom>
+          <a:solidFill>
+            <a:srgbClr val="1E7C3C"/>
+          </a:solidFill>
+          <a:ln>
+            <a:noFill/>
+          </a:ln>
+          <a:effectLst/>
+        </p:spPr>
+        <p:style>
+          <a:lnRef idx="1">
+            <a:schemeClr val="accent1"/>
+          </a:lnRef>
+          <a:fillRef idx="3">
+            <a:schemeClr val="accent1"/>
+          </a:fillRef>
+          <a:effectRef idx="2">
+            <a:schemeClr val="accent1"/>
+          </a:effectRef>
+          <a:fontRef idx="minor">
+            <a:schemeClr val="lt1"/>
+          </a:fontRef>
+        </p:style>
+        <p:txBody>
+          <a:bodyPr rtlCol="0" anchor="ctr"/>
+          <a:lstStyle/>
+          <a:p>
+            <a:pPr algn="ctr"/>
+          </a:p>
+        </p:txBody>
+      </p:sp>
+      <p:sp>
+        <p:nvSpPr>
+          <p:cNvPr id="73" name="Oval 72"/>
+          <p:cNvSpPr/>
+          <p:nvPr/>
+        </p:nvSpPr>
+        <p:spPr>
+          <a:xfrm>
+            <a:off x="9198864" y="3108960"/>
+            <a:ext cx="155448" cy="155448"/>
+          </a:xfrm>
+          <a:prstGeom prst="ellipse">
+            <a:avLst/>
+          </a:prstGeom>
+          <a:solidFill>
+            <a:srgbClr val="1E7C3C"/>
+          </a:solidFill>
+          <a:ln>
+            <a:noFill/>
+          </a:ln>
+          <a:effectLst/>
+        </p:spPr>
+        <p:style>
+          <a:lnRef idx="1">
+            <a:schemeClr val="accent1"/>
+          </a:lnRef>
+          <a:fillRef idx="3">
+            <a:schemeClr val="accent1"/>
+          </a:fillRef>
+          <a:effectRef idx="2">
+            <a:schemeClr val="accent1"/>
+          </a:effectRef>
+          <a:fontRef idx="minor">
+            <a:schemeClr val="lt1"/>
+          </a:fontRef>
+        </p:style>
+        <p:txBody>
+          <a:bodyPr rtlCol="0" anchor="ctr"/>
+          <a:lstStyle/>
+          <a:p>
+            <a:pPr algn="ctr"/>
+          </a:p>
+        </p:txBody>
+      </p:sp>
+      <p:sp>
+        <p:nvSpPr>
+          <p:cNvPr id="74" name="Oval 73"/>
+          <p:cNvSpPr/>
+          <p:nvPr/>
+        </p:nvSpPr>
+        <p:spPr>
+          <a:xfrm>
+            <a:off x="9486900" y="3108960"/>
+            <a:ext cx="155448" cy="155448"/>
+          </a:xfrm>
+          <a:prstGeom prst="ellipse">
+            <a:avLst/>
+          </a:prstGeom>
+          <a:solidFill>
+            <a:srgbClr val="1E7C3C"/>
+          </a:solidFill>
+          <a:ln>
+            <a:noFill/>
+          </a:ln>
+          <a:effectLst/>
+        </p:spPr>
+        <p:style>
+          <a:lnRef idx="1">
+            <a:schemeClr val="accent1"/>
+          </a:lnRef>
+          <a:fillRef idx="3">
+            <a:schemeClr val="accent1"/>
+          </a:fillRef>
+          <a:effectRef idx="2">
+            <a:schemeClr val="accent1"/>
+          </a:effectRef>
+          <a:fontRef idx="minor">
+            <a:schemeClr val="lt1"/>
+          </a:fontRef>
+        </p:style>
+        <p:txBody>
+          <a:bodyPr rtlCol="0" anchor="ctr"/>
+          <a:lstStyle/>
+          <a:p>
+            <a:pPr algn="ctr"/>
+          </a:p>
+        </p:txBody>
+      </p:sp>
+      <p:sp>
+        <p:nvSpPr>
+          <p:cNvPr id="75" name="Oval 74"/>
+          <p:cNvSpPr/>
+          <p:nvPr/>
+        </p:nvSpPr>
+        <p:spPr>
+          <a:xfrm>
+            <a:off x="9774936" y="3108960"/>
+            <a:ext cx="155448" cy="155448"/>
+          </a:xfrm>
+          <a:prstGeom prst="ellipse">
+            <a:avLst/>
+          </a:prstGeom>
+          <a:solidFill>
+            <a:srgbClr val="1E7C3C"/>
+          </a:solidFill>
+          <a:ln>
+            <a:noFill/>
+          </a:ln>
+          <a:effectLst/>
+        </p:spPr>
+        <p:style>
+          <a:lnRef idx="1">
+            <a:schemeClr val="accent1"/>
+          </a:lnRef>
+          <a:fillRef idx="3">
+            <a:schemeClr val="accent1"/>
+          </a:fillRef>
+          <a:effectRef idx="2">
+            <a:schemeClr val="accent1"/>
+          </a:effectRef>
+          <a:fontRef idx="minor">
+            <a:schemeClr val="lt1"/>
+          </a:fontRef>
+        </p:style>
+        <p:txBody>
+          <a:bodyPr rtlCol="0" anchor="ctr"/>
+          <a:lstStyle/>
+          <a:p>
+            <a:pPr algn="ctr"/>
+          </a:p>
+        </p:txBody>
+      </p:sp>
+      <p:sp>
+        <p:nvSpPr>
+          <p:cNvPr id="76" name="Oval 75"/>
+          <p:cNvSpPr/>
+          <p:nvPr/>
+        </p:nvSpPr>
+        <p:spPr>
+          <a:xfrm>
+            <a:off x="10062972" y="3108960"/>
+            <a:ext cx="155448" cy="155448"/>
+          </a:xfrm>
+          <a:prstGeom prst="ellipse">
+            <a:avLst/>
+          </a:prstGeom>
+          <a:solidFill>
+            <a:srgbClr val="1E7C3C"/>
+          </a:solidFill>
+          <a:ln>
+            <a:noFill/>
+          </a:ln>
+          <a:effectLst/>
+        </p:spPr>
+        <p:style>
+          <a:lnRef idx="1">
+            <a:schemeClr val="accent1"/>
+          </a:lnRef>
+          <a:fillRef idx="3">
+            <a:schemeClr val="accent1"/>
+          </a:fillRef>
+          <a:effectRef idx="2">
+            <a:schemeClr val="accent1"/>
+          </a:effectRef>
+          <a:fontRef idx="minor">
+            <a:schemeClr val="lt1"/>
+          </a:fontRef>
+        </p:style>
+        <p:txBody>
+          <a:bodyPr rtlCol="0" anchor="ctr"/>
+          <a:lstStyle/>
+          <a:p>
+            <a:pPr algn="ctr"/>
+          </a:p>
+        </p:txBody>
+      </p:sp>
+      <p:sp>
+        <p:nvSpPr>
+          <p:cNvPr id="77" name="Oval 76"/>
+          <p:cNvSpPr/>
+          <p:nvPr/>
+        </p:nvSpPr>
+        <p:spPr>
+          <a:xfrm>
+            <a:off x="7470648" y="3383280"/>
+            <a:ext cx="155448" cy="155448"/>
+          </a:xfrm>
+          <a:prstGeom prst="ellipse">
+            <a:avLst/>
+          </a:prstGeom>
+          <a:solidFill>
+            <a:srgbClr val="1E7C3C"/>
+          </a:solidFill>
+          <a:ln>
+            <a:noFill/>
+          </a:ln>
+          <a:effectLst/>
+        </p:spPr>
+        <p:style>
+          <a:lnRef idx="1">
+            <a:schemeClr val="accent1"/>
+          </a:lnRef>
+          <a:fillRef idx="3">
+            <a:schemeClr val="accent1"/>
+          </a:fillRef>
+          <a:effectRef idx="2">
+            <a:schemeClr val="accent1"/>
+          </a:effectRef>
+          <a:fontRef idx="minor">
+            <a:schemeClr val="lt1"/>
+          </a:fontRef>
+        </p:style>
+        <p:txBody>
+          <a:bodyPr rtlCol="0" anchor="ctr"/>
+          <a:lstStyle/>
+          <a:p>
+            <a:pPr algn="ctr"/>
+          </a:p>
+        </p:txBody>
+      </p:sp>
+      <p:sp>
+        <p:nvSpPr>
+          <p:cNvPr id="78" name="Oval 77"/>
+          <p:cNvSpPr/>
+          <p:nvPr/>
+        </p:nvSpPr>
+        <p:spPr>
+          <a:xfrm>
+            <a:off x="7758683" y="3383280"/>
+            <a:ext cx="155448" cy="155448"/>
+          </a:xfrm>
+          <a:prstGeom prst="ellipse">
+            <a:avLst/>
+          </a:prstGeom>
+          <a:solidFill>
+            <a:srgbClr val="1E7C3C"/>
+          </a:solidFill>
+          <a:ln>
+            <a:noFill/>
+          </a:ln>
+          <a:effectLst/>
+        </p:spPr>
+        <p:style>
+          <a:lnRef idx="1">
+            <a:schemeClr val="accent1"/>
+          </a:lnRef>
+          <a:fillRef idx="3">
+            <a:schemeClr val="accent1"/>
+          </a:fillRef>
+          <a:effectRef idx="2">
+            <a:schemeClr val="accent1"/>
+          </a:effectRef>
+          <a:fontRef idx="minor">
+            <a:schemeClr val="lt1"/>
+          </a:fontRef>
+        </p:style>
+        <p:txBody>
+          <a:bodyPr rtlCol="0" anchor="ctr"/>
+          <a:lstStyle/>
+          <a:p>
+            <a:pPr algn="ctr"/>
+          </a:p>
+        </p:txBody>
+      </p:sp>
+      <p:sp>
+        <p:nvSpPr>
+          <p:cNvPr id="79" name="Oval 78"/>
+          <p:cNvSpPr/>
+          <p:nvPr/>
+        </p:nvSpPr>
+        <p:spPr>
+          <a:xfrm>
+            <a:off x="8046720" y="3383280"/>
+            <a:ext cx="155448" cy="155448"/>
+          </a:xfrm>
+          <a:prstGeom prst="ellipse">
+            <a:avLst/>
+          </a:prstGeom>
+          <a:solidFill>
+            <a:srgbClr val="1E7C3C"/>
+          </a:solidFill>
+          <a:ln>
+            <a:noFill/>
+          </a:ln>
+          <a:effectLst/>
+        </p:spPr>
+        <p:style>
+          <a:lnRef idx="1">
+            <a:schemeClr val="accent1"/>
+          </a:lnRef>
+          <a:fillRef idx="3">
+            <a:schemeClr val="accent1"/>
+          </a:fillRef>
+          <a:effectRef idx="2">
+            <a:schemeClr val="accent1"/>
+          </a:effectRef>
+          <a:fontRef idx="minor">
+            <a:schemeClr val="lt1"/>
+          </a:fontRef>
+        </p:style>
+        <p:txBody>
+          <a:bodyPr rtlCol="0" anchor="ctr"/>
+          <a:lstStyle/>
+          <a:p>
+            <a:pPr algn="ctr"/>
+          </a:p>
+        </p:txBody>
+      </p:sp>
+      <p:sp>
+        <p:nvSpPr>
+          <p:cNvPr id="80" name="Oval 79"/>
+          <p:cNvSpPr/>
+          <p:nvPr/>
+        </p:nvSpPr>
+        <p:spPr>
+          <a:xfrm>
+            <a:off x="8334756" y="3383280"/>
+            <a:ext cx="155448" cy="155448"/>
+          </a:xfrm>
+          <a:prstGeom prst="ellipse">
+            <a:avLst/>
+          </a:prstGeom>
+          <a:solidFill>
+            <a:srgbClr val="1E7C3C"/>
+          </a:solidFill>
+          <a:ln>
+            <a:noFill/>
+          </a:ln>
+          <a:effectLst/>
+        </p:spPr>
+        <p:style>
+          <a:lnRef idx="1">
+            <a:schemeClr val="accent1"/>
+          </a:lnRef>
+          <a:fillRef idx="3">
+            <a:schemeClr val="accent1"/>
+          </a:fillRef>
+          <a:effectRef idx="2">
+            <a:schemeClr val="accent1"/>
+          </a:effectRef>
+          <a:fontRef idx="minor">
+            <a:schemeClr val="lt1"/>
+          </a:fontRef>
+        </p:style>
+        <p:txBody>
+          <a:bodyPr rtlCol="0" anchor="ctr"/>
+          <a:lstStyle/>
+          <a:p>
+            <a:pPr algn="ctr"/>
+          </a:p>
+        </p:txBody>
+      </p:sp>
+      <p:sp>
+        <p:nvSpPr>
+          <p:cNvPr id="81" name="Oval 80"/>
+          <p:cNvSpPr/>
+          <p:nvPr/>
+        </p:nvSpPr>
+        <p:spPr>
+          <a:xfrm>
+            <a:off x="8622792" y="3383280"/>
+            <a:ext cx="155448" cy="155448"/>
+          </a:xfrm>
+          <a:prstGeom prst="ellipse">
+            <a:avLst/>
+          </a:prstGeom>
+          <a:solidFill>
+            <a:srgbClr val="1E7C3C"/>
+          </a:solidFill>
+          <a:ln>
+            <a:noFill/>
+          </a:ln>
+          <a:effectLst/>
+        </p:spPr>
+        <p:style>
+          <a:lnRef idx="1">
+            <a:schemeClr val="accent1"/>
+          </a:lnRef>
+          <a:fillRef idx="3">
+            <a:schemeClr val="accent1"/>
+          </a:fillRef>
+          <a:effectRef idx="2">
+            <a:schemeClr val="accent1"/>
+          </a:effectRef>
+          <a:fontRef idx="minor">
+            <a:schemeClr val="lt1"/>
+          </a:fontRef>
+        </p:style>
+        <p:txBody>
+          <a:bodyPr rtlCol="0" anchor="ctr"/>
+          <a:lstStyle/>
+          <a:p>
+            <a:pPr algn="ctr"/>
+          </a:p>
+        </p:txBody>
+      </p:sp>
+      <p:sp>
+        <p:nvSpPr>
+          <p:cNvPr id="82" name="Oval 81"/>
+          <p:cNvSpPr/>
+          <p:nvPr/>
+        </p:nvSpPr>
+        <p:spPr>
+          <a:xfrm>
+            <a:off x="8910828" y="3383280"/>
+            <a:ext cx="155448" cy="155448"/>
+          </a:xfrm>
+          <a:prstGeom prst="ellipse">
+            <a:avLst/>
+          </a:prstGeom>
+          <a:solidFill>
+            <a:srgbClr val="1E7C3C"/>
+          </a:solidFill>
+          <a:ln>
+            <a:noFill/>
+          </a:ln>
+          <a:effectLst/>
+        </p:spPr>
+        <p:style>
+          <a:lnRef idx="1">
+            <a:schemeClr val="accent1"/>
+          </a:lnRef>
+          <a:fillRef idx="3">
+            <a:schemeClr val="accent1"/>
+          </a:fillRef>
+          <a:effectRef idx="2">
+            <a:schemeClr val="accent1"/>
+          </a:effectRef>
+          <a:fontRef idx="minor">
+            <a:schemeClr val="lt1"/>
+          </a:fontRef>
+        </p:style>
+        <p:txBody>
+          <a:bodyPr rtlCol="0" anchor="ctr"/>
+          <a:lstStyle/>
+          <a:p>
+            <a:pPr algn="ctr"/>
+          </a:p>
+        </p:txBody>
+      </p:sp>
+      <p:sp>
+        <p:nvSpPr>
+          <p:cNvPr id="83" name="Oval 82"/>
+          <p:cNvSpPr/>
+          <p:nvPr/>
+        </p:nvSpPr>
+        <p:spPr>
+          <a:xfrm>
+            <a:off x="9198864" y="3383280"/>
+            <a:ext cx="155448" cy="155448"/>
+          </a:xfrm>
+          <a:prstGeom prst="ellipse">
+            <a:avLst/>
+          </a:prstGeom>
+          <a:solidFill>
+            <a:srgbClr val="1E7C3C"/>
+          </a:solidFill>
+          <a:ln>
+            <a:noFill/>
+          </a:ln>
+          <a:effectLst/>
+        </p:spPr>
+        <p:style>
+          <a:lnRef idx="1">
+            <a:schemeClr val="accent1"/>
+          </a:lnRef>
+          <a:fillRef idx="3">
+            <a:schemeClr val="accent1"/>
+          </a:fillRef>
+          <a:effectRef idx="2">
+            <a:schemeClr val="accent1"/>
+          </a:effectRef>
+          <a:fontRef idx="minor">
+            <a:schemeClr val="lt1"/>
+          </a:fontRef>
+        </p:style>
+        <p:txBody>
+          <a:bodyPr rtlCol="0" anchor="ctr"/>
+          <a:lstStyle/>
+          <a:p>
+            <a:pPr algn="ctr"/>
+          </a:p>
+        </p:txBody>
+      </p:sp>
+      <p:sp>
+        <p:nvSpPr>
+          <p:cNvPr id="84" name="Oval 83"/>
+          <p:cNvSpPr/>
+          <p:nvPr/>
+        </p:nvSpPr>
+        <p:spPr>
+          <a:xfrm>
+            <a:off x="9486900" y="3383280"/>
+            <a:ext cx="155448" cy="155448"/>
+          </a:xfrm>
+          <a:prstGeom prst="ellipse">
+            <a:avLst/>
+          </a:prstGeom>
+          <a:solidFill>
+            <a:srgbClr val="1E7C3C"/>
+          </a:solidFill>
+          <a:ln>
+            <a:noFill/>
+          </a:ln>
+          <a:effectLst/>
+        </p:spPr>
+        <p:style>
+          <a:lnRef idx="1">
+            <a:schemeClr val="accent1"/>
+          </a:lnRef>
+          <a:fillRef idx="3">
+            <a:schemeClr val="accent1"/>
+          </a:fillRef>
+          <a:effectRef idx="2">
+            <a:schemeClr val="accent1"/>
+          </a:effectRef>
+          <a:fontRef idx="minor">
+            <a:schemeClr val="lt1"/>
+          </a:fontRef>
+        </p:style>
+        <p:txBody>
+          <a:bodyPr rtlCol="0" anchor="ctr"/>
+          <a:lstStyle/>
+          <a:p>
+            <a:pPr algn="ctr"/>
+          </a:p>
+        </p:txBody>
+      </p:sp>
+      <p:sp>
+        <p:nvSpPr>
+          <p:cNvPr id="85" name="Oval 84"/>
+          <p:cNvSpPr/>
+          <p:nvPr/>
+        </p:nvSpPr>
+        <p:spPr>
+          <a:xfrm>
+            <a:off x="9774936" y="3383280"/>
+            <a:ext cx="155448" cy="155448"/>
+          </a:xfrm>
+          <a:prstGeom prst="ellipse">
+            <a:avLst/>
+          </a:prstGeom>
+          <a:solidFill>
+            <a:srgbClr val="1E7C3C"/>
+          </a:solidFill>
+          <a:ln>
+            <a:noFill/>
+          </a:ln>
+          <a:effectLst/>
+        </p:spPr>
+        <p:style>
+          <a:lnRef idx="1">
+            <a:schemeClr val="accent1"/>
+          </a:lnRef>
+          <a:fillRef idx="3">
+            <a:schemeClr val="accent1"/>
+          </a:fillRef>
+          <a:effectRef idx="2">
+            <a:schemeClr val="accent1"/>
+          </a:effectRef>
+          <a:fontRef idx="minor">
+            <a:schemeClr val="lt1"/>
+          </a:fontRef>
+        </p:style>
+        <p:txBody>
+          <a:bodyPr rtlCol="0" anchor="ctr"/>
+          <a:lstStyle/>
+          <a:p>
+            <a:pPr algn="ctr"/>
+          </a:p>
+        </p:txBody>
+      </p:sp>
+      <p:sp>
+        <p:nvSpPr>
+          <p:cNvPr id="86" name="Oval 85"/>
+          <p:cNvSpPr/>
+          <p:nvPr/>
+        </p:nvSpPr>
+        <p:spPr>
+          <a:xfrm>
+            <a:off x="10062972" y="3383280"/>
+            <a:ext cx="155448" cy="155448"/>
+          </a:xfrm>
+          <a:prstGeom prst="ellipse">
+            <a:avLst/>
+          </a:prstGeom>
+          <a:solidFill>
+            <a:srgbClr val="1E7C3C"/>
+          </a:solidFill>
+          <a:ln>
+            <a:noFill/>
+          </a:ln>
+          <a:effectLst/>
+        </p:spPr>
+        <p:style>
+          <a:lnRef idx="1">
+            <a:schemeClr val="accent1"/>
+          </a:lnRef>
+          <a:fillRef idx="3">
+            <a:schemeClr val="accent1"/>
+          </a:fillRef>
+          <a:effectRef idx="2">
+            <a:schemeClr val="accent1"/>
+          </a:effectRef>
+          <a:fontRef idx="minor">
+            <a:schemeClr val="lt1"/>
+          </a:fontRef>
+        </p:style>
+        <p:txBody>
+          <a:bodyPr rtlCol="0" anchor="ctr"/>
+          <a:lstStyle/>
+          <a:p>
+            <a:pPr algn="ctr"/>
+          </a:p>
+        </p:txBody>
+      </p:sp>
+      <p:sp>
+        <p:nvSpPr>
+          <p:cNvPr id="87" name="Oval 86"/>
+          <p:cNvSpPr/>
+          <p:nvPr/>
+        </p:nvSpPr>
+        <p:spPr>
+          <a:xfrm>
+            <a:off x="7470648" y="3657600"/>
+            <a:ext cx="155448" cy="155448"/>
+          </a:xfrm>
+          <a:prstGeom prst="ellipse">
+            <a:avLst/>
+          </a:prstGeom>
+          <a:solidFill>
+            <a:srgbClr val="1E7C3C"/>
+          </a:solidFill>
+          <a:ln>
+            <a:noFill/>
+          </a:ln>
+          <a:effectLst/>
+        </p:spPr>
+        <p:style>
+          <a:lnRef idx="1">
+            <a:schemeClr val="accent1"/>
+          </a:lnRef>
+          <a:fillRef idx="3">
+            <a:schemeClr val="accent1"/>
+          </a:fillRef>
+          <a:effectRef idx="2">
+            <a:schemeClr val="accent1"/>
+          </a:effectRef>
+          <a:fontRef idx="minor">
+            <a:schemeClr val="lt1"/>
+          </a:fontRef>
+        </p:style>
+        <p:txBody>
+          <a:bodyPr rtlCol="0" anchor="ctr"/>
+          <a:lstStyle/>
+          <a:p>
+            <a:pPr algn="ctr"/>
+          </a:p>
+        </p:txBody>
+      </p:sp>
+      <p:sp>
+        <p:nvSpPr>
+          <p:cNvPr id="88" name="Oval 87"/>
+          <p:cNvSpPr/>
+          <p:nvPr/>
+        </p:nvSpPr>
+        <p:spPr>
+          <a:xfrm>
+            <a:off x="7758683" y="3657600"/>
+            <a:ext cx="155448" cy="155448"/>
+          </a:xfrm>
+          <a:prstGeom prst="ellipse">
+            <a:avLst/>
+          </a:prstGeom>
+          <a:solidFill>
+            <a:srgbClr val="1E7C3C"/>
+          </a:solidFill>
+          <a:ln>
+            <a:noFill/>
+          </a:ln>
+          <a:effectLst/>
+        </p:spPr>
+        <p:style>
+          <a:lnRef idx="1">
+            <a:schemeClr val="accent1"/>
+          </a:lnRef>
+          <a:fillRef idx="3">
+            <a:schemeClr val="accent1"/>
+          </a:fillRef>
+          <a:effectRef idx="2">
+            <a:schemeClr val="accent1"/>
+          </a:effectRef>
+          <a:fontRef idx="minor">
+            <a:schemeClr val="lt1"/>
+          </a:fontRef>
+        </p:style>
+        <p:txBody>
+          <a:bodyPr rtlCol="0" anchor="ctr"/>
+          <a:lstStyle/>
+          <a:p>
+            <a:pPr algn="ctr"/>
+          </a:p>
+        </p:txBody>
+      </p:sp>
+      <p:sp>
+        <p:nvSpPr>
+          <p:cNvPr id="89" name="Oval 88"/>
+          <p:cNvSpPr/>
+          <p:nvPr/>
+        </p:nvSpPr>
+        <p:spPr>
+          <a:xfrm>
+            <a:off x="8046720" y="3657600"/>
+            <a:ext cx="155448" cy="155448"/>
+          </a:xfrm>
+          <a:prstGeom prst="ellipse">
+            <a:avLst/>
+          </a:prstGeom>
+          <a:solidFill>
+            <a:srgbClr val="1E7C3C"/>
+          </a:solidFill>
+          <a:ln>
+            <a:noFill/>
+          </a:ln>
+          <a:effectLst/>
+        </p:spPr>
+        <p:style>
+          <a:lnRef idx="1">
+            <a:schemeClr val="accent1"/>
+          </a:lnRef>
+          <a:fillRef idx="3">
+            <a:schemeClr val="accent1"/>
+          </a:fillRef>
+          <a:effectRef idx="2">
+            <a:schemeClr val="accent1"/>
+          </a:effectRef>
+          <a:fontRef idx="minor">
+            <a:schemeClr val="lt1"/>
+          </a:fontRef>
+        </p:style>
+        <p:txBody>
+          <a:bodyPr rtlCol="0" anchor="ctr"/>
+          <a:lstStyle/>
+          <a:p>
+            <a:pPr algn="ctr"/>
+          </a:p>
+        </p:txBody>
+      </p:sp>
+      <p:sp>
+        <p:nvSpPr>
+          <p:cNvPr id="90" name="Oval 89"/>
+          <p:cNvSpPr/>
+          <p:nvPr/>
+        </p:nvSpPr>
+        <p:spPr>
+          <a:xfrm>
+            <a:off x="8334756" y="3657600"/>
+            <a:ext cx="155448" cy="155448"/>
+          </a:xfrm>
+          <a:prstGeom prst="ellipse">
+            <a:avLst/>
+          </a:prstGeom>
+          <a:solidFill>
+            <a:srgbClr val="1E7C3C"/>
+          </a:solidFill>
+          <a:ln>
+            <a:noFill/>
+          </a:ln>
+          <a:effectLst/>
+        </p:spPr>
+        <p:style>
+          <a:lnRef idx="1">
+            <a:schemeClr val="accent1"/>
+          </a:lnRef>
+          <a:fillRef idx="3">
+            <a:schemeClr val="accent1"/>
+          </a:fillRef>
+          <a:effectRef idx="2">
+            <a:schemeClr val="accent1"/>
+          </a:effectRef>
+          <a:fontRef idx="minor">
+            <a:schemeClr val="lt1"/>
+          </a:fontRef>
+        </p:style>
+        <p:txBody>
+          <a:bodyPr rtlCol="0" anchor="ctr"/>
+          <a:lstStyle/>
+          <a:p>
+            <a:pPr algn="ctr"/>
+          </a:p>
+        </p:txBody>
+      </p:sp>
+      <p:sp>
+        <p:nvSpPr>
+          <p:cNvPr id="91" name="Oval 90"/>
+          <p:cNvSpPr/>
+          <p:nvPr/>
+        </p:nvSpPr>
+        <p:spPr>
+          <a:xfrm>
+            <a:off x="8622792" y="3657600"/>
+            <a:ext cx="155448" cy="155448"/>
+          </a:xfrm>
+          <a:prstGeom prst="ellipse">
+            <a:avLst/>
+          </a:prstGeom>
+          <a:solidFill>
+            <a:srgbClr val="1E7C3C"/>
+          </a:solidFill>
+          <a:ln>
+            <a:noFill/>
+          </a:ln>
+          <a:effectLst/>
+        </p:spPr>
+        <p:style>
+          <a:lnRef idx="1">
+            <a:schemeClr val="accent1"/>
+          </a:lnRef>
+          <a:fillRef idx="3">
+            <a:schemeClr val="accent1"/>
+          </a:fillRef>
+          <a:effectRef idx="2">
+            <a:schemeClr val="accent1"/>
+          </a:effectRef>
+          <a:fontRef idx="minor">
+            <a:schemeClr val="lt1"/>
+          </a:fontRef>
+        </p:style>
+        <p:txBody>
+          <a:bodyPr rtlCol="0" anchor="ctr"/>
+          <a:lstStyle/>
+          <a:p>
+            <a:pPr algn="ctr"/>
+          </a:p>
+        </p:txBody>
+      </p:sp>
+      <p:sp>
+        <p:nvSpPr>
+          <p:cNvPr id="92" name="Oval 91"/>
+          <p:cNvSpPr/>
+          <p:nvPr/>
+        </p:nvSpPr>
+        <p:spPr>
+          <a:xfrm>
+            <a:off x="8910828" y="3657600"/>
+            <a:ext cx="155448" cy="155448"/>
+          </a:xfrm>
+          <a:prstGeom prst="ellipse">
+            <a:avLst/>
+          </a:prstGeom>
+          <a:solidFill>
+            <a:srgbClr val="1E7C3C"/>
+          </a:solidFill>
+          <a:ln>
+            <a:noFill/>
+          </a:ln>
+          <a:effectLst/>
+        </p:spPr>
+        <p:style>
+          <a:lnRef idx="1">
+            <a:schemeClr val="accent1"/>
+          </a:lnRef>
+          <a:fillRef idx="3">
+            <a:schemeClr val="accent1"/>
+          </a:fillRef>
+          <a:effectRef idx="2">
+            <a:schemeClr val="accent1"/>
+          </a:effectRef>
+          <a:fontRef idx="minor">
+            <a:schemeClr val="lt1"/>
+          </a:fontRef>
+        </p:style>
+        <p:txBody>
+          <a:bodyPr rtlCol="0" anchor="ctr"/>
+          <a:lstStyle/>
+          <a:p>
+            <a:pPr algn="ctr"/>
+          </a:p>
+        </p:txBody>
+      </p:sp>
+      <p:sp>
+        <p:nvSpPr>
+          <p:cNvPr id="93" name="Oval 92"/>
+          <p:cNvSpPr/>
+          <p:nvPr/>
+        </p:nvSpPr>
+        <p:spPr>
+          <a:xfrm>
+            <a:off x="9198864" y="3657600"/>
+            <a:ext cx="155448" cy="155448"/>
+          </a:xfrm>
+          <a:prstGeom prst="ellipse">
+            <a:avLst/>
+          </a:prstGeom>
+          <a:solidFill>
+            <a:srgbClr val="1E7C3C"/>
+          </a:solidFill>
+          <a:ln>
+            <a:noFill/>
+          </a:ln>
+          <a:effectLst/>
+        </p:spPr>
+        <p:style>
+          <a:lnRef idx="1">
+            <a:schemeClr val="accent1"/>
+          </a:lnRef>
+          <a:fillRef idx="3">
+            <a:schemeClr val="accent1"/>
+          </a:fillRef>
+          <a:effectRef idx="2">
+            <a:schemeClr val="accent1"/>
+          </a:effectRef>
+          <a:fontRef idx="minor">
+            <a:schemeClr val="lt1"/>
+          </a:fontRef>
+        </p:style>
+        <p:txBody>
+          <a:bodyPr rtlCol="0" anchor="ctr"/>
+          <a:lstStyle/>
+          <a:p>
+            <a:pPr algn="ctr"/>
+          </a:p>
+        </p:txBody>
+      </p:sp>
+      <p:sp>
+        <p:nvSpPr>
+          <p:cNvPr id="94" name="Oval 93"/>
+          <p:cNvSpPr/>
+          <p:nvPr/>
+        </p:nvSpPr>
+        <p:spPr>
+          <a:xfrm>
+            <a:off x="9486900" y="3657600"/>
+            <a:ext cx="155448" cy="155448"/>
+          </a:xfrm>
+          <a:prstGeom prst="ellipse">
+            <a:avLst/>
+          </a:prstGeom>
+          <a:solidFill>
+            <a:srgbClr val="1E7C3C"/>
+          </a:solidFill>
+          <a:ln>
+            <a:noFill/>
+          </a:ln>
+          <a:effectLst/>
+        </p:spPr>
+        <p:style>
+          <a:lnRef idx="1">
+            <a:schemeClr val="accent1"/>
+          </a:lnRef>
+          <a:fillRef idx="3">
+            <a:schemeClr val="accent1"/>
+          </a:fillRef>
+          <a:effectRef idx="2">
+            <a:schemeClr val="accent1"/>
+          </a:effectRef>
+          <a:fontRef idx="minor">
+            <a:schemeClr val="lt1"/>
+          </a:fontRef>
+        </p:style>
+        <p:txBody>
+          <a:bodyPr rtlCol="0" anchor="ctr"/>
+          <a:lstStyle/>
+          <a:p>
+            <a:pPr algn="ctr"/>
+          </a:p>
+        </p:txBody>
+      </p:sp>
+      <p:sp>
+        <p:nvSpPr>
+          <p:cNvPr id="95" name="Oval 94"/>
+          <p:cNvSpPr/>
+          <p:nvPr/>
+        </p:nvSpPr>
+        <p:spPr>
+          <a:xfrm>
+            <a:off x="9774936" y="3657600"/>
+            <a:ext cx="155448" cy="155448"/>
+          </a:xfrm>
+          <a:prstGeom prst="ellipse">
+            <a:avLst/>
+          </a:prstGeom>
+          <a:solidFill>
+            <a:srgbClr val="1E7C3C"/>
+          </a:solidFill>
+          <a:ln>
+            <a:noFill/>
+          </a:ln>
+          <a:effectLst/>
+        </p:spPr>
+        <p:style>
+          <a:lnRef idx="1">
+            <a:schemeClr val="accent1"/>
+          </a:lnRef>
+          <a:fillRef idx="3">
+            <a:schemeClr val="accent1"/>
+          </a:fillRef>
+          <a:effectRef idx="2">
+            <a:schemeClr val="accent1"/>
+          </a:effectRef>
+          <a:fontRef idx="minor">
+            <a:schemeClr val="lt1"/>
+          </a:fontRef>
+        </p:style>
+        <p:txBody>
+          <a:bodyPr rtlCol="0" anchor="ctr"/>
+          <a:lstStyle/>
+          <a:p>
+            <a:pPr algn="ctr"/>
+          </a:p>
+        </p:txBody>
+      </p:sp>
+      <p:sp>
+        <p:nvSpPr>
+          <p:cNvPr id="96" name="Oval 95"/>
+          <p:cNvSpPr/>
+          <p:nvPr/>
+        </p:nvSpPr>
+        <p:spPr>
+          <a:xfrm>
+            <a:off x="10062972" y="3657600"/>
+            <a:ext cx="155448" cy="155448"/>
+          </a:xfrm>
+          <a:prstGeom prst="ellipse">
+            <a:avLst/>
+          </a:prstGeom>
+          <a:solidFill>
+            <a:srgbClr val="1E7C3C"/>
+          </a:solidFill>
+          <a:ln>
+            <a:noFill/>
+          </a:ln>
+          <a:effectLst/>
+        </p:spPr>
+        <p:style>
+          <a:lnRef idx="1">
+            <a:schemeClr val="accent1"/>
+          </a:lnRef>
+          <a:fillRef idx="3">
+            <a:schemeClr val="accent1"/>
+          </a:fillRef>
+          <a:effectRef idx="2">
+            <a:schemeClr val="accent1"/>
+          </a:effectRef>
+          <a:fontRef idx="minor">
+            <a:schemeClr val="lt1"/>
+          </a:fontRef>
+        </p:style>
+        <p:txBody>
+          <a:bodyPr rtlCol="0" anchor="ctr"/>
+          <a:lstStyle/>
+          <a:p>
+            <a:pPr algn="ctr"/>
+          </a:p>
+        </p:txBody>
+      </p:sp>
+      <p:sp>
+        <p:nvSpPr>
+          <p:cNvPr id="97" name="Oval 96"/>
+          <p:cNvSpPr/>
+          <p:nvPr/>
+        </p:nvSpPr>
+        <p:spPr>
+          <a:xfrm>
+            <a:off x="7470648" y="3931920"/>
+            <a:ext cx="155448" cy="155448"/>
+          </a:xfrm>
+          <a:prstGeom prst="ellipse">
+            <a:avLst/>
+          </a:prstGeom>
+          <a:solidFill>
+            <a:srgbClr val="1E7C3C"/>
+          </a:solidFill>
+          <a:ln>
+            <a:noFill/>
+          </a:ln>
+          <a:effectLst/>
+        </p:spPr>
+        <p:style>
+          <a:lnRef idx="1">
+            <a:schemeClr val="accent1"/>
+          </a:lnRef>
+          <a:fillRef idx="3">
+            <a:schemeClr val="accent1"/>
+          </a:fillRef>
+          <a:effectRef idx="2">
+            <a:schemeClr val="accent1"/>
+          </a:effectRef>
+          <a:fontRef idx="minor">
+            <a:schemeClr val="lt1"/>
+          </a:fontRef>
+        </p:style>
+        <p:txBody>
+          <a:bodyPr rtlCol="0" anchor="ctr"/>
+          <a:lstStyle/>
+          <a:p>
+            <a:pPr algn="ctr"/>
+          </a:p>
+        </p:txBody>
+      </p:sp>
+      <p:sp>
+        <p:nvSpPr>
+          <p:cNvPr id="98" name="Oval 97"/>
+          <p:cNvSpPr/>
+          <p:nvPr/>
+        </p:nvSpPr>
+        <p:spPr>
+          <a:xfrm>
+            <a:off x="7758683" y="3931920"/>
+            <a:ext cx="155448" cy="155448"/>
+          </a:xfrm>
+          <a:prstGeom prst="ellipse">
+            <a:avLst/>
+          </a:prstGeom>
+          <a:solidFill>
+            <a:srgbClr val="1E7C3C"/>
+          </a:solidFill>
+          <a:ln>
+            <a:noFill/>
+          </a:ln>
+          <a:effectLst/>
+        </p:spPr>
+        <p:style>
+          <a:lnRef idx="1">
+            <a:schemeClr val="accent1"/>
+          </a:lnRef>
+          <a:fillRef idx="3">
+            <a:schemeClr val="accent1"/>
+          </a:fillRef>
+          <a:effectRef idx="2">
+            <a:schemeClr val="accent1"/>
+          </a:effectRef>
+          <a:fontRef idx="minor">
+            <a:schemeClr val="lt1"/>
+          </a:fontRef>
+        </p:style>
+        <p:txBody>
+          <a:bodyPr rtlCol="0" anchor="ctr"/>
+          <a:lstStyle/>
+          <a:p>
+            <a:pPr algn="ctr"/>
+          </a:p>
+        </p:txBody>
+      </p:sp>
+      <p:sp>
+        <p:nvSpPr>
+          <p:cNvPr id="99" name="Oval 98"/>
+          <p:cNvSpPr/>
+          <p:nvPr/>
+        </p:nvSpPr>
+        <p:spPr>
+          <a:xfrm>
+            <a:off x="8046720" y="3931920"/>
+            <a:ext cx="155448" cy="155448"/>
+          </a:xfrm>
+          <a:prstGeom prst="ellipse">
+            <a:avLst/>
+          </a:prstGeom>
+          <a:solidFill>
+            <a:srgbClr val="1E7C3C"/>
+          </a:solidFill>
+          <a:ln>
+            <a:noFill/>
+          </a:ln>
+          <a:effectLst/>
+        </p:spPr>
+        <p:style>
+          <a:lnRef idx="1">
+            <a:schemeClr val="accent1"/>
+          </a:lnRef>
+          <a:fillRef idx="3">
+            <a:schemeClr val="accent1"/>
+          </a:fillRef>
+          <a:effectRef idx="2">
+            <a:schemeClr val="accent1"/>
+          </a:effectRef>
+          <a:fontRef idx="minor">
+            <a:schemeClr val="lt1"/>
+          </a:fontRef>
+        </p:style>
+        <p:txBody>
+          <a:bodyPr rtlCol="0" anchor="ctr"/>
+          <a:lstStyle/>
+          <a:p>
+            <a:pPr algn="ctr"/>
+          </a:p>
+        </p:txBody>
+      </p:sp>
+      <p:sp>
+        <p:nvSpPr>
+          <p:cNvPr id="100" name="Oval 99"/>
+          <p:cNvSpPr/>
+          <p:nvPr/>
+        </p:nvSpPr>
+        <p:spPr>
+          <a:xfrm>
+            <a:off x="8334756" y="3931920"/>
+            <a:ext cx="155448" cy="155448"/>
+          </a:xfrm>
+          <a:prstGeom prst="ellipse">
+            <a:avLst/>
+          </a:prstGeom>
+          <a:solidFill>
+            <a:srgbClr val="1E7C3C"/>
+          </a:solidFill>
+          <a:ln>
+            <a:noFill/>
+          </a:ln>
+          <a:effectLst/>
+        </p:spPr>
+        <p:style>
+          <a:lnRef idx="1">
+            <a:schemeClr val="accent1"/>
+          </a:lnRef>
+          <a:fillRef idx="3">
+            <a:schemeClr val="accent1"/>
+          </a:fillRef>
+          <a:effectRef idx="2">
+            <a:schemeClr val="accent1"/>
+          </a:effectRef>
+          <a:fontRef idx="minor">
+            <a:schemeClr val="lt1"/>
+          </a:fontRef>
+        </p:style>
+        <p:txBody>
+          <a:bodyPr rtlCol="0" anchor="ctr"/>
+          <a:lstStyle/>
+          <a:p>
+            <a:pPr algn="ctr"/>
+          </a:p>
+        </p:txBody>
+      </p:sp>
+      <p:sp>
+        <p:nvSpPr>
+          <p:cNvPr id="101" name="Oval 100"/>
+          <p:cNvSpPr/>
+          <p:nvPr/>
+        </p:nvSpPr>
+        <p:spPr>
+          <a:xfrm>
+            <a:off x="8622792" y="3931920"/>
+            <a:ext cx="155448" cy="155448"/>
+          </a:xfrm>
+          <a:prstGeom prst="ellipse">
+            <a:avLst/>
+          </a:prstGeom>
+          <a:solidFill>
+            <a:srgbClr val="1E7C3C"/>
+          </a:solidFill>
+          <a:ln>
+            <a:noFill/>
+          </a:ln>
+          <a:effectLst/>
+        </p:spPr>
+        <p:style>
+          <a:lnRef idx="1">
+            <a:schemeClr val="accent1"/>
+          </a:lnRef>
+          <a:fillRef idx="3">
+            <a:schemeClr val="accent1"/>
+          </a:fillRef>
+          <a:effectRef idx="2">
+            <a:schemeClr val="accent1"/>
+          </a:effectRef>
+          <a:fontRef idx="minor">
+            <a:schemeClr val="lt1"/>
+          </a:fontRef>
+        </p:style>
+        <p:txBody>
+          <a:bodyPr rtlCol="0" anchor="ctr"/>
+          <a:lstStyle/>
+          <a:p>
+            <a:pPr algn="ctr"/>
+          </a:p>
+        </p:txBody>
+      </p:sp>
+      <p:sp>
+        <p:nvSpPr>
+          <p:cNvPr id="102" name="Oval 101"/>
+          <p:cNvSpPr/>
+          <p:nvPr/>
+        </p:nvSpPr>
+        <p:spPr>
+          <a:xfrm>
+            <a:off x="8910828" y="3931920"/>
+            <a:ext cx="155448" cy="155448"/>
+          </a:xfrm>
+          <a:prstGeom prst="ellipse">
+            <a:avLst/>
+          </a:prstGeom>
+          <a:solidFill>
+            <a:srgbClr val="1E7C3C"/>
+          </a:solidFill>
+          <a:ln>
+            <a:noFill/>
+          </a:ln>
+          <a:effectLst/>
+        </p:spPr>
+        <p:style>
+          <a:lnRef idx="1">
+            <a:schemeClr val="accent1"/>
+          </a:lnRef>
+          <a:fillRef idx="3">
+            <a:schemeClr val="accent1"/>
+          </a:fillRef>
+          <a:effectRef idx="2">
+            <a:schemeClr val="accent1"/>
+          </a:effectRef>
+          <a:fontRef idx="minor">
+            <a:schemeClr val="lt1"/>
+          </a:fontRef>
+        </p:style>
+        <p:txBody>
+          <a:bodyPr rtlCol="0" anchor="ctr"/>
+          <a:lstStyle/>
+          <a:p>
+            <a:pPr algn="ctr"/>
+          </a:p>
+        </p:txBody>
+      </p:sp>
+      <p:sp>
+        <p:nvSpPr>
+          <p:cNvPr id="103" name="Oval 102"/>
+          <p:cNvSpPr/>
+          <p:nvPr/>
+        </p:nvSpPr>
+        <p:spPr>
+          <a:xfrm>
+            <a:off x="9198864" y="3931920"/>
+            <a:ext cx="155448" cy="155448"/>
+          </a:xfrm>
+          <a:prstGeom prst="ellipse">
+            <a:avLst/>
+          </a:prstGeom>
+          <a:solidFill>
+            <a:srgbClr val="1E7C3C"/>
+          </a:solidFill>
+          <a:ln>
+            <a:noFill/>
+          </a:ln>
+          <a:effectLst/>
+        </p:spPr>
+        <p:style>
+          <a:lnRef idx="1">
+            <a:schemeClr val="accent1"/>
+          </a:lnRef>
+          <a:fillRef idx="3">
+            <a:schemeClr val="accent1"/>
+          </a:fillRef>
+          <a:effectRef idx="2">
+            <a:schemeClr val="accent1"/>
+          </a:effectRef>
+          <a:fontRef idx="minor">
+            <a:schemeClr val="lt1"/>
+          </a:fontRef>
+        </p:style>
+        <p:txBody>
+          <a:bodyPr rtlCol="0" anchor="ctr"/>
+          <a:lstStyle/>
+          <a:p>
+            <a:pPr algn="ctr"/>
+          </a:p>
+        </p:txBody>
+      </p:sp>
+      <p:sp>
+        <p:nvSpPr>
+          <p:cNvPr id="104" name="Oval 103"/>
+          <p:cNvSpPr/>
+          <p:nvPr/>
+        </p:nvSpPr>
+        <p:spPr>
+          <a:xfrm>
+            <a:off x="9486900" y="3931920"/>
+            <a:ext cx="155448" cy="155448"/>
+          </a:xfrm>
+          <a:prstGeom prst="ellipse">
+            <a:avLst/>
+          </a:prstGeom>
+          <a:solidFill>
+            <a:srgbClr val="1E7C3C"/>
+          </a:solidFill>
+          <a:ln>
+            <a:noFill/>
+          </a:ln>
+          <a:effectLst/>
+        </p:spPr>
+        <p:style>
+          <a:lnRef idx="1">
+            <a:schemeClr val="accent1"/>
+          </a:lnRef>
+          <a:fillRef idx="3">
+            <a:schemeClr val="accent1"/>
+          </a:fillRef>
+          <a:effectRef idx="2">
+            <a:schemeClr val="accent1"/>
+          </a:effectRef>
+          <a:fontRef idx="minor">
+            <a:schemeClr val="lt1"/>
+          </a:fontRef>
+        </p:style>
+        <p:txBody>
+          <a:bodyPr rtlCol="0" anchor="ctr"/>
+          <a:lstStyle/>
+          <a:p>
+            <a:pPr algn="ctr"/>
+          </a:p>
+        </p:txBody>
+      </p:sp>
+      <p:sp>
+        <p:nvSpPr>
+          <p:cNvPr id="105" name="Oval 104"/>
+          <p:cNvSpPr/>
+          <p:nvPr/>
+        </p:nvSpPr>
+        <p:spPr>
+          <a:xfrm>
+            <a:off x="9774936" y="3931920"/>
+            <a:ext cx="155448" cy="155448"/>
+          </a:xfrm>
+          <a:prstGeom prst="ellipse">
+            <a:avLst/>
+          </a:prstGeom>
+          <a:solidFill>
+            <a:srgbClr val="1E7C3C"/>
+          </a:solidFill>
+          <a:ln>
+            <a:noFill/>
+          </a:ln>
+          <a:effectLst/>
+        </p:spPr>
+        <p:style>
+          <a:lnRef idx="1">
+            <a:schemeClr val="accent1"/>
+          </a:lnRef>
+          <a:fillRef idx="3">
+            <a:schemeClr val="accent1"/>
+          </a:fillRef>
+          <a:effectRef idx="2">
+            <a:schemeClr val="accent1"/>
+          </a:effectRef>
+          <a:fontRef idx="minor">
+            <a:schemeClr val="lt1"/>
+          </a:fontRef>
+        </p:style>
+        <p:txBody>
+          <a:bodyPr rtlCol="0" anchor="ctr"/>
+          <a:lstStyle/>
+          <a:p>
+            <a:pPr algn="ctr"/>
+          </a:p>
+        </p:txBody>
+      </p:sp>
+      <p:sp>
+        <p:nvSpPr>
+          <p:cNvPr id="106" name="Oval 105"/>
+          <p:cNvSpPr/>
+          <p:nvPr/>
+        </p:nvSpPr>
+        <p:spPr>
+          <a:xfrm>
+            <a:off x="10062972" y="3931920"/>
+            <a:ext cx="155448" cy="155448"/>
+          </a:xfrm>
+          <a:prstGeom prst="ellipse">
+            <a:avLst/>
+          </a:prstGeom>
+          <a:solidFill>
+            <a:srgbClr val="1E7C3C"/>
+          </a:solidFill>
+          <a:ln>
+            <a:noFill/>
+          </a:ln>
+          <a:effectLst/>
+        </p:spPr>
+        <p:style>
+          <a:lnRef idx="1">
+            <a:schemeClr val="accent1"/>
+          </a:lnRef>
+          <a:fillRef idx="3">
+            <a:schemeClr val="accent1"/>
+          </a:fillRef>
+          <a:effectRef idx="2">
+            <a:schemeClr val="accent1"/>
+          </a:effectRef>
+          <a:fontRef idx="minor">
+            <a:schemeClr val="lt1"/>
+          </a:fontRef>
+        </p:style>
+        <p:txBody>
+          <a:bodyPr rtlCol="0" anchor="ctr"/>
+          <a:lstStyle/>
+          <a:p>
+            <a:pPr algn="ctr"/>
+          </a:p>
+        </p:txBody>
+      </p:sp>
+      <p:sp>
+        <p:nvSpPr>
+          <p:cNvPr id="107" name="TextBox 106"/>
+          <p:cNvSpPr txBox="1"/>
+          <p:nvPr/>
+        </p:nvSpPr>
+        <p:spPr>
+          <a:xfrm>
+            <a:off x="6437376" y="4297680"/>
+            <a:ext cx="4992624" cy="475488"/>
+          </a:xfrm>
+          <a:prstGeom prst="rect">
+            <a:avLst/>
+          </a:prstGeom>
+          <a:noFill/>
+        </p:spPr>
+        <p:txBody>
+          <a:bodyPr wrap="square" lIns="0" rIns="0" tIns="0" bIns="0" anchor="ctr">
+            <a:spAutoFit/>
+          </a:bodyPr>
+          <a:lstStyle/>
+          <a:p>
+            <a:pPr algn="l"/>
+            <a:r>
+              <a:rPr sz="1150" b="1">
+                <a:solidFill>
+                  <a:srgbClr val="232F3E"/>
+                </a:solidFill>
+                <a:latin typeface="Calibri"/>
+              </a:rPr>
+              <a:t>1 / 40 sessions lost — the caller. Thirty-nine never notice.</a:t>
+            </a:r>
+          </a:p>
+        </p:txBody>
+      </p:sp>
+      <p:sp>
+        <p:nvSpPr>
+          <p:cNvPr id="108" name="Rounded Rectangle 107"/>
+          <p:cNvSpPr/>
+          <p:nvPr/>
+        </p:nvSpPr>
+        <p:spPr>
+          <a:xfrm>
+            <a:off x="566928" y="5029200"/>
+            <a:ext cx="3584448" cy="475488"/>
+          </a:xfrm>
+          <a:prstGeom prst="roundRect">
+            <a:avLst>
+              <a:gd name="adj" fmla="val 11538"/>
+            </a:avLst>
+          </a:prstGeom>
+          <a:solidFill>
+            <a:srgbClr val="F7F8FA"/>
+          </a:solidFill>
+          <a:ln w="12700">
+            <a:solidFill>
+              <a:srgbClr val="E4E7EA"/>
+            </a:solidFill>
+          </a:ln>
+          <a:effectLst/>
+        </p:spPr>
+        <p:style>
+          <a:lnRef idx="1">
+            <a:schemeClr val="accent1"/>
+          </a:lnRef>
+          <a:fillRef idx="3">
+            <a:schemeClr val="accent1"/>
+          </a:fillRef>
+          <a:effectRef idx="2">
+            <a:schemeClr val="accent1"/>
+          </a:effectRef>
+          <a:fontRef idx="minor">
+            <a:schemeClr val="lt1"/>
+          </a:fontRef>
+        </p:style>
+        <p:txBody>
+          <a:bodyPr rtlCol="0" anchor="ctr"/>
+          <a:lstStyle/>
+          <a:p>
+            <a:pPr algn="ctr"/>
+          </a:p>
+        </p:txBody>
+      </p:sp>
+      <p:sp>
+        <p:nvSpPr>
+          <p:cNvPr id="109" name="TextBox 108"/>
+          <p:cNvSpPr txBox="1"/>
+          <p:nvPr/>
+        </p:nvSpPr>
+        <p:spPr>
+          <a:xfrm>
+            <a:off x="713232" y="5029200"/>
+            <a:ext cx="3291840" cy="475488"/>
+          </a:xfrm>
+          <a:prstGeom prst="rect">
+            <a:avLst/>
+          </a:prstGeom>
+          <a:noFill/>
+        </p:spPr>
+        <p:txBody>
+          <a:bodyPr wrap="square" lIns="0" rIns="0" tIns="0" bIns="0" anchor="ctr">
+            <a:spAutoFit/>
+          </a:bodyPr>
+          <a:lstStyle/>
+          <a:p>
+            <a:pPr algn="l"/>
+            <a:r>
+              <a:rPr sz="1000" b="1">
+                <a:solidFill>
+                  <a:srgbClr val="232F3E"/>
+                </a:solidFill>
+                <a:latin typeface="Calibri"/>
+              </a:rPr>
+              <a:t>Unhandled rejection — </a:t>
+            </a:r>
+            <a:r>
+              <a:rPr sz="1000" b="0">
+                <a:solidFill>
+                  <a:srgbClr val="16191F"/>
+                </a:solidFill>
+                <a:latin typeface="Calibri"/>
+              </a:rPr>
+              <a:t>one turn throws; the shared process exits.</a:t>
+            </a:r>
+          </a:p>
+        </p:txBody>
+      </p:sp>
+      <p:sp>
+        <p:nvSpPr>
+          <p:cNvPr id="110" name="Rounded Rectangle 109"/>
+          <p:cNvSpPr/>
+          <p:nvPr/>
+        </p:nvSpPr>
+        <p:spPr>
+          <a:xfrm>
+            <a:off x="4306824" y="5029200"/>
+            <a:ext cx="3584448" cy="475488"/>
+          </a:xfrm>
+          <a:prstGeom prst="roundRect">
+            <a:avLst>
+              <a:gd name="adj" fmla="val 11538"/>
+            </a:avLst>
+          </a:prstGeom>
+          <a:solidFill>
+            <a:srgbClr val="F7F8FA"/>
+          </a:solidFill>
+          <a:ln w="12700">
+            <a:solidFill>
+              <a:srgbClr val="E4E7EA"/>
+            </a:solidFill>
+          </a:ln>
+          <a:effectLst/>
+        </p:spPr>
+        <p:style>
+          <a:lnRef idx="1">
+            <a:schemeClr val="accent1"/>
+          </a:lnRef>
+          <a:fillRef idx="3">
+            <a:schemeClr val="accent1"/>
+          </a:fillRef>
+          <a:effectRef idx="2">
+            <a:schemeClr val="accent1"/>
+          </a:effectRef>
+          <a:fontRef idx="minor">
+            <a:schemeClr val="lt1"/>
+          </a:fontRef>
+        </p:style>
+        <p:txBody>
+          <a:bodyPr rtlCol="0" anchor="ctr"/>
+          <a:lstStyle/>
+          <a:p>
+            <a:pPr algn="ctr"/>
+          </a:p>
+        </p:txBody>
+      </p:sp>
+      <p:sp>
+        <p:nvSpPr>
+          <p:cNvPr id="111" name="TextBox 110"/>
+          <p:cNvSpPr txBox="1"/>
+          <p:nvPr/>
+        </p:nvSpPr>
+        <p:spPr>
+          <a:xfrm>
+            <a:off x="4453128" y="5029200"/>
+            <a:ext cx="3291840" cy="475488"/>
+          </a:xfrm>
+          <a:prstGeom prst="rect">
+            <a:avLst/>
+          </a:prstGeom>
+          <a:noFill/>
+        </p:spPr>
+        <p:txBody>
+          <a:bodyPr wrap="square" lIns="0" rIns="0" tIns="0" bIns="0" anchor="ctr">
+            <a:spAutoFit/>
+          </a:bodyPr>
+          <a:lstStyle/>
+          <a:p>
+            <a:pPr algn="l"/>
+            <a:r>
+              <a:rPr sz="1000" b="1">
+                <a:solidFill>
+                  <a:srgbClr val="232F3E"/>
+                </a:solidFill>
+                <a:latin typeface="Calibri"/>
+              </a:rPr>
+              <a:t>Out of memory — </a:t>
+            </a:r>
+            <a:r>
+              <a:rPr sz="1000" b="0">
+                <a:solidFill>
+                  <a:srgbClr val="16191F"/>
+                </a:solidFill>
+                <a:latin typeface="Calibri"/>
+              </a:rPr>
+              <a:t>one runaway conversation exhausts the one heap.</a:t>
+            </a:r>
+          </a:p>
+        </p:txBody>
+      </p:sp>
+      <p:sp>
+        <p:nvSpPr>
+          <p:cNvPr id="112" name="Rounded Rectangle 111"/>
+          <p:cNvSpPr/>
+          <p:nvPr/>
+        </p:nvSpPr>
+        <p:spPr>
+          <a:xfrm>
+            <a:off x="8046719" y="5029200"/>
+            <a:ext cx="3584448" cy="475488"/>
+          </a:xfrm>
+          <a:prstGeom prst="roundRect">
+            <a:avLst>
+              <a:gd name="adj" fmla="val 11538"/>
+            </a:avLst>
+          </a:prstGeom>
+          <a:solidFill>
+            <a:srgbClr val="F7F8FA"/>
+          </a:solidFill>
+          <a:ln w="12700">
+            <a:solidFill>
+              <a:srgbClr val="E4E7EA"/>
+            </a:solidFill>
+          </a:ln>
+          <a:effectLst/>
+        </p:spPr>
+        <p:style>
+          <a:lnRef idx="1">
+            <a:schemeClr val="accent1"/>
+          </a:lnRef>
+          <a:fillRef idx="3">
+            <a:schemeClr val="accent1"/>
+          </a:fillRef>
+          <a:effectRef idx="2">
+            <a:schemeClr val="accent1"/>
+          </a:effectRef>
+          <a:fontRef idx="minor">
+            <a:schemeClr val="lt1"/>
+          </a:fontRef>
+        </p:style>
+        <p:txBody>
+          <a:bodyPr rtlCol="0" anchor="ctr"/>
+          <a:lstStyle/>
+          <a:p>
+            <a:pPr algn="ctr"/>
+          </a:p>
+        </p:txBody>
+      </p:sp>
+      <p:sp>
+        <p:nvSpPr>
+          <p:cNvPr id="113" name="TextBox 112"/>
+          <p:cNvSpPr txBox="1"/>
+          <p:nvPr/>
+        </p:nvSpPr>
+        <p:spPr>
+          <a:xfrm>
+            <a:off x="8193023" y="5029200"/>
+            <a:ext cx="3291840" cy="475488"/>
+          </a:xfrm>
+          <a:prstGeom prst="rect">
+            <a:avLst/>
+          </a:prstGeom>
+          <a:noFill/>
+        </p:spPr>
+        <p:txBody>
+          <a:bodyPr wrap="square" lIns="0" rIns="0" tIns="0" bIns="0" anchor="ctr">
+            <a:spAutoFit/>
+          </a:bodyPr>
+          <a:lstStyle/>
+          <a:p>
+            <a:pPr algn="l"/>
+            <a:r>
+              <a:rPr sz="1000" b="1">
+                <a:solidFill>
+                  <a:srgbClr val="232F3E"/>
+                </a:solidFill>
+                <a:latin typeface="Calibri"/>
+              </a:rPr>
+              <a:t>Injection that pivots — </a:t>
+            </a:r>
+            <a:r>
+              <a:rPr sz="1000" b="0">
+                <a:solidFill>
+                  <a:srgbClr val="16191F"/>
+                </a:solidFill>
+                <a:latin typeface="Calibri"/>
+              </a:rPr>
+              <a:t>reaches the registry and every user’s tokens.</a:t>
+            </a:r>
+          </a:p>
+        </p:txBody>
+      </p:sp>
+      <p:sp>
+        <p:nvSpPr>
+          <p:cNvPr id="114" name="Rounded Rectangle 113"/>
+          <p:cNvSpPr/>
+          <p:nvPr/>
+        </p:nvSpPr>
+        <p:spPr>
+          <a:xfrm>
+            <a:off x="566928" y="5614416"/>
+            <a:ext cx="11064240" cy="566928"/>
+          </a:xfrm>
+          <a:prstGeom prst="roundRect">
+            <a:avLst>
+              <a:gd name="adj" fmla="val 16129"/>
+            </a:avLst>
+          </a:prstGeom>
+          <a:solidFill>
+            <a:srgbClr val="FFEFD6"/>
+          </a:solidFill>
+          <a:ln>
+            <a:noFill/>
+          </a:ln>
+          <a:effectLst/>
+        </p:spPr>
+        <p:style>
+          <a:lnRef idx="1">
+            <a:schemeClr val="accent1"/>
+          </a:lnRef>
+          <a:fillRef idx="3">
+            <a:schemeClr val="accent1"/>
+          </a:fillRef>
+          <a:effectRef idx="2">
+            <a:schemeClr val="accent1"/>
+          </a:effectRef>
+          <a:fontRef idx="minor">
+            <a:schemeClr val="lt1"/>
+          </a:fontRef>
+        </p:style>
+        <p:txBody>
+          <a:bodyPr rtlCol="0" anchor="ctr"/>
+          <a:lstStyle/>
+          <a:p>
+            <a:pPr algn="ctr"/>
+          </a:p>
+        </p:txBody>
+      </p:sp>
+      <p:sp>
+        <p:nvSpPr>
+          <p:cNvPr id="115" name="TextBox 114"/>
+          <p:cNvSpPr txBox="1"/>
+          <p:nvPr/>
+        </p:nvSpPr>
+        <p:spPr>
+          <a:xfrm>
+            <a:off x="804672" y="5614416"/>
+            <a:ext cx="2103120" cy="566928"/>
+          </a:xfrm>
+          <a:prstGeom prst="rect">
+            <a:avLst/>
+          </a:prstGeom>
+          <a:noFill/>
+        </p:spPr>
+        <p:txBody>
+          <a:bodyPr wrap="square" lIns="0" rIns="0" tIns="0" bIns="0" anchor="ctr">
+            <a:spAutoFit/>
+          </a:bodyPr>
+          <a:lstStyle/>
+          <a:p>
+            <a:pPr algn="l"/>
+            <a:r>
+              <a:rPr sz="2400" b="1">
+                <a:solidFill>
+                  <a:srgbClr val="FF9900"/>
+                </a:solidFill>
+                <a:latin typeface="Calibri"/>
+              </a:rPr>
+              <a:t>40 → 1</a:t>
+            </a:r>
+          </a:p>
+        </p:txBody>
+      </p:sp>
+      <p:sp>
+        <p:nvSpPr>
+          <p:cNvPr id="116" name="Rounded Rectangle 115"/>
+          <p:cNvSpPr/>
+          <p:nvPr/>
+        </p:nvSpPr>
+        <p:spPr>
+          <a:xfrm>
+            <a:off x="9966960" y="5769864"/>
+            <a:ext cx="1426464" cy="256032"/>
+          </a:xfrm>
+          <a:prstGeom prst="roundRect">
+            <a:avLst>
+              <a:gd name="adj" fmla="val 46428"/>
+            </a:avLst>
+          </a:prstGeom>
+          <a:solidFill>
+            <a:srgbClr val="1E7C3C"/>
+          </a:solidFill>
+          <a:ln>
+            <a:noFill/>
+          </a:ln>
+          <a:effectLst/>
+        </p:spPr>
+        <p:style>
+          <a:lnRef idx="1">
+            <a:schemeClr val="accent1"/>
+          </a:lnRef>
+          <a:fillRef idx="3">
+            <a:schemeClr val="accent1"/>
+          </a:fillRef>
+          <a:effectRef idx="2">
+            <a:schemeClr val="accent1"/>
+          </a:effectRef>
+          <a:fontRef idx="minor">
+            <a:schemeClr val="lt1"/>
+          </a:fontRef>
+        </p:style>
+        <p:txBody>
+          <a:bodyPr rtlCol="0" anchor="ctr"/>
+          <a:lstStyle/>
+          <a:p>
+            <a:pPr algn="ctr"/>
+          </a:p>
+        </p:txBody>
+      </p:sp>
+      <p:sp>
+        <p:nvSpPr>
+          <p:cNvPr id="117" name="TextBox 116"/>
+          <p:cNvSpPr txBox="1"/>
+          <p:nvPr/>
+        </p:nvSpPr>
+        <p:spPr>
+          <a:xfrm>
+            <a:off x="9966960" y="5769864"/>
+            <a:ext cx="1426464" cy="256032"/>
+          </a:xfrm>
+          <a:prstGeom prst="rect">
+            <a:avLst/>
+          </a:prstGeom>
+          <a:noFill/>
+        </p:spPr>
+        <p:txBody>
+          <a:bodyPr wrap="square" lIns="0" rIns="0" tIns="0" bIns="0" anchor="ctr">
+            <a:spAutoFit/>
+          </a:bodyPr>
+          <a:lstStyle/>
+          <a:p>
+            <a:pPr algn="ctr"/>
+            <a:r>
+              <a:rPr sz="1000" b="1">
+                <a:solidFill>
+                  <a:srgbClr val="FFFFFF"/>
+                </a:solidFill>
+                <a:latin typeface="Calibri"/>
+              </a:rPr>
+              <a:t>AGENTCORE</a:t>
+            </a:r>
+          </a:p>
+        </p:txBody>
+      </p:sp>
+      <p:sp>
+        <p:nvSpPr>
+          <p:cNvPr id="118" name="TextBox 117"/>
+          <p:cNvSpPr txBox="1"/>
+          <p:nvPr/>
+        </p:nvSpPr>
+        <p:spPr>
+          <a:xfrm>
+            <a:off x="3017520" y="5614416"/>
+            <a:ext cx="6766560" cy="566928"/>
+          </a:xfrm>
+          <a:prstGeom prst="rect">
+            <a:avLst/>
+          </a:prstGeom>
+          <a:noFill/>
+        </p:spPr>
+        <p:txBody>
+          <a:bodyPr wrap="square" lIns="0" rIns="0" tIns="0" bIns="0" anchor="ctr">
+            <a:spAutoFit/>
+          </a:bodyPr>
+          <a:lstStyle/>
+          <a:p>
+            <a:pPr algn="l"/>
+            <a:r>
+              <a:rPr sz="1200" b="1">
+                <a:solidFill>
+                  <a:srgbClr val="232F3E"/>
+                </a:solidFill>
+                <a:latin typeface="Calibri"/>
+              </a:rPr>
+              <a:t>sessions lost to the same fault, on the same code — the whole argument in one number</a:t>
             </a:r>
           </a:p>
         </p:txBody>
@@ -20212,7 +25689,7 @@
           <a:p>
             <a:pPr algn="ctr"/>
             <a:r>
-              <a:rPr sz="800" b="1">
+              <a:rPr sz="1000" b="1">
                 <a:solidFill>
                   <a:srgbClr val="232F3E"/>
                 </a:solidFill>
@@ -20385,7 +25862,7 @@
           <a:p>
             <a:pPr algn="ctr"/>
             <a:r>
-              <a:rPr sz="800" b="1">
+              <a:rPr sz="1000" b="1">
                 <a:solidFill>
                   <a:srgbClr val="232F3E"/>
                 </a:solidFill>
@@ -20558,7 +26035,7 @@
           <a:p>
             <a:pPr algn="ctr"/>
             <a:r>
-              <a:rPr sz="800" b="1">
+              <a:rPr sz="1000" b="1">
                 <a:solidFill>
                   <a:srgbClr val="232F3E"/>
                 </a:solidFill>
@@ -20701,7 +26178,7 @@
           <a:p>
             <a:pPr algn="ctr"/>
             <a:r>
-              <a:rPr sz="800" b="1">
+              <a:rPr sz="1000" b="1">
                 <a:solidFill>
                   <a:srgbClr val="232F3E"/>
                 </a:solidFill>
@@ -20880,7 +26357,7 @@
           <a:p>
             <a:pPr algn="ctr"/>
             <a:r>
-              <a:rPr sz="800" b="1">
+              <a:rPr sz="1000" b="1">
                 <a:solidFill>
                   <a:srgbClr val="232F3E"/>
                 </a:solidFill>
@@ -20960,7 +26437,7 @@
           <a:p>
             <a:pPr algn="ctr"/>
             <a:r>
-              <a:rPr sz="787" b="1" spc="120">
+              <a:rPr sz="1000" b="1" spc="120">
                 <a:solidFill>
                   <a:srgbClr val="FF9900"/>
                 </a:solidFill>
@@ -21140,7 +26617,7 @@
           <a:p>
             <a:pPr algn="ctr"/>
             <a:r>
-              <a:rPr sz="787">
+              <a:rPr sz="1000">
                 <a:solidFill>
                   <a:srgbClr val="C07000"/>
                 </a:solidFill>
@@ -21197,7 +26674,7 @@
           <a:p>
             <a:pPr algn="ctr"/>
             <a:r>
-              <a:rPr sz="787">
+              <a:rPr sz="1000">
                 <a:solidFill>
                   <a:srgbClr val="232F3E"/>
                 </a:solidFill>
@@ -21254,7 +26731,7 @@
           <a:p>
             <a:pPr algn="ctr"/>
             <a:r>
-              <a:rPr sz="787">
+              <a:rPr sz="1000">
                 <a:solidFill>
                   <a:srgbClr val="232F3E"/>
                 </a:solidFill>
@@ -21311,7 +26788,7 @@
           <a:p>
             <a:pPr algn="ctr"/>
             <a:r>
-              <a:rPr sz="787">
+              <a:rPr sz="1000">
                 <a:solidFill>
                   <a:srgbClr val="C07000"/>
                 </a:solidFill>
@@ -21368,7 +26845,7 @@
           <a:p>
             <a:pPr algn="ctr"/>
             <a:r>
-              <a:rPr sz="787">
+              <a:rPr sz="1000">
                 <a:solidFill>
                   <a:srgbClr val="232F3E"/>
                 </a:solidFill>
@@ -21425,7 +26902,7 @@
           <a:p>
             <a:pPr algn="ctr"/>
             <a:r>
-              <a:rPr sz="787">
+              <a:rPr sz="1000">
                 <a:solidFill>
                   <a:srgbClr val="232F3E"/>
                 </a:solidFill>
@@ -21482,7 +26959,7 @@
           <a:p>
             <a:pPr algn="ctr"/>
             <a:r>
-              <a:rPr sz="787">
+              <a:rPr sz="1000">
                 <a:solidFill>
                   <a:srgbClr val="232F3E"/>
                 </a:solidFill>
@@ -21539,7 +27016,7 @@
           <a:p>
             <a:pPr algn="ctr"/>
             <a:r>
-              <a:rPr sz="787">
+              <a:rPr sz="1000">
                 <a:solidFill>
                   <a:srgbClr val="232F3E"/>
                 </a:solidFill>
@@ -21596,7 +27073,7 @@
           <a:p>
             <a:pPr algn="ctr"/>
             <a:r>
-              <a:rPr sz="787">
+              <a:rPr sz="1000">
                 <a:solidFill>
                   <a:srgbClr val="232F3E"/>
                 </a:solidFill>
@@ -21653,7 +27130,7 @@
           <a:p>
             <a:pPr algn="ctr"/>
             <a:r>
-              <a:rPr sz="787">
+              <a:rPr sz="1000">
                 <a:solidFill>
                   <a:srgbClr val="232F3E"/>
                 </a:solidFill>
@@ -21710,7 +27187,7 @@
           <a:p>
             <a:pPr algn="ctr"/>
             <a:r>
-              <a:rPr sz="787">
+              <a:rPr sz="1000">
                 <a:solidFill>
                   <a:srgbClr val="232F3E"/>
                 </a:solidFill>
@@ -21767,7 +27244,7 @@
           <a:p>
             <a:pPr algn="ctr"/>
             <a:r>
-              <a:rPr sz="787">
+              <a:rPr sz="1000">
                 <a:solidFill>
                   <a:srgbClr val="232F3E"/>
                 </a:solidFill>
@@ -21824,7 +27301,7 @@
           <a:p>
             <a:pPr algn="ctr"/>
             <a:r>
-              <a:rPr sz="787">
+              <a:rPr sz="1000">
                 <a:solidFill>
                   <a:srgbClr val="232F3E"/>
                 </a:solidFill>
@@ -21881,7 +27358,7 @@
           <a:p>
             <a:pPr algn="ctr"/>
             <a:r>
-              <a:rPr sz="787">
+              <a:rPr sz="1000">
                 <a:solidFill>
                   <a:srgbClr val="C07000"/>
                 </a:solidFill>
@@ -21938,7 +27415,7 @@
           <a:p>
             <a:pPr algn="ctr"/>
             <a:r>
-              <a:rPr sz="787">
+              <a:rPr sz="1000">
                 <a:solidFill>
                   <a:srgbClr val="232F3E"/>
                 </a:solidFill>
@@ -22131,7 +27608,7 @@
               </a:lnSpc>
             </a:pPr>
             <a:r>
-              <a:rPr sz="825" b="0" dirty="0">
+              <a:rPr sz="1000" b="0" dirty="0">
                 <a:solidFill>
                   <a:srgbClr val="545B64"/>
                 </a:solidFill>
@@ -22289,7 +27766,7 @@
               </a:lnSpc>
             </a:pPr>
             <a:r>
-              <a:rPr sz="825" b="0">
+              <a:rPr sz="1000" b="0">
                 <a:solidFill>
                   <a:srgbClr val="545B64"/>
                 </a:solidFill>
@@ -22704,7 +28181,7 @@
           <a:p>
             <a:pPr algn="ctr"/>
             <a:r>
-              <a:rPr sz="787" b="1" spc="60">
+              <a:rPr sz="1000" b="1" spc="60">
                 <a:solidFill>
                   <a:srgbClr val="C07000"/>
                 </a:solidFill>
@@ -22739,7 +28216,7 @@
           <a:p>
             <a:pPr algn="ctr"/>
             <a:r>
-              <a:rPr sz="937" b="1">
+              <a:rPr sz="1000" b="1">
                 <a:solidFill>
                   <a:srgbClr val="232F3E"/>
                 </a:solidFill>
@@ -22866,7 +28343,7 @@
           <a:p>
             <a:pPr algn="ctr"/>
             <a:r>
-              <a:rPr sz="787" b="1" spc="60">
+              <a:rPr sz="1000" b="1" spc="60">
                 <a:solidFill>
                   <a:srgbClr val="C07000"/>
                 </a:solidFill>
@@ -22901,7 +28378,7 @@
           <a:p>
             <a:pPr algn="ctr"/>
             <a:r>
-              <a:rPr sz="937" b="1">
+              <a:rPr sz="1000" b="1">
                 <a:solidFill>
                   <a:srgbClr val="232F3E"/>
                 </a:solidFill>
@@ -23028,7 +28505,7 @@
           <a:p>
             <a:pPr algn="ctr"/>
             <a:r>
-              <a:rPr sz="787" b="1" spc="60">
+              <a:rPr sz="1000" b="1" spc="60">
                 <a:solidFill>
                   <a:srgbClr val="C07000"/>
                 </a:solidFill>
@@ -23063,7 +28540,7 @@
           <a:p>
             <a:pPr algn="ctr"/>
             <a:r>
-              <a:rPr sz="937" b="1">
+              <a:rPr sz="1000" b="1">
                 <a:solidFill>
                   <a:srgbClr val="232F3E"/>
                 </a:solidFill>
@@ -23190,7 +28667,7 @@
           <a:p>
             <a:pPr algn="ctr"/>
             <a:r>
-              <a:rPr sz="787" b="1" spc="60">
+              <a:rPr sz="1000" b="1" spc="60">
                 <a:solidFill>
                   <a:srgbClr val="C07000"/>
                 </a:solidFill>
@@ -23225,7 +28702,7 @@
           <a:p>
             <a:pPr algn="ctr"/>
             <a:r>
-              <a:rPr sz="937" b="1">
+              <a:rPr sz="1000" b="1">
                 <a:solidFill>
                   <a:srgbClr val="232F3E"/>
                 </a:solidFill>
@@ -23352,7 +28829,7 @@
           <a:p>
             <a:pPr algn="ctr"/>
             <a:r>
-              <a:rPr sz="787" b="1" spc="60">
+              <a:rPr sz="1000" b="1" spc="60">
                 <a:solidFill>
                   <a:srgbClr val="C07000"/>
                 </a:solidFill>
@@ -23387,7 +28864,7 @@
           <a:p>
             <a:pPr algn="ctr"/>
             <a:r>
-              <a:rPr sz="937" b="1">
+              <a:rPr sz="1000" b="1">
                 <a:solidFill>
                   <a:srgbClr val="232F3E"/>
                 </a:solidFill>
@@ -23422,7 +28899,7 @@
           <a:p>
             <a:pPr algn="l"/>
             <a:r>
-              <a:rPr sz="900" b="1" dirty="0">
+              <a:rPr sz="1000" b="1" dirty="0">
                 <a:solidFill>
                   <a:srgbClr val="545B64"/>
                 </a:solidFill>
@@ -23457,7 +28934,7 @@
           <a:p>
             <a:pPr algn="r"/>
             <a:r>
-              <a:rPr sz="900" b="0">
+              <a:rPr sz="1000" b="0">
                 <a:solidFill>
                   <a:srgbClr val="545B64"/>
                 </a:solidFill>
@@ -23764,7 +29241,7 @@
           <a:p>
             <a:pPr algn="r"/>
             <a:r>
-              <a:rPr sz="900" b="1">
+              <a:rPr sz="1000" b="1">
                 <a:solidFill>
                   <a:srgbClr val="FF9900"/>
                 </a:solidFill>

--- a/docs/Valentin-Presentation-v7.pptx
+++ b/docs/Valentin-Presentation-v7.pptx
@@ -15,13 +15,13 @@
     <p:sldId id="280" r:id="rId6"/>
     <p:sldId id="281" r:id="rId24"/>
     <p:sldId id="282" r:id="rId25"/>
-    <p:sldId id="272" r:id="rId8"/>
+    <p:sldId id="288" r:id="rId31"/>
     <p:sldId id="283" r:id="rId26"/>
     <p:sldId id="287" r:id="rId30"/>
     <p:sldId id="284" r:id="rId27"/>
     <p:sldId id="285" r:id="rId28"/>
     <p:sldId id="286" r:id="rId29"/>
-    <p:sldId id="276" r:id="rId15"/>
+    <p:sldId id="289" r:id="rId32"/>
     <p:sldId id="277" r:id="rId16"/>
     <p:sldId id="278" r:id="rId17"/>
     <p:sldId id="267" r:id="rId18"/>
@@ -376,13 +376,13 @@
           <a:lstStyle/>
           <a:p>
             <a:r>
-              <a:t>[0:25 · cumulative 3:50 of 10:00]</a:t>
+              <a:t>[0:35 · cumulative 5:15 of 10:00]</a:t>
             </a:r>
           </a:p>
           <a:p/>
           <a:p>
             <a:r>
-              <a:t>Now the real content. Same product, built twice: engine A is the DIY build I own on Fargate; engine B is the same model on AgentCore. Everything from here judges those two engines through six lenses.</a:t>
+              <a:t>Cost, at four scales. At one user the story is the floor: engine A bills eighteen dollars before anyone speaks; B bills a dime. At a million users the story is the meter: both bills are per-user, and B settles at eighteen times cheaper because extraction is part of the service, not a second model call. And A’s floor is not even fixed — it steps up with every forty concurrent sessions.</a:t>
             </a:r>
           </a:p>
         </p:txBody>
@@ -428,13 +428,13 @@
           <a:lstStyle/>
           <a:p>
             <a:r>
-              <a:t>[0:50 · cumulative 4:40 of 10:00]</a:t>
+              <a:t>[0:20 · cumulative 5:35 of 10:00]</a:t>
             </a:r>
           </a:p>
           <a:p/>
           <a:p>
             <a:r>
-              <a:t>The whole section in one slide. Six lenses down the side; the four AgentCore components across the top, lit when they matter to that lens. Cost lights everything. Security is Runtime plus Gateway. Debuggability and latency go to DIY — four-two, and the two it loses are why this is a comparison and not a sales pitch.</a:t>
+              <a:t>The bill, itemised — every rate from a pricing page, every quantity counted out of this repo. The reply call to Bedrock is identical on both sides, so I excluded it from both.</a:t>
             </a:r>
           </a:p>
         </p:txBody>
@@ -480,13 +480,13 @@
           <a:lstStyle/>
           <a:p>
             <a:r>
-              <a:t>[0:35 · cumulative 5:15 of 10:00]</a:t>
+              <a:t>[0:30 · cumulative 6:05 of 10:00]</a:t>
             </a:r>
           </a:p>
           <a:p/>
           <a:p>
             <a:r>
-              <a:t>Cost, at four scales. At one user the story is the floor: engine A bills eighteen dollars before anyone speaks; B bills a dime. At a million users the story is the meter: both bills are per-user, and B settles at eighteen times cheaper because extraction is part of the service, not a second model call. And A’s floor is not even fixed — it steps up with every forty concurrent sessions.</a:t>
+              <a:t>Resilience is Runtime plus Gateway. In-process, forty sessions share one Node process, one heap, one crash. A microVM per session and a Lambda per tool means a fault has nowhere to travel: one session lost, not forty.</a:t>
             </a:r>
           </a:p>
         </p:txBody>
@@ -500,7 +500,7 @@
 </file>
 
 <file path=ppt/notesSlides/notesSlide13.xml><?xml version="1.0" encoding="utf-8"?>
-<p:notes xmlns:a="http://schemas.openxmlformats.org/drawingml/2006/main" xmlns:r="http://schemas.openxmlformats.org/officeDocument/2006/relationships" xmlns:p="http://schemas.openxmlformats.org/presentationml/2006/main">
+<p:notes xmlns:a="http://schemas.openxmlformats.org/drawingml/2006/main" xmlns:p="http://schemas.openxmlformats.org/presentationml/2006/main" xmlns:r="http://schemas.openxmlformats.org/officeDocument/2006/relationships">
   <p:cSld>
     <p:spTree>
       <p:nvGrpSpPr>
@@ -518,24 +518,12 @@
       </p:grpSpPr>
       <p:sp>
         <p:nvSpPr>
-          <p:cNvPr id="2" name="Slide Image Placeholder 1"/>
-          <p:cNvSpPr>
-            <a:spLocks noGrp="1" noRot="1" noChangeAspect="1"/>
-          </p:cNvSpPr>
-          <p:nvPr>
-            <p:ph type="sldImg" idx="2"/>
-          </p:nvPr>
-        </p:nvSpPr>
-        <p:spPr/>
-      </p:sp>
-      <p:sp>
-        <p:nvSpPr>
-          <p:cNvPr id="3" name="Notes Placeholder 2"/>
+          <p:cNvPr id="100" name="Notes Placeholder"/>
           <p:cNvSpPr>
             <a:spLocks noGrp="1"/>
           </p:cNvSpPr>
           <p:nvPr>
-            <p:ph type="body" sz="quarter" idx="3"/>
+            <p:ph type="body" idx="1"/>
           </p:nvPr>
         </p:nvSpPr>
         <p:spPr/>
@@ -544,28 +532,16 @@
           <a:lstStyle/>
           <a:p>
             <a:r>
-              <a:t>[0:30 · cumulative 8:25 of 10:00]</a:t>
+              <a:t>[0:25 · cumulative 6:30 of 10:00]</a:t>
             </a:r>
           </a:p>
           <a:p/>
           <a:p>
             <a:r>
-              <a:t>A word on how this got built, because it is the part people ask about. I wrote none of the application code. Six agents did, each with a prompt file and an explicit do-not-touch list — disjoint ownership is what stops five agents editing at once from being a merge-conflict generator.</a:t>
-            </a:r>
-          </a:p>
-        </p:txBody>
-      </p:sp>
-      <p:sp>
-        <p:nvSpPr>
-          <p:cNvPr id="4" name="Slide Number Placeholder 3"/>
-          <p:cNvSpPr>
-            <a:spLocks noGrp="1"/>
-          </p:cNvSpPr>
-          <p:nvPr>
-            <p:ph type="sldNum" sz="quarter" idx="5"/>
-          </p:nvPr>
-        </p:nvSpPr>
-        <p:spPr/>
+              <a:t>The same fault, injected on both engines. Engine A loses all forty sessions — the process is the blast radius. Engine B loses exactly one: the caller. Three fault classes, same outcome every time.</a:t>
+            </a:r>
+          </a:p>
+        </p:txBody>
       </p:sp>
     </p:spTree>
   </p:cSld>
@@ -836,13 +812,13 @@
           <a:lstStyle/>
           <a:p>
             <a:r>
-              <a:t>[0:30 · cumulative 7:55 of 10:00]</a:t>
+              <a:t>[0:30 · cumulative 8:25 of 10:00]</a:t>
             </a:r>
           </a:p>
           <a:p/>
           <a:p>
             <a:r>
-              <a:t>Debuggability the DIY build wins, and I will not skip it. Hand-wired OTEL emits exactly the fields that decide an incident at two in the morning. AgentCore’s traces are free, but on its schema. Where I landed: its traces as the floor, my spans on top.</a:t>
+              <a:t>A word on how this got built, because it is the part people ask about. I wrote none of the application code. Six agents did, each with a prompt file and an explicit do-not-touch list — disjoint ownership is what stops five agents editing at once from being a merge-conflict generator.</a:t>
             </a:r>
           </a:p>
         </p:txBody>
@@ -1116,13 +1092,13 @@
           <a:lstStyle/>
           <a:p>
             <a:r>
-              <a:t>[0:25 · cumulative 7:25 of 10:00]</a:t>
+              <a:t>[0:30 · cumulative 7:55 of 10:00]</a:t>
             </a:r>
           </a:p>
           <a:p/>
           <a:p>
             <a:r>
-              <a:t>Ownership and velocity — Memory plus Gateway. On engine A the extraction prompt is mine to maintain forever, and adding a tool is a deploy. On B, extraction is the service’s problem and the tool list is data. The give-up is real: I lose the extraction schema I designed.</a:t>
+              <a:t>Debuggability the DIY build wins, and I will not skip it. Hand-wired OTEL emits exactly the fields that decide an incident at two in the morning. AgentCore’s traces are free, but on its schema. Where I landed: its traces as the floor, my spans on top.</a:t>
             </a:r>
           </a:p>
         </p:txBody>
@@ -1136,7 +1112,7 @@
 </file>
 
 <file path=ppt/notesSlides/notesSlide6.xml><?xml version="1.0" encoding="utf-8"?>
-<p:notes xmlns:a="http://schemas.openxmlformats.org/drawingml/2006/main" xmlns:r="http://schemas.openxmlformats.org/officeDocument/2006/relationships" xmlns:p="http://schemas.openxmlformats.org/presentationml/2006/main">
+<p:notes xmlns:a="http://schemas.openxmlformats.org/drawingml/2006/main" xmlns:p="http://schemas.openxmlformats.org/presentationml/2006/main" xmlns:r="http://schemas.openxmlformats.org/officeDocument/2006/relationships">
   <p:cSld>
     <p:spTree>
       <p:nvGrpSpPr>
@@ -1154,24 +1130,12 @@
       </p:grpSpPr>
       <p:sp>
         <p:nvSpPr>
-          <p:cNvPr id="2" name="Slide Image Placeholder 1"/>
-          <p:cNvSpPr>
-            <a:spLocks noGrp="1" noRot="1" noChangeAspect="1"/>
-          </p:cNvSpPr>
-          <p:nvPr>
-            <p:ph type="sldImg" idx="2"/>
-          </p:nvPr>
-        </p:nvSpPr>
-        <p:spPr/>
-      </p:sp>
-      <p:sp>
-        <p:nvSpPr>
-          <p:cNvPr id="3" name="Notes Placeholder 2"/>
+          <p:cNvPr id="100" name="Notes Placeholder"/>
           <p:cNvSpPr>
             <a:spLocks noGrp="1"/>
           </p:cNvSpPr>
           <p:nvPr>
-            <p:ph type="body" sz="quarter" idx="3"/>
+            <p:ph type="body" idx="1"/>
           </p:nvPr>
         </p:nvSpPr>
         <p:spPr/>
@@ -1180,28 +1144,16 @@
           <a:lstStyle/>
           <a:p>
             <a:r>
-              <a:t>[0:20 · cumulative 5:35 of 10:00]</a:t>
+              <a:t>[0:25 · cumulative 7:25 of 10:00]</a:t>
             </a:r>
           </a:p>
           <a:p/>
           <a:p>
             <a:r>
-              <a:t>The bill, itemised — every rate from a pricing page, every quantity counted out of this repo. The reply call to Bedrock is identical on both sides, so I excluded it from both.</a:t>
-            </a:r>
-          </a:p>
-        </p:txBody>
-      </p:sp>
-      <p:sp>
-        <p:nvSpPr>
-          <p:cNvPr id="4" name="Slide Number Placeholder 3"/>
-          <p:cNvSpPr>
-            <a:spLocks noGrp="1"/>
-          </p:cNvSpPr>
-          <p:nvPr>
-            <p:ph type="sldNum" sz="quarter" idx="5"/>
-          </p:nvPr>
-        </p:nvSpPr>
-        <p:spPr/>
+              <a:t>Ownership and velocity — Memory plus Gateway. On engine A the extraction prompt is mine to maintain forever, and adding a tool is a deploy. On B, extraction is the service’s problem and the tool list is data. The give-up is real: I lose the extraction schema I designed.</a:t>
+            </a:r>
+          </a:p>
+        </p:txBody>
       </p:sp>
     </p:spTree>
   </p:cSld>
@@ -1296,13 +1248,13 @@
           <a:lstStyle/>
           <a:p>
             <a:r>
-              <a:t>[0:25 · cumulative 6:30 of 10:00]</a:t>
+              <a:t>[0:25 · cumulative 3:50 of 10:00]</a:t>
             </a:r>
           </a:p>
           <a:p/>
           <a:p>
             <a:r>
-              <a:t>The same fault, injected on both engines. Engine A loses all forty sessions — the process is the blast radius. Engine B loses exactly one: the caller. Three fault classes, same outcome every time.</a:t>
+              <a:t>Now the real content. Same product, built twice: engine A is the DIY build I own on Fargate; engine B is the same model on AgentCore. Everything from here judges those two engines through six lenses.</a:t>
             </a:r>
           </a:p>
         </p:txBody>
@@ -1348,13 +1300,13 @@
           <a:lstStyle/>
           <a:p>
             <a:r>
-              <a:t>[0:30 · cumulative 6:05 of 10:00]</a:t>
+              <a:t>[0:50 · cumulative 4:40 of 10:00]</a:t>
             </a:r>
           </a:p>
           <a:p/>
           <a:p>
             <a:r>
-              <a:t>Resilience is Runtime plus Gateway. In-process, forty sessions share one Node process, one heap, one crash. A microVM per session and a Lambda per tool means a fault has nowhere to travel: one session lost, not forty.</a:t>
+              <a:t>The whole section in one slide. Six lenses down the side; the four AgentCore components across the top, lit when they matter to that lens. Cost lights everything. Security is Runtime plus Gateway. Debuggability and latency go to DIY — four-two, and the two it loses are why this is a comparison and not a sales pitch.</a:t>
             </a:r>
           </a:p>
         </p:txBody>
@@ -4605,298 +4557,6 @@
 </p:sld>
 </file>
 
-<file path=ppt/slides/slide14.xml><?xml version="1.0" encoding="utf-8"?>
-<p:sld xmlns:a="http://schemas.openxmlformats.org/drawingml/2006/main" xmlns:r="http://schemas.openxmlformats.org/officeDocument/2006/relationships" xmlns:p="http://schemas.openxmlformats.org/presentationml/2006/main">
-  <p:cSld>
-    <p:spTree>
-      <p:nvGrpSpPr>
-        <p:cNvPr id="1" name=""/>
-        <p:cNvGrpSpPr/>
-        <p:nvPr/>
-      </p:nvGrpSpPr>
-      <p:grpSpPr>
-        <a:xfrm>
-          <a:off x="0" y="0"/>
-          <a:ext cx="0" cy="0"/>
-          <a:chOff x="0" y="0"/>
-          <a:chExt cx="0" cy="0"/>
-        </a:xfrm>
-      </p:grpSpPr>
-      <p:sp>
-        <p:nvSpPr>
-          <p:cNvPr id="2" name="Rectangle 1"/>
-          <p:cNvSpPr/>
-          <p:nvPr/>
-        </p:nvSpPr>
-        <p:spPr>
-          <a:xfrm>
-            <a:off x="0" y="0"/>
-            <a:ext cx="12191969" cy="6858000"/>
-          </a:xfrm>
-          <a:prstGeom prst="rect">
-            <a:avLst/>
-          </a:prstGeom>
-          <a:solidFill>
-            <a:srgbClr val="FFFFFF"/>
-          </a:solidFill>
-          <a:ln>
-            <a:noFill/>
-          </a:ln>
-          <a:effectLst/>
-        </p:spPr>
-        <p:style>
-          <a:lnRef idx="1">
-            <a:schemeClr val="accent1"/>
-          </a:lnRef>
-          <a:fillRef idx="3">
-            <a:schemeClr val="accent1"/>
-          </a:fillRef>
-          <a:effectRef idx="2">
-            <a:schemeClr val="accent1"/>
-          </a:effectRef>
-          <a:fontRef idx="minor">
-            <a:schemeClr val="lt1"/>
-          </a:fontRef>
-        </p:style>
-        <p:txBody>
-          <a:bodyPr rtlCol="0" anchor="ctr"/>
-          <a:lstStyle/>
-          <a:p>
-            <a:pPr algn="ctr"/>
-            <a:endParaRPr/>
-          </a:p>
-        </p:txBody>
-      </p:sp>
-      <p:pic>
-        <p:nvPicPr>
-          <p:cNvPr id="3" name="Picture 2" descr="How I built it: the team. One human and six agents, each with its own prompt file and an explicit ownership boundary."/>
-          <p:cNvPicPr>
-            <a:picLocks noChangeAspect="1"/>
-          </p:cNvPicPr>
-          <p:nvPr/>
-        </p:nvPicPr>
-        <p:blipFill>
-          <a:blip r:embed="rId3"/>
-          <a:srcRect t="21808"/>
-          <a:stretch>
-            <a:fillRect/>
-          </a:stretch>
-        </p:blipFill>
-        <p:spPr>
-          <a:xfrm>
-            <a:off x="-31" y="1171598"/>
-            <a:ext cx="12192000" cy="5362410"/>
-          </a:xfrm>
-          <a:prstGeom prst="rect">
-            <a:avLst/>
-          </a:prstGeom>
-        </p:spPr>
-      </p:pic>
-      <p:sp>
-        <p:nvSpPr>
-          <p:cNvPr id="4" name="Oval 3"/>
-          <p:cNvSpPr/>
-          <p:nvPr/>
-        </p:nvSpPr>
-        <p:spPr>
-          <a:xfrm>
-            <a:off x="502920" y="365760"/>
-            <a:ext cx="594360" cy="594360"/>
-          </a:xfrm>
-          <a:prstGeom prst="ellipse">
-            <a:avLst/>
-          </a:prstGeom>
-          <a:solidFill>
-            <a:srgbClr val="232F3E"/>
-          </a:solidFill>
-          <a:ln>
-            <a:noFill/>
-          </a:ln>
-          <a:effectLst/>
-        </p:spPr>
-        <p:style>
-          <a:lnRef idx="1">
-            <a:schemeClr val="accent1"/>
-          </a:lnRef>
-          <a:fillRef idx="3">
-            <a:schemeClr val="accent1"/>
-          </a:fillRef>
-          <a:effectRef idx="2">
-            <a:schemeClr val="accent1"/>
-          </a:effectRef>
-          <a:fontRef idx="minor">
-            <a:schemeClr val="lt1"/>
-          </a:fontRef>
-        </p:style>
-        <p:txBody>
-          <a:bodyPr rtlCol="0" anchor="ctr"/>
-          <a:lstStyle/>
-          <a:p>
-            <a:pPr algn="ctr"/>
-            <a:endParaRPr/>
-          </a:p>
-        </p:txBody>
-      </p:sp>
-      <p:sp>
-        <p:nvSpPr>
-          <p:cNvPr id="5" name="TextBox 4"/>
-          <p:cNvSpPr txBox="1"/>
-          <p:nvPr/>
-        </p:nvSpPr>
-        <p:spPr>
-          <a:xfrm>
-            <a:off x="502920" y="365760"/>
-            <a:ext cx="594360" cy="594360"/>
-          </a:xfrm>
-          <a:prstGeom prst="rect">
-            <a:avLst/>
-          </a:prstGeom>
-          <a:noFill/>
-        </p:spPr>
-        <p:txBody>
-          <a:bodyPr wrap="square" lIns="0" tIns="0" rIns="0" bIns="0" anchor="ctr">
-            <a:spAutoFit/>
-          </a:bodyPr>
-          <a:lstStyle/>
-          <a:p>
-            <a:pPr algn="ctr"/>
-            <a:r>
-              <a:rPr sz="2600" b="1">
-                <a:solidFill>
-                  <a:srgbClr val="FF9900"/>
-                </a:solidFill>
-                <a:latin typeface="Calibri"/>
-              </a:rPr>
-              <a:t>13</a:t>
-            </a:r>
-          </a:p>
-        </p:txBody>
-      </p:sp>
-      <p:sp>
-        <p:nvSpPr>
-          <p:cNvPr id="6" name="TextBox 5"/>
-          <p:cNvSpPr txBox="1"/>
-          <p:nvPr/>
-        </p:nvSpPr>
-        <p:spPr>
-          <a:xfrm>
-            <a:off x="502920" y="6446520"/>
-            <a:ext cx="8229600" cy="320040"/>
-          </a:xfrm>
-          <a:prstGeom prst="rect">
-            <a:avLst/>
-          </a:prstGeom>
-          <a:noFill/>
-        </p:spPr>
-        <p:txBody>
-          <a:bodyPr wrap="square" lIns="0" tIns="0" rIns="0" bIns="0" anchor="ctr">
-            <a:spAutoFit/>
-          </a:bodyPr>
-          <a:lstStyle/>
-          <a:p>
-            <a:pPr algn="l"/>
-            <a:r>
-              <a:rPr sz="1000" b="1">
-                <a:solidFill>
-                  <a:srgbClr val="545B64"/>
-                </a:solidFill>
-                <a:latin typeface="Calibri"/>
-              </a:rPr>
-              <a:t>VALENTIN   ·   GenAI TFC Capstone Deep-Dive</a:t>
-            </a:r>
-          </a:p>
-        </p:txBody>
-      </p:sp>
-      <p:sp>
-        <p:nvSpPr>
-          <p:cNvPr id="7" name="TextBox 6"/>
-          <p:cNvSpPr txBox="1"/>
-          <p:nvPr/>
-        </p:nvSpPr>
-        <p:spPr>
-          <a:xfrm>
-            <a:off x="10332720" y="6446520"/>
-            <a:ext cx="1371600" cy="320040"/>
-          </a:xfrm>
-          <a:prstGeom prst="rect">
-            <a:avLst/>
-          </a:prstGeom>
-          <a:noFill/>
-        </p:spPr>
-        <p:txBody>
-          <a:bodyPr wrap="square" lIns="0" tIns="0" rIns="0" bIns="0" anchor="ctr">
-            <a:spAutoFit/>
-          </a:bodyPr>
-          <a:lstStyle/>
-          <a:p>
-            <a:pPr algn="r"/>
-            <a:r>
-              <a:rPr sz="1000" b="0">
-                <a:solidFill>
-                  <a:srgbClr val="545B64"/>
-                </a:solidFill>
-                <a:latin typeface="Calibri"/>
-              </a:rPr>
-              <a:t>14 / 17</a:t>
-            </a:r>
-          </a:p>
-        </p:txBody>
-      </p:sp>
-      <p:sp>
-        <p:nvSpPr>
-          <p:cNvPr id="8" name="TextBox 7">
-            <a:extLst>
-              <a:ext uri="{FF2B5EF4-FFF2-40B4-BE49-F238E27FC236}">
-                <a16:creationId xmlns:a16="http://schemas.microsoft.com/office/drawing/2014/main" id="{9A11471F-6ED4-9273-DBA2-2E6E55847DAE}"/>
-              </a:ext>
-            </a:extLst>
-          </p:cNvPr>
-          <p:cNvSpPr txBox="1"/>
-          <p:nvPr/>
-        </p:nvSpPr>
-        <p:spPr>
-          <a:xfrm>
-            <a:off x="1280160" y="478274"/>
-            <a:ext cx="10058400" cy="369332"/>
-          </a:xfrm>
-          <a:prstGeom prst="rect">
-            <a:avLst/>
-          </a:prstGeom>
-          <a:noFill/>
-        </p:spPr>
-        <p:txBody>
-          <a:bodyPr wrap="square" lIns="0" tIns="0" rIns="0" bIns="0" anchor="ctr">
-            <a:spAutoFit/>
-          </a:bodyPr>
-          <a:lstStyle/>
-          <a:p>
-            <a:pPr algn="l"/>
-            <a:r>
-              <a:rPr lang="en-US" sz="2400" b="1" dirty="0">
-                <a:solidFill>
-                  <a:srgbClr val="232F3E"/>
-                </a:solidFill>
-                <a:latin typeface="Calibri"/>
-              </a:rPr>
-              <a:t>Who Built Valentin?</a:t>
-            </a:r>
-            <a:endParaRPr sz="2400" b="1" dirty="0">
-              <a:solidFill>
-                <a:srgbClr val="232F3E"/>
-              </a:solidFill>
-              <a:latin typeface="Calibri"/>
-            </a:endParaRPr>
-          </a:p>
-        </p:txBody>
-      </p:sp>
-    </p:spTree>
-  </p:cSld>
-  <p:clrMapOvr>
-    <a:masterClrMapping/>
-  </p:clrMapOvr>
-</p:sld>
-</file>
-
 <file path=ppt/slides/slide15.xml><?xml version="1.0" encoding="utf-8"?>
 <p:sld xmlns:a="http://schemas.openxmlformats.org/drawingml/2006/main" xmlns:r="http://schemas.openxmlformats.org/officeDocument/2006/relationships" xmlns:p="http://schemas.openxmlformats.org/presentationml/2006/main">
   <p:cSld>
@@ -4955,7 +4615,1196 @@
           <a:lstStyle/>
           <a:p>
             <a:pPr algn="ctr"/>
-            <a:endParaRPr/>
+          </a:p>
+        </p:txBody>
+      </p:sp>
+      <p:sp>
+        <p:nvSpPr>
+          <p:cNvPr id="3" name="Oval 2"/>
+          <p:cNvSpPr/>
+          <p:nvPr/>
+        </p:nvSpPr>
+        <p:spPr>
+          <a:xfrm>
+            <a:off x="502920" y="365760"/>
+            <a:ext cx="594360" cy="594360"/>
+          </a:xfrm>
+          <a:prstGeom prst="ellipse">
+            <a:avLst/>
+          </a:prstGeom>
+          <a:solidFill>
+            <a:srgbClr val="232F3E"/>
+          </a:solidFill>
+          <a:ln>
+            <a:noFill/>
+          </a:ln>
+          <a:effectLst/>
+        </p:spPr>
+        <p:style>
+          <a:lnRef idx="1">
+            <a:schemeClr val="accent1"/>
+          </a:lnRef>
+          <a:fillRef idx="3">
+            <a:schemeClr val="accent1"/>
+          </a:fillRef>
+          <a:effectRef idx="2">
+            <a:schemeClr val="accent1"/>
+          </a:effectRef>
+          <a:fontRef idx="minor">
+            <a:schemeClr val="lt1"/>
+          </a:fontRef>
+        </p:style>
+        <p:txBody>
+          <a:bodyPr rtlCol="0" anchor="ctr"/>
+          <a:lstStyle/>
+          <a:p>
+            <a:pPr algn="ctr"/>
+          </a:p>
+        </p:txBody>
+      </p:sp>
+      <p:sp>
+        <p:nvSpPr>
+          <p:cNvPr id="4" name="TextBox 3"/>
+          <p:cNvSpPr txBox="1"/>
+          <p:nvPr/>
+        </p:nvSpPr>
+        <p:spPr>
+          <a:xfrm>
+            <a:off x="502920" y="365760"/>
+            <a:ext cx="594360" cy="594360"/>
+          </a:xfrm>
+          <a:prstGeom prst="rect">
+            <a:avLst/>
+          </a:prstGeom>
+          <a:noFill/>
+        </p:spPr>
+        <p:txBody>
+          <a:bodyPr wrap="square" lIns="0" rIns="0" tIns="0" bIns="0" anchor="ctr">
+            <a:spAutoFit/>
+          </a:bodyPr>
+          <a:lstStyle/>
+          <a:p>
+            <a:pPr algn="ctr"/>
+            <a:r>
+              <a:rPr sz="2600" b="1">
+                <a:solidFill>
+                  <a:srgbClr val="FF9900"/>
+                </a:solidFill>
+                <a:latin typeface="Calibri"/>
+              </a:rPr>
+              <a:t>14</a:t>
+            </a:r>
+          </a:p>
+        </p:txBody>
+      </p:sp>
+      <p:sp>
+        <p:nvSpPr>
+          <p:cNvPr id="5" name="TextBox 4"/>
+          <p:cNvSpPr txBox="1"/>
+          <p:nvPr/>
+        </p:nvSpPr>
+        <p:spPr>
+          <a:xfrm>
+            <a:off x="502920" y="6446520"/>
+            <a:ext cx="8229600" cy="320040"/>
+          </a:xfrm>
+          <a:prstGeom prst="rect">
+            <a:avLst/>
+          </a:prstGeom>
+          <a:noFill/>
+        </p:spPr>
+        <p:txBody>
+          <a:bodyPr wrap="square" lIns="0" rIns="0" tIns="0" bIns="0" anchor="ctr">
+            <a:spAutoFit/>
+          </a:bodyPr>
+          <a:lstStyle/>
+          <a:p>
+            <a:pPr algn="l"/>
+            <a:r>
+              <a:rPr sz="1000" b="1">
+                <a:solidFill>
+                  <a:srgbClr val="545B64"/>
+                </a:solidFill>
+                <a:latin typeface="Calibri"/>
+              </a:rPr>
+              <a:t>VALENTIN   ·   GenAI TFC Capstone Deep-Dive</a:t>
+            </a:r>
+          </a:p>
+        </p:txBody>
+      </p:sp>
+      <p:sp>
+        <p:nvSpPr>
+          <p:cNvPr id="6" name="TextBox 5"/>
+          <p:cNvSpPr txBox="1"/>
+          <p:nvPr/>
+        </p:nvSpPr>
+        <p:spPr>
+          <a:xfrm>
+            <a:off x="10332720" y="6446520"/>
+            <a:ext cx="1371600" cy="320040"/>
+          </a:xfrm>
+          <a:prstGeom prst="rect">
+            <a:avLst/>
+          </a:prstGeom>
+          <a:noFill/>
+        </p:spPr>
+        <p:txBody>
+          <a:bodyPr wrap="square" lIns="0" rIns="0" tIns="0" bIns="0" anchor="ctr">
+            <a:spAutoFit/>
+          </a:bodyPr>
+          <a:lstStyle/>
+          <a:p>
+            <a:pPr algn="r"/>
+            <a:r>
+              <a:rPr sz="1000" b="0">
+                <a:solidFill>
+                  <a:srgbClr val="545B64"/>
+                </a:solidFill>
+                <a:latin typeface="Calibri"/>
+              </a:rPr>
+              <a:t>15 / 17</a:t>
+            </a:r>
+          </a:p>
+        </p:txBody>
+      </p:sp>
+      <p:sp>
+        <p:nvSpPr>
+          <p:cNvPr id="7" name="TextBox 6"/>
+          <p:cNvSpPr txBox="1"/>
+          <p:nvPr/>
+        </p:nvSpPr>
+        <p:spPr>
+          <a:xfrm>
+            <a:off x="1280160" y="365760"/>
+            <a:ext cx="10058400" cy="594360"/>
+          </a:xfrm>
+          <a:prstGeom prst="rect">
+            <a:avLst/>
+          </a:prstGeom>
+          <a:noFill/>
+        </p:spPr>
+        <p:txBody>
+          <a:bodyPr wrap="square" lIns="0" rIns="0" tIns="0" bIns="0" anchor="ctr">
+            <a:spAutoFit/>
+          </a:bodyPr>
+          <a:lstStyle/>
+          <a:p>
+            <a:pPr algn="l"/>
+            <a:r>
+              <a:rPr sz="3000" b="1">
+                <a:solidFill>
+                  <a:srgbClr val="232F3E"/>
+                </a:solidFill>
+                <a:latin typeface="Calibri"/>
+              </a:rPr>
+              <a:t>Every node is a real pull request</a:t>
+            </a:r>
+          </a:p>
+        </p:txBody>
+      </p:sp>
+      <p:sp>
+        <p:nvSpPr>
+          <p:cNvPr id="8" name="Rectangle 7"/>
+          <p:cNvSpPr/>
+          <p:nvPr/>
+        </p:nvSpPr>
+        <p:spPr>
+          <a:xfrm>
+            <a:off x="502920" y="1051560"/>
+            <a:ext cx="1371600" cy="36576"/>
+          </a:xfrm>
+          <a:prstGeom prst="rect">
+            <a:avLst/>
+          </a:prstGeom>
+          <a:solidFill>
+            <a:srgbClr val="FF9900"/>
+          </a:solidFill>
+          <a:ln>
+            <a:noFill/>
+          </a:ln>
+          <a:effectLst/>
+        </p:spPr>
+        <p:style>
+          <a:lnRef idx="1">
+            <a:schemeClr val="accent1"/>
+          </a:lnRef>
+          <a:fillRef idx="3">
+            <a:schemeClr val="accent1"/>
+          </a:fillRef>
+          <a:effectRef idx="2">
+            <a:schemeClr val="accent1"/>
+          </a:effectRef>
+          <a:fontRef idx="minor">
+            <a:schemeClr val="lt1"/>
+          </a:fontRef>
+        </p:style>
+        <p:txBody>
+          <a:bodyPr rtlCol="0" anchor="ctr"/>
+          <a:lstStyle/>
+          <a:p>
+            <a:pPr algn="ctr"/>
+          </a:p>
+        </p:txBody>
+      </p:sp>
+      <p:sp>
+        <p:nvSpPr>
+          <p:cNvPr id="9" name="TextBox 8"/>
+          <p:cNvSpPr txBox="1"/>
+          <p:nvPr/>
+        </p:nvSpPr>
+        <p:spPr>
+          <a:xfrm>
+            <a:off x="502920" y="1280160"/>
+            <a:ext cx="11155680" cy="384048"/>
+          </a:xfrm>
+          <a:prstGeom prst="rect">
+            <a:avLst/>
+          </a:prstGeom>
+          <a:noFill/>
+        </p:spPr>
+        <p:txBody>
+          <a:bodyPr wrap="square" lIns="0" rIns="0" tIns="0" bIns="0" anchor="t">
+            <a:spAutoFit/>
+          </a:bodyPr>
+          <a:lstStyle/>
+          <a:p>
+            <a:pPr algn="l"/>
+            <a:r>
+              <a:rPr sz="1400" b="0">
+                <a:solidFill>
+                  <a:srgbClr val="545B64"/>
+                </a:solidFill>
+                <a:latin typeface="Calibri"/>
+              </a:rPr>
+              <a:t>Fifty-seven of them, in the order they were opened, connected to where they merged.</a:t>
+            </a:r>
+          </a:p>
+        </p:txBody>
+      </p:sp>
+      <p:sp>
+        <p:nvSpPr>
+          <p:cNvPr id="10" name="Rounded Rectangle 9"/>
+          <p:cNvSpPr/>
+          <p:nvPr/>
+        </p:nvSpPr>
+        <p:spPr>
+          <a:xfrm>
+            <a:off x="566928" y="4956048"/>
+            <a:ext cx="2656332" cy="786384"/>
+          </a:xfrm>
+          <a:prstGeom prst="roundRect">
+            <a:avLst>
+              <a:gd name="adj" fmla="val 6976"/>
+            </a:avLst>
+          </a:prstGeom>
+          <a:solidFill>
+            <a:srgbClr val="F7F8FA"/>
+          </a:solidFill>
+          <a:ln w="12700">
+            <a:solidFill>
+              <a:srgbClr val="E4E7EA"/>
+            </a:solidFill>
+          </a:ln>
+          <a:effectLst/>
+        </p:spPr>
+        <p:style>
+          <a:lnRef idx="1">
+            <a:schemeClr val="accent1"/>
+          </a:lnRef>
+          <a:fillRef idx="3">
+            <a:schemeClr val="accent1"/>
+          </a:fillRef>
+          <a:effectRef idx="2">
+            <a:schemeClr val="accent1"/>
+          </a:effectRef>
+          <a:fontRef idx="minor">
+            <a:schemeClr val="lt1"/>
+          </a:fontRef>
+        </p:style>
+        <p:txBody>
+          <a:bodyPr rtlCol="0" anchor="ctr"/>
+          <a:lstStyle/>
+          <a:p>
+            <a:pPr algn="ctr"/>
+          </a:p>
+        </p:txBody>
+      </p:sp>
+      <p:sp>
+        <p:nvSpPr>
+          <p:cNvPr id="11" name="TextBox 10"/>
+          <p:cNvSpPr txBox="1"/>
+          <p:nvPr/>
+        </p:nvSpPr>
+        <p:spPr>
+          <a:xfrm>
+            <a:off x="731520" y="5010912"/>
+            <a:ext cx="914400" cy="365760"/>
+          </a:xfrm>
+          <a:prstGeom prst="rect">
+            <a:avLst/>
+          </a:prstGeom>
+          <a:noFill/>
+        </p:spPr>
+        <p:txBody>
+          <a:bodyPr wrap="square" lIns="0" rIns="0" tIns="0" bIns="0" anchor="ctr">
+            <a:spAutoFit/>
+          </a:bodyPr>
+          <a:lstStyle/>
+          <a:p>
+            <a:pPr algn="l"/>
+            <a:r>
+              <a:rPr sz="2000" b="1">
+                <a:solidFill>
+                  <a:srgbClr val="232F3E"/>
+                </a:solidFill>
+                <a:latin typeface="Calibri"/>
+              </a:rPr>
+              <a:t>57</a:t>
+            </a:r>
+          </a:p>
+        </p:txBody>
+      </p:sp>
+      <p:sp>
+        <p:nvSpPr>
+          <p:cNvPr id="12" name="TextBox 11"/>
+          <p:cNvSpPr txBox="1"/>
+          <p:nvPr/>
+        </p:nvSpPr>
+        <p:spPr>
+          <a:xfrm>
+            <a:off x="1627631" y="5010912"/>
+            <a:ext cx="1431035" cy="365760"/>
+          </a:xfrm>
+          <a:prstGeom prst="rect">
+            <a:avLst/>
+          </a:prstGeom>
+          <a:noFill/>
+        </p:spPr>
+        <p:txBody>
+          <a:bodyPr wrap="square" lIns="0" rIns="0" tIns="0" bIns="0" anchor="ctr">
+            <a:spAutoFit/>
+          </a:bodyPr>
+          <a:lstStyle/>
+          <a:p>
+            <a:pPr algn="l"/>
+            <a:r>
+              <a:rPr sz="1200" b="1">
+                <a:solidFill>
+                  <a:srgbClr val="232F3E"/>
+                </a:solidFill>
+                <a:latin typeface="Calibri"/>
+              </a:rPr>
+              <a:t>pull requests</a:t>
+            </a:r>
+          </a:p>
+        </p:txBody>
+      </p:sp>
+      <p:sp>
+        <p:nvSpPr>
+          <p:cNvPr id="13" name="TextBox 12"/>
+          <p:cNvSpPr txBox="1"/>
+          <p:nvPr/>
+        </p:nvSpPr>
+        <p:spPr>
+          <a:xfrm>
+            <a:off x="731520" y="5394960"/>
+            <a:ext cx="2327148" cy="292608"/>
+          </a:xfrm>
+          <a:prstGeom prst="rect">
+            <a:avLst/>
+          </a:prstGeom>
+          <a:noFill/>
+        </p:spPr>
+        <p:txBody>
+          <a:bodyPr wrap="square" lIns="0" rIns="0" tIns="0" bIns="0" anchor="ctr">
+            <a:spAutoFit/>
+          </a:bodyPr>
+          <a:lstStyle/>
+          <a:p>
+            <a:pPr algn="l"/>
+            <a:r>
+              <a:rPr sz="1000" b="0">
+                <a:solidFill>
+                  <a:srgbClr val="545B64"/>
+                </a:solidFill>
+                <a:latin typeface="Calibri"/>
+              </a:rPr>
+              <a:t>49 merged · 7 closed · 1 open</a:t>
+            </a:r>
+          </a:p>
+        </p:txBody>
+      </p:sp>
+      <p:sp>
+        <p:nvSpPr>
+          <p:cNvPr id="14" name="Rounded Rectangle 13"/>
+          <p:cNvSpPr/>
+          <p:nvPr/>
+        </p:nvSpPr>
+        <p:spPr>
+          <a:xfrm>
+            <a:off x="3369564" y="4956048"/>
+            <a:ext cx="2656332" cy="786384"/>
+          </a:xfrm>
+          <a:prstGeom prst="roundRect">
+            <a:avLst>
+              <a:gd name="adj" fmla="val 6976"/>
+            </a:avLst>
+          </a:prstGeom>
+          <a:solidFill>
+            <a:srgbClr val="F7F8FA"/>
+          </a:solidFill>
+          <a:ln w="12700">
+            <a:solidFill>
+              <a:srgbClr val="E4E7EA"/>
+            </a:solidFill>
+          </a:ln>
+          <a:effectLst/>
+        </p:spPr>
+        <p:style>
+          <a:lnRef idx="1">
+            <a:schemeClr val="accent1"/>
+          </a:lnRef>
+          <a:fillRef idx="3">
+            <a:schemeClr val="accent1"/>
+          </a:fillRef>
+          <a:effectRef idx="2">
+            <a:schemeClr val="accent1"/>
+          </a:effectRef>
+          <a:fontRef idx="minor">
+            <a:schemeClr val="lt1"/>
+          </a:fontRef>
+        </p:style>
+        <p:txBody>
+          <a:bodyPr rtlCol="0" anchor="ctr"/>
+          <a:lstStyle/>
+          <a:p>
+            <a:pPr algn="ctr"/>
+          </a:p>
+        </p:txBody>
+      </p:sp>
+      <p:sp>
+        <p:nvSpPr>
+          <p:cNvPr id="15" name="TextBox 14"/>
+          <p:cNvSpPr txBox="1"/>
+          <p:nvPr/>
+        </p:nvSpPr>
+        <p:spPr>
+          <a:xfrm>
+            <a:off x="3534156" y="5010912"/>
+            <a:ext cx="914400" cy="365760"/>
+          </a:xfrm>
+          <a:prstGeom prst="rect">
+            <a:avLst/>
+          </a:prstGeom>
+          <a:noFill/>
+        </p:spPr>
+        <p:txBody>
+          <a:bodyPr wrap="square" lIns="0" rIns="0" tIns="0" bIns="0" anchor="ctr">
+            <a:spAutoFit/>
+          </a:bodyPr>
+          <a:lstStyle/>
+          <a:p>
+            <a:pPr algn="l"/>
+            <a:r>
+              <a:rPr sz="2000" b="1">
+                <a:solidFill>
+                  <a:srgbClr val="232F3E"/>
+                </a:solidFill>
+                <a:latin typeface="Calibri"/>
+              </a:rPr>
+              <a:t>176</a:t>
+            </a:r>
+          </a:p>
+        </p:txBody>
+      </p:sp>
+      <p:sp>
+        <p:nvSpPr>
+          <p:cNvPr id="16" name="TextBox 15"/>
+          <p:cNvSpPr txBox="1"/>
+          <p:nvPr/>
+        </p:nvSpPr>
+        <p:spPr>
+          <a:xfrm>
+            <a:off x="4430268" y="5010912"/>
+            <a:ext cx="1431035" cy="365760"/>
+          </a:xfrm>
+          <a:prstGeom prst="rect">
+            <a:avLst/>
+          </a:prstGeom>
+          <a:noFill/>
+        </p:spPr>
+        <p:txBody>
+          <a:bodyPr wrap="square" lIns="0" rIns="0" tIns="0" bIns="0" anchor="ctr">
+            <a:spAutoFit/>
+          </a:bodyPr>
+          <a:lstStyle/>
+          <a:p>
+            <a:pPr algn="l"/>
+            <a:r>
+              <a:rPr sz="1200" b="1">
+                <a:solidFill>
+                  <a:srgbClr val="232F3E"/>
+                </a:solidFill>
+                <a:latin typeface="Calibri"/>
+              </a:rPr>
+              <a:t>commits</a:t>
+            </a:r>
+          </a:p>
+        </p:txBody>
+      </p:sp>
+      <p:sp>
+        <p:nvSpPr>
+          <p:cNvPr id="17" name="TextBox 16"/>
+          <p:cNvSpPr txBox="1"/>
+          <p:nvPr/>
+        </p:nvSpPr>
+        <p:spPr>
+          <a:xfrm>
+            <a:off x="3534156" y="5394960"/>
+            <a:ext cx="2327148" cy="292608"/>
+          </a:xfrm>
+          <a:prstGeom prst="rect">
+            <a:avLst/>
+          </a:prstGeom>
+          <a:noFill/>
+        </p:spPr>
+        <p:txBody>
+          <a:bodyPr wrap="square" lIns="0" rIns="0" tIns="0" bIns="0" anchor="ctr">
+            <a:spAutoFit/>
+          </a:bodyPr>
+          <a:lstStyle/>
+          <a:p>
+            <a:pPr algn="l"/>
+            <a:r>
+              <a:rPr sz="1000" b="0">
+                <a:solidFill>
+                  <a:srgbClr val="545B64"/>
+                </a:solidFill>
+                <a:latin typeface="Calibri"/>
+              </a:rPr>
+              <a:t>+34,549 lines, 436 files</a:t>
+            </a:r>
+          </a:p>
+        </p:txBody>
+      </p:sp>
+      <p:sp>
+        <p:nvSpPr>
+          <p:cNvPr id="18" name="Rounded Rectangle 17"/>
+          <p:cNvSpPr/>
+          <p:nvPr/>
+        </p:nvSpPr>
+        <p:spPr>
+          <a:xfrm>
+            <a:off x="6172200" y="4956048"/>
+            <a:ext cx="2656332" cy="786384"/>
+          </a:xfrm>
+          <a:prstGeom prst="roundRect">
+            <a:avLst>
+              <a:gd name="adj" fmla="val 6976"/>
+            </a:avLst>
+          </a:prstGeom>
+          <a:solidFill>
+            <a:srgbClr val="F7F8FA"/>
+          </a:solidFill>
+          <a:ln w="12700">
+            <a:solidFill>
+              <a:srgbClr val="E4E7EA"/>
+            </a:solidFill>
+          </a:ln>
+          <a:effectLst/>
+        </p:spPr>
+        <p:style>
+          <a:lnRef idx="1">
+            <a:schemeClr val="accent1"/>
+          </a:lnRef>
+          <a:fillRef idx="3">
+            <a:schemeClr val="accent1"/>
+          </a:fillRef>
+          <a:effectRef idx="2">
+            <a:schemeClr val="accent1"/>
+          </a:effectRef>
+          <a:fontRef idx="minor">
+            <a:schemeClr val="lt1"/>
+          </a:fontRef>
+        </p:style>
+        <p:txBody>
+          <a:bodyPr rtlCol="0" anchor="ctr"/>
+          <a:lstStyle/>
+          <a:p>
+            <a:pPr algn="ctr"/>
+          </a:p>
+        </p:txBody>
+      </p:sp>
+      <p:sp>
+        <p:nvSpPr>
+          <p:cNvPr id="19" name="TextBox 18"/>
+          <p:cNvSpPr txBox="1"/>
+          <p:nvPr/>
+        </p:nvSpPr>
+        <p:spPr>
+          <a:xfrm>
+            <a:off x="6336792" y="5010912"/>
+            <a:ext cx="914400" cy="365760"/>
+          </a:xfrm>
+          <a:prstGeom prst="rect">
+            <a:avLst/>
+          </a:prstGeom>
+          <a:noFill/>
+        </p:spPr>
+        <p:txBody>
+          <a:bodyPr wrap="square" lIns="0" rIns="0" tIns="0" bIns="0" anchor="ctr">
+            <a:spAutoFit/>
+          </a:bodyPr>
+          <a:lstStyle/>
+          <a:p>
+            <a:pPr algn="l"/>
+            <a:r>
+              <a:rPr sz="2000" b="1">
+                <a:solidFill>
+                  <a:srgbClr val="232F3E"/>
+                </a:solidFill>
+                <a:latin typeface="Calibri"/>
+              </a:rPr>
+              <a:t>93</a:t>
+            </a:r>
+          </a:p>
+        </p:txBody>
+      </p:sp>
+      <p:sp>
+        <p:nvSpPr>
+          <p:cNvPr id="20" name="TextBox 19"/>
+          <p:cNvSpPr txBox="1"/>
+          <p:nvPr/>
+        </p:nvSpPr>
+        <p:spPr>
+          <a:xfrm>
+            <a:off x="7232904" y="5010912"/>
+            <a:ext cx="1431035" cy="365760"/>
+          </a:xfrm>
+          <a:prstGeom prst="rect">
+            <a:avLst/>
+          </a:prstGeom>
+          <a:noFill/>
+        </p:spPr>
+        <p:txBody>
+          <a:bodyPr wrap="square" lIns="0" rIns="0" tIns="0" bIns="0" anchor="ctr">
+            <a:spAutoFit/>
+          </a:bodyPr>
+          <a:lstStyle/>
+          <a:p>
+            <a:pPr algn="l"/>
+            <a:r>
+              <a:rPr sz="1200" b="1">
+                <a:solidFill>
+                  <a:srgbClr val="232F3E"/>
+                </a:solidFill>
+                <a:latin typeface="Calibri"/>
+              </a:rPr>
+              <a:t>review comments</a:t>
+            </a:r>
+          </a:p>
+        </p:txBody>
+      </p:sp>
+      <p:sp>
+        <p:nvSpPr>
+          <p:cNvPr id="21" name="TextBox 20"/>
+          <p:cNvSpPr txBox="1"/>
+          <p:nvPr/>
+        </p:nvSpPr>
+        <p:spPr>
+          <a:xfrm>
+            <a:off x="6336792" y="5394960"/>
+            <a:ext cx="2327148" cy="292608"/>
+          </a:xfrm>
+          <a:prstGeom prst="rect">
+            <a:avLst/>
+          </a:prstGeom>
+          <a:noFill/>
+        </p:spPr>
+        <p:txBody>
+          <a:bodyPr wrap="square" lIns="0" rIns="0" tIns="0" bIns="0" anchor="ctr">
+            <a:spAutoFit/>
+          </a:bodyPr>
+          <a:lstStyle/>
+          <a:p>
+            <a:pPr algn="l"/>
+            <a:r>
+              <a:rPr sz="1000" b="0">
+                <a:solidFill>
+                  <a:srgbClr val="545B64"/>
+                </a:solidFill>
+                <a:latin typeface="Calibri"/>
+              </a:rPr>
+              <a:t>longest threads run dozens deep</a:t>
+            </a:r>
+          </a:p>
+        </p:txBody>
+      </p:sp>
+      <p:sp>
+        <p:nvSpPr>
+          <p:cNvPr id="22" name="Rounded Rectangle 21"/>
+          <p:cNvSpPr/>
+          <p:nvPr/>
+        </p:nvSpPr>
+        <p:spPr>
+          <a:xfrm>
+            <a:off x="8974836" y="4956048"/>
+            <a:ext cx="2656332" cy="786384"/>
+          </a:xfrm>
+          <a:prstGeom prst="roundRect">
+            <a:avLst>
+              <a:gd name="adj" fmla="val 6976"/>
+            </a:avLst>
+          </a:prstGeom>
+          <a:solidFill>
+            <a:srgbClr val="F7F8FA"/>
+          </a:solidFill>
+          <a:ln w="12700">
+            <a:solidFill>
+              <a:srgbClr val="E4E7EA"/>
+            </a:solidFill>
+          </a:ln>
+          <a:effectLst/>
+        </p:spPr>
+        <p:style>
+          <a:lnRef idx="1">
+            <a:schemeClr val="accent1"/>
+          </a:lnRef>
+          <a:fillRef idx="3">
+            <a:schemeClr val="accent1"/>
+          </a:fillRef>
+          <a:effectRef idx="2">
+            <a:schemeClr val="accent1"/>
+          </a:effectRef>
+          <a:fontRef idx="minor">
+            <a:schemeClr val="lt1"/>
+          </a:fontRef>
+        </p:style>
+        <p:txBody>
+          <a:bodyPr rtlCol="0" anchor="ctr"/>
+          <a:lstStyle/>
+          <a:p>
+            <a:pPr algn="ctr"/>
+          </a:p>
+        </p:txBody>
+      </p:sp>
+      <p:sp>
+        <p:nvSpPr>
+          <p:cNvPr id="23" name="TextBox 22"/>
+          <p:cNvSpPr txBox="1"/>
+          <p:nvPr/>
+        </p:nvSpPr>
+        <p:spPr>
+          <a:xfrm>
+            <a:off x="9139428" y="5010912"/>
+            <a:ext cx="914400" cy="365760"/>
+          </a:xfrm>
+          <a:prstGeom prst="rect">
+            <a:avLst/>
+          </a:prstGeom>
+          <a:noFill/>
+        </p:spPr>
+        <p:txBody>
+          <a:bodyPr wrap="square" lIns="0" rIns="0" tIns="0" bIns="0" anchor="ctr">
+            <a:spAutoFit/>
+          </a:bodyPr>
+          <a:lstStyle/>
+          <a:p>
+            <a:pPr algn="l"/>
+            <a:r>
+              <a:rPr sz="2000" b="1">
+                <a:solidFill>
+                  <a:srgbClr val="232F3E"/>
+                </a:solidFill>
+                <a:latin typeface="Calibri"/>
+              </a:rPr>
+              <a:t>32</a:t>
+            </a:r>
+          </a:p>
+        </p:txBody>
+      </p:sp>
+      <p:sp>
+        <p:nvSpPr>
+          <p:cNvPr id="24" name="TextBox 23"/>
+          <p:cNvSpPr txBox="1"/>
+          <p:nvPr/>
+        </p:nvSpPr>
+        <p:spPr>
+          <a:xfrm>
+            <a:off x="10035540" y="5010912"/>
+            <a:ext cx="1431035" cy="365760"/>
+          </a:xfrm>
+          <a:prstGeom prst="rect">
+            <a:avLst/>
+          </a:prstGeom>
+          <a:noFill/>
+        </p:spPr>
+        <p:txBody>
+          <a:bodyPr wrap="square" lIns="0" rIns="0" tIns="0" bIns="0" anchor="ctr">
+            <a:spAutoFit/>
+          </a:bodyPr>
+          <a:lstStyle/>
+          <a:p>
+            <a:pPr algn="l"/>
+            <a:r>
+              <a:rPr sz="1200" b="1">
+                <a:solidFill>
+                  <a:srgbClr val="232F3E"/>
+                </a:solidFill>
+                <a:latin typeface="Calibri"/>
+              </a:rPr>
+              <a:t>workflow PRs</a:t>
+            </a:r>
+          </a:p>
+        </p:txBody>
+      </p:sp>
+      <p:sp>
+        <p:nvSpPr>
+          <p:cNvPr id="25" name="TextBox 24"/>
+          <p:cNvSpPr txBox="1"/>
+          <p:nvPr/>
+        </p:nvSpPr>
+        <p:spPr>
+          <a:xfrm>
+            <a:off x="9139428" y="5394960"/>
+            <a:ext cx="2327148" cy="292608"/>
+          </a:xfrm>
+          <a:prstGeom prst="rect">
+            <a:avLst/>
+          </a:prstGeom>
+          <a:noFill/>
+        </p:spPr>
+        <p:txBody>
+          <a:bodyPr wrap="square" lIns="0" rIns="0" tIns="0" bIns="0" anchor="ctr">
+            <a:spAutoFit/>
+          </a:bodyPr>
+          <a:lstStyle/>
+          <a:p>
+            <a:pPr algn="l"/>
+            <a:r>
+              <a:rPr sz="1000" b="0">
+                <a:solidFill>
+                  <a:srgbClr val="545B64"/>
+                </a:solidFill>
+                <a:latin typeface="Calibri"/>
+              </a:rPr>
+              <a:t>the methodology is the biggest lane</a:t>
+            </a:r>
+          </a:p>
+        </p:txBody>
+      </p:sp>
+      <p:sp>
+        <p:nvSpPr>
+          <p:cNvPr id="26" name="TextBox 25"/>
+          <p:cNvSpPr txBox="1"/>
+          <p:nvPr/>
+        </p:nvSpPr>
+        <p:spPr>
+          <a:xfrm>
+            <a:off x="566928" y="5888736"/>
+            <a:ext cx="11064240" cy="475488"/>
+          </a:xfrm>
+          <a:prstGeom prst="rect">
+            <a:avLst/>
+          </a:prstGeom>
+          <a:noFill/>
+        </p:spPr>
+        <p:txBody>
+          <a:bodyPr wrap="square" lIns="0" rIns="0" tIns="0" bIns="0" anchor="t">
+            <a:spAutoFit/>
+          </a:bodyPr>
+          <a:lstStyle/>
+          <a:p>
+            <a:pPr algn="l"/>
+            <a:r>
+              <a:rPr sz="1050" b="0">
+                <a:solidFill>
+                  <a:srgbClr val="545B64"/>
+                </a:solidFill>
+                <a:latin typeface="Calibri"/>
+              </a:rPr>
+              <a:t>Generated from the repo’s PR history by a script, so it cannot drift. Node size is files changed; a ring means a genuine multi-agent review thread; the axis is PR order, not a calendar. At the peak, five PRs were open at once.</a:t>
+            </a:r>
+          </a:p>
+        </p:txBody>
+      </p:sp>
+      <p:sp>
+        <p:nvSpPr>
+          <p:cNvPr id="27" name="TextBox 26"/>
+          <p:cNvSpPr txBox="1"/>
+          <p:nvPr/>
+        </p:nvSpPr>
+        <p:spPr>
+          <a:xfrm>
+            <a:off x="566928" y="1792224"/>
+            <a:ext cx="11064240" cy="256032"/>
+          </a:xfrm>
+          <a:prstGeom prst="rect">
+            <a:avLst/>
+          </a:prstGeom>
+          <a:noFill/>
+        </p:spPr>
+        <p:txBody>
+          <a:bodyPr wrap="square" lIns="0" rIns="0" tIns="0" bIns="0" anchor="ctr">
+            <a:spAutoFit/>
+          </a:bodyPr>
+          <a:lstStyle/>
+          <a:p>
+            <a:pPr algn="l"/>
+            <a:r>
+              <a:rPr sz="1050" b="0">
+                <a:solidFill>
+                  <a:srgbClr val="545B64"/>
+                </a:solidFill>
+                <a:latin typeface="Calibri"/>
+              </a:rPr>
+              <a:t>node size = files changed   ·   ring = a genuine multi-agent review thread   ·   dashed = reviewed, then closed without merging   ·   left to right = the order the PRs were opened</a:t>
+            </a:r>
+          </a:p>
+        </p:txBody>
+      </p:sp>
+      <p:sp>
+        <p:nvSpPr>
+          <p:cNvPr id="28" name="TextBox 27"/>
+          <p:cNvSpPr txBox="1"/>
+          <p:nvPr/>
+        </p:nvSpPr>
+        <p:spPr>
+          <a:xfrm>
+            <a:off x="566928" y="2447773"/>
+            <a:ext cx="1207008" cy="237744"/>
+          </a:xfrm>
+          <a:prstGeom prst="rect">
+            <a:avLst/>
+          </a:prstGeom>
+          <a:noFill/>
+        </p:spPr>
+        <p:txBody>
+          <a:bodyPr wrap="square" lIns="0" rIns="0" tIns="0" bIns="0" anchor="ctr">
+            <a:spAutoFit/>
+          </a:bodyPr>
+          <a:lstStyle/>
+          <a:p>
+            <a:pPr algn="r"/>
+            <a:r>
+              <a:rPr sz="1000" b="1">
+                <a:solidFill>
+                  <a:srgbClr val="232F3E"/>
+                </a:solidFill>
+                <a:latin typeface="Calibri"/>
+              </a:rPr>
+              <a:t>Master Agent</a:t>
+            </a:r>
+          </a:p>
+        </p:txBody>
+      </p:sp>
+      <p:sp>
+        <p:nvSpPr>
+          <p:cNvPr id="29" name="TextBox 28"/>
+          <p:cNvSpPr txBox="1"/>
+          <p:nvPr/>
+        </p:nvSpPr>
+        <p:spPr>
+          <a:xfrm>
+            <a:off x="566928" y="2733176"/>
+            <a:ext cx="1207008" cy="237744"/>
+          </a:xfrm>
+          <a:prstGeom prst="rect">
+            <a:avLst/>
+          </a:prstGeom>
+          <a:noFill/>
+        </p:spPr>
+        <p:txBody>
+          <a:bodyPr wrap="square" lIns="0" rIns="0" tIns="0" bIns="0" anchor="ctr">
+            <a:spAutoFit/>
+          </a:bodyPr>
+          <a:lstStyle/>
+          <a:p>
+            <a:pPr algn="r"/>
+            <a:r>
+              <a:rPr sz="1000" b="1">
+                <a:solidFill>
+                  <a:srgbClr val="232F3E"/>
+                </a:solidFill>
+                <a:latin typeface="Calibri"/>
+              </a:rPr>
+              <a:t>System Architect</a:t>
+            </a:r>
+          </a:p>
+        </p:txBody>
+      </p:sp>
+      <p:sp>
+        <p:nvSpPr>
+          <p:cNvPr id="30" name="TextBox 29"/>
+          <p:cNvSpPr txBox="1"/>
+          <p:nvPr/>
+        </p:nvSpPr>
+        <p:spPr>
+          <a:xfrm>
+            <a:off x="566928" y="3018578"/>
+            <a:ext cx="1207008" cy="237744"/>
+          </a:xfrm>
+          <a:prstGeom prst="rect">
+            <a:avLst/>
+          </a:prstGeom>
+          <a:noFill/>
+        </p:spPr>
+        <p:txBody>
+          <a:bodyPr wrap="square" lIns="0" rIns="0" tIns="0" bIns="0" anchor="ctr">
+            <a:spAutoFit/>
+          </a:bodyPr>
+          <a:lstStyle/>
+          <a:p>
+            <a:pPr algn="r"/>
+            <a:r>
+              <a:rPr sz="1000" b="1">
+                <a:solidFill>
+                  <a:srgbClr val="232F3E"/>
+                </a:solidFill>
+                <a:latin typeface="Calibri"/>
+              </a:rPr>
+              <a:t>Frontend Dev</a:t>
+            </a:r>
+          </a:p>
+        </p:txBody>
+      </p:sp>
+      <p:sp>
+        <p:nvSpPr>
+          <p:cNvPr id="31" name="TextBox 30"/>
+          <p:cNvSpPr txBox="1"/>
+          <p:nvPr/>
+        </p:nvSpPr>
+        <p:spPr>
+          <a:xfrm>
+            <a:off x="566928" y="3303981"/>
+            <a:ext cx="1207008" cy="237744"/>
+          </a:xfrm>
+          <a:prstGeom prst="rect">
+            <a:avLst/>
+          </a:prstGeom>
+          <a:noFill/>
+        </p:spPr>
+        <p:txBody>
+          <a:bodyPr wrap="square" lIns="0" rIns="0" tIns="0" bIns="0" anchor="ctr">
+            <a:spAutoFit/>
+          </a:bodyPr>
+          <a:lstStyle/>
+          <a:p>
+            <a:pPr algn="r"/>
+            <a:r>
+              <a:rPr sz="1000" b="1">
+                <a:solidFill>
+                  <a:srgbClr val="232F3E"/>
+                </a:solidFill>
+                <a:latin typeface="Calibri"/>
+              </a:rPr>
+              <a:t>Backend Dev</a:t>
+            </a:r>
+          </a:p>
+        </p:txBody>
+      </p:sp>
+      <p:sp>
+        <p:nvSpPr>
+          <p:cNvPr id="32" name="TextBox 31"/>
+          <p:cNvSpPr txBox="1"/>
+          <p:nvPr/>
+        </p:nvSpPr>
+        <p:spPr>
+          <a:xfrm>
+            <a:off x="566928" y="3589383"/>
+            <a:ext cx="1207008" cy="237744"/>
+          </a:xfrm>
+          <a:prstGeom prst="rect">
+            <a:avLst/>
+          </a:prstGeom>
+          <a:noFill/>
+        </p:spPr>
+        <p:txBody>
+          <a:bodyPr wrap="square" lIns="0" rIns="0" tIns="0" bIns="0" anchor="ctr">
+            <a:spAutoFit/>
+          </a:bodyPr>
+          <a:lstStyle/>
+          <a:p>
+            <a:pPr algn="r"/>
+            <a:r>
+              <a:rPr sz="1000" b="1">
+                <a:solidFill>
+                  <a:srgbClr val="232F3E"/>
+                </a:solidFill>
+                <a:latin typeface="Calibri"/>
+              </a:rPr>
+              <a:t>UI Designer</a:t>
+            </a:r>
+          </a:p>
+        </p:txBody>
+      </p:sp>
+      <p:sp>
+        <p:nvSpPr>
+          <p:cNvPr id="33" name="TextBox 32"/>
+          <p:cNvSpPr txBox="1"/>
+          <p:nvPr/>
+        </p:nvSpPr>
+        <p:spPr>
+          <a:xfrm>
+            <a:off x="566928" y="3874786"/>
+            <a:ext cx="1207008" cy="237744"/>
+          </a:xfrm>
+          <a:prstGeom prst="rect">
+            <a:avLst/>
+          </a:prstGeom>
+          <a:noFill/>
+        </p:spPr>
+        <p:txBody>
+          <a:bodyPr wrap="square" lIns="0" rIns="0" tIns="0" bIns="0" anchor="ctr">
+            <a:spAutoFit/>
+          </a:bodyPr>
+          <a:lstStyle/>
+          <a:p>
+            <a:pPr algn="r"/>
+            <a:r>
+              <a:rPr sz="1000" b="1">
+                <a:solidFill>
+                  <a:srgbClr val="232F3E"/>
+                </a:solidFill>
+                <a:latin typeface="Calibri"/>
+              </a:rPr>
+              <a:t>QA Agent</a:t>
+            </a:r>
+          </a:p>
+        </p:txBody>
+      </p:sp>
+      <p:sp>
+        <p:nvSpPr>
+          <p:cNvPr id="34" name="TextBox 33"/>
+          <p:cNvSpPr txBox="1"/>
+          <p:nvPr/>
+        </p:nvSpPr>
+        <p:spPr>
+          <a:xfrm>
+            <a:off x="566928" y="4160189"/>
+            <a:ext cx="1207008" cy="237744"/>
+          </a:xfrm>
+          <a:prstGeom prst="rect">
+            <a:avLst/>
+          </a:prstGeom>
+          <a:noFill/>
+        </p:spPr>
+        <p:txBody>
+          <a:bodyPr wrap="square" lIns="0" rIns="0" tIns="0" bIns="0" anchor="ctr">
+            <a:spAutoFit/>
+          </a:bodyPr>
+          <a:lstStyle/>
+          <a:p>
+            <a:pPr algn="r"/>
+            <a:r>
+              <a:rPr sz="1000" b="1">
+                <a:solidFill>
+                  <a:srgbClr val="232F3E"/>
+                </a:solidFill>
+                <a:latin typeface="Calibri"/>
+              </a:rPr>
+              <a:t>Infra / Workflow</a:t>
+            </a:r>
           </a:p>
         </p:txBody>
       </p:sp>
@@ -4969,267 +5818,21 @@
         </p:nvPicPr>
         <p:blipFill>
           <a:blip r:embed="rId3"/>
-          <a:srcRect l="8999" t="22829" r="8751" b="13434"/>
+          <a:srcRect l="18833" t="31361" r="12083" b="40385"/>
           <a:stretch>
             <a:fillRect/>
           </a:stretch>
         </p:blipFill>
         <p:spPr>
           <a:xfrm>
-            <a:off x="153769" y="1204315"/>
-            <a:ext cx="11816558" cy="5150765"/>
+            <a:off x="1874519" y="2148840"/>
+            <a:ext cx="9756648" cy="2247912"/>
           </a:xfrm>
           <a:prstGeom prst="rect">
             <a:avLst/>
           </a:prstGeom>
         </p:spPr>
       </p:pic>
-      <p:sp>
-        <p:nvSpPr>
-          <p:cNvPr id="4" name="Oval 3"/>
-          <p:cNvSpPr/>
-          <p:nvPr/>
-        </p:nvSpPr>
-        <p:spPr>
-          <a:xfrm>
-            <a:off x="502920" y="365760"/>
-            <a:ext cx="594360" cy="594360"/>
-          </a:xfrm>
-          <a:prstGeom prst="ellipse">
-            <a:avLst/>
-          </a:prstGeom>
-          <a:solidFill>
-            <a:srgbClr val="232F3E"/>
-          </a:solidFill>
-          <a:ln>
-            <a:noFill/>
-          </a:ln>
-          <a:effectLst/>
-        </p:spPr>
-        <p:style>
-          <a:lnRef idx="1">
-            <a:schemeClr val="accent1"/>
-          </a:lnRef>
-          <a:fillRef idx="3">
-            <a:schemeClr val="accent1"/>
-          </a:fillRef>
-          <a:effectRef idx="2">
-            <a:schemeClr val="accent1"/>
-          </a:effectRef>
-          <a:fontRef idx="minor">
-            <a:schemeClr val="lt1"/>
-          </a:fontRef>
-        </p:style>
-        <p:txBody>
-          <a:bodyPr rtlCol="0" anchor="ctr"/>
-          <a:lstStyle/>
-          <a:p>
-            <a:pPr algn="ctr"/>
-            <a:endParaRPr/>
-          </a:p>
-        </p:txBody>
-      </p:sp>
-      <p:sp>
-        <p:nvSpPr>
-          <p:cNvPr id="5" name="TextBox 4"/>
-          <p:cNvSpPr txBox="1"/>
-          <p:nvPr/>
-        </p:nvSpPr>
-        <p:spPr>
-          <a:xfrm>
-            <a:off x="502920" y="365760"/>
-            <a:ext cx="594360" cy="594360"/>
-          </a:xfrm>
-          <a:prstGeom prst="rect">
-            <a:avLst/>
-          </a:prstGeom>
-          <a:noFill/>
-        </p:spPr>
-        <p:txBody>
-          <a:bodyPr wrap="square" lIns="0" tIns="0" rIns="0" bIns="0" anchor="ctr">
-            <a:spAutoFit/>
-          </a:bodyPr>
-          <a:lstStyle/>
-          <a:p>
-            <a:pPr algn="ctr"/>
-            <a:r>
-              <a:rPr sz="2600" b="1">
-                <a:solidFill>
-                  <a:srgbClr val="FF9900"/>
-                </a:solidFill>
-                <a:latin typeface="Calibri"/>
-              </a:rPr>
-              <a:t>14</a:t>
-            </a:r>
-          </a:p>
-        </p:txBody>
-      </p:sp>
-      <p:sp>
-        <p:nvSpPr>
-          <p:cNvPr id="6" name="TextBox 5"/>
-          <p:cNvSpPr txBox="1"/>
-          <p:nvPr/>
-        </p:nvSpPr>
-        <p:spPr>
-          <a:xfrm>
-            <a:off x="502920" y="6446520"/>
-            <a:ext cx="8229600" cy="320040"/>
-          </a:xfrm>
-          <a:prstGeom prst="rect">
-            <a:avLst/>
-          </a:prstGeom>
-          <a:noFill/>
-        </p:spPr>
-        <p:txBody>
-          <a:bodyPr wrap="square" lIns="0" tIns="0" rIns="0" bIns="0" anchor="ctr">
-            <a:spAutoFit/>
-          </a:bodyPr>
-          <a:lstStyle/>
-          <a:p>
-            <a:pPr algn="l"/>
-            <a:r>
-              <a:rPr sz="1000" b="1">
-                <a:solidFill>
-                  <a:srgbClr val="545B64"/>
-                </a:solidFill>
-                <a:latin typeface="Calibri"/>
-              </a:rPr>
-              <a:t>VALENTIN   ·   GenAI TFC Capstone Deep-Dive</a:t>
-            </a:r>
-          </a:p>
-        </p:txBody>
-      </p:sp>
-      <p:sp>
-        <p:nvSpPr>
-          <p:cNvPr id="7" name="TextBox 6"/>
-          <p:cNvSpPr txBox="1"/>
-          <p:nvPr/>
-        </p:nvSpPr>
-        <p:spPr>
-          <a:xfrm>
-            <a:off x="10332720" y="6446520"/>
-            <a:ext cx="1371600" cy="320040"/>
-          </a:xfrm>
-          <a:prstGeom prst="rect">
-            <a:avLst/>
-          </a:prstGeom>
-          <a:noFill/>
-        </p:spPr>
-        <p:txBody>
-          <a:bodyPr wrap="square" lIns="0" tIns="0" rIns="0" bIns="0" anchor="ctr">
-            <a:spAutoFit/>
-          </a:bodyPr>
-          <a:lstStyle/>
-          <a:p>
-            <a:pPr algn="r"/>
-            <a:r>
-              <a:rPr sz="1000" b="0">
-                <a:solidFill>
-                  <a:srgbClr val="545B64"/>
-                </a:solidFill>
-                <a:latin typeface="Calibri"/>
-              </a:rPr>
-              <a:t>15 / 17</a:t>
-            </a:r>
-          </a:p>
-        </p:txBody>
-      </p:sp>
-      <p:sp>
-        <p:nvSpPr>
-          <p:cNvPr id="9" name="Rectangle 8">
-            <a:hlinkClick r:id="rId4"/>
-          </p:cNvPr>
-          <p:cNvSpPr/>
-          <p:nvPr/>
-        </p:nvSpPr>
-        <p:spPr>
-          <a:xfrm>
-            <a:off x="1363980" y="4617720"/>
-            <a:ext cx="1706880" cy="236220"/>
-          </a:xfrm>
-          <a:prstGeom prst="rect">
-            <a:avLst/>
-          </a:prstGeom>
-          <a:solidFill>
-            <a:srgbClr val="FFFFFF">
-              <a:alpha val="0"/>
-            </a:srgbClr>
-          </a:solidFill>
-          <a:ln>
-            <a:noFill/>
-          </a:ln>
-          <a:effectLst/>
-        </p:spPr>
-        <p:style>
-          <a:lnRef idx="1">
-            <a:schemeClr val="accent1"/>
-          </a:lnRef>
-          <a:fillRef idx="3">
-            <a:schemeClr val="accent1"/>
-          </a:fillRef>
-          <a:effectRef idx="2">
-            <a:schemeClr val="accent1"/>
-          </a:effectRef>
-          <a:fontRef idx="minor">
-            <a:schemeClr val="lt1"/>
-          </a:fontRef>
-        </p:style>
-        <p:txBody>
-          <a:bodyPr rtlCol="0" anchor="ctr"/>
-          <a:lstStyle/>
-          <a:p>
-            <a:pPr algn="ctr"/>
-            <a:endParaRPr/>
-          </a:p>
-        </p:txBody>
-      </p:sp>
-      <p:sp>
-        <p:nvSpPr>
-          <p:cNvPr id="10" name="TextBox 9">
-            <a:extLst>
-              <a:ext uri="{FF2B5EF4-FFF2-40B4-BE49-F238E27FC236}">
-                <a16:creationId xmlns:a16="http://schemas.microsoft.com/office/drawing/2014/main" id="{B6B9D365-56E4-DCC6-9C31-87B2560C50D3}"/>
-              </a:ext>
-            </a:extLst>
-          </p:cNvPr>
-          <p:cNvSpPr txBox="1"/>
-          <p:nvPr/>
-        </p:nvSpPr>
-        <p:spPr>
-          <a:xfrm>
-            <a:off x="1280160" y="478274"/>
-            <a:ext cx="10058400" cy="369332"/>
-          </a:xfrm>
-          <a:prstGeom prst="rect">
-            <a:avLst/>
-          </a:prstGeom>
-          <a:noFill/>
-        </p:spPr>
-        <p:txBody>
-          <a:bodyPr wrap="square" lIns="0" tIns="0" rIns="0" bIns="0" anchor="ctr">
-            <a:spAutoFit/>
-          </a:bodyPr>
-          <a:lstStyle/>
-          <a:p>
-            <a:pPr algn="l"/>
-            <a:r>
-              <a:rPr lang="en-US" sz="2400" b="1" dirty="0">
-                <a:solidFill>
-                  <a:srgbClr val="232F3E"/>
-                </a:solidFill>
-                <a:latin typeface="Calibri"/>
-              </a:rPr>
-              <a:t>How they Built it?</a:t>
-            </a:r>
-            <a:endParaRPr sz="2400" b="1" dirty="0">
-              <a:solidFill>
-                <a:srgbClr val="232F3E"/>
-              </a:solidFill>
-              <a:latin typeface="Calibri"/>
-            </a:endParaRPr>
-          </a:p>
-        </p:txBody>
-      </p:sp>
     </p:spTree>
   </p:cSld>
   <p:clrMapOvr>
@@ -25299,6 +25902,4707 @@
                 <a:latin typeface="Calibri"/>
               </a:rPr>
               <a:t>sessions lost to the same fault, on the same code — the whole argument in one number</a:t>
+            </a:r>
+          </a:p>
+        </p:txBody>
+      </p:sp>
+    </p:spTree>
+  </p:cSld>
+  <p:clrMapOvr>
+    <a:masterClrMapping/>
+  </p:clrMapOvr>
+</p:sld>
+</file>
+
+<file path=ppt/slides/slide25.xml><?xml version="1.0" encoding="utf-8"?>
+<p:sld xmlns:a="http://schemas.openxmlformats.org/drawingml/2006/main" xmlns:p="http://schemas.openxmlformats.org/presentationml/2006/main" xmlns:r="http://schemas.openxmlformats.org/officeDocument/2006/relationships">
+  <p:cSld>
+    <p:spTree>
+      <p:nvGrpSpPr>
+        <p:cNvPr id="1" name=""/>
+        <p:cNvGrpSpPr/>
+        <p:nvPr/>
+      </p:nvGrpSpPr>
+      <p:grpSpPr/>
+      <p:sp>
+        <p:nvSpPr>
+          <p:cNvPr id="2" name="Rectangle 1"/>
+          <p:cNvSpPr/>
+          <p:nvPr/>
+        </p:nvSpPr>
+        <p:spPr>
+          <a:xfrm>
+            <a:off x="0" y="0"/>
+            <a:ext cx="12191969" cy="6858000"/>
+          </a:xfrm>
+          <a:prstGeom prst="rect">
+            <a:avLst/>
+          </a:prstGeom>
+          <a:solidFill>
+            <a:srgbClr val="FFFFFF"/>
+          </a:solidFill>
+          <a:ln>
+            <a:noFill/>
+          </a:ln>
+          <a:effectLst/>
+        </p:spPr>
+        <p:style>
+          <a:lnRef idx="1">
+            <a:schemeClr val="accent1"/>
+          </a:lnRef>
+          <a:fillRef idx="3">
+            <a:schemeClr val="accent1"/>
+          </a:fillRef>
+          <a:effectRef idx="2">
+            <a:schemeClr val="accent1"/>
+          </a:effectRef>
+          <a:fontRef idx="minor">
+            <a:schemeClr val="lt1"/>
+          </a:fontRef>
+        </p:style>
+        <p:txBody>
+          <a:bodyPr rtlCol="0" anchor="ctr"/>
+          <a:lstStyle/>
+          <a:p>
+            <a:pPr algn="ctr"/>
+          </a:p>
+        </p:txBody>
+      </p:sp>
+      <p:sp>
+        <p:nvSpPr>
+          <p:cNvPr id="3" name="Oval 2"/>
+          <p:cNvSpPr/>
+          <p:nvPr/>
+        </p:nvSpPr>
+        <p:spPr>
+          <a:xfrm>
+            <a:off x="502920" y="365760"/>
+            <a:ext cx="594360" cy="594360"/>
+          </a:xfrm>
+          <a:prstGeom prst="ellipse">
+            <a:avLst/>
+          </a:prstGeom>
+          <a:solidFill>
+            <a:srgbClr val="232F3E"/>
+          </a:solidFill>
+          <a:ln>
+            <a:noFill/>
+          </a:ln>
+          <a:effectLst/>
+        </p:spPr>
+        <p:style>
+          <a:lnRef idx="1">
+            <a:schemeClr val="accent1"/>
+          </a:lnRef>
+          <a:fillRef idx="3">
+            <a:schemeClr val="accent1"/>
+          </a:fillRef>
+          <a:effectRef idx="2">
+            <a:schemeClr val="accent1"/>
+          </a:effectRef>
+          <a:fontRef idx="minor">
+            <a:schemeClr val="lt1"/>
+          </a:fontRef>
+        </p:style>
+        <p:txBody>
+          <a:bodyPr rtlCol="0" anchor="ctr"/>
+          <a:lstStyle/>
+          <a:p>
+            <a:pPr algn="ctr"/>
+          </a:p>
+        </p:txBody>
+      </p:sp>
+      <p:sp>
+        <p:nvSpPr>
+          <p:cNvPr id="4" name="TextBox 3"/>
+          <p:cNvSpPr txBox="1"/>
+          <p:nvPr/>
+        </p:nvSpPr>
+        <p:spPr>
+          <a:xfrm>
+            <a:off x="502920" y="365760"/>
+            <a:ext cx="594360" cy="594360"/>
+          </a:xfrm>
+          <a:prstGeom prst="rect">
+            <a:avLst/>
+          </a:prstGeom>
+          <a:noFill/>
+        </p:spPr>
+        <p:txBody>
+          <a:bodyPr wrap="square" lIns="0" rIns="0" tIns="0" bIns="0" anchor="ctr">
+            <a:spAutoFit/>
+          </a:bodyPr>
+          <a:lstStyle/>
+          <a:p>
+            <a:pPr algn="ctr"/>
+            <a:r>
+              <a:rPr sz="2600" b="1">
+                <a:solidFill>
+                  <a:srgbClr val="FF9900"/>
+                </a:solidFill>
+                <a:latin typeface="Calibri"/>
+              </a:rPr>
+              <a:t>7</a:t>
+            </a:r>
+          </a:p>
+        </p:txBody>
+      </p:sp>
+      <p:sp>
+        <p:nvSpPr>
+          <p:cNvPr id="5" name="TextBox 4"/>
+          <p:cNvSpPr txBox="1"/>
+          <p:nvPr/>
+        </p:nvSpPr>
+        <p:spPr>
+          <a:xfrm>
+            <a:off x="502920" y="6446520"/>
+            <a:ext cx="8229600" cy="320040"/>
+          </a:xfrm>
+          <a:prstGeom prst="rect">
+            <a:avLst/>
+          </a:prstGeom>
+          <a:noFill/>
+        </p:spPr>
+        <p:txBody>
+          <a:bodyPr wrap="square" lIns="0" rIns="0" tIns="0" bIns="0" anchor="ctr">
+            <a:spAutoFit/>
+          </a:bodyPr>
+          <a:lstStyle/>
+          <a:p>
+            <a:pPr algn="l"/>
+            <a:r>
+              <a:rPr sz="1000" b="1">
+                <a:solidFill>
+                  <a:srgbClr val="545B64"/>
+                </a:solidFill>
+                <a:latin typeface="Calibri"/>
+              </a:rPr>
+              <a:t>VALENTIN   ·   GenAI TFC Capstone Deep-Dive</a:t>
+            </a:r>
+          </a:p>
+        </p:txBody>
+      </p:sp>
+      <p:sp>
+        <p:nvSpPr>
+          <p:cNvPr id="6" name="TextBox 5"/>
+          <p:cNvSpPr txBox="1"/>
+          <p:nvPr/>
+        </p:nvSpPr>
+        <p:spPr>
+          <a:xfrm>
+            <a:off x="10332720" y="6446520"/>
+            <a:ext cx="1371600" cy="320040"/>
+          </a:xfrm>
+          <a:prstGeom prst="rect">
+            <a:avLst/>
+          </a:prstGeom>
+          <a:noFill/>
+        </p:spPr>
+        <p:txBody>
+          <a:bodyPr wrap="square" lIns="0" rIns="0" tIns="0" bIns="0" anchor="ctr">
+            <a:spAutoFit/>
+          </a:bodyPr>
+          <a:lstStyle/>
+          <a:p>
+            <a:pPr algn="r"/>
+            <a:r>
+              <a:rPr sz="1000" b="0">
+                <a:solidFill>
+                  <a:srgbClr val="545B64"/>
+                </a:solidFill>
+                <a:latin typeface="Calibri"/>
+              </a:rPr>
+              <a:t>8 / 17</a:t>
+            </a:r>
+          </a:p>
+        </p:txBody>
+      </p:sp>
+      <p:sp>
+        <p:nvSpPr>
+          <p:cNvPr id="7" name="TextBox 6"/>
+          <p:cNvSpPr txBox="1"/>
+          <p:nvPr/>
+        </p:nvSpPr>
+        <p:spPr>
+          <a:xfrm>
+            <a:off x="1280160" y="365760"/>
+            <a:ext cx="10058400" cy="594360"/>
+          </a:xfrm>
+          <a:prstGeom prst="rect">
+            <a:avLst/>
+          </a:prstGeom>
+          <a:noFill/>
+        </p:spPr>
+        <p:txBody>
+          <a:bodyPr wrap="square" lIns="0" rIns="0" tIns="0" bIns="0" anchor="ctr">
+            <a:spAutoFit/>
+          </a:bodyPr>
+          <a:lstStyle/>
+          <a:p>
+            <a:pPr algn="l"/>
+            <a:r>
+              <a:rPr sz="3000" b="1">
+                <a:solidFill>
+                  <a:srgbClr val="232F3E"/>
+                </a:solidFill>
+                <a:latin typeface="Calibri"/>
+              </a:rPr>
+              <a:t>Cost — the bill, itemised</a:t>
+            </a:r>
+          </a:p>
+        </p:txBody>
+      </p:sp>
+      <p:sp>
+        <p:nvSpPr>
+          <p:cNvPr id="8" name="Rectangle 7"/>
+          <p:cNvSpPr/>
+          <p:nvPr/>
+        </p:nvSpPr>
+        <p:spPr>
+          <a:xfrm>
+            <a:off x="502920" y="1051560"/>
+            <a:ext cx="1371600" cy="36576"/>
+          </a:xfrm>
+          <a:prstGeom prst="rect">
+            <a:avLst/>
+          </a:prstGeom>
+          <a:solidFill>
+            <a:srgbClr val="FF9900"/>
+          </a:solidFill>
+          <a:ln>
+            <a:noFill/>
+          </a:ln>
+          <a:effectLst/>
+        </p:spPr>
+        <p:style>
+          <a:lnRef idx="1">
+            <a:schemeClr val="accent1"/>
+          </a:lnRef>
+          <a:fillRef idx="3">
+            <a:schemeClr val="accent1"/>
+          </a:fillRef>
+          <a:effectRef idx="2">
+            <a:schemeClr val="accent1"/>
+          </a:effectRef>
+          <a:fontRef idx="minor">
+            <a:schemeClr val="lt1"/>
+          </a:fontRef>
+        </p:style>
+        <p:txBody>
+          <a:bodyPr rtlCol="0" anchor="ctr"/>
+          <a:lstStyle/>
+          <a:p>
+            <a:pPr algn="ctr"/>
+          </a:p>
+        </p:txBody>
+      </p:sp>
+      <p:sp>
+        <p:nvSpPr>
+          <p:cNvPr id="9" name="TextBox 8"/>
+          <p:cNvSpPr txBox="1"/>
+          <p:nvPr/>
+        </p:nvSpPr>
+        <p:spPr>
+          <a:xfrm>
+            <a:off x="502920" y="1280160"/>
+            <a:ext cx="11155680" cy="384048"/>
+          </a:xfrm>
+          <a:prstGeom prst="rect">
+            <a:avLst/>
+          </a:prstGeom>
+          <a:noFill/>
+        </p:spPr>
+        <p:txBody>
+          <a:bodyPr wrap="square" lIns="0" rIns="0" tIns="0" bIns="0" anchor="t">
+            <a:spAutoFit/>
+          </a:bodyPr>
+          <a:lstStyle/>
+          <a:p>
+            <a:pPr algn="l"/>
+            <a:r>
+              <a:rPr sz="1400" b="0">
+                <a:solidFill>
+                  <a:srgbClr val="545B64"/>
+                </a:solidFill>
+                <a:latin typeface="Calibri"/>
+              </a:rPr>
+              <a:t>Every rate from a vendor pricing page, every quantity counted out of this repo. The identical Bedrock reply call is excluded from both.</a:t>
+            </a:r>
+          </a:p>
+        </p:txBody>
+      </p:sp>
+      <p:sp>
+        <p:nvSpPr>
+          <p:cNvPr id="10" name="Rounded Rectangle 9"/>
+          <p:cNvSpPr/>
+          <p:nvPr/>
+        </p:nvSpPr>
+        <p:spPr>
+          <a:xfrm>
+            <a:off x="566928" y="1755648"/>
+            <a:ext cx="2670048" cy="384048"/>
+          </a:xfrm>
+          <a:prstGeom prst="roundRect">
+            <a:avLst>
+              <a:gd name="adj" fmla="val 50000"/>
+            </a:avLst>
+          </a:prstGeom>
+          <a:solidFill>
+            <a:srgbClr val="232F3E"/>
+          </a:solidFill>
+          <a:ln>
+            <a:noFill/>
+          </a:ln>
+          <a:effectLst/>
+        </p:spPr>
+        <p:style>
+          <a:lnRef idx="1">
+            <a:schemeClr val="accent1"/>
+          </a:lnRef>
+          <a:fillRef idx="3">
+            <a:schemeClr val="accent1"/>
+          </a:fillRef>
+          <a:effectRef idx="2">
+            <a:schemeClr val="accent1"/>
+          </a:effectRef>
+          <a:fontRef idx="minor">
+            <a:schemeClr val="lt1"/>
+          </a:fontRef>
+        </p:style>
+        <p:txBody>
+          <a:bodyPr rtlCol="0" anchor="ctr"/>
+          <a:lstStyle/>
+          <a:p>
+            <a:pPr algn="ctr"/>
+          </a:p>
+        </p:txBody>
+      </p:sp>
+      <p:sp>
+        <p:nvSpPr>
+          <p:cNvPr id="11" name="Oval 10"/>
+          <p:cNvSpPr/>
+          <p:nvPr/>
+        </p:nvSpPr>
+        <p:spPr>
+          <a:xfrm>
+            <a:off x="768096" y="1897379"/>
+            <a:ext cx="100584" cy="100584"/>
+          </a:xfrm>
+          <a:prstGeom prst="ellipse">
+            <a:avLst/>
+          </a:prstGeom>
+          <a:solidFill>
+            <a:srgbClr val="FF9900"/>
+          </a:solidFill>
+          <a:ln>
+            <a:noFill/>
+          </a:ln>
+          <a:effectLst/>
+        </p:spPr>
+        <p:style>
+          <a:lnRef idx="1">
+            <a:schemeClr val="accent1"/>
+          </a:lnRef>
+          <a:fillRef idx="3">
+            <a:schemeClr val="accent1"/>
+          </a:fillRef>
+          <a:effectRef idx="2">
+            <a:schemeClr val="accent1"/>
+          </a:effectRef>
+          <a:fontRef idx="minor">
+            <a:schemeClr val="lt1"/>
+          </a:fontRef>
+        </p:style>
+        <p:txBody>
+          <a:bodyPr rtlCol="0" anchor="ctr"/>
+          <a:lstStyle/>
+          <a:p>
+            <a:pPr algn="ctr"/>
+          </a:p>
+        </p:txBody>
+      </p:sp>
+      <p:sp>
+        <p:nvSpPr>
+          <p:cNvPr id="12" name="TextBox 11"/>
+          <p:cNvSpPr txBox="1"/>
+          <p:nvPr/>
+        </p:nvSpPr>
+        <p:spPr>
+          <a:xfrm>
+            <a:off x="969264" y="1755648"/>
+            <a:ext cx="2157984" cy="384048"/>
+          </a:xfrm>
+          <a:prstGeom prst="rect">
+            <a:avLst/>
+          </a:prstGeom>
+          <a:noFill/>
+        </p:spPr>
+        <p:txBody>
+          <a:bodyPr wrap="square" lIns="0" rIns="0" tIns="0" bIns="0" anchor="ctr">
+            <a:spAutoFit/>
+          </a:bodyPr>
+          <a:lstStyle/>
+          <a:p>
+            <a:pPr algn="l"/>
+            <a:r>
+              <a:rPr sz="1150" b="1">
+                <a:solidFill>
+                  <a:srgbClr val="FFFFFF"/>
+                </a:solidFill>
+                <a:latin typeface="Calibri"/>
+              </a:rPr>
+              <a:t>AgentCore Runtime</a:t>
+            </a:r>
+          </a:p>
+        </p:txBody>
+      </p:sp>
+      <p:sp>
+        <p:nvSpPr>
+          <p:cNvPr id="13" name="Rounded Rectangle 12"/>
+          <p:cNvSpPr/>
+          <p:nvPr/>
+        </p:nvSpPr>
+        <p:spPr>
+          <a:xfrm>
+            <a:off x="3364992" y="1755648"/>
+            <a:ext cx="2670048" cy="384048"/>
+          </a:xfrm>
+          <a:prstGeom prst="roundRect">
+            <a:avLst>
+              <a:gd name="adj" fmla="val 50000"/>
+            </a:avLst>
+          </a:prstGeom>
+          <a:solidFill>
+            <a:srgbClr val="232F3E"/>
+          </a:solidFill>
+          <a:ln>
+            <a:noFill/>
+          </a:ln>
+          <a:effectLst/>
+        </p:spPr>
+        <p:style>
+          <a:lnRef idx="1">
+            <a:schemeClr val="accent1"/>
+          </a:lnRef>
+          <a:fillRef idx="3">
+            <a:schemeClr val="accent1"/>
+          </a:fillRef>
+          <a:effectRef idx="2">
+            <a:schemeClr val="accent1"/>
+          </a:effectRef>
+          <a:fontRef idx="minor">
+            <a:schemeClr val="lt1"/>
+          </a:fontRef>
+        </p:style>
+        <p:txBody>
+          <a:bodyPr rtlCol="0" anchor="ctr"/>
+          <a:lstStyle/>
+          <a:p>
+            <a:pPr algn="ctr"/>
+          </a:p>
+        </p:txBody>
+      </p:sp>
+      <p:sp>
+        <p:nvSpPr>
+          <p:cNvPr id="14" name="Oval 13"/>
+          <p:cNvSpPr/>
+          <p:nvPr/>
+        </p:nvSpPr>
+        <p:spPr>
+          <a:xfrm>
+            <a:off x="3566160" y="1897379"/>
+            <a:ext cx="100584" cy="100584"/>
+          </a:xfrm>
+          <a:prstGeom prst="ellipse">
+            <a:avLst/>
+          </a:prstGeom>
+          <a:solidFill>
+            <a:srgbClr val="FF9900"/>
+          </a:solidFill>
+          <a:ln>
+            <a:noFill/>
+          </a:ln>
+          <a:effectLst/>
+        </p:spPr>
+        <p:style>
+          <a:lnRef idx="1">
+            <a:schemeClr val="accent1"/>
+          </a:lnRef>
+          <a:fillRef idx="3">
+            <a:schemeClr val="accent1"/>
+          </a:fillRef>
+          <a:effectRef idx="2">
+            <a:schemeClr val="accent1"/>
+          </a:effectRef>
+          <a:fontRef idx="minor">
+            <a:schemeClr val="lt1"/>
+          </a:fontRef>
+        </p:style>
+        <p:txBody>
+          <a:bodyPr rtlCol="0" anchor="ctr"/>
+          <a:lstStyle/>
+          <a:p>
+            <a:pPr algn="ctr"/>
+          </a:p>
+        </p:txBody>
+      </p:sp>
+      <p:sp>
+        <p:nvSpPr>
+          <p:cNvPr id="15" name="TextBox 14"/>
+          <p:cNvSpPr txBox="1"/>
+          <p:nvPr/>
+        </p:nvSpPr>
+        <p:spPr>
+          <a:xfrm>
+            <a:off x="3767328" y="1755648"/>
+            <a:ext cx="2157984" cy="384048"/>
+          </a:xfrm>
+          <a:prstGeom prst="rect">
+            <a:avLst/>
+          </a:prstGeom>
+          <a:noFill/>
+        </p:spPr>
+        <p:txBody>
+          <a:bodyPr wrap="square" lIns="0" rIns="0" tIns="0" bIns="0" anchor="ctr">
+            <a:spAutoFit/>
+          </a:bodyPr>
+          <a:lstStyle/>
+          <a:p>
+            <a:pPr algn="l"/>
+            <a:r>
+              <a:rPr sz="1150" b="1">
+                <a:solidFill>
+                  <a:srgbClr val="FFFFFF"/>
+                </a:solidFill>
+                <a:latin typeface="Calibri"/>
+              </a:rPr>
+              <a:t>AgentCore Memory</a:t>
+            </a:r>
+          </a:p>
+        </p:txBody>
+      </p:sp>
+      <p:sp>
+        <p:nvSpPr>
+          <p:cNvPr id="16" name="Rounded Rectangle 15"/>
+          <p:cNvSpPr/>
+          <p:nvPr/>
+        </p:nvSpPr>
+        <p:spPr>
+          <a:xfrm>
+            <a:off x="6163056" y="1755648"/>
+            <a:ext cx="2670048" cy="384048"/>
+          </a:xfrm>
+          <a:prstGeom prst="roundRect">
+            <a:avLst>
+              <a:gd name="adj" fmla="val 50000"/>
+            </a:avLst>
+          </a:prstGeom>
+          <a:solidFill>
+            <a:srgbClr val="232F3E"/>
+          </a:solidFill>
+          <a:ln>
+            <a:noFill/>
+          </a:ln>
+          <a:effectLst/>
+        </p:spPr>
+        <p:style>
+          <a:lnRef idx="1">
+            <a:schemeClr val="accent1"/>
+          </a:lnRef>
+          <a:fillRef idx="3">
+            <a:schemeClr val="accent1"/>
+          </a:fillRef>
+          <a:effectRef idx="2">
+            <a:schemeClr val="accent1"/>
+          </a:effectRef>
+          <a:fontRef idx="minor">
+            <a:schemeClr val="lt1"/>
+          </a:fontRef>
+        </p:style>
+        <p:txBody>
+          <a:bodyPr rtlCol="0" anchor="ctr"/>
+          <a:lstStyle/>
+          <a:p>
+            <a:pPr algn="ctr"/>
+          </a:p>
+        </p:txBody>
+      </p:sp>
+      <p:sp>
+        <p:nvSpPr>
+          <p:cNvPr id="17" name="Oval 16"/>
+          <p:cNvSpPr/>
+          <p:nvPr/>
+        </p:nvSpPr>
+        <p:spPr>
+          <a:xfrm>
+            <a:off x="6364224" y="1897379"/>
+            <a:ext cx="100584" cy="100584"/>
+          </a:xfrm>
+          <a:prstGeom prst="ellipse">
+            <a:avLst/>
+          </a:prstGeom>
+          <a:solidFill>
+            <a:srgbClr val="FF9900"/>
+          </a:solidFill>
+          <a:ln>
+            <a:noFill/>
+          </a:ln>
+          <a:effectLst/>
+        </p:spPr>
+        <p:style>
+          <a:lnRef idx="1">
+            <a:schemeClr val="accent1"/>
+          </a:lnRef>
+          <a:fillRef idx="3">
+            <a:schemeClr val="accent1"/>
+          </a:fillRef>
+          <a:effectRef idx="2">
+            <a:schemeClr val="accent1"/>
+          </a:effectRef>
+          <a:fontRef idx="minor">
+            <a:schemeClr val="lt1"/>
+          </a:fontRef>
+        </p:style>
+        <p:txBody>
+          <a:bodyPr rtlCol="0" anchor="ctr"/>
+          <a:lstStyle/>
+          <a:p>
+            <a:pPr algn="ctr"/>
+          </a:p>
+        </p:txBody>
+      </p:sp>
+      <p:sp>
+        <p:nvSpPr>
+          <p:cNvPr id="18" name="TextBox 17"/>
+          <p:cNvSpPr txBox="1"/>
+          <p:nvPr/>
+        </p:nvSpPr>
+        <p:spPr>
+          <a:xfrm>
+            <a:off x="6565392" y="1755648"/>
+            <a:ext cx="2157984" cy="384048"/>
+          </a:xfrm>
+          <a:prstGeom prst="rect">
+            <a:avLst/>
+          </a:prstGeom>
+          <a:noFill/>
+        </p:spPr>
+        <p:txBody>
+          <a:bodyPr wrap="square" lIns="0" rIns="0" tIns="0" bIns="0" anchor="ctr">
+            <a:spAutoFit/>
+          </a:bodyPr>
+          <a:lstStyle/>
+          <a:p>
+            <a:pPr algn="l"/>
+            <a:r>
+              <a:rPr sz="1150" b="1">
+                <a:solidFill>
+                  <a:srgbClr val="FFFFFF"/>
+                </a:solidFill>
+                <a:latin typeface="Calibri"/>
+              </a:rPr>
+              <a:t>AgentCore Gateway</a:t>
+            </a:r>
+          </a:p>
+        </p:txBody>
+      </p:sp>
+      <p:sp>
+        <p:nvSpPr>
+          <p:cNvPr id="19" name="Rounded Rectangle 18"/>
+          <p:cNvSpPr/>
+          <p:nvPr/>
+        </p:nvSpPr>
+        <p:spPr>
+          <a:xfrm>
+            <a:off x="8961119" y="1755648"/>
+            <a:ext cx="2670048" cy="384048"/>
+          </a:xfrm>
+          <a:prstGeom prst="roundRect">
+            <a:avLst>
+              <a:gd name="adj" fmla="val 50000"/>
+            </a:avLst>
+          </a:prstGeom>
+          <a:solidFill>
+            <a:srgbClr val="232F3E"/>
+          </a:solidFill>
+          <a:ln>
+            <a:noFill/>
+          </a:ln>
+          <a:effectLst/>
+        </p:spPr>
+        <p:style>
+          <a:lnRef idx="1">
+            <a:schemeClr val="accent1"/>
+          </a:lnRef>
+          <a:fillRef idx="3">
+            <a:schemeClr val="accent1"/>
+          </a:fillRef>
+          <a:effectRef idx="2">
+            <a:schemeClr val="accent1"/>
+          </a:effectRef>
+          <a:fontRef idx="minor">
+            <a:schemeClr val="lt1"/>
+          </a:fontRef>
+        </p:style>
+        <p:txBody>
+          <a:bodyPr rtlCol="0" anchor="ctr"/>
+          <a:lstStyle/>
+          <a:p>
+            <a:pPr algn="ctr"/>
+          </a:p>
+        </p:txBody>
+      </p:sp>
+      <p:sp>
+        <p:nvSpPr>
+          <p:cNvPr id="20" name="Oval 19"/>
+          <p:cNvSpPr/>
+          <p:nvPr/>
+        </p:nvSpPr>
+        <p:spPr>
+          <a:xfrm>
+            <a:off x="9162288" y="1897379"/>
+            <a:ext cx="100584" cy="100584"/>
+          </a:xfrm>
+          <a:prstGeom prst="ellipse">
+            <a:avLst/>
+          </a:prstGeom>
+          <a:solidFill>
+            <a:srgbClr val="FF9900"/>
+          </a:solidFill>
+          <a:ln>
+            <a:noFill/>
+          </a:ln>
+          <a:effectLst/>
+        </p:spPr>
+        <p:style>
+          <a:lnRef idx="1">
+            <a:schemeClr val="accent1"/>
+          </a:lnRef>
+          <a:fillRef idx="3">
+            <a:schemeClr val="accent1"/>
+          </a:fillRef>
+          <a:effectRef idx="2">
+            <a:schemeClr val="accent1"/>
+          </a:effectRef>
+          <a:fontRef idx="minor">
+            <a:schemeClr val="lt1"/>
+          </a:fontRef>
+        </p:style>
+        <p:txBody>
+          <a:bodyPr rtlCol="0" anchor="ctr"/>
+          <a:lstStyle/>
+          <a:p>
+            <a:pPr algn="ctr"/>
+          </a:p>
+        </p:txBody>
+      </p:sp>
+      <p:sp>
+        <p:nvSpPr>
+          <p:cNvPr id="21" name="TextBox 20"/>
+          <p:cNvSpPr txBox="1"/>
+          <p:nvPr/>
+        </p:nvSpPr>
+        <p:spPr>
+          <a:xfrm>
+            <a:off x="9363455" y="1755648"/>
+            <a:ext cx="2157984" cy="384048"/>
+          </a:xfrm>
+          <a:prstGeom prst="rect">
+            <a:avLst/>
+          </a:prstGeom>
+          <a:noFill/>
+        </p:spPr>
+        <p:txBody>
+          <a:bodyPr wrap="square" lIns="0" rIns="0" tIns="0" bIns="0" anchor="ctr">
+            <a:spAutoFit/>
+          </a:bodyPr>
+          <a:lstStyle/>
+          <a:p>
+            <a:pPr algn="l"/>
+            <a:r>
+              <a:rPr sz="1150" b="1">
+                <a:solidFill>
+                  <a:srgbClr val="FFFFFF"/>
+                </a:solidFill>
+                <a:latin typeface="Calibri"/>
+              </a:rPr>
+              <a:t>AgentCore Observability</a:t>
+            </a:r>
+          </a:p>
+        </p:txBody>
+      </p:sp>
+      <p:sp>
+        <p:nvSpPr>
+          <p:cNvPr id="22" name="Rounded Rectangle 21"/>
+          <p:cNvSpPr/>
+          <p:nvPr/>
+        </p:nvSpPr>
+        <p:spPr>
+          <a:xfrm>
+            <a:off x="566928" y="2304288"/>
+            <a:ext cx="5394960" cy="3054096"/>
+          </a:xfrm>
+          <a:prstGeom prst="roundRect">
+            <a:avLst>
+              <a:gd name="adj" fmla="val 1796"/>
+            </a:avLst>
+          </a:prstGeom>
+          <a:solidFill>
+            <a:srgbClr val="F7F8FA"/>
+          </a:solidFill>
+          <a:ln w="12700">
+            <a:solidFill>
+              <a:srgbClr val="E4E7EA"/>
+            </a:solidFill>
+          </a:ln>
+          <a:effectLst/>
+        </p:spPr>
+        <p:style>
+          <a:lnRef idx="1">
+            <a:schemeClr val="accent1"/>
+          </a:lnRef>
+          <a:fillRef idx="3">
+            <a:schemeClr val="accent1"/>
+          </a:fillRef>
+          <a:effectRef idx="2">
+            <a:schemeClr val="accent1"/>
+          </a:effectRef>
+          <a:fontRef idx="minor">
+            <a:schemeClr val="lt1"/>
+          </a:fontRef>
+        </p:style>
+        <p:txBody>
+          <a:bodyPr rtlCol="0" anchor="ctr"/>
+          <a:lstStyle/>
+          <a:p>
+            <a:pPr algn="ctr"/>
+          </a:p>
+        </p:txBody>
+      </p:sp>
+      <p:sp>
+        <p:nvSpPr>
+          <p:cNvPr id="23" name="Rectangle 22"/>
+          <p:cNvSpPr/>
+          <p:nvPr/>
+        </p:nvSpPr>
+        <p:spPr>
+          <a:xfrm>
+            <a:off x="566928" y="2304288"/>
+            <a:ext cx="5394960" cy="420624"/>
+          </a:xfrm>
+          <a:prstGeom prst="rect">
+            <a:avLst/>
+          </a:prstGeom>
+          <a:solidFill>
+            <a:srgbClr val="545B64"/>
+          </a:solidFill>
+          <a:ln>
+            <a:noFill/>
+          </a:ln>
+          <a:effectLst/>
+        </p:spPr>
+        <p:style>
+          <a:lnRef idx="1">
+            <a:schemeClr val="accent1"/>
+          </a:lnRef>
+          <a:fillRef idx="3">
+            <a:schemeClr val="accent1"/>
+          </a:fillRef>
+          <a:effectRef idx="2">
+            <a:schemeClr val="accent1"/>
+          </a:effectRef>
+          <a:fontRef idx="minor">
+            <a:schemeClr val="lt1"/>
+          </a:fontRef>
+        </p:style>
+        <p:txBody>
+          <a:bodyPr rtlCol="0" anchor="ctr"/>
+          <a:lstStyle/>
+          <a:p>
+            <a:pPr algn="ctr"/>
+          </a:p>
+        </p:txBody>
+      </p:sp>
+      <p:sp>
+        <p:nvSpPr>
+          <p:cNvPr id="24" name="TextBox 23"/>
+          <p:cNvSpPr txBox="1"/>
+          <p:nvPr/>
+        </p:nvSpPr>
+        <p:spPr>
+          <a:xfrm>
+            <a:off x="768096" y="2304288"/>
+            <a:ext cx="4992624" cy="420624"/>
+          </a:xfrm>
+          <a:prstGeom prst="rect">
+            <a:avLst/>
+          </a:prstGeom>
+          <a:noFill/>
+        </p:spPr>
+        <p:txBody>
+          <a:bodyPr wrap="square" lIns="0" rIns="0" tIns="0" bIns="0" anchor="ctr">
+            <a:spAutoFit/>
+          </a:bodyPr>
+          <a:lstStyle/>
+          <a:p>
+            <a:pPr algn="l"/>
+            <a:r>
+              <a:rPr sz="1150" b="1">
+                <a:solidFill>
+                  <a:srgbClr val="FFFFFF"/>
+                </a:solidFill>
+                <a:latin typeface="Calibri"/>
+              </a:rPr>
+              <a:t>ENGINE A · DIY</a:t>
+            </a:r>
+          </a:p>
+        </p:txBody>
+      </p:sp>
+      <p:sp>
+        <p:nvSpPr>
+          <p:cNvPr id="25" name="TextBox 24"/>
+          <p:cNvSpPr txBox="1"/>
+          <p:nvPr/>
+        </p:nvSpPr>
+        <p:spPr>
+          <a:xfrm>
+            <a:off x="768096" y="2852928"/>
+            <a:ext cx="4992624" cy="329184"/>
+          </a:xfrm>
+          <a:prstGeom prst="rect">
+            <a:avLst/>
+          </a:prstGeom>
+          <a:noFill/>
+        </p:spPr>
+        <p:txBody>
+          <a:bodyPr wrap="square" lIns="0" rIns="0" tIns="0" bIns="0" anchor="ctr">
+            <a:spAutoFit/>
+          </a:bodyPr>
+          <a:lstStyle/>
+          <a:p>
+            <a:pPr algn="l"/>
+            <a:r>
+              <a:rPr sz="1600" b="1">
+                <a:solidFill>
+                  <a:srgbClr val="232F3E"/>
+                </a:solidFill>
+                <a:latin typeface="Calibri"/>
+              </a:rPr>
+              <a:t>$18.02 fixed  +  $1.39 per user</a:t>
+            </a:r>
+          </a:p>
+        </p:txBody>
+      </p:sp>
+      <p:sp>
+        <p:nvSpPr>
+          <p:cNvPr id="26" name="TextBox 25"/>
+          <p:cNvSpPr txBox="1"/>
+          <p:nvPr/>
+        </p:nvSpPr>
+        <p:spPr>
+          <a:xfrm>
+            <a:off x="768096" y="3273552"/>
+            <a:ext cx="3657600" cy="237744"/>
+          </a:xfrm>
+          <a:prstGeom prst="rect">
+            <a:avLst/>
+          </a:prstGeom>
+          <a:noFill/>
+        </p:spPr>
+        <p:txBody>
+          <a:bodyPr wrap="square" lIns="0" rIns="0" tIns="0" bIns="0" anchor="ctr">
+            <a:spAutoFit/>
+          </a:bodyPr>
+          <a:lstStyle/>
+          <a:p>
+            <a:pPr algn="l"/>
+            <a:r>
+              <a:rPr sz="1200" b="1">
+                <a:solidFill>
+                  <a:srgbClr val="232F3E"/>
+                </a:solidFill>
+                <a:latin typeface="Calibri"/>
+              </a:rPr>
+              <a:t>AWS Fargate</a:t>
+            </a:r>
+          </a:p>
+        </p:txBody>
+      </p:sp>
+      <p:sp>
+        <p:nvSpPr>
+          <p:cNvPr id="27" name="TextBox 26"/>
+          <p:cNvSpPr txBox="1"/>
+          <p:nvPr/>
+        </p:nvSpPr>
+        <p:spPr>
+          <a:xfrm>
+            <a:off x="768096" y="3511296"/>
+            <a:ext cx="3657600" cy="219456"/>
+          </a:xfrm>
+          <a:prstGeom prst="rect">
+            <a:avLst/>
+          </a:prstGeom>
+          <a:noFill/>
+        </p:spPr>
+        <p:txBody>
+          <a:bodyPr wrap="square" lIns="0" rIns="0" tIns="0" bIns="0" anchor="ctr">
+            <a:spAutoFit/>
+          </a:bodyPr>
+          <a:lstStyle/>
+          <a:p>
+            <a:pPr algn="l"/>
+            <a:r>
+              <a:rPr sz="1000" b="0">
+                <a:solidFill>
+                  <a:srgbClr val="545B64"/>
+                </a:solidFill>
+                <a:latin typeface="Calibri"/>
+              </a:rPr>
+              <a:t>0.5 vCPU · 730 h · never scales below one task</a:t>
+            </a:r>
+          </a:p>
+        </p:txBody>
+      </p:sp>
+      <p:sp>
+        <p:nvSpPr>
+          <p:cNvPr id="28" name="TextBox 27"/>
+          <p:cNvSpPr txBox="1"/>
+          <p:nvPr/>
+        </p:nvSpPr>
+        <p:spPr>
+          <a:xfrm>
+            <a:off x="768096" y="3273552"/>
+            <a:ext cx="4992624" cy="237744"/>
+          </a:xfrm>
+          <a:prstGeom prst="rect">
+            <a:avLst/>
+          </a:prstGeom>
+          <a:noFill/>
+        </p:spPr>
+        <p:txBody>
+          <a:bodyPr wrap="square" lIns="0" rIns="0" tIns="0" bIns="0" anchor="ctr">
+            <a:spAutoFit/>
+          </a:bodyPr>
+          <a:lstStyle/>
+          <a:p>
+            <a:pPr algn="r"/>
+            <a:r>
+              <a:rPr sz="1300" b="1">
+                <a:solidFill>
+                  <a:srgbClr val="232F3E"/>
+                </a:solidFill>
+                <a:latin typeface="Calibri"/>
+              </a:rPr>
+              <a:t>$18.02</a:t>
+            </a:r>
+          </a:p>
+        </p:txBody>
+      </p:sp>
+      <p:sp>
+        <p:nvSpPr>
+          <p:cNvPr id="29" name="Rectangle 28"/>
+          <p:cNvSpPr/>
+          <p:nvPr/>
+        </p:nvSpPr>
+        <p:spPr>
+          <a:xfrm>
+            <a:off x="768096" y="3785616"/>
+            <a:ext cx="4992624" cy="9144"/>
+          </a:xfrm>
+          <a:prstGeom prst="rect">
+            <a:avLst/>
+          </a:prstGeom>
+          <a:solidFill>
+            <a:srgbClr val="E4E7EA"/>
+          </a:solidFill>
+          <a:ln>
+            <a:noFill/>
+          </a:ln>
+          <a:effectLst/>
+        </p:spPr>
+        <p:style>
+          <a:lnRef idx="1">
+            <a:schemeClr val="accent1"/>
+          </a:lnRef>
+          <a:fillRef idx="3">
+            <a:schemeClr val="accent1"/>
+          </a:fillRef>
+          <a:effectRef idx="2">
+            <a:schemeClr val="accent1"/>
+          </a:effectRef>
+          <a:fontRef idx="minor">
+            <a:schemeClr val="lt1"/>
+          </a:fontRef>
+        </p:style>
+        <p:txBody>
+          <a:bodyPr rtlCol="0" anchor="ctr"/>
+          <a:lstStyle/>
+          <a:p>
+            <a:pPr algn="ctr"/>
+          </a:p>
+        </p:txBody>
+      </p:sp>
+      <p:sp>
+        <p:nvSpPr>
+          <p:cNvPr id="30" name="TextBox 29"/>
+          <p:cNvSpPr txBox="1"/>
+          <p:nvPr/>
+        </p:nvSpPr>
+        <p:spPr>
+          <a:xfrm>
+            <a:off x="768096" y="3840480"/>
+            <a:ext cx="3657600" cy="237744"/>
+          </a:xfrm>
+          <a:prstGeom prst="rect">
+            <a:avLst/>
+          </a:prstGeom>
+          <a:noFill/>
+        </p:spPr>
+        <p:txBody>
+          <a:bodyPr wrap="square" lIns="0" rIns="0" tIns="0" bIns="0" anchor="ctr">
+            <a:spAutoFit/>
+          </a:bodyPr>
+          <a:lstStyle/>
+          <a:p>
+            <a:pPr algn="l"/>
+            <a:r>
+              <a:rPr sz="1200" b="1">
+                <a:solidFill>
+                  <a:srgbClr val="232F3E"/>
+                </a:solidFill>
+                <a:latin typeface="Calibri"/>
+              </a:rPr>
+              <a:t>2nd Bedrock call — extraction</a:t>
+            </a:r>
+          </a:p>
+        </p:txBody>
+      </p:sp>
+      <p:sp>
+        <p:nvSpPr>
+          <p:cNvPr id="31" name="TextBox 30"/>
+          <p:cNvSpPr txBox="1"/>
+          <p:nvPr/>
+        </p:nvSpPr>
+        <p:spPr>
+          <a:xfrm>
+            <a:off x="768096" y="4078224"/>
+            <a:ext cx="3657600" cy="219456"/>
+          </a:xfrm>
+          <a:prstGeom prst="rect">
+            <a:avLst/>
+          </a:prstGeom>
+          <a:noFill/>
+        </p:spPr>
+        <p:txBody>
+          <a:bodyPr wrap="square" lIns="0" rIns="0" tIns="0" bIns="0" anchor="ctr">
+            <a:spAutoFit/>
+          </a:bodyPr>
+          <a:lstStyle/>
+          <a:p>
+            <a:pPr algn="l"/>
+            <a:r>
+              <a:rPr sz="1000" b="0">
+                <a:solidFill>
+                  <a:srgbClr val="545B64"/>
+                </a:solidFill>
+                <a:latin typeface="Calibri"/>
+              </a:rPr>
+              <a:t>104 turns × $0.01332</a:t>
+            </a:r>
+          </a:p>
+        </p:txBody>
+      </p:sp>
+      <p:sp>
+        <p:nvSpPr>
+          <p:cNvPr id="32" name="TextBox 31"/>
+          <p:cNvSpPr txBox="1"/>
+          <p:nvPr/>
+        </p:nvSpPr>
+        <p:spPr>
+          <a:xfrm>
+            <a:off x="768096" y="3840480"/>
+            <a:ext cx="4992624" cy="237744"/>
+          </a:xfrm>
+          <a:prstGeom prst="rect">
+            <a:avLst/>
+          </a:prstGeom>
+          <a:noFill/>
+        </p:spPr>
+        <p:txBody>
+          <a:bodyPr wrap="square" lIns="0" rIns="0" tIns="0" bIns="0" anchor="ctr">
+            <a:spAutoFit/>
+          </a:bodyPr>
+          <a:lstStyle/>
+          <a:p>
+            <a:pPr algn="r"/>
+            <a:r>
+              <a:rPr sz="1300" b="1">
+                <a:solidFill>
+                  <a:srgbClr val="232F3E"/>
+                </a:solidFill>
+                <a:latin typeface="Calibri"/>
+              </a:rPr>
+              <a:t>$1.385</a:t>
+            </a:r>
+          </a:p>
+        </p:txBody>
+      </p:sp>
+      <p:sp>
+        <p:nvSpPr>
+          <p:cNvPr id="33" name="Rectangle 32"/>
+          <p:cNvSpPr/>
+          <p:nvPr/>
+        </p:nvSpPr>
+        <p:spPr>
+          <a:xfrm>
+            <a:off x="768096" y="4352544"/>
+            <a:ext cx="4992624" cy="9144"/>
+          </a:xfrm>
+          <a:prstGeom prst="rect">
+            <a:avLst/>
+          </a:prstGeom>
+          <a:solidFill>
+            <a:srgbClr val="E4E7EA"/>
+          </a:solidFill>
+          <a:ln>
+            <a:noFill/>
+          </a:ln>
+          <a:effectLst/>
+        </p:spPr>
+        <p:style>
+          <a:lnRef idx="1">
+            <a:schemeClr val="accent1"/>
+          </a:lnRef>
+          <a:fillRef idx="3">
+            <a:schemeClr val="accent1"/>
+          </a:fillRef>
+          <a:effectRef idx="2">
+            <a:schemeClr val="accent1"/>
+          </a:effectRef>
+          <a:fontRef idx="minor">
+            <a:schemeClr val="lt1"/>
+          </a:fontRef>
+        </p:style>
+        <p:txBody>
+          <a:bodyPr rtlCol="0" anchor="ctr"/>
+          <a:lstStyle/>
+          <a:p>
+            <a:pPr algn="ctr"/>
+          </a:p>
+        </p:txBody>
+      </p:sp>
+      <p:sp>
+        <p:nvSpPr>
+          <p:cNvPr id="34" name="TextBox 33"/>
+          <p:cNvSpPr txBox="1"/>
+          <p:nvPr/>
+        </p:nvSpPr>
+        <p:spPr>
+          <a:xfrm>
+            <a:off x="768096" y="4407408"/>
+            <a:ext cx="3657600" cy="237744"/>
+          </a:xfrm>
+          <a:prstGeom prst="rect">
+            <a:avLst/>
+          </a:prstGeom>
+          <a:noFill/>
+        </p:spPr>
+        <p:txBody>
+          <a:bodyPr wrap="square" lIns="0" rIns="0" tIns="0" bIns="0" anchor="ctr">
+            <a:spAutoFit/>
+          </a:bodyPr>
+          <a:lstStyle/>
+          <a:p>
+            <a:pPr algn="l"/>
+            <a:r>
+              <a:rPr sz="1200" b="1">
+                <a:solidFill>
+                  <a:srgbClr val="232F3E"/>
+                </a:solidFill>
+                <a:latin typeface="Calibri"/>
+              </a:rPr>
+              <a:t>Amazon DynamoDB</a:t>
+            </a:r>
+          </a:p>
+        </p:txBody>
+      </p:sp>
+      <p:sp>
+        <p:nvSpPr>
+          <p:cNvPr id="35" name="TextBox 34"/>
+          <p:cNvSpPr txBox="1"/>
+          <p:nvPr/>
+        </p:nvSpPr>
+        <p:spPr>
+          <a:xfrm>
+            <a:off x="768096" y="4645152"/>
+            <a:ext cx="3657600" cy="219456"/>
+          </a:xfrm>
+          <a:prstGeom prst="rect">
+            <a:avLst/>
+          </a:prstGeom>
+          <a:noFill/>
+        </p:spPr>
+        <p:txBody>
+          <a:bodyPr wrap="square" lIns="0" rIns="0" tIns="0" bIns="0" anchor="ctr">
+            <a:spAutoFit/>
+          </a:bodyPr>
+          <a:lstStyle/>
+          <a:p>
+            <a:pPr algn="l"/>
+            <a:r>
+              <a:rPr sz="1000" b="0">
+                <a:solidFill>
+                  <a:srgbClr val="545B64"/>
+                </a:solidFill>
+                <a:latin typeface="Calibri"/>
+              </a:rPr>
+              <a:t>on-demand reads, writes and storage</a:t>
+            </a:r>
+          </a:p>
+        </p:txBody>
+      </p:sp>
+      <p:sp>
+        <p:nvSpPr>
+          <p:cNvPr id="36" name="TextBox 35"/>
+          <p:cNvSpPr txBox="1"/>
+          <p:nvPr/>
+        </p:nvSpPr>
+        <p:spPr>
+          <a:xfrm>
+            <a:off x="768096" y="4407408"/>
+            <a:ext cx="4992624" cy="237744"/>
+          </a:xfrm>
+          <a:prstGeom prst="rect">
+            <a:avLst/>
+          </a:prstGeom>
+          <a:noFill/>
+        </p:spPr>
+        <p:txBody>
+          <a:bodyPr wrap="square" lIns="0" rIns="0" tIns="0" bIns="0" anchor="ctr">
+            <a:spAutoFit/>
+          </a:bodyPr>
+          <a:lstStyle/>
+          <a:p>
+            <a:pPr algn="r"/>
+            <a:r>
+              <a:rPr sz="1300" b="1">
+                <a:solidFill>
+                  <a:srgbClr val="232F3E"/>
+                </a:solidFill>
+                <a:latin typeface="Calibri"/>
+              </a:rPr>
+              <a:t>$0.0006</a:t>
+            </a:r>
+          </a:p>
+        </p:txBody>
+      </p:sp>
+      <p:sp>
+        <p:nvSpPr>
+          <p:cNvPr id="37" name="Rectangle 36"/>
+          <p:cNvSpPr/>
+          <p:nvPr/>
+        </p:nvSpPr>
+        <p:spPr>
+          <a:xfrm>
+            <a:off x="768096" y="4919472"/>
+            <a:ext cx="4992624" cy="9144"/>
+          </a:xfrm>
+          <a:prstGeom prst="rect">
+            <a:avLst/>
+          </a:prstGeom>
+          <a:solidFill>
+            <a:srgbClr val="E4E7EA"/>
+          </a:solidFill>
+          <a:ln>
+            <a:noFill/>
+          </a:ln>
+          <a:effectLst/>
+        </p:spPr>
+        <p:style>
+          <a:lnRef idx="1">
+            <a:schemeClr val="accent1"/>
+          </a:lnRef>
+          <a:fillRef idx="3">
+            <a:schemeClr val="accent1"/>
+          </a:fillRef>
+          <a:effectRef idx="2">
+            <a:schemeClr val="accent1"/>
+          </a:effectRef>
+          <a:fontRef idx="minor">
+            <a:schemeClr val="lt1"/>
+          </a:fontRef>
+        </p:style>
+        <p:txBody>
+          <a:bodyPr rtlCol="0" anchor="ctr"/>
+          <a:lstStyle/>
+          <a:p>
+            <a:pPr algn="ctr"/>
+          </a:p>
+        </p:txBody>
+      </p:sp>
+      <p:sp>
+        <p:nvSpPr>
+          <p:cNvPr id="38" name="TextBox 37"/>
+          <p:cNvSpPr txBox="1"/>
+          <p:nvPr/>
+        </p:nvSpPr>
+        <p:spPr>
+          <a:xfrm>
+            <a:off x="768096" y="5010912"/>
+            <a:ext cx="3657600" cy="274320"/>
+          </a:xfrm>
+          <a:prstGeom prst="rect">
+            <a:avLst/>
+          </a:prstGeom>
+          <a:noFill/>
+        </p:spPr>
+        <p:txBody>
+          <a:bodyPr wrap="square" lIns="0" rIns="0" tIns="0" bIns="0" anchor="ctr">
+            <a:spAutoFit/>
+          </a:bodyPr>
+          <a:lstStyle/>
+          <a:p>
+            <a:pPr algn="l"/>
+            <a:r>
+              <a:rPr sz="1250" b="1">
+                <a:solidFill>
+                  <a:srgbClr val="232F3E"/>
+                </a:solidFill>
+                <a:latin typeface="Calibri"/>
+              </a:rPr>
+              <a:t>At one user, per month</a:t>
+            </a:r>
+          </a:p>
+        </p:txBody>
+      </p:sp>
+      <p:sp>
+        <p:nvSpPr>
+          <p:cNvPr id="39" name="TextBox 38"/>
+          <p:cNvSpPr txBox="1"/>
+          <p:nvPr/>
+        </p:nvSpPr>
+        <p:spPr>
+          <a:xfrm>
+            <a:off x="768096" y="5010912"/>
+            <a:ext cx="4992624" cy="274320"/>
+          </a:xfrm>
+          <a:prstGeom prst="rect">
+            <a:avLst/>
+          </a:prstGeom>
+          <a:noFill/>
+        </p:spPr>
+        <p:txBody>
+          <a:bodyPr wrap="square" lIns="0" rIns="0" tIns="0" bIns="0" anchor="ctr">
+            <a:spAutoFit/>
+          </a:bodyPr>
+          <a:lstStyle/>
+          <a:p>
+            <a:pPr algn="r"/>
+            <a:r>
+              <a:rPr sz="1500" b="1">
+                <a:solidFill>
+                  <a:srgbClr val="232F3E"/>
+                </a:solidFill>
+                <a:latin typeface="Calibri"/>
+              </a:rPr>
+              <a:t>$19.41</a:t>
+            </a:r>
+          </a:p>
+        </p:txBody>
+      </p:sp>
+      <p:sp>
+        <p:nvSpPr>
+          <p:cNvPr id="40" name="Rounded Rectangle 39"/>
+          <p:cNvSpPr/>
+          <p:nvPr/>
+        </p:nvSpPr>
+        <p:spPr>
+          <a:xfrm>
+            <a:off x="6236208" y="2304288"/>
+            <a:ext cx="5394960" cy="3054096"/>
+          </a:xfrm>
+          <a:prstGeom prst="roundRect">
+            <a:avLst>
+              <a:gd name="adj" fmla="val 1796"/>
+            </a:avLst>
+          </a:prstGeom>
+          <a:solidFill>
+            <a:srgbClr val="F7F8FA"/>
+          </a:solidFill>
+          <a:ln w="12700">
+            <a:solidFill>
+              <a:srgbClr val="E4E7EA"/>
+            </a:solidFill>
+          </a:ln>
+          <a:effectLst/>
+        </p:spPr>
+        <p:style>
+          <a:lnRef idx="1">
+            <a:schemeClr val="accent1"/>
+          </a:lnRef>
+          <a:fillRef idx="3">
+            <a:schemeClr val="accent1"/>
+          </a:fillRef>
+          <a:effectRef idx="2">
+            <a:schemeClr val="accent1"/>
+          </a:effectRef>
+          <a:fontRef idx="minor">
+            <a:schemeClr val="lt1"/>
+          </a:fontRef>
+        </p:style>
+        <p:txBody>
+          <a:bodyPr rtlCol="0" anchor="ctr"/>
+          <a:lstStyle/>
+          <a:p>
+            <a:pPr algn="ctr"/>
+          </a:p>
+        </p:txBody>
+      </p:sp>
+      <p:sp>
+        <p:nvSpPr>
+          <p:cNvPr id="41" name="Rectangle 40"/>
+          <p:cNvSpPr/>
+          <p:nvPr/>
+        </p:nvSpPr>
+        <p:spPr>
+          <a:xfrm>
+            <a:off x="6236208" y="2304288"/>
+            <a:ext cx="5394960" cy="420624"/>
+          </a:xfrm>
+          <a:prstGeom prst="rect">
+            <a:avLst/>
+          </a:prstGeom>
+          <a:solidFill>
+            <a:srgbClr val="232F3E"/>
+          </a:solidFill>
+          <a:ln>
+            <a:noFill/>
+          </a:ln>
+          <a:effectLst/>
+        </p:spPr>
+        <p:style>
+          <a:lnRef idx="1">
+            <a:schemeClr val="accent1"/>
+          </a:lnRef>
+          <a:fillRef idx="3">
+            <a:schemeClr val="accent1"/>
+          </a:fillRef>
+          <a:effectRef idx="2">
+            <a:schemeClr val="accent1"/>
+          </a:effectRef>
+          <a:fontRef idx="minor">
+            <a:schemeClr val="lt1"/>
+          </a:fontRef>
+        </p:style>
+        <p:txBody>
+          <a:bodyPr rtlCol="0" anchor="ctr"/>
+          <a:lstStyle/>
+          <a:p>
+            <a:pPr algn="ctr"/>
+          </a:p>
+        </p:txBody>
+      </p:sp>
+      <p:sp>
+        <p:nvSpPr>
+          <p:cNvPr id="42" name="TextBox 41"/>
+          <p:cNvSpPr txBox="1"/>
+          <p:nvPr/>
+        </p:nvSpPr>
+        <p:spPr>
+          <a:xfrm>
+            <a:off x="6437376" y="2304288"/>
+            <a:ext cx="4992624" cy="420624"/>
+          </a:xfrm>
+          <a:prstGeom prst="rect">
+            <a:avLst/>
+          </a:prstGeom>
+          <a:noFill/>
+        </p:spPr>
+        <p:txBody>
+          <a:bodyPr wrap="square" lIns="0" rIns="0" tIns="0" bIns="0" anchor="ctr">
+            <a:spAutoFit/>
+          </a:bodyPr>
+          <a:lstStyle/>
+          <a:p>
+            <a:pPr algn="l"/>
+            <a:r>
+              <a:rPr sz="1150" b="1">
+                <a:solidFill>
+                  <a:srgbClr val="FFFFFF"/>
+                </a:solidFill>
+                <a:latin typeface="Calibri"/>
+              </a:rPr>
+              <a:t>ENGINE B · AGENTCORE</a:t>
+            </a:r>
+          </a:p>
+        </p:txBody>
+      </p:sp>
+      <p:sp>
+        <p:nvSpPr>
+          <p:cNvPr id="43" name="TextBox 42"/>
+          <p:cNvSpPr txBox="1"/>
+          <p:nvPr/>
+        </p:nvSpPr>
+        <p:spPr>
+          <a:xfrm>
+            <a:off x="6437376" y="2852928"/>
+            <a:ext cx="4992624" cy="329184"/>
+          </a:xfrm>
+          <a:prstGeom prst="rect">
+            <a:avLst/>
+          </a:prstGeom>
+          <a:noFill/>
+        </p:spPr>
+        <p:txBody>
+          <a:bodyPr wrap="square" lIns="0" rIns="0" tIns="0" bIns="0" anchor="ctr">
+            <a:spAutoFit/>
+          </a:bodyPr>
+          <a:lstStyle/>
+          <a:p>
+            <a:pPr algn="l"/>
+            <a:r>
+              <a:rPr sz="1600" b="1">
+                <a:solidFill>
+                  <a:srgbClr val="232F3E"/>
+                </a:solidFill>
+                <a:latin typeface="Calibri"/>
+              </a:rPr>
+              <a:t>$0.0006 fixed  +  $0.10 per user</a:t>
+            </a:r>
+          </a:p>
+        </p:txBody>
+      </p:sp>
+      <p:sp>
+        <p:nvSpPr>
+          <p:cNvPr id="44" name="TextBox 43"/>
+          <p:cNvSpPr txBox="1"/>
+          <p:nvPr/>
+        </p:nvSpPr>
+        <p:spPr>
+          <a:xfrm>
+            <a:off x="6437376" y="3273552"/>
+            <a:ext cx="3657600" cy="237744"/>
+          </a:xfrm>
+          <a:prstGeom prst="rect">
+            <a:avLst/>
+          </a:prstGeom>
+          <a:noFill/>
+        </p:spPr>
+        <p:txBody>
+          <a:bodyPr wrap="square" lIns="0" rIns="0" tIns="0" bIns="0" anchor="ctr">
+            <a:spAutoFit/>
+          </a:bodyPr>
+          <a:lstStyle/>
+          <a:p>
+            <a:pPr algn="l"/>
+            <a:r>
+              <a:rPr sz="1200" b="1">
+                <a:solidFill>
+                  <a:srgbClr val="232F3E"/>
+                </a:solidFill>
+                <a:latin typeface="Calibri"/>
+              </a:rPr>
+              <a:t>AgentCore Gateway</a:t>
+            </a:r>
+          </a:p>
+        </p:txBody>
+      </p:sp>
+      <p:sp>
+        <p:nvSpPr>
+          <p:cNvPr id="45" name="TextBox 44"/>
+          <p:cNvSpPr txBox="1"/>
+          <p:nvPr/>
+        </p:nvSpPr>
+        <p:spPr>
+          <a:xfrm>
+            <a:off x="6437376" y="3511296"/>
+            <a:ext cx="3657600" cy="219456"/>
+          </a:xfrm>
+          <a:prstGeom prst="rect">
+            <a:avLst/>
+          </a:prstGeom>
+          <a:noFill/>
+        </p:spPr>
+        <p:txBody>
+          <a:bodyPr wrap="square" lIns="0" rIns="0" tIns="0" bIns="0" anchor="ctr">
+            <a:spAutoFit/>
+          </a:bodyPr>
+          <a:lstStyle/>
+          <a:p>
+            <a:pPr algn="l"/>
+            <a:r>
+              <a:rPr sz="1000" b="0">
+                <a:solidFill>
+                  <a:srgbClr val="545B64"/>
+                </a:solidFill>
+                <a:latin typeface="Calibri"/>
+              </a:rPr>
+              <a:t>3 tools indexed — the only fixed line</a:t>
+            </a:r>
+          </a:p>
+        </p:txBody>
+      </p:sp>
+      <p:sp>
+        <p:nvSpPr>
+          <p:cNvPr id="46" name="TextBox 45"/>
+          <p:cNvSpPr txBox="1"/>
+          <p:nvPr/>
+        </p:nvSpPr>
+        <p:spPr>
+          <a:xfrm>
+            <a:off x="6437376" y="3273552"/>
+            <a:ext cx="4992624" cy="237744"/>
+          </a:xfrm>
+          <a:prstGeom prst="rect">
+            <a:avLst/>
+          </a:prstGeom>
+          <a:noFill/>
+        </p:spPr>
+        <p:txBody>
+          <a:bodyPr wrap="square" lIns="0" rIns="0" tIns="0" bIns="0" anchor="ctr">
+            <a:spAutoFit/>
+          </a:bodyPr>
+          <a:lstStyle/>
+          <a:p>
+            <a:pPr algn="r"/>
+            <a:r>
+              <a:rPr sz="1300" b="1">
+                <a:solidFill>
+                  <a:srgbClr val="1E7C3C"/>
+                </a:solidFill>
+                <a:latin typeface="Calibri"/>
+              </a:rPr>
+              <a:t>$0.0006</a:t>
+            </a:r>
+          </a:p>
+        </p:txBody>
+      </p:sp>
+      <p:sp>
+        <p:nvSpPr>
+          <p:cNvPr id="47" name="Rectangle 46"/>
+          <p:cNvSpPr/>
+          <p:nvPr/>
+        </p:nvSpPr>
+        <p:spPr>
+          <a:xfrm>
+            <a:off x="6437376" y="3785616"/>
+            <a:ext cx="4992624" cy="9144"/>
+          </a:xfrm>
+          <a:prstGeom prst="rect">
+            <a:avLst/>
+          </a:prstGeom>
+          <a:solidFill>
+            <a:srgbClr val="E4E7EA"/>
+          </a:solidFill>
+          <a:ln>
+            <a:noFill/>
+          </a:ln>
+          <a:effectLst/>
+        </p:spPr>
+        <p:style>
+          <a:lnRef idx="1">
+            <a:schemeClr val="accent1"/>
+          </a:lnRef>
+          <a:fillRef idx="3">
+            <a:schemeClr val="accent1"/>
+          </a:fillRef>
+          <a:effectRef idx="2">
+            <a:schemeClr val="accent1"/>
+          </a:effectRef>
+          <a:fontRef idx="minor">
+            <a:schemeClr val="lt1"/>
+          </a:fontRef>
+        </p:style>
+        <p:txBody>
+          <a:bodyPr rtlCol="0" anchor="ctr"/>
+          <a:lstStyle/>
+          <a:p>
+            <a:pPr algn="ctr"/>
+          </a:p>
+        </p:txBody>
+      </p:sp>
+      <p:sp>
+        <p:nvSpPr>
+          <p:cNvPr id="48" name="TextBox 47"/>
+          <p:cNvSpPr txBox="1"/>
+          <p:nvPr/>
+        </p:nvSpPr>
+        <p:spPr>
+          <a:xfrm>
+            <a:off x="6437376" y="3840480"/>
+            <a:ext cx="3657600" cy="237744"/>
+          </a:xfrm>
+          <a:prstGeom prst="rect">
+            <a:avLst/>
+          </a:prstGeom>
+          <a:noFill/>
+        </p:spPr>
+        <p:txBody>
+          <a:bodyPr wrap="square" lIns="0" rIns="0" tIns="0" bIns="0" anchor="ctr">
+            <a:spAutoFit/>
+          </a:bodyPr>
+          <a:lstStyle/>
+          <a:p>
+            <a:pPr algn="l"/>
+            <a:r>
+              <a:rPr sz="1200" b="1">
+                <a:solidFill>
+                  <a:srgbClr val="232F3E"/>
+                </a:solidFill>
+                <a:latin typeface="Calibri"/>
+              </a:rPr>
+              <a:t>AgentCore Memory</a:t>
+            </a:r>
+          </a:p>
+        </p:txBody>
+      </p:sp>
+      <p:sp>
+        <p:nvSpPr>
+          <p:cNvPr id="49" name="TextBox 48"/>
+          <p:cNvSpPr txBox="1"/>
+          <p:nvPr/>
+        </p:nvSpPr>
+        <p:spPr>
+          <a:xfrm>
+            <a:off x="6437376" y="4078224"/>
+            <a:ext cx="3657600" cy="219456"/>
+          </a:xfrm>
+          <a:prstGeom prst="rect">
+            <a:avLst/>
+          </a:prstGeom>
+          <a:noFill/>
+        </p:spPr>
+        <p:txBody>
+          <a:bodyPr wrap="square" lIns="0" rIns="0" tIns="0" bIns="0" anchor="ctr">
+            <a:spAutoFit/>
+          </a:bodyPr>
+          <a:lstStyle/>
+          <a:p>
+            <a:pPr algn="l"/>
+            <a:r>
+              <a:rPr sz="1000" b="0">
+                <a:solidFill>
+                  <a:srgbClr val="545B64"/>
+                </a:solidFill>
+                <a:latin typeface="Calibri"/>
+              </a:rPr>
+              <a:t>1 event + 1 retrieval per turn, extraction included</a:t>
+            </a:r>
+          </a:p>
+        </p:txBody>
+      </p:sp>
+      <p:sp>
+        <p:nvSpPr>
+          <p:cNvPr id="50" name="TextBox 49"/>
+          <p:cNvSpPr txBox="1"/>
+          <p:nvPr/>
+        </p:nvSpPr>
+        <p:spPr>
+          <a:xfrm>
+            <a:off x="6437376" y="3840480"/>
+            <a:ext cx="4992624" cy="237744"/>
+          </a:xfrm>
+          <a:prstGeom prst="rect">
+            <a:avLst/>
+          </a:prstGeom>
+          <a:noFill/>
+        </p:spPr>
+        <p:txBody>
+          <a:bodyPr wrap="square" lIns="0" rIns="0" tIns="0" bIns="0" anchor="ctr">
+            <a:spAutoFit/>
+          </a:bodyPr>
+          <a:lstStyle/>
+          <a:p>
+            <a:pPr algn="r"/>
+            <a:r>
+              <a:rPr sz="1300" b="1">
+                <a:solidFill>
+                  <a:srgbClr val="1E7C3C"/>
+                </a:solidFill>
+                <a:latin typeface="Calibri"/>
+              </a:rPr>
+              <a:t>$0.098</a:t>
+            </a:r>
+          </a:p>
+        </p:txBody>
+      </p:sp>
+      <p:sp>
+        <p:nvSpPr>
+          <p:cNvPr id="51" name="Rectangle 50"/>
+          <p:cNvSpPr/>
+          <p:nvPr/>
+        </p:nvSpPr>
+        <p:spPr>
+          <a:xfrm>
+            <a:off x="6437376" y="4352544"/>
+            <a:ext cx="4992624" cy="9144"/>
+          </a:xfrm>
+          <a:prstGeom prst="rect">
+            <a:avLst/>
+          </a:prstGeom>
+          <a:solidFill>
+            <a:srgbClr val="E4E7EA"/>
+          </a:solidFill>
+          <a:ln>
+            <a:noFill/>
+          </a:ln>
+          <a:effectLst/>
+        </p:spPr>
+        <p:style>
+          <a:lnRef idx="1">
+            <a:schemeClr val="accent1"/>
+          </a:lnRef>
+          <a:fillRef idx="3">
+            <a:schemeClr val="accent1"/>
+          </a:fillRef>
+          <a:effectRef idx="2">
+            <a:schemeClr val="accent1"/>
+          </a:effectRef>
+          <a:fontRef idx="minor">
+            <a:schemeClr val="lt1"/>
+          </a:fontRef>
+        </p:style>
+        <p:txBody>
+          <a:bodyPr rtlCol="0" anchor="ctr"/>
+          <a:lstStyle/>
+          <a:p>
+            <a:pPr algn="ctr"/>
+          </a:p>
+        </p:txBody>
+      </p:sp>
+      <p:sp>
+        <p:nvSpPr>
+          <p:cNvPr id="52" name="TextBox 51"/>
+          <p:cNvSpPr txBox="1"/>
+          <p:nvPr/>
+        </p:nvSpPr>
+        <p:spPr>
+          <a:xfrm>
+            <a:off x="6437376" y="4407408"/>
+            <a:ext cx="3657600" cy="237744"/>
+          </a:xfrm>
+          <a:prstGeom prst="rect">
+            <a:avLst/>
+          </a:prstGeom>
+          <a:noFill/>
+        </p:spPr>
+        <p:txBody>
+          <a:bodyPr wrap="square" lIns="0" rIns="0" tIns="0" bIns="0" anchor="ctr">
+            <a:spAutoFit/>
+          </a:bodyPr>
+          <a:lstStyle/>
+          <a:p>
+            <a:pPr algn="l"/>
+            <a:r>
+              <a:rPr sz="1200" b="1">
+                <a:solidFill>
+                  <a:srgbClr val="232F3E"/>
+                </a:solidFill>
+                <a:latin typeface="Calibri"/>
+              </a:rPr>
+              <a:t>AgentCore Runtime</a:t>
+            </a:r>
+          </a:p>
+        </p:txBody>
+      </p:sp>
+      <p:sp>
+        <p:nvSpPr>
+          <p:cNvPr id="53" name="TextBox 52"/>
+          <p:cNvSpPr txBox="1"/>
+          <p:nvPr/>
+        </p:nvSpPr>
+        <p:spPr>
+          <a:xfrm>
+            <a:off x="6437376" y="4645152"/>
+            <a:ext cx="3657600" cy="219456"/>
+          </a:xfrm>
+          <a:prstGeom prst="rect">
+            <a:avLst/>
+          </a:prstGeom>
+          <a:noFill/>
+        </p:spPr>
+        <p:txBody>
+          <a:bodyPr wrap="square" lIns="0" rIns="0" tIns="0" bIns="0" anchor="ctr">
+            <a:spAutoFit/>
+          </a:bodyPr>
+          <a:lstStyle/>
+          <a:p>
+            <a:pPr algn="l"/>
+            <a:r>
+              <a:rPr sz="1000" b="0">
+                <a:solidFill>
+                  <a:srgbClr val="545B64"/>
+                </a:solidFill>
+                <a:latin typeface="Calibri"/>
+              </a:rPr>
+              <a:t>3 s × 104 turns, billed per second</a:t>
+            </a:r>
+          </a:p>
+        </p:txBody>
+      </p:sp>
+      <p:sp>
+        <p:nvSpPr>
+          <p:cNvPr id="54" name="TextBox 53"/>
+          <p:cNvSpPr txBox="1"/>
+          <p:nvPr/>
+        </p:nvSpPr>
+        <p:spPr>
+          <a:xfrm>
+            <a:off x="6437376" y="4407408"/>
+            <a:ext cx="4992624" cy="237744"/>
+          </a:xfrm>
+          <a:prstGeom prst="rect">
+            <a:avLst/>
+          </a:prstGeom>
+          <a:noFill/>
+        </p:spPr>
+        <p:txBody>
+          <a:bodyPr wrap="square" lIns="0" rIns="0" tIns="0" bIns="0" anchor="ctr">
+            <a:spAutoFit/>
+          </a:bodyPr>
+          <a:lstStyle/>
+          <a:p>
+            <a:pPr algn="r"/>
+            <a:r>
+              <a:rPr sz="1300" b="1">
+                <a:solidFill>
+                  <a:srgbClr val="1E7C3C"/>
+                </a:solidFill>
+                <a:latin typeface="Calibri"/>
+              </a:rPr>
+              <a:t>$0.0047</a:t>
+            </a:r>
+          </a:p>
+        </p:txBody>
+      </p:sp>
+      <p:sp>
+        <p:nvSpPr>
+          <p:cNvPr id="55" name="Rectangle 54"/>
+          <p:cNvSpPr/>
+          <p:nvPr/>
+        </p:nvSpPr>
+        <p:spPr>
+          <a:xfrm>
+            <a:off x="6437376" y="4919472"/>
+            <a:ext cx="4992624" cy="9144"/>
+          </a:xfrm>
+          <a:prstGeom prst="rect">
+            <a:avLst/>
+          </a:prstGeom>
+          <a:solidFill>
+            <a:srgbClr val="E4E7EA"/>
+          </a:solidFill>
+          <a:ln>
+            <a:noFill/>
+          </a:ln>
+          <a:effectLst/>
+        </p:spPr>
+        <p:style>
+          <a:lnRef idx="1">
+            <a:schemeClr val="accent1"/>
+          </a:lnRef>
+          <a:fillRef idx="3">
+            <a:schemeClr val="accent1"/>
+          </a:fillRef>
+          <a:effectRef idx="2">
+            <a:schemeClr val="accent1"/>
+          </a:effectRef>
+          <a:fontRef idx="minor">
+            <a:schemeClr val="lt1"/>
+          </a:fontRef>
+        </p:style>
+        <p:txBody>
+          <a:bodyPr rtlCol="0" anchor="ctr"/>
+          <a:lstStyle/>
+          <a:p>
+            <a:pPr algn="ctr"/>
+          </a:p>
+        </p:txBody>
+      </p:sp>
+      <p:sp>
+        <p:nvSpPr>
+          <p:cNvPr id="56" name="TextBox 55"/>
+          <p:cNvSpPr txBox="1"/>
+          <p:nvPr/>
+        </p:nvSpPr>
+        <p:spPr>
+          <a:xfrm>
+            <a:off x="6437376" y="5010912"/>
+            <a:ext cx="3657600" cy="274320"/>
+          </a:xfrm>
+          <a:prstGeom prst="rect">
+            <a:avLst/>
+          </a:prstGeom>
+          <a:noFill/>
+        </p:spPr>
+        <p:txBody>
+          <a:bodyPr wrap="square" lIns="0" rIns="0" tIns="0" bIns="0" anchor="ctr">
+            <a:spAutoFit/>
+          </a:bodyPr>
+          <a:lstStyle/>
+          <a:p>
+            <a:pPr algn="l"/>
+            <a:r>
+              <a:rPr sz="1250" b="1">
+                <a:solidFill>
+                  <a:srgbClr val="232F3E"/>
+                </a:solidFill>
+                <a:latin typeface="Calibri"/>
+              </a:rPr>
+              <a:t>At one user, per month</a:t>
+            </a:r>
+          </a:p>
+        </p:txBody>
+      </p:sp>
+      <p:sp>
+        <p:nvSpPr>
+          <p:cNvPr id="57" name="TextBox 56"/>
+          <p:cNvSpPr txBox="1"/>
+          <p:nvPr/>
+        </p:nvSpPr>
+        <p:spPr>
+          <a:xfrm>
+            <a:off x="6437376" y="5010912"/>
+            <a:ext cx="4992624" cy="274320"/>
+          </a:xfrm>
+          <a:prstGeom prst="rect">
+            <a:avLst/>
+          </a:prstGeom>
+          <a:noFill/>
+        </p:spPr>
+        <p:txBody>
+          <a:bodyPr wrap="square" lIns="0" rIns="0" tIns="0" bIns="0" anchor="ctr">
+            <a:spAutoFit/>
+          </a:bodyPr>
+          <a:lstStyle/>
+          <a:p>
+            <a:pPr algn="r"/>
+            <a:r>
+              <a:rPr sz="1500" b="1">
+                <a:solidFill>
+                  <a:srgbClr val="1E7C3C"/>
+                </a:solidFill>
+                <a:latin typeface="Calibri"/>
+              </a:rPr>
+              <a:t>$0.10</a:t>
+            </a:r>
+          </a:p>
+        </p:txBody>
+      </p:sp>
+      <p:sp>
+        <p:nvSpPr>
+          <p:cNvPr id="58" name="TextBox 57"/>
+          <p:cNvSpPr txBox="1"/>
+          <p:nvPr/>
+        </p:nvSpPr>
+        <p:spPr>
+          <a:xfrm>
+            <a:off x="566928" y="5449824"/>
+            <a:ext cx="11064240" cy="384048"/>
+          </a:xfrm>
+          <a:prstGeom prst="rect">
+            <a:avLst/>
+          </a:prstGeom>
+          <a:noFill/>
+        </p:spPr>
+        <p:txBody>
+          <a:bodyPr wrap="square" lIns="0" rIns="0" tIns="0" bIns="0" anchor="t">
+            <a:spAutoFit/>
+          </a:bodyPr>
+          <a:lstStyle/>
+          <a:p>
+            <a:pPr algn="l"/>
+            <a:r>
+              <a:rPr sz="1100" b="0">
+                <a:solidFill>
+                  <a:srgbClr val="545B64"/>
+                </a:solidFill>
+                <a:latin typeface="Calibri"/>
+              </a:rPr>
+              <a:t>Unit price favours engine A — Runtime is 2.20× dearer per vCPU-hour and one Memory event costs ~124× a DynamoDB write. B wins the bill anyway: it charges per second of real work, and folds extraction into the service instead of a second model call.</a:t>
+            </a:r>
+          </a:p>
+        </p:txBody>
+      </p:sp>
+      <p:sp>
+        <p:nvSpPr>
+          <p:cNvPr id="59" name="Rounded Rectangle 58"/>
+          <p:cNvSpPr/>
+          <p:nvPr/>
+        </p:nvSpPr>
+        <p:spPr>
+          <a:xfrm>
+            <a:off x="566928" y="5888736"/>
+            <a:ext cx="11064240" cy="402336"/>
+          </a:xfrm>
+          <a:prstGeom prst="roundRect">
+            <a:avLst>
+              <a:gd name="adj" fmla="val 22727"/>
+            </a:avLst>
+          </a:prstGeom>
+          <a:solidFill>
+            <a:srgbClr val="FFEFD6"/>
+          </a:solidFill>
+          <a:ln>
+            <a:noFill/>
+          </a:ln>
+          <a:effectLst/>
+        </p:spPr>
+        <p:style>
+          <a:lnRef idx="1">
+            <a:schemeClr val="accent1"/>
+          </a:lnRef>
+          <a:fillRef idx="3">
+            <a:schemeClr val="accent1"/>
+          </a:fillRef>
+          <a:effectRef idx="2">
+            <a:schemeClr val="accent1"/>
+          </a:effectRef>
+          <a:fontRef idx="minor">
+            <a:schemeClr val="lt1"/>
+          </a:fontRef>
+        </p:style>
+        <p:txBody>
+          <a:bodyPr rtlCol="0" anchor="ctr"/>
+          <a:lstStyle/>
+          <a:p>
+            <a:pPr algn="ctr"/>
+          </a:p>
+        </p:txBody>
+      </p:sp>
+      <p:sp>
+        <p:nvSpPr>
+          <p:cNvPr id="60" name="TextBox 59"/>
+          <p:cNvSpPr txBox="1"/>
+          <p:nvPr/>
+        </p:nvSpPr>
+        <p:spPr>
+          <a:xfrm>
+            <a:off x="768096" y="5888736"/>
+            <a:ext cx="10661904" cy="402336"/>
+          </a:xfrm>
+          <a:prstGeom prst="rect">
+            <a:avLst/>
+          </a:prstGeom>
+          <a:noFill/>
+        </p:spPr>
+        <p:txBody>
+          <a:bodyPr wrap="square" lIns="0" rIns="0" tIns="0" bIns="0" anchor="ctr">
+            <a:spAutoFit/>
+          </a:bodyPr>
+          <a:lstStyle/>
+          <a:p>
+            <a:pPr algn="l"/>
+            <a:r>
+              <a:rPr sz="1100" b="1">
+                <a:solidFill>
+                  <a:srgbClr val="232F3E"/>
+                </a:solidFill>
+                <a:latin typeface="Calibri"/>
+              </a:rPr>
+              <a:t>Reproducible: </a:t>
+            </a:r>
+            <a:r>
+              <a:rPr sz="1100" b="1">
+                <a:solidFill>
+                  <a:srgbClr val="FF9900"/>
+                </a:solidFill>
+                <a:latin typeface="Calibri"/>
+              </a:rPr>
+              <a:t>scripts/cost-model.mjs</a:t>
+            </a:r>
+            <a:r>
+              <a:rPr sz="1100" b="0">
+                <a:solidFill>
+                  <a:srgbClr val="232F3E"/>
+                </a:solidFill>
+                <a:latin typeface="Calibri"/>
+              </a:rPr>
+              <a:t>  regenerates every figure. Caveat — if Memory meters retrievals per record rather than per call, engine B lands 3.8× worse.</a:t>
+            </a:r>
+          </a:p>
+        </p:txBody>
+      </p:sp>
+    </p:spTree>
+  </p:cSld>
+  <p:clrMapOvr>
+    <a:masterClrMapping/>
+  </p:clrMapOvr>
+</p:sld>
+</file>
+
+<file path=ppt/slides/slide26.xml><?xml version="1.0" encoding="utf-8"?>
+<p:sld xmlns:a="http://schemas.openxmlformats.org/drawingml/2006/main" xmlns:p="http://schemas.openxmlformats.org/presentationml/2006/main" xmlns:r="http://schemas.openxmlformats.org/officeDocument/2006/relationships">
+  <p:cSld>
+    <p:spTree>
+      <p:nvGrpSpPr>
+        <p:cNvPr id="1" name=""/>
+        <p:cNvGrpSpPr/>
+        <p:nvPr/>
+      </p:nvGrpSpPr>
+      <p:grpSpPr/>
+      <p:sp>
+        <p:nvSpPr>
+          <p:cNvPr id="2" name="Rectangle 1"/>
+          <p:cNvSpPr/>
+          <p:nvPr/>
+        </p:nvSpPr>
+        <p:spPr>
+          <a:xfrm>
+            <a:off x="0" y="0"/>
+            <a:ext cx="12191969" cy="6858000"/>
+          </a:xfrm>
+          <a:prstGeom prst="rect">
+            <a:avLst/>
+          </a:prstGeom>
+          <a:solidFill>
+            <a:srgbClr val="FFFFFF"/>
+          </a:solidFill>
+          <a:ln>
+            <a:noFill/>
+          </a:ln>
+          <a:effectLst/>
+        </p:spPr>
+        <p:style>
+          <a:lnRef idx="1">
+            <a:schemeClr val="accent1"/>
+          </a:lnRef>
+          <a:fillRef idx="3">
+            <a:schemeClr val="accent1"/>
+          </a:fillRef>
+          <a:effectRef idx="2">
+            <a:schemeClr val="accent1"/>
+          </a:effectRef>
+          <a:fontRef idx="minor">
+            <a:schemeClr val="lt1"/>
+          </a:fontRef>
+        </p:style>
+        <p:txBody>
+          <a:bodyPr rtlCol="0" anchor="ctr"/>
+          <a:lstStyle/>
+          <a:p>
+            <a:pPr algn="ctr"/>
+          </a:p>
+        </p:txBody>
+      </p:sp>
+      <p:sp>
+        <p:nvSpPr>
+          <p:cNvPr id="3" name="Oval 2"/>
+          <p:cNvSpPr/>
+          <p:nvPr/>
+        </p:nvSpPr>
+        <p:spPr>
+          <a:xfrm>
+            <a:off x="502920" y="365760"/>
+            <a:ext cx="594360" cy="594360"/>
+          </a:xfrm>
+          <a:prstGeom prst="ellipse">
+            <a:avLst/>
+          </a:prstGeom>
+          <a:solidFill>
+            <a:srgbClr val="232F3E"/>
+          </a:solidFill>
+          <a:ln>
+            <a:noFill/>
+          </a:ln>
+          <a:effectLst/>
+        </p:spPr>
+        <p:style>
+          <a:lnRef idx="1">
+            <a:schemeClr val="accent1"/>
+          </a:lnRef>
+          <a:fillRef idx="3">
+            <a:schemeClr val="accent1"/>
+          </a:fillRef>
+          <a:effectRef idx="2">
+            <a:schemeClr val="accent1"/>
+          </a:effectRef>
+          <a:fontRef idx="minor">
+            <a:schemeClr val="lt1"/>
+          </a:fontRef>
+        </p:style>
+        <p:txBody>
+          <a:bodyPr rtlCol="0" anchor="ctr"/>
+          <a:lstStyle/>
+          <a:p>
+            <a:pPr algn="ctr"/>
+          </a:p>
+        </p:txBody>
+      </p:sp>
+      <p:sp>
+        <p:nvSpPr>
+          <p:cNvPr id="4" name="TextBox 3"/>
+          <p:cNvSpPr txBox="1"/>
+          <p:nvPr/>
+        </p:nvSpPr>
+        <p:spPr>
+          <a:xfrm>
+            <a:off x="502920" y="365760"/>
+            <a:ext cx="594360" cy="594360"/>
+          </a:xfrm>
+          <a:prstGeom prst="rect">
+            <a:avLst/>
+          </a:prstGeom>
+          <a:noFill/>
+        </p:spPr>
+        <p:txBody>
+          <a:bodyPr wrap="square" lIns="0" rIns="0" tIns="0" bIns="0" anchor="ctr">
+            <a:spAutoFit/>
+          </a:bodyPr>
+          <a:lstStyle/>
+          <a:p>
+            <a:pPr algn="ctr"/>
+            <a:r>
+              <a:rPr sz="2600" b="1">
+                <a:solidFill>
+                  <a:srgbClr val="FF9900"/>
+                </a:solidFill>
+                <a:latin typeface="Calibri"/>
+              </a:rPr>
+              <a:t>13</a:t>
+            </a:r>
+          </a:p>
+        </p:txBody>
+      </p:sp>
+      <p:sp>
+        <p:nvSpPr>
+          <p:cNvPr id="5" name="TextBox 4"/>
+          <p:cNvSpPr txBox="1"/>
+          <p:nvPr/>
+        </p:nvSpPr>
+        <p:spPr>
+          <a:xfrm>
+            <a:off x="502920" y="6446520"/>
+            <a:ext cx="8229600" cy="320040"/>
+          </a:xfrm>
+          <a:prstGeom prst="rect">
+            <a:avLst/>
+          </a:prstGeom>
+          <a:noFill/>
+        </p:spPr>
+        <p:txBody>
+          <a:bodyPr wrap="square" lIns="0" rIns="0" tIns="0" bIns="0" anchor="ctr">
+            <a:spAutoFit/>
+          </a:bodyPr>
+          <a:lstStyle/>
+          <a:p>
+            <a:pPr algn="l"/>
+            <a:r>
+              <a:rPr sz="1000" b="1">
+                <a:solidFill>
+                  <a:srgbClr val="545B64"/>
+                </a:solidFill>
+                <a:latin typeface="Calibri"/>
+              </a:rPr>
+              <a:t>VALENTIN   ·   GenAI TFC Capstone Deep-Dive</a:t>
+            </a:r>
+          </a:p>
+        </p:txBody>
+      </p:sp>
+      <p:sp>
+        <p:nvSpPr>
+          <p:cNvPr id="6" name="TextBox 5"/>
+          <p:cNvSpPr txBox="1"/>
+          <p:nvPr/>
+        </p:nvSpPr>
+        <p:spPr>
+          <a:xfrm>
+            <a:off x="10332720" y="6446520"/>
+            <a:ext cx="1371600" cy="320040"/>
+          </a:xfrm>
+          <a:prstGeom prst="rect">
+            <a:avLst/>
+          </a:prstGeom>
+          <a:noFill/>
+        </p:spPr>
+        <p:txBody>
+          <a:bodyPr wrap="square" lIns="0" rIns="0" tIns="0" bIns="0" anchor="ctr">
+            <a:spAutoFit/>
+          </a:bodyPr>
+          <a:lstStyle/>
+          <a:p>
+            <a:pPr algn="r"/>
+            <a:r>
+              <a:rPr sz="1000" b="0">
+                <a:solidFill>
+                  <a:srgbClr val="545B64"/>
+                </a:solidFill>
+                <a:latin typeface="Calibri"/>
+              </a:rPr>
+              <a:t>14 / 17</a:t>
+            </a:r>
+          </a:p>
+        </p:txBody>
+      </p:sp>
+      <p:sp>
+        <p:nvSpPr>
+          <p:cNvPr id="7" name="TextBox 6"/>
+          <p:cNvSpPr txBox="1"/>
+          <p:nvPr/>
+        </p:nvSpPr>
+        <p:spPr>
+          <a:xfrm>
+            <a:off x="1280160" y="365760"/>
+            <a:ext cx="10058400" cy="594360"/>
+          </a:xfrm>
+          <a:prstGeom prst="rect">
+            <a:avLst/>
+          </a:prstGeom>
+          <a:noFill/>
+        </p:spPr>
+        <p:txBody>
+          <a:bodyPr wrap="square" lIns="0" rIns="0" tIns="0" bIns="0" anchor="ctr">
+            <a:spAutoFit/>
+          </a:bodyPr>
+          <a:lstStyle/>
+          <a:p>
+            <a:pPr algn="l"/>
+            <a:r>
+              <a:rPr sz="3000" b="1">
+                <a:solidFill>
+                  <a:srgbClr val="232F3E"/>
+                </a:solidFill>
+                <a:latin typeface="Calibri"/>
+              </a:rPr>
+              <a:t>I didn’t write it. They did.</a:t>
+            </a:r>
+          </a:p>
+        </p:txBody>
+      </p:sp>
+      <p:sp>
+        <p:nvSpPr>
+          <p:cNvPr id="8" name="Rectangle 7"/>
+          <p:cNvSpPr/>
+          <p:nvPr/>
+        </p:nvSpPr>
+        <p:spPr>
+          <a:xfrm>
+            <a:off x="502920" y="1051560"/>
+            <a:ext cx="1371600" cy="36576"/>
+          </a:xfrm>
+          <a:prstGeom prst="rect">
+            <a:avLst/>
+          </a:prstGeom>
+          <a:solidFill>
+            <a:srgbClr val="FF9900"/>
+          </a:solidFill>
+          <a:ln>
+            <a:noFill/>
+          </a:ln>
+          <a:effectLst/>
+        </p:spPr>
+        <p:style>
+          <a:lnRef idx="1">
+            <a:schemeClr val="accent1"/>
+          </a:lnRef>
+          <a:fillRef idx="3">
+            <a:schemeClr val="accent1"/>
+          </a:fillRef>
+          <a:effectRef idx="2">
+            <a:schemeClr val="accent1"/>
+          </a:effectRef>
+          <a:fontRef idx="minor">
+            <a:schemeClr val="lt1"/>
+          </a:fontRef>
+        </p:style>
+        <p:txBody>
+          <a:bodyPr rtlCol="0" anchor="ctr"/>
+          <a:lstStyle/>
+          <a:p>
+            <a:pPr algn="ctr"/>
+          </a:p>
+        </p:txBody>
+      </p:sp>
+      <p:sp>
+        <p:nvSpPr>
+          <p:cNvPr id="9" name="TextBox 8"/>
+          <p:cNvSpPr txBox="1"/>
+          <p:nvPr/>
+        </p:nvSpPr>
+        <p:spPr>
+          <a:xfrm>
+            <a:off x="502920" y="1280160"/>
+            <a:ext cx="11155680" cy="384048"/>
+          </a:xfrm>
+          <a:prstGeom prst="rect">
+            <a:avLst/>
+          </a:prstGeom>
+          <a:noFill/>
+        </p:spPr>
+        <p:txBody>
+          <a:bodyPr wrap="square" lIns="0" rIns="0" tIns="0" bIns="0" anchor="t">
+            <a:spAutoFit/>
+          </a:bodyPr>
+          <a:lstStyle/>
+          <a:p>
+            <a:pPr algn="l"/>
+            <a:r>
+              <a:rPr sz="1400" b="0">
+                <a:solidFill>
+                  <a:srgbClr val="545B64"/>
+                </a:solidFill>
+                <a:latin typeface="Calibri"/>
+              </a:rPr>
+              <a:t>Six agent personas with disjoint file ownership, and one human who holds the veto.</a:t>
+            </a:r>
+          </a:p>
+        </p:txBody>
+      </p:sp>
+      <p:sp>
+        <p:nvSpPr>
+          <p:cNvPr id="10" name="Rounded Rectangle 9"/>
+          <p:cNvSpPr/>
+          <p:nvPr/>
+        </p:nvSpPr>
+        <p:spPr>
+          <a:xfrm>
+            <a:off x="566928" y="1810512"/>
+            <a:ext cx="5394960" cy="841248"/>
+          </a:xfrm>
+          <a:prstGeom prst="roundRect">
+            <a:avLst>
+              <a:gd name="adj" fmla="val 6521"/>
+            </a:avLst>
+          </a:prstGeom>
+          <a:solidFill>
+            <a:srgbClr val="F7F8FA"/>
+          </a:solidFill>
+          <a:ln w="12700">
+            <a:solidFill>
+              <a:srgbClr val="E4E7EA"/>
+            </a:solidFill>
+          </a:ln>
+          <a:effectLst/>
+        </p:spPr>
+        <p:style>
+          <a:lnRef idx="1">
+            <a:schemeClr val="accent1"/>
+          </a:lnRef>
+          <a:fillRef idx="3">
+            <a:schemeClr val="accent1"/>
+          </a:fillRef>
+          <a:effectRef idx="2">
+            <a:schemeClr val="accent1"/>
+          </a:effectRef>
+          <a:fontRef idx="minor">
+            <a:schemeClr val="lt1"/>
+          </a:fontRef>
+        </p:style>
+        <p:txBody>
+          <a:bodyPr rtlCol="0" anchor="ctr"/>
+          <a:lstStyle/>
+          <a:p>
+            <a:pPr algn="ctr"/>
+          </a:p>
+        </p:txBody>
+      </p:sp>
+      <p:sp>
+        <p:nvSpPr>
+          <p:cNvPr id="11" name="Rectangle 10"/>
+          <p:cNvSpPr/>
+          <p:nvPr/>
+        </p:nvSpPr>
+        <p:spPr>
+          <a:xfrm>
+            <a:off x="566928" y="1810512"/>
+            <a:ext cx="54864" cy="841248"/>
+          </a:xfrm>
+          <a:prstGeom prst="rect">
+            <a:avLst/>
+          </a:prstGeom>
+          <a:solidFill>
+            <a:srgbClr val="232F3E"/>
+          </a:solidFill>
+          <a:ln>
+            <a:noFill/>
+          </a:ln>
+          <a:effectLst/>
+        </p:spPr>
+        <p:style>
+          <a:lnRef idx="1">
+            <a:schemeClr val="accent1"/>
+          </a:lnRef>
+          <a:fillRef idx="3">
+            <a:schemeClr val="accent1"/>
+          </a:fillRef>
+          <a:effectRef idx="2">
+            <a:schemeClr val="accent1"/>
+          </a:effectRef>
+          <a:fontRef idx="minor">
+            <a:schemeClr val="lt1"/>
+          </a:fontRef>
+        </p:style>
+        <p:txBody>
+          <a:bodyPr rtlCol="0" anchor="ctr"/>
+          <a:lstStyle/>
+          <a:p>
+            <a:pPr algn="ctr"/>
+          </a:p>
+        </p:txBody>
+      </p:sp>
+      <p:sp>
+        <p:nvSpPr>
+          <p:cNvPr id="12" name="TextBox 11"/>
+          <p:cNvSpPr txBox="1"/>
+          <p:nvPr/>
+        </p:nvSpPr>
+        <p:spPr>
+          <a:xfrm>
+            <a:off x="822960" y="1901952"/>
+            <a:ext cx="4937760" cy="274320"/>
+          </a:xfrm>
+          <a:prstGeom prst="rect">
+            <a:avLst/>
+          </a:prstGeom>
+          <a:noFill/>
+        </p:spPr>
+        <p:txBody>
+          <a:bodyPr wrap="square" lIns="0" rIns="0" tIns="0" bIns="0" anchor="ctr">
+            <a:spAutoFit/>
+          </a:bodyPr>
+          <a:lstStyle/>
+          <a:p>
+            <a:pPr algn="l"/>
+            <a:r>
+              <a:rPr sz="1300" b="1">
+                <a:solidFill>
+                  <a:srgbClr val="232F3E"/>
+                </a:solidFill>
+                <a:latin typeface="Calibri"/>
+              </a:rPr>
+              <a:t>Coral · human</a:t>
+            </a:r>
+          </a:p>
+        </p:txBody>
+      </p:sp>
+      <p:sp>
+        <p:nvSpPr>
+          <p:cNvPr id="13" name="TextBox 12"/>
+          <p:cNvSpPr txBox="1"/>
+          <p:nvPr/>
+        </p:nvSpPr>
+        <p:spPr>
+          <a:xfrm>
+            <a:off x="822960" y="2194560"/>
+            <a:ext cx="4937760" cy="365760"/>
+          </a:xfrm>
+          <a:prstGeom prst="rect">
+            <a:avLst/>
+          </a:prstGeom>
+          <a:noFill/>
+        </p:spPr>
+        <p:txBody>
+          <a:bodyPr wrap="square" lIns="0" rIns="0" tIns="0" bIns="0" anchor="t">
+            <a:spAutoFit/>
+          </a:bodyPr>
+          <a:lstStyle/>
+          <a:p>
+            <a:pPr algn="l"/>
+            <a:r>
+              <a:rPr sz="1100" b="0">
+                <a:solidFill>
+                  <a:srgbClr val="16191F"/>
+                </a:solidFill>
+                <a:latin typeface="Calibri"/>
+              </a:rPr>
+              <a:t>Product intent, final say, veto. Wrote none of the application code.</a:t>
+            </a:r>
+          </a:p>
+        </p:txBody>
+      </p:sp>
+      <p:sp>
+        <p:nvSpPr>
+          <p:cNvPr id="14" name="Rounded Rectangle 13"/>
+          <p:cNvSpPr/>
+          <p:nvPr/>
+        </p:nvSpPr>
+        <p:spPr>
+          <a:xfrm>
+            <a:off x="6236208" y="1810512"/>
+            <a:ext cx="5394960" cy="841248"/>
+          </a:xfrm>
+          <a:prstGeom prst="roundRect">
+            <a:avLst>
+              <a:gd name="adj" fmla="val 6521"/>
+            </a:avLst>
+          </a:prstGeom>
+          <a:solidFill>
+            <a:srgbClr val="F7F8FA"/>
+          </a:solidFill>
+          <a:ln w="12700">
+            <a:solidFill>
+              <a:srgbClr val="E4E7EA"/>
+            </a:solidFill>
+          </a:ln>
+          <a:effectLst/>
+        </p:spPr>
+        <p:style>
+          <a:lnRef idx="1">
+            <a:schemeClr val="accent1"/>
+          </a:lnRef>
+          <a:fillRef idx="3">
+            <a:schemeClr val="accent1"/>
+          </a:fillRef>
+          <a:effectRef idx="2">
+            <a:schemeClr val="accent1"/>
+          </a:effectRef>
+          <a:fontRef idx="minor">
+            <a:schemeClr val="lt1"/>
+          </a:fontRef>
+        </p:style>
+        <p:txBody>
+          <a:bodyPr rtlCol="0" anchor="ctr"/>
+          <a:lstStyle/>
+          <a:p>
+            <a:pPr algn="ctr"/>
+          </a:p>
+        </p:txBody>
+      </p:sp>
+      <p:sp>
+        <p:nvSpPr>
+          <p:cNvPr id="15" name="Rectangle 14"/>
+          <p:cNvSpPr/>
+          <p:nvPr/>
+        </p:nvSpPr>
+        <p:spPr>
+          <a:xfrm>
+            <a:off x="6236208" y="1810512"/>
+            <a:ext cx="54864" cy="841248"/>
+          </a:xfrm>
+          <a:prstGeom prst="rect">
+            <a:avLst/>
+          </a:prstGeom>
+          <a:solidFill>
+            <a:srgbClr val="FF9900"/>
+          </a:solidFill>
+          <a:ln>
+            <a:noFill/>
+          </a:ln>
+          <a:effectLst/>
+        </p:spPr>
+        <p:style>
+          <a:lnRef idx="1">
+            <a:schemeClr val="accent1"/>
+          </a:lnRef>
+          <a:fillRef idx="3">
+            <a:schemeClr val="accent1"/>
+          </a:fillRef>
+          <a:effectRef idx="2">
+            <a:schemeClr val="accent1"/>
+          </a:effectRef>
+          <a:fontRef idx="minor">
+            <a:schemeClr val="lt1"/>
+          </a:fontRef>
+        </p:style>
+        <p:txBody>
+          <a:bodyPr rtlCol="0" anchor="ctr"/>
+          <a:lstStyle/>
+          <a:p>
+            <a:pPr algn="ctr"/>
+          </a:p>
+        </p:txBody>
+      </p:sp>
+      <p:sp>
+        <p:nvSpPr>
+          <p:cNvPr id="16" name="TextBox 15"/>
+          <p:cNvSpPr txBox="1"/>
+          <p:nvPr/>
+        </p:nvSpPr>
+        <p:spPr>
+          <a:xfrm>
+            <a:off x="6492240" y="1901952"/>
+            <a:ext cx="4937760" cy="274320"/>
+          </a:xfrm>
+          <a:prstGeom prst="rect">
+            <a:avLst/>
+          </a:prstGeom>
+          <a:noFill/>
+        </p:spPr>
+        <p:txBody>
+          <a:bodyPr wrap="square" lIns="0" rIns="0" tIns="0" bIns="0" anchor="ctr">
+            <a:spAutoFit/>
+          </a:bodyPr>
+          <a:lstStyle/>
+          <a:p>
+            <a:pPr algn="l"/>
+            <a:r>
+              <a:rPr sz="1300" b="1">
+                <a:solidFill>
+                  <a:srgbClr val="232F3E"/>
+                </a:solidFill>
+                <a:latin typeface="Calibri"/>
+              </a:rPr>
+              <a:t>Master Agent  ·  .kiro/  ·  .github/</a:t>
+            </a:r>
+          </a:p>
+        </p:txBody>
+      </p:sp>
+      <p:sp>
+        <p:nvSpPr>
+          <p:cNvPr id="17" name="TextBox 16"/>
+          <p:cNvSpPr txBox="1"/>
+          <p:nvPr/>
+        </p:nvSpPr>
+        <p:spPr>
+          <a:xfrm>
+            <a:off x="6492240" y="2194560"/>
+            <a:ext cx="4937760" cy="365760"/>
+          </a:xfrm>
+          <a:prstGeom prst="rect">
+            <a:avLst/>
+          </a:prstGeom>
+          <a:noFill/>
+        </p:spPr>
+        <p:txBody>
+          <a:bodyPr wrap="square" lIns="0" rIns="0" tIns="0" bIns="0" anchor="t">
+            <a:spAutoFit/>
+          </a:bodyPr>
+          <a:lstStyle/>
+          <a:p>
+            <a:pPr algn="l"/>
+            <a:r>
+              <a:rPr sz="1100" b="0">
+                <a:solidFill>
+                  <a:srgbClr val="16191F"/>
+                </a:solidFill>
+                <a:latin typeface="Calibri"/>
+              </a:rPr>
+              <a:t>Decomposes, delegates, reviews, merges — and posts the last word.</a:t>
+            </a:r>
+          </a:p>
+        </p:txBody>
+      </p:sp>
+      <p:sp>
+        <p:nvSpPr>
+          <p:cNvPr id="18" name="Rounded Rectangle 17"/>
+          <p:cNvSpPr/>
+          <p:nvPr/>
+        </p:nvSpPr>
+        <p:spPr>
+          <a:xfrm>
+            <a:off x="566928" y="2871216"/>
+            <a:ext cx="2095804" cy="2212848"/>
+          </a:xfrm>
+          <a:prstGeom prst="roundRect">
+            <a:avLst>
+              <a:gd name="adj" fmla="val 2617"/>
+            </a:avLst>
+          </a:prstGeom>
+          <a:solidFill>
+            <a:srgbClr val="F7F8FA"/>
+          </a:solidFill>
+          <a:ln w="12700">
+            <a:solidFill>
+              <a:srgbClr val="E4E7EA"/>
+            </a:solidFill>
+          </a:ln>
+          <a:effectLst/>
+        </p:spPr>
+        <p:style>
+          <a:lnRef idx="1">
+            <a:schemeClr val="accent1"/>
+          </a:lnRef>
+          <a:fillRef idx="3">
+            <a:schemeClr val="accent1"/>
+          </a:fillRef>
+          <a:effectRef idx="2">
+            <a:schemeClr val="accent1"/>
+          </a:effectRef>
+          <a:fontRef idx="minor">
+            <a:schemeClr val="lt1"/>
+          </a:fontRef>
+        </p:style>
+        <p:txBody>
+          <a:bodyPr rtlCol="0" anchor="ctr"/>
+          <a:lstStyle/>
+          <a:p>
+            <a:pPr algn="ctr"/>
+          </a:p>
+        </p:txBody>
+      </p:sp>
+      <p:sp>
+        <p:nvSpPr>
+          <p:cNvPr id="19" name="Rectangle 18"/>
+          <p:cNvSpPr/>
+          <p:nvPr/>
+        </p:nvSpPr>
+        <p:spPr>
+          <a:xfrm>
+            <a:off x="566928" y="2871216"/>
+            <a:ext cx="2095804" cy="45720"/>
+          </a:xfrm>
+          <a:prstGeom prst="rect">
+            <a:avLst/>
+          </a:prstGeom>
+          <a:solidFill>
+            <a:srgbClr val="FF9900"/>
+          </a:solidFill>
+          <a:ln>
+            <a:noFill/>
+          </a:ln>
+          <a:effectLst/>
+        </p:spPr>
+        <p:style>
+          <a:lnRef idx="1">
+            <a:schemeClr val="accent1"/>
+          </a:lnRef>
+          <a:fillRef idx="3">
+            <a:schemeClr val="accent1"/>
+          </a:fillRef>
+          <a:effectRef idx="2">
+            <a:schemeClr val="accent1"/>
+          </a:effectRef>
+          <a:fontRef idx="minor">
+            <a:schemeClr val="lt1"/>
+          </a:fontRef>
+        </p:style>
+        <p:txBody>
+          <a:bodyPr rtlCol="0" anchor="ctr"/>
+          <a:lstStyle/>
+          <a:p>
+            <a:pPr algn="ctr"/>
+          </a:p>
+        </p:txBody>
+      </p:sp>
+      <p:sp>
+        <p:nvSpPr>
+          <p:cNvPr id="20" name="TextBox 19"/>
+          <p:cNvSpPr txBox="1"/>
+          <p:nvPr/>
+        </p:nvSpPr>
+        <p:spPr>
+          <a:xfrm>
+            <a:off x="713232" y="2999232"/>
+            <a:ext cx="1803196" cy="256032"/>
+          </a:xfrm>
+          <a:prstGeom prst="rect">
+            <a:avLst/>
+          </a:prstGeom>
+          <a:noFill/>
+        </p:spPr>
+        <p:txBody>
+          <a:bodyPr wrap="square" lIns="0" rIns="0" tIns="0" bIns="0" anchor="ctr">
+            <a:spAutoFit/>
+          </a:bodyPr>
+          <a:lstStyle/>
+          <a:p>
+            <a:pPr algn="l"/>
+            <a:r>
+              <a:rPr sz="1250" b="1">
+                <a:solidFill>
+                  <a:srgbClr val="232F3E"/>
+                </a:solidFill>
+                <a:latin typeface="Calibri"/>
+              </a:rPr>
+              <a:t>System Architect</a:t>
+            </a:r>
+          </a:p>
+        </p:txBody>
+      </p:sp>
+      <p:sp>
+        <p:nvSpPr>
+          <p:cNvPr id="21" name="Rounded Rectangle 20"/>
+          <p:cNvSpPr/>
+          <p:nvPr/>
+        </p:nvSpPr>
+        <p:spPr>
+          <a:xfrm>
+            <a:off x="713232" y="3291840"/>
+            <a:ext cx="1803196" cy="237744"/>
+          </a:xfrm>
+          <a:prstGeom prst="roundRect">
+            <a:avLst>
+              <a:gd name="adj" fmla="val 30769"/>
+            </a:avLst>
+          </a:prstGeom>
+          <a:solidFill>
+            <a:srgbClr val="FFEFD6"/>
+          </a:solidFill>
+          <a:ln>
+            <a:noFill/>
+          </a:ln>
+          <a:effectLst/>
+        </p:spPr>
+        <p:style>
+          <a:lnRef idx="1">
+            <a:schemeClr val="accent1"/>
+          </a:lnRef>
+          <a:fillRef idx="3">
+            <a:schemeClr val="accent1"/>
+          </a:fillRef>
+          <a:effectRef idx="2">
+            <a:schemeClr val="accent1"/>
+          </a:effectRef>
+          <a:fontRef idx="minor">
+            <a:schemeClr val="lt1"/>
+          </a:fontRef>
+        </p:style>
+        <p:txBody>
+          <a:bodyPr rtlCol="0" anchor="ctr"/>
+          <a:lstStyle/>
+          <a:p>
+            <a:pPr algn="ctr"/>
+          </a:p>
+        </p:txBody>
+      </p:sp>
+      <p:sp>
+        <p:nvSpPr>
+          <p:cNvPr id="22" name="TextBox 21"/>
+          <p:cNvSpPr txBox="1"/>
+          <p:nvPr/>
+        </p:nvSpPr>
+        <p:spPr>
+          <a:xfrm>
+            <a:off x="713232" y="3291840"/>
+            <a:ext cx="1803196" cy="237744"/>
+          </a:xfrm>
+          <a:prstGeom prst="rect">
+            <a:avLst/>
+          </a:prstGeom>
+          <a:noFill/>
+        </p:spPr>
+        <p:txBody>
+          <a:bodyPr wrap="square" lIns="0" rIns="0" tIns="0" bIns="0" anchor="ctr">
+            <a:spAutoFit/>
+          </a:bodyPr>
+          <a:lstStyle/>
+          <a:p>
+            <a:pPr algn="ctr"/>
+            <a:r>
+              <a:rPr sz="1000" b="1">
+                <a:solidFill>
+                  <a:srgbClr val="545B64"/>
+                </a:solidFill>
+                <a:latin typeface="Calibri"/>
+              </a:rPr>
+              <a:t>src/shared/</a:t>
+            </a:r>
+          </a:p>
+        </p:txBody>
+      </p:sp>
+      <p:sp>
+        <p:nvSpPr>
+          <p:cNvPr id="23" name="TextBox 22"/>
+          <p:cNvSpPr txBox="1"/>
+          <p:nvPr/>
+        </p:nvSpPr>
+        <p:spPr>
+          <a:xfrm>
+            <a:off x="713232" y="3621024"/>
+            <a:ext cx="1803196" cy="676656"/>
+          </a:xfrm>
+          <a:prstGeom prst="rect">
+            <a:avLst/>
+          </a:prstGeom>
+          <a:noFill/>
+        </p:spPr>
+        <p:txBody>
+          <a:bodyPr wrap="square" lIns="0" rIns="0" tIns="0" bIns="0" anchor="t">
+            <a:spAutoFit/>
+          </a:bodyPr>
+          <a:lstStyle/>
+          <a:p>
+            <a:pPr algn="l"/>
+            <a:r>
+              <a:rPr sz="1050" b="0">
+                <a:solidFill>
+                  <a:srgbClr val="16191F"/>
+                </a:solidFill>
+                <a:latin typeface="Calibri"/>
+              </a:rPr>
+              <a:t>Contracts and shared types. Writes the spec before anyone branches.</a:t>
+            </a:r>
+          </a:p>
+        </p:txBody>
+      </p:sp>
+      <p:sp>
+        <p:nvSpPr>
+          <p:cNvPr id="24" name="Rectangle 23"/>
+          <p:cNvSpPr/>
+          <p:nvPr/>
+        </p:nvSpPr>
+        <p:spPr>
+          <a:xfrm>
+            <a:off x="713232" y="4334256"/>
+            <a:ext cx="1803196" cy="9144"/>
+          </a:xfrm>
+          <a:prstGeom prst="rect">
+            <a:avLst/>
+          </a:prstGeom>
+          <a:solidFill>
+            <a:srgbClr val="E4E7EA"/>
+          </a:solidFill>
+          <a:ln>
+            <a:noFill/>
+          </a:ln>
+          <a:effectLst/>
+        </p:spPr>
+        <p:style>
+          <a:lnRef idx="1">
+            <a:schemeClr val="accent1"/>
+          </a:lnRef>
+          <a:fillRef idx="3">
+            <a:schemeClr val="accent1"/>
+          </a:fillRef>
+          <a:effectRef idx="2">
+            <a:schemeClr val="accent1"/>
+          </a:effectRef>
+          <a:fontRef idx="minor">
+            <a:schemeClr val="lt1"/>
+          </a:fontRef>
+        </p:style>
+        <p:txBody>
+          <a:bodyPr rtlCol="0" anchor="ctr"/>
+          <a:lstStyle/>
+          <a:p>
+            <a:pPr algn="ctr"/>
+          </a:p>
+        </p:txBody>
+      </p:sp>
+      <p:sp>
+        <p:nvSpPr>
+          <p:cNvPr id="25" name="TextBox 24"/>
+          <p:cNvSpPr txBox="1"/>
+          <p:nvPr/>
+        </p:nvSpPr>
+        <p:spPr>
+          <a:xfrm>
+            <a:off x="713232" y="4407408"/>
+            <a:ext cx="1803196" cy="603504"/>
+          </a:xfrm>
+          <a:prstGeom prst="rect">
+            <a:avLst/>
+          </a:prstGeom>
+          <a:noFill/>
+        </p:spPr>
+        <p:txBody>
+          <a:bodyPr wrap="square" lIns="0" rIns="0" tIns="0" bIns="0" anchor="t">
+            <a:spAutoFit/>
+          </a:bodyPr>
+          <a:lstStyle/>
+          <a:p>
+            <a:pPr algn="l"/>
+            <a:r>
+              <a:rPr sz="1000" b="0">
+                <a:solidFill>
+                  <a:srgbClr val="545B64"/>
+                </a:solidFill>
+                <a:latin typeface="Calibri"/>
+              </a:rPr>
+              <a:t>#2 shared types · #41 category lookups · #44 preferenceCategoryCount</a:t>
+            </a:r>
+          </a:p>
+        </p:txBody>
+      </p:sp>
+      <p:sp>
+        <p:nvSpPr>
+          <p:cNvPr id="26" name="Rounded Rectangle 25"/>
+          <p:cNvSpPr/>
+          <p:nvPr/>
+        </p:nvSpPr>
+        <p:spPr>
+          <a:xfrm>
+            <a:off x="2809036" y="2871216"/>
+            <a:ext cx="2095804" cy="2212848"/>
+          </a:xfrm>
+          <a:prstGeom prst="roundRect">
+            <a:avLst>
+              <a:gd name="adj" fmla="val 2617"/>
+            </a:avLst>
+          </a:prstGeom>
+          <a:solidFill>
+            <a:srgbClr val="F7F8FA"/>
+          </a:solidFill>
+          <a:ln w="12700">
+            <a:solidFill>
+              <a:srgbClr val="E4E7EA"/>
+            </a:solidFill>
+          </a:ln>
+          <a:effectLst/>
+        </p:spPr>
+        <p:style>
+          <a:lnRef idx="1">
+            <a:schemeClr val="accent1"/>
+          </a:lnRef>
+          <a:fillRef idx="3">
+            <a:schemeClr val="accent1"/>
+          </a:fillRef>
+          <a:effectRef idx="2">
+            <a:schemeClr val="accent1"/>
+          </a:effectRef>
+          <a:fontRef idx="minor">
+            <a:schemeClr val="lt1"/>
+          </a:fontRef>
+        </p:style>
+        <p:txBody>
+          <a:bodyPr rtlCol="0" anchor="ctr"/>
+          <a:lstStyle/>
+          <a:p>
+            <a:pPr algn="ctr"/>
+          </a:p>
+        </p:txBody>
+      </p:sp>
+      <p:sp>
+        <p:nvSpPr>
+          <p:cNvPr id="27" name="Rectangle 26"/>
+          <p:cNvSpPr/>
+          <p:nvPr/>
+        </p:nvSpPr>
+        <p:spPr>
+          <a:xfrm>
+            <a:off x="2809036" y="2871216"/>
+            <a:ext cx="2095804" cy="45720"/>
+          </a:xfrm>
+          <a:prstGeom prst="rect">
+            <a:avLst/>
+          </a:prstGeom>
+          <a:solidFill>
+            <a:srgbClr val="FF9900"/>
+          </a:solidFill>
+          <a:ln>
+            <a:noFill/>
+          </a:ln>
+          <a:effectLst/>
+        </p:spPr>
+        <p:style>
+          <a:lnRef idx="1">
+            <a:schemeClr val="accent1"/>
+          </a:lnRef>
+          <a:fillRef idx="3">
+            <a:schemeClr val="accent1"/>
+          </a:fillRef>
+          <a:effectRef idx="2">
+            <a:schemeClr val="accent1"/>
+          </a:effectRef>
+          <a:fontRef idx="minor">
+            <a:schemeClr val="lt1"/>
+          </a:fontRef>
+        </p:style>
+        <p:txBody>
+          <a:bodyPr rtlCol="0" anchor="ctr"/>
+          <a:lstStyle/>
+          <a:p>
+            <a:pPr algn="ctr"/>
+          </a:p>
+        </p:txBody>
+      </p:sp>
+      <p:sp>
+        <p:nvSpPr>
+          <p:cNvPr id="28" name="TextBox 27"/>
+          <p:cNvSpPr txBox="1"/>
+          <p:nvPr/>
+        </p:nvSpPr>
+        <p:spPr>
+          <a:xfrm>
+            <a:off x="2955340" y="2999232"/>
+            <a:ext cx="1803196" cy="256032"/>
+          </a:xfrm>
+          <a:prstGeom prst="rect">
+            <a:avLst/>
+          </a:prstGeom>
+          <a:noFill/>
+        </p:spPr>
+        <p:txBody>
+          <a:bodyPr wrap="square" lIns="0" rIns="0" tIns="0" bIns="0" anchor="ctr">
+            <a:spAutoFit/>
+          </a:bodyPr>
+          <a:lstStyle/>
+          <a:p>
+            <a:pPr algn="l"/>
+            <a:r>
+              <a:rPr sz="1250" b="1">
+                <a:solidFill>
+                  <a:srgbClr val="232F3E"/>
+                </a:solidFill>
+                <a:latin typeface="Calibri"/>
+              </a:rPr>
+              <a:t>Frontend Dev</a:t>
+            </a:r>
+          </a:p>
+        </p:txBody>
+      </p:sp>
+      <p:sp>
+        <p:nvSpPr>
+          <p:cNvPr id="29" name="Rounded Rectangle 28"/>
+          <p:cNvSpPr/>
+          <p:nvPr/>
+        </p:nvSpPr>
+        <p:spPr>
+          <a:xfrm>
+            <a:off x="2955340" y="3291840"/>
+            <a:ext cx="1803196" cy="237744"/>
+          </a:xfrm>
+          <a:prstGeom prst="roundRect">
+            <a:avLst>
+              <a:gd name="adj" fmla="val 30769"/>
+            </a:avLst>
+          </a:prstGeom>
+          <a:solidFill>
+            <a:srgbClr val="FFEFD6"/>
+          </a:solidFill>
+          <a:ln>
+            <a:noFill/>
+          </a:ln>
+          <a:effectLst/>
+        </p:spPr>
+        <p:style>
+          <a:lnRef idx="1">
+            <a:schemeClr val="accent1"/>
+          </a:lnRef>
+          <a:fillRef idx="3">
+            <a:schemeClr val="accent1"/>
+          </a:fillRef>
+          <a:effectRef idx="2">
+            <a:schemeClr val="accent1"/>
+          </a:effectRef>
+          <a:fontRef idx="minor">
+            <a:schemeClr val="lt1"/>
+          </a:fontRef>
+        </p:style>
+        <p:txBody>
+          <a:bodyPr rtlCol="0" anchor="ctr"/>
+          <a:lstStyle/>
+          <a:p>
+            <a:pPr algn="ctr"/>
+          </a:p>
+        </p:txBody>
+      </p:sp>
+      <p:sp>
+        <p:nvSpPr>
+          <p:cNvPr id="30" name="TextBox 29"/>
+          <p:cNvSpPr txBox="1"/>
+          <p:nvPr/>
+        </p:nvSpPr>
+        <p:spPr>
+          <a:xfrm>
+            <a:off x="2955340" y="3291840"/>
+            <a:ext cx="1803196" cy="237744"/>
+          </a:xfrm>
+          <a:prstGeom prst="rect">
+            <a:avLst/>
+          </a:prstGeom>
+          <a:noFill/>
+        </p:spPr>
+        <p:txBody>
+          <a:bodyPr wrap="square" lIns="0" rIns="0" tIns="0" bIns="0" anchor="ctr">
+            <a:spAutoFit/>
+          </a:bodyPr>
+          <a:lstStyle/>
+          <a:p>
+            <a:pPr algn="ctr"/>
+            <a:r>
+              <a:rPr sz="1000" b="1">
+                <a:solidFill>
+                  <a:srgbClr val="545B64"/>
+                </a:solidFill>
+                <a:latin typeface="Calibri"/>
+              </a:rPr>
+              <a:t>src/client/</a:t>
+            </a:r>
+          </a:p>
+        </p:txBody>
+      </p:sp>
+      <p:sp>
+        <p:nvSpPr>
+          <p:cNvPr id="31" name="TextBox 30"/>
+          <p:cNvSpPr txBox="1"/>
+          <p:nvPr/>
+        </p:nvSpPr>
+        <p:spPr>
+          <a:xfrm>
+            <a:off x="2955340" y="3621024"/>
+            <a:ext cx="1803196" cy="676656"/>
+          </a:xfrm>
+          <a:prstGeom prst="rect">
+            <a:avLst/>
+          </a:prstGeom>
+          <a:noFill/>
+        </p:spPr>
+        <p:txBody>
+          <a:bodyPr wrap="square" lIns="0" rIns="0" tIns="0" bIns="0" anchor="t">
+            <a:spAutoFit/>
+          </a:bodyPr>
+          <a:lstStyle/>
+          <a:p>
+            <a:pPr algn="l"/>
+            <a:r>
+              <a:rPr sz="1050" b="0">
+                <a:solidFill>
+                  <a:srgbClr val="16191F"/>
+                </a:solidFill>
+                <a:latin typeface="Calibri"/>
+              </a:rPr>
+              <a:t>Components, hooks, state. Cannot touch shared types.</a:t>
+            </a:r>
+          </a:p>
+        </p:txBody>
+      </p:sp>
+      <p:sp>
+        <p:nvSpPr>
+          <p:cNvPr id="32" name="Rectangle 31"/>
+          <p:cNvSpPr/>
+          <p:nvPr/>
+        </p:nvSpPr>
+        <p:spPr>
+          <a:xfrm>
+            <a:off x="2955340" y="4334256"/>
+            <a:ext cx="1803196" cy="9144"/>
+          </a:xfrm>
+          <a:prstGeom prst="rect">
+            <a:avLst/>
+          </a:prstGeom>
+          <a:solidFill>
+            <a:srgbClr val="E4E7EA"/>
+          </a:solidFill>
+          <a:ln>
+            <a:noFill/>
+          </a:ln>
+          <a:effectLst/>
+        </p:spPr>
+        <p:style>
+          <a:lnRef idx="1">
+            <a:schemeClr val="accent1"/>
+          </a:lnRef>
+          <a:fillRef idx="3">
+            <a:schemeClr val="accent1"/>
+          </a:fillRef>
+          <a:effectRef idx="2">
+            <a:schemeClr val="accent1"/>
+          </a:effectRef>
+          <a:fontRef idx="minor">
+            <a:schemeClr val="lt1"/>
+          </a:fontRef>
+        </p:style>
+        <p:txBody>
+          <a:bodyPr rtlCol="0" anchor="ctr"/>
+          <a:lstStyle/>
+          <a:p>
+            <a:pPr algn="ctr"/>
+          </a:p>
+        </p:txBody>
+      </p:sp>
+      <p:sp>
+        <p:nvSpPr>
+          <p:cNvPr id="33" name="TextBox 32"/>
+          <p:cNvSpPr txBox="1"/>
+          <p:nvPr/>
+        </p:nvSpPr>
+        <p:spPr>
+          <a:xfrm>
+            <a:off x="2955340" y="4407408"/>
+            <a:ext cx="1803196" cy="603504"/>
+          </a:xfrm>
+          <a:prstGeom prst="rect">
+            <a:avLst/>
+          </a:prstGeom>
+          <a:noFill/>
+        </p:spPr>
+        <p:txBody>
+          <a:bodyPr wrap="square" lIns="0" rIns="0" tIns="0" bIns="0" anchor="t">
+            <a:spAutoFit/>
+          </a:bodyPr>
+          <a:lstStyle/>
+          <a:p>
+            <a:pPr algn="l"/>
+            <a:r>
+              <a:rPr sz="1000" b="0">
+                <a:solidFill>
+                  <a:srgbClr val="545B64"/>
+                </a:solidFill>
+                <a:latin typeface="Calibri"/>
+              </a:rPr>
+              <a:t>#3 chat UI · #58 Partner Profile Panel, 27 files · #65 live architecture view</a:t>
+            </a:r>
+          </a:p>
+        </p:txBody>
+      </p:sp>
+      <p:sp>
+        <p:nvSpPr>
+          <p:cNvPr id="34" name="Rounded Rectangle 33"/>
+          <p:cNvSpPr/>
+          <p:nvPr/>
+        </p:nvSpPr>
+        <p:spPr>
+          <a:xfrm>
+            <a:off x="5051145" y="2871216"/>
+            <a:ext cx="2095804" cy="2212848"/>
+          </a:xfrm>
+          <a:prstGeom prst="roundRect">
+            <a:avLst>
+              <a:gd name="adj" fmla="val 2617"/>
+            </a:avLst>
+          </a:prstGeom>
+          <a:solidFill>
+            <a:srgbClr val="F7F8FA"/>
+          </a:solidFill>
+          <a:ln w="12700">
+            <a:solidFill>
+              <a:srgbClr val="E4E7EA"/>
+            </a:solidFill>
+          </a:ln>
+          <a:effectLst/>
+        </p:spPr>
+        <p:style>
+          <a:lnRef idx="1">
+            <a:schemeClr val="accent1"/>
+          </a:lnRef>
+          <a:fillRef idx="3">
+            <a:schemeClr val="accent1"/>
+          </a:fillRef>
+          <a:effectRef idx="2">
+            <a:schemeClr val="accent1"/>
+          </a:effectRef>
+          <a:fontRef idx="minor">
+            <a:schemeClr val="lt1"/>
+          </a:fontRef>
+        </p:style>
+        <p:txBody>
+          <a:bodyPr rtlCol="0" anchor="ctr"/>
+          <a:lstStyle/>
+          <a:p>
+            <a:pPr algn="ctr"/>
+          </a:p>
+        </p:txBody>
+      </p:sp>
+      <p:sp>
+        <p:nvSpPr>
+          <p:cNvPr id="35" name="Rectangle 34"/>
+          <p:cNvSpPr/>
+          <p:nvPr/>
+        </p:nvSpPr>
+        <p:spPr>
+          <a:xfrm>
+            <a:off x="5051145" y="2871216"/>
+            <a:ext cx="2095804" cy="45720"/>
+          </a:xfrm>
+          <a:prstGeom prst="rect">
+            <a:avLst/>
+          </a:prstGeom>
+          <a:solidFill>
+            <a:srgbClr val="FF9900"/>
+          </a:solidFill>
+          <a:ln>
+            <a:noFill/>
+          </a:ln>
+          <a:effectLst/>
+        </p:spPr>
+        <p:style>
+          <a:lnRef idx="1">
+            <a:schemeClr val="accent1"/>
+          </a:lnRef>
+          <a:fillRef idx="3">
+            <a:schemeClr val="accent1"/>
+          </a:fillRef>
+          <a:effectRef idx="2">
+            <a:schemeClr val="accent1"/>
+          </a:effectRef>
+          <a:fontRef idx="minor">
+            <a:schemeClr val="lt1"/>
+          </a:fontRef>
+        </p:style>
+        <p:txBody>
+          <a:bodyPr rtlCol="0" anchor="ctr"/>
+          <a:lstStyle/>
+          <a:p>
+            <a:pPr algn="ctr"/>
+          </a:p>
+        </p:txBody>
+      </p:sp>
+      <p:sp>
+        <p:nvSpPr>
+          <p:cNvPr id="36" name="TextBox 35"/>
+          <p:cNvSpPr txBox="1"/>
+          <p:nvPr/>
+        </p:nvSpPr>
+        <p:spPr>
+          <a:xfrm>
+            <a:off x="5197449" y="2999232"/>
+            <a:ext cx="1803196" cy="256032"/>
+          </a:xfrm>
+          <a:prstGeom prst="rect">
+            <a:avLst/>
+          </a:prstGeom>
+          <a:noFill/>
+        </p:spPr>
+        <p:txBody>
+          <a:bodyPr wrap="square" lIns="0" rIns="0" tIns="0" bIns="0" anchor="ctr">
+            <a:spAutoFit/>
+          </a:bodyPr>
+          <a:lstStyle/>
+          <a:p>
+            <a:pPr algn="l"/>
+            <a:r>
+              <a:rPr sz="1250" b="1">
+                <a:solidFill>
+                  <a:srgbClr val="232F3E"/>
+                </a:solidFill>
+                <a:latin typeface="Calibri"/>
+              </a:rPr>
+              <a:t>Backend Dev</a:t>
+            </a:r>
+          </a:p>
+        </p:txBody>
+      </p:sp>
+      <p:sp>
+        <p:nvSpPr>
+          <p:cNvPr id="37" name="Rounded Rectangle 36"/>
+          <p:cNvSpPr/>
+          <p:nvPr/>
+        </p:nvSpPr>
+        <p:spPr>
+          <a:xfrm>
+            <a:off x="5197449" y="3291840"/>
+            <a:ext cx="1803196" cy="237744"/>
+          </a:xfrm>
+          <a:prstGeom prst="roundRect">
+            <a:avLst>
+              <a:gd name="adj" fmla="val 30769"/>
+            </a:avLst>
+          </a:prstGeom>
+          <a:solidFill>
+            <a:srgbClr val="FFEFD6"/>
+          </a:solidFill>
+          <a:ln>
+            <a:noFill/>
+          </a:ln>
+          <a:effectLst/>
+        </p:spPr>
+        <p:style>
+          <a:lnRef idx="1">
+            <a:schemeClr val="accent1"/>
+          </a:lnRef>
+          <a:fillRef idx="3">
+            <a:schemeClr val="accent1"/>
+          </a:fillRef>
+          <a:effectRef idx="2">
+            <a:schemeClr val="accent1"/>
+          </a:effectRef>
+          <a:fontRef idx="minor">
+            <a:schemeClr val="lt1"/>
+          </a:fontRef>
+        </p:style>
+        <p:txBody>
+          <a:bodyPr rtlCol="0" anchor="ctr"/>
+          <a:lstStyle/>
+          <a:p>
+            <a:pPr algn="ctr"/>
+          </a:p>
+        </p:txBody>
+      </p:sp>
+      <p:sp>
+        <p:nvSpPr>
+          <p:cNvPr id="38" name="TextBox 37"/>
+          <p:cNvSpPr txBox="1"/>
+          <p:nvPr/>
+        </p:nvSpPr>
+        <p:spPr>
+          <a:xfrm>
+            <a:off x="5197449" y="3291840"/>
+            <a:ext cx="1803196" cy="237744"/>
+          </a:xfrm>
+          <a:prstGeom prst="rect">
+            <a:avLst/>
+          </a:prstGeom>
+          <a:noFill/>
+        </p:spPr>
+        <p:txBody>
+          <a:bodyPr wrap="square" lIns="0" rIns="0" tIns="0" bIns="0" anchor="ctr">
+            <a:spAutoFit/>
+          </a:bodyPr>
+          <a:lstStyle/>
+          <a:p>
+            <a:pPr algn="ctr"/>
+            <a:r>
+              <a:rPr sz="1000" b="1">
+                <a:solidFill>
+                  <a:srgbClr val="545B64"/>
+                </a:solidFill>
+                <a:latin typeface="Calibri"/>
+              </a:rPr>
+              <a:t>src/server/</a:t>
+            </a:r>
+          </a:p>
+        </p:txBody>
+      </p:sp>
+      <p:sp>
+        <p:nvSpPr>
+          <p:cNvPr id="39" name="TextBox 38"/>
+          <p:cNvSpPr txBox="1"/>
+          <p:nvPr/>
+        </p:nvSpPr>
+        <p:spPr>
+          <a:xfrm>
+            <a:off x="5197449" y="3621024"/>
+            <a:ext cx="1803196" cy="676656"/>
+          </a:xfrm>
+          <a:prstGeom prst="rect">
+            <a:avLst/>
+          </a:prstGeom>
+          <a:noFill/>
+        </p:spPr>
+        <p:txBody>
+          <a:bodyPr wrap="square" lIns="0" rIns="0" tIns="0" bIns="0" anchor="t">
+            <a:spAutoFit/>
+          </a:bodyPr>
+          <a:lstStyle/>
+          <a:p>
+            <a:pPr algn="l"/>
+            <a:r>
+              <a:rPr sz="1050" b="0">
+                <a:solidFill>
+                  <a:srgbClr val="16191F"/>
+                </a:solidFill>
+                <a:latin typeface="Calibri"/>
+              </a:rPr>
+              <a:t>API, Bedrock extraction, persistence. Cannot touch the client.</a:t>
+            </a:r>
+          </a:p>
+        </p:txBody>
+      </p:sp>
+      <p:sp>
+        <p:nvSpPr>
+          <p:cNvPr id="40" name="Rectangle 39"/>
+          <p:cNvSpPr/>
+          <p:nvPr/>
+        </p:nvSpPr>
+        <p:spPr>
+          <a:xfrm>
+            <a:off x="5197449" y="4334256"/>
+            <a:ext cx="1803196" cy="9144"/>
+          </a:xfrm>
+          <a:prstGeom prst="rect">
+            <a:avLst/>
+          </a:prstGeom>
+          <a:solidFill>
+            <a:srgbClr val="E4E7EA"/>
+          </a:solidFill>
+          <a:ln>
+            <a:noFill/>
+          </a:ln>
+          <a:effectLst/>
+        </p:spPr>
+        <p:style>
+          <a:lnRef idx="1">
+            <a:schemeClr val="accent1"/>
+          </a:lnRef>
+          <a:fillRef idx="3">
+            <a:schemeClr val="accent1"/>
+          </a:fillRef>
+          <a:effectRef idx="2">
+            <a:schemeClr val="accent1"/>
+          </a:effectRef>
+          <a:fontRef idx="minor">
+            <a:schemeClr val="lt1"/>
+          </a:fontRef>
+        </p:style>
+        <p:txBody>
+          <a:bodyPr rtlCol="0" anchor="ctr"/>
+          <a:lstStyle/>
+          <a:p>
+            <a:pPr algn="ctr"/>
+          </a:p>
+        </p:txBody>
+      </p:sp>
+      <p:sp>
+        <p:nvSpPr>
+          <p:cNvPr id="41" name="TextBox 40"/>
+          <p:cNvSpPr txBox="1"/>
+          <p:nvPr/>
+        </p:nvSpPr>
+        <p:spPr>
+          <a:xfrm>
+            <a:off x="5197449" y="4407408"/>
+            <a:ext cx="1803196" cy="603504"/>
+          </a:xfrm>
+          <a:prstGeom prst="rect">
+            <a:avLst/>
+          </a:prstGeom>
+          <a:noFill/>
+        </p:spPr>
+        <p:txBody>
+          <a:bodyPr wrap="square" lIns="0" rIns="0" tIns="0" bIns="0" anchor="t">
+            <a:spAutoFit/>
+          </a:bodyPr>
+          <a:lstStyle/>
+          <a:p>
+            <a:pPr algn="l"/>
+            <a:r>
+              <a:rPr sz="1000" b="0">
+                <a:solidFill>
+                  <a:srgbClr val="545B64"/>
+                </a:solidFill>
+                <a:latin typeface="Calibri"/>
+              </a:rPr>
+              <a:t>#4 API and orchestrator · #15 real Bedrock SDK · #64 demo seeding and reset</a:t>
+            </a:r>
+          </a:p>
+        </p:txBody>
+      </p:sp>
+      <p:sp>
+        <p:nvSpPr>
+          <p:cNvPr id="42" name="Rounded Rectangle 41"/>
+          <p:cNvSpPr/>
+          <p:nvPr/>
+        </p:nvSpPr>
+        <p:spPr>
+          <a:xfrm>
+            <a:off x="7293254" y="2871216"/>
+            <a:ext cx="2095804" cy="2212848"/>
+          </a:xfrm>
+          <a:prstGeom prst="roundRect">
+            <a:avLst>
+              <a:gd name="adj" fmla="val 2617"/>
+            </a:avLst>
+          </a:prstGeom>
+          <a:solidFill>
+            <a:srgbClr val="F7F8FA"/>
+          </a:solidFill>
+          <a:ln w="12700">
+            <a:solidFill>
+              <a:srgbClr val="E4E7EA"/>
+            </a:solidFill>
+          </a:ln>
+          <a:effectLst/>
+        </p:spPr>
+        <p:style>
+          <a:lnRef idx="1">
+            <a:schemeClr val="accent1"/>
+          </a:lnRef>
+          <a:fillRef idx="3">
+            <a:schemeClr val="accent1"/>
+          </a:fillRef>
+          <a:effectRef idx="2">
+            <a:schemeClr val="accent1"/>
+          </a:effectRef>
+          <a:fontRef idx="minor">
+            <a:schemeClr val="lt1"/>
+          </a:fontRef>
+        </p:style>
+        <p:txBody>
+          <a:bodyPr rtlCol="0" anchor="ctr"/>
+          <a:lstStyle/>
+          <a:p>
+            <a:pPr algn="ctr"/>
+          </a:p>
+        </p:txBody>
+      </p:sp>
+      <p:sp>
+        <p:nvSpPr>
+          <p:cNvPr id="43" name="Rectangle 42"/>
+          <p:cNvSpPr/>
+          <p:nvPr/>
+        </p:nvSpPr>
+        <p:spPr>
+          <a:xfrm>
+            <a:off x="7293254" y="2871216"/>
+            <a:ext cx="2095804" cy="45720"/>
+          </a:xfrm>
+          <a:prstGeom prst="rect">
+            <a:avLst/>
+          </a:prstGeom>
+          <a:solidFill>
+            <a:srgbClr val="FF9900"/>
+          </a:solidFill>
+          <a:ln>
+            <a:noFill/>
+          </a:ln>
+          <a:effectLst/>
+        </p:spPr>
+        <p:style>
+          <a:lnRef idx="1">
+            <a:schemeClr val="accent1"/>
+          </a:lnRef>
+          <a:fillRef idx="3">
+            <a:schemeClr val="accent1"/>
+          </a:fillRef>
+          <a:effectRef idx="2">
+            <a:schemeClr val="accent1"/>
+          </a:effectRef>
+          <a:fontRef idx="minor">
+            <a:schemeClr val="lt1"/>
+          </a:fontRef>
+        </p:style>
+        <p:txBody>
+          <a:bodyPr rtlCol="0" anchor="ctr"/>
+          <a:lstStyle/>
+          <a:p>
+            <a:pPr algn="ctr"/>
+          </a:p>
+        </p:txBody>
+      </p:sp>
+      <p:sp>
+        <p:nvSpPr>
+          <p:cNvPr id="44" name="TextBox 43"/>
+          <p:cNvSpPr txBox="1"/>
+          <p:nvPr/>
+        </p:nvSpPr>
+        <p:spPr>
+          <a:xfrm>
+            <a:off x="7439558" y="2999232"/>
+            <a:ext cx="1803196" cy="256032"/>
+          </a:xfrm>
+          <a:prstGeom prst="rect">
+            <a:avLst/>
+          </a:prstGeom>
+          <a:noFill/>
+        </p:spPr>
+        <p:txBody>
+          <a:bodyPr wrap="square" lIns="0" rIns="0" tIns="0" bIns="0" anchor="ctr">
+            <a:spAutoFit/>
+          </a:bodyPr>
+          <a:lstStyle/>
+          <a:p>
+            <a:pPr algn="l"/>
+            <a:r>
+              <a:rPr sz="1250" b="1">
+                <a:solidFill>
+                  <a:srgbClr val="232F3E"/>
+                </a:solidFill>
+                <a:latin typeface="Calibri"/>
+              </a:rPr>
+              <a:t>UI Designer</a:t>
+            </a:r>
+          </a:p>
+        </p:txBody>
+      </p:sp>
+      <p:sp>
+        <p:nvSpPr>
+          <p:cNvPr id="45" name="Rounded Rectangle 44"/>
+          <p:cNvSpPr/>
+          <p:nvPr/>
+        </p:nvSpPr>
+        <p:spPr>
+          <a:xfrm>
+            <a:off x="7439558" y="3291840"/>
+            <a:ext cx="1803196" cy="237744"/>
+          </a:xfrm>
+          <a:prstGeom prst="roundRect">
+            <a:avLst>
+              <a:gd name="adj" fmla="val 30769"/>
+            </a:avLst>
+          </a:prstGeom>
+          <a:solidFill>
+            <a:srgbClr val="FFEFD6"/>
+          </a:solidFill>
+          <a:ln>
+            <a:noFill/>
+          </a:ln>
+          <a:effectLst/>
+        </p:spPr>
+        <p:style>
+          <a:lnRef idx="1">
+            <a:schemeClr val="accent1"/>
+          </a:lnRef>
+          <a:fillRef idx="3">
+            <a:schemeClr val="accent1"/>
+          </a:fillRef>
+          <a:effectRef idx="2">
+            <a:schemeClr val="accent1"/>
+          </a:effectRef>
+          <a:fontRef idx="minor">
+            <a:schemeClr val="lt1"/>
+          </a:fontRef>
+        </p:style>
+        <p:txBody>
+          <a:bodyPr rtlCol="0" anchor="ctr"/>
+          <a:lstStyle/>
+          <a:p>
+            <a:pPr algn="ctr"/>
+          </a:p>
+        </p:txBody>
+      </p:sp>
+      <p:sp>
+        <p:nvSpPr>
+          <p:cNvPr id="46" name="TextBox 45"/>
+          <p:cNvSpPr txBox="1"/>
+          <p:nvPr/>
+        </p:nvSpPr>
+        <p:spPr>
+          <a:xfrm>
+            <a:off x="7439558" y="3291840"/>
+            <a:ext cx="1803196" cy="237744"/>
+          </a:xfrm>
+          <a:prstGeom prst="rect">
+            <a:avLst/>
+          </a:prstGeom>
+          <a:noFill/>
+        </p:spPr>
+        <p:txBody>
+          <a:bodyPr wrap="square" lIns="0" rIns="0" tIns="0" bIns="0" anchor="ctr">
+            <a:spAutoFit/>
+          </a:bodyPr>
+          <a:lstStyle/>
+          <a:p>
+            <a:pPr algn="ctr"/>
+            <a:r>
+              <a:rPr sz="1000" b="1">
+                <a:solidFill>
+                  <a:srgbClr val="545B64"/>
+                </a:solidFill>
+                <a:latin typeface="Calibri"/>
+              </a:rPr>
+              <a:t>design-system/</a:t>
+            </a:r>
+          </a:p>
+        </p:txBody>
+      </p:sp>
+      <p:sp>
+        <p:nvSpPr>
+          <p:cNvPr id="47" name="TextBox 46"/>
+          <p:cNvSpPr txBox="1"/>
+          <p:nvPr/>
+        </p:nvSpPr>
+        <p:spPr>
+          <a:xfrm>
+            <a:off x="7439558" y="3621024"/>
+            <a:ext cx="1803196" cy="676656"/>
+          </a:xfrm>
+          <a:prstGeom prst="rect">
+            <a:avLst/>
+          </a:prstGeom>
+          <a:noFill/>
+        </p:spPr>
+        <p:txBody>
+          <a:bodyPr wrap="square" lIns="0" rIns="0" tIns="0" bIns="0" anchor="t">
+            <a:spAutoFit/>
+          </a:bodyPr>
+          <a:lstStyle/>
+          <a:p>
+            <a:pPr algn="l"/>
+            <a:r>
+              <a:rPr sz="1050" b="0">
+                <a:solidFill>
+                  <a:srgbClr val="16191F"/>
+                </a:solidFill>
+                <a:latin typeface="Calibri"/>
+              </a:rPr>
+              <a:t>Tokens, accessibility, eight real mockups to choose from.</a:t>
+            </a:r>
+          </a:p>
+        </p:txBody>
+      </p:sp>
+      <p:sp>
+        <p:nvSpPr>
+          <p:cNvPr id="48" name="Rectangle 47"/>
+          <p:cNvSpPr/>
+          <p:nvPr/>
+        </p:nvSpPr>
+        <p:spPr>
+          <a:xfrm>
+            <a:off x="7439558" y="4334256"/>
+            <a:ext cx="1803196" cy="9144"/>
+          </a:xfrm>
+          <a:prstGeom prst="rect">
+            <a:avLst/>
+          </a:prstGeom>
+          <a:solidFill>
+            <a:srgbClr val="E4E7EA"/>
+          </a:solidFill>
+          <a:ln>
+            <a:noFill/>
+          </a:ln>
+          <a:effectLst/>
+        </p:spPr>
+        <p:style>
+          <a:lnRef idx="1">
+            <a:schemeClr val="accent1"/>
+          </a:lnRef>
+          <a:fillRef idx="3">
+            <a:schemeClr val="accent1"/>
+          </a:fillRef>
+          <a:effectRef idx="2">
+            <a:schemeClr val="accent1"/>
+          </a:effectRef>
+          <a:fontRef idx="minor">
+            <a:schemeClr val="lt1"/>
+          </a:fontRef>
+        </p:style>
+        <p:txBody>
+          <a:bodyPr rtlCol="0" anchor="ctr"/>
+          <a:lstStyle/>
+          <a:p>
+            <a:pPr algn="ctr"/>
+          </a:p>
+        </p:txBody>
+      </p:sp>
+      <p:sp>
+        <p:nvSpPr>
+          <p:cNvPr id="49" name="TextBox 48"/>
+          <p:cNvSpPr txBox="1"/>
+          <p:nvPr/>
+        </p:nvSpPr>
+        <p:spPr>
+          <a:xfrm>
+            <a:off x="7439558" y="4407408"/>
+            <a:ext cx="1803196" cy="603504"/>
+          </a:xfrm>
+          <a:prstGeom prst="rect">
+            <a:avLst/>
+          </a:prstGeom>
+          <a:noFill/>
+        </p:spPr>
+        <p:txBody>
+          <a:bodyPr wrap="square" lIns="0" rIns="0" tIns="0" bIns="0" anchor="t">
+            <a:spAutoFit/>
+          </a:bodyPr>
+          <a:lstStyle/>
+          <a:p>
+            <a:pPr algn="l"/>
+            <a:r>
+              <a:rPr sz="1000" b="0">
+                <a:solidFill>
+                  <a:srgbClr val="545B64"/>
+                </a:solidFill>
+                <a:latin typeface="Calibri"/>
+              </a:rPr>
+              <a:t>#16 refined palette · #22 component pass · 8 mockups, one shipped</a:t>
+            </a:r>
+          </a:p>
+        </p:txBody>
+      </p:sp>
+      <p:sp>
+        <p:nvSpPr>
+          <p:cNvPr id="50" name="Rounded Rectangle 49"/>
+          <p:cNvSpPr/>
+          <p:nvPr/>
+        </p:nvSpPr>
+        <p:spPr>
+          <a:xfrm>
+            <a:off x="9535363" y="2871216"/>
+            <a:ext cx="2095804" cy="2212848"/>
+          </a:xfrm>
+          <a:prstGeom prst="roundRect">
+            <a:avLst>
+              <a:gd name="adj" fmla="val 2617"/>
+            </a:avLst>
+          </a:prstGeom>
+          <a:solidFill>
+            <a:srgbClr val="F7F8FA"/>
+          </a:solidFill>
+          <a:ln w="12700">
+            <a:solidFill>
+              <a:srgbClr val="E4E7EA"/>
+            </a:solidFill>
+          </a:ln>
+          <a:effectLst/>
+        </p:spPr>
+        <p:style>
+          <a:lnRef idx="1">
+            <a:schemeClr val="accent1"/>
+          </a:lnRef>
+          <a:fillRef idx="3">
+            <a:schemeClr val="accent1"/>
+          </a:fillRef>
+          <a:effectRef idx="2">
+            <a:schemeClr val="accent1"/>
+          </a:effectRef>
+          <a:fontRef idx="minor">
+            <a:schemeClr val="lt1"/>
+          </a:fontRef>
+        </p:style>
+        <p:txBody>
+          <a:bodyPr rtlCol="0" anchor="ctr"/>
+          <a:lstStyle/>
+          <a:p>
+            <a:pPr algn="ctr"/>
+          </a:p>
+        </p:txBody>
+      </p:sp>
+      <p:sp>
+        <p:nvSpPr>
+          <p:cNvPr id="51" name="Rectangle 50"/>
+          <p:cNvSpPr/>
+          <p:nvPr/>
+        </p:nvSpPr>
+        <p:spPr>
+          <a:xfrm>
+            <a:off x="9535363" y="2871216"/>
+            <a:ext cx="2095804" cy="45720"/>
+          </a:xfrm>
+          <a:prstGeom prst="rect">
+            <a:avLst/>
+          </a:prstGeom>
+          <a:solidFill>
+            <a:srgbClr val="FF9900"/>
+          </a:solidFill>
+          <a:ln>
+            <a:noFill/>
+          </a:ln>
+          <a:effectLst/>
+        </p:spPr>
+        <p:style>
+          <a:lnRef idx="1">
+            <a:schemeClr val="accent1"/>
+          </a:lnRef>
+          <a:fillRef idx="3">
+            <a:schemeClr val="accent1"/>
+          </a:fillRef>
+          <a:effectRef idx="2">
+            <a:schemeClr val="accent1"/>
+          </a:effectRef>
+          <a:fontRef idx="minor">
+            <a:schemeClr val="lt1"/>
+          </a:fontRef>
+        </p:style>
+        <p:txBody>
+          <a:bodyPr rtlCol="0" anchor="ctr"/>
+          <a:lstStyle/>
+          <a:p>
+            <a:pPr algn="ctr"/>
+          </a:p>
+        </p:txBody>
+      </p:sp>
+      <p:sp>
+        <p:nvSpPr>
+          <p:cNvPr id="52" name="TextBox 51"/>
+          <p:cNvSpPr txBox="1"/>
+          <p:nvPr/>
+        </p:nvSpPr>
+        <p:spPr>
+          <a:xfrm>
+            <a:off x="9681667" y="2999232"/>
+            <a:ext cx="1803196" cy="256032"/>
+          </a:xfrm>
+          <a:prstGeom prst="rect">
+            <a:avLst/>
+          </a:prstGeom>
+          <a:noFill/>
+        </p:spPr>
+        <p:txBody>
+          <a:bodyPr wrap="square" lIns="0" rIns="0" tIns="0" bIns="0" anchor="ctr">
+            <a:spAutoFit/>
+          </a:bodyPr>
+          <a:lstStyle/>
+          <a:p>
+            <a:pPr algn="l"/>
+            <a:r>
+              <a:rPr sz="1250" b="1">
+                <a:solidFill>
+                  <a:srgbClr val="232F3E"/>
+                </a:solidFill>
+                <a:latin typeface="Calibri"/>
+              </a:rPr>
+              <a:t>QA Agent</a:t>
+            </a:r>
+          </a:p>
+        </p:txBody>
+      </p:sp>
+      <p:sp>
+        <p:nvSpPr>
+          <p:cNvPr id="53" name="Rounded Rectangle 52"/>
+          <p:cNvSpPr/>
+          <p:nvPr/>
+        </p:nvSpPr>
+        <p:spPr>
+          <a:xfrm>
+            <a:off x="9681667" y="3291840"/>
+            <a:ext cx="1803196" cy="237744"/>
+          </a:xfrm>
+          <a:prstGeom prst="roundRect">
+            <a:avLst>
+              <a:gd name="adj" fmla="val 30769"/>
+            </a:avLst>
+          </a:prstGeom>
+          <a:solidFill>
+            <a:srgbClr val="FFEFD6"/>
+          </a:solidFill>
+          <a:ln>
+            <a:noFill/>
+          </a:ln>
+          <a:effectLst/>
+        </p:spPr>
+        <p:style>
+          <a:lnRef idx="1">
+            <a:schemeClr val="accent1"/>
+          </a:lnRef>
+          <a:fillRef idx="3">
+            <a:schemeClr val="accent1"/>
+          </a:fillRef>
+          <a:effectRef idx="2">
+            <a:schemeClr val="accent1"/>
+          </a:effectRef>
+          <a:fontRef idx="minor">
+            <a:schemeClr val="lt1"/>
+          </a:fontRef>
+        </p:style>
+        <p:txBody>
+          <a:bodyPr rtlCol="0" anchor="ctr"/>
+          <a:lstStyle/>
+          <a:p>
+            <a:pPr algn="ctr"/>
+          </a:p>
+        </p:txBody>
+      </p:sp>
+      <p:sp>
+        <p:nvSpPr>
+          <p:cNvPr id="54" name="TextBox 53"/>
+          <p:cNvSpPr txBox="1"/>
+          <p:nvPr/>
+        </p:nvSpPr>
+        <p:spPr>
+          <a:xfrm>
+            <a:off x="9681667" y="3291840"/>
+            <a:ext cx="1803196" cy="237744"/>
+          </a:xfrm>
+          <a:prstGeom prst="rect">
+            <a:avLst/>
+          </a:prstGeom>
+          <a:noFill/>
+        </p:spPr>
+        <p:txBody>
+          <a:bodyPr wrap="square" lIns="0" rIns="0" tIns="0" bIns="0" anchor="ctr">
+            <a:spAutoFit/>
+          </a:bodyPr>
+          <a:lstStyle/>
+          <a:p>
+            <a:pPr algn="ctr"/>
+            <a:r>
+              <a:rPr sz="1000" b="1">
+                <a:solidFill>
+                  <a:srgbClr val="545B64"/>
+                </a:solidFill>
+                <a:latin typeface="Calibri"/>
+              </a:rPr>
+              <a:t>e2e/</a:t>
+            </a:r>
+          </a:p>
+        </p:txBody>
+      </p:sp>
+      <p:sp>
+        <p:nvSpPr>
+          <p:cNvPr id="55" name="TextBox 54"/>
+          <p:cNvSpPr txBox="1"/>
+          <p:nvPr/>
+        </p:nvSpPr>
+        <p:spPr>
+          <a:xfrm>
+            <a:off x="9681667" y="3621024"/>
+            <a:ext cx="1803196" cy="676656"/>
+          </a:xfrm>
+          <a:prstGeom prst="rect">
+            <a:avLst/>
+          </a:prstGeom>
+          <a:noFill/>
+        </p:spPr>
+        <p:txBody>
+          <a:bodyPr wrap="square" lIns="0" rIns="0" tIns="0" bIns="0" anchor="t">
+            <a:spAutoFit/>
+          </a:bodyPr>
+          <a:lstStyle/>
+          <a:p>
+            <a:pPr algn="l"/>
+            <a:r>
+              <a:rPr sz="1050" b="0">
+                <a:solidFill>
+                  <a:srgbClr val="16191F"/>
+                </a:solidFill>
+                <a:latin typeface="Calibri"/>
+              </a:rPr>
+              <a:t>Playwright E2E and regression coverage. Cannot touch src at all.</a:t>
+            </a:r>
+          </a:p>
+        </p:txBody>
+      </p:sp>
+      <p:sp>
+        <p:nvSpPr>
+          <p:cNvPr id="56" name="Rectangle 55"/>
+          <p:cNvSpPr/>
+          <p:nvPr/>
+        </p:nvSpPr>
+        <p:spPr>
+          <a:xfrm>
+            <a:off x="9681667" y="4334256"/>
+            <a:ext cx="1803196" cy="9144"/>
+          </a:xfrm>
+          <a:prstGeom prst="rect">
+            <a:avLst/>
+          </a:prstGeom>
+          <a:solidFill>
+            <a:srgbClr val="E4E7EA"/>
+          </a:solidFill>
+          <a:ln>
+            <a:noFill/>
+          </a:ln>
+          <a:effectLst/>
+        </p:spPr>
+        <p:style>
+          <a:lnRef idx="1">
+            <a:schemeClr val="accent1"/>
+          </a:lnRef>
+          <a:fillRef idx="3">
+            <a:schemeClr val="accent1"/>
+          </a:fillRef>
+          <a:effectRef idx="2">
+            <a:schemeClr val="accent1"/>
+          </a:effectRef>
+          <a:fontRef idx="minor">
+            <a:schemeClr val="lt1"/>
+          </a:fontRef>
+        </p:style>
+        <p:txBody>
+          <a:bodyPr rtlCol="0" anchor="ctr"/>
+          <a:lstStyle/>
+          <a:p>
+            <a:pPr algn="ctr"/>
+          </a:p>
+        </p:txBody>
+      </p:sp>
+      <p:sp>
+        <p:nvSpPr>
+          <p:cNvPr id="57" name="TextBox 56"/>
+          <p:cNvSpPr txBox="1"/>
+          <p:nvPr/>
+        </p:nvSpPr>
+        <p:spPr>
+          <a:xfrm>
+            <a:off x="9681667" y="4407408"/>
+            <a:ext cx="1803196" cy="603504"/>
+          </a:xfrm>
+          <a:prstGeom prst="rect">
+            <a:avLst/>
+          </a:prstGeom>
+          <a:noFill/>
+        </p:spPr>
+        <p:txBody>
+          <a:bodyPr wrap="square" lIns="0" rIns="0" tIns="0" bIns="0" anchor="t">
+            <a:spAutoFit/>
+          </a:bodyPr>
+          <a:lstStyle/>
+          <a:p>
+            <a:pPr algn="l"/>
+            <a:r>
+              <a:rPr sz="1000" b="0">
+                <a:solidFill>
+                  <a:srgbClr val="545B64"/>
+                </a:solidFill>
+                <a:latin typeface="Calibri"/>
+              </a:rPr>
+              <a:t>#8 onboarding and responsive · 5 PRs purely for coverage · 376 tests green</a:t>
+            </a:r>
+          </a:p>
+        </p:txBody>
+      </p:sp>
+      <p:sp>
+        <p:nvSpPr>
+          <p:cNvPr id="58" name="TextBox 57"/>
+          <p:cNvSpPr txBox="1"/>
+          <p:nvPr/>
+        </p:nvSpPr>
+        <p:spPr>
+          <a:xfrm>
+            <a:off x="566928" y="5285232"/>
+            <a:ext cx="11064240" cy="512064"/>
+          </a:xfrm>
+          <a:prstGeom prst="rect">
+            <a:avLst/>
+          </a:prstGeom>
+          <a:noFill/>
+        </p:spPr>
+        <p:txBody>
+          <a:bodyPr wrap="square" lIns="0" rIns="0" tIns="0" bIns="0" anchor="t">
+            <a:spAutoFit/>
+          </a:bodyPr>
+          <a:lstStyle/>
+          <a:p>
+            <a:pPr algn="l"/>
+            <a:r>
+              <a:rPr sz="1100" b="0">
+                <a:solidFill>
+                  <a:srgbClr val="545B64"/>
+                </a:solidFill>
+                <a:latin typeface="Calibri"/>
+              </a:rPr>
+              <a:t>Each is a prompt file in .kiro/agents/ with a voice exemplar and an explicit do-not-modify list. Disjoint ownership is what keeps five agents editing at once from being a merge-conflict generator.</a:t>
+            </a:r>
+          </a:p>
+        </p:txBody>
+      </p:sp>
+      <p:sp>
+        <p:nvSpPr>
+          <p:cNvPr id="59" name="Rounded Rectangle 58"/>
+          <p:cNvSpPr/>
+          <p:nvPr/>
+        </p:nvSpPr>
+        <p:spPr>
+          <a:xfrm>
+            <a:off x="566928" y="5870448"/>
+            <a:ext cx="11064240" cy="384048"/>
+          </a:xfrm>
+          <a:prstGeom prst="roundRect">
+            <a:avLst>
+              <a:gd name="adj" fmla="val 23809"/>
+            </a:avLst>
+          </a:prstGeom>
+          <a:solidFill>
+            <a:srgbClr val="FFEFD6"/>
+          </a:solidFill>
+          <a:ln>
+            <a:noFill/>
+          </a:ln>
+          <a:effectLst/>
+        </p:spPr>
+        <p:style>
+          <a:lnRef idx="1">
+            <a:schemeClr val="accent1"/>
+          </a:lnRef>
+          <a:fillRef idx="3">
+            <a:schemeClr val="accent1"/>
+          </a:fillRef>
+          <a:effectRef idx="2">
+            <a:schemeClr val="accent1"/>
+          </a:effectRef>
+          <a:fontRef idx="minor">
+            <a:schemeClr val="lt1"/>
+          </a:fontRef>
+        </p:style>
+        <p:txBody>
+          <a:bodyPr rtlCol="0" anchor="ctr"/>
+          <a:lstStyle/>
+          <a:p>
+            <a:pPr algn="ctr"/>
+          </a:p>
+        </p:txBody>
+      </p:sp>
+      <p:sp>
+        <p:nvSpPr>
+          <p:cNvPr id="60" name="TextBox 59"/>
+          <p:cNvSpPr txBox="1"/>
+          <p:nvPr/>
+        </p:nvSpPr>
+        <p:spPr>
+          <a:xfrm>
+            <a:off x="768096" y="5870448"/>
+            <a:ext cx="10661904" cy="384048"/>
+          </a:xfrm>
+          <a:prstGeom prst="rect">
+            <a:avLst/>
+          </a:prstGeom>
+          <a:noFill/>
+        </p:spPr>
+        <p:txBody>
+          <a:bodyPr wrap="square" lIns="0" rIns="0" tIns="0" bIns="0" anchor="ctr">
+            <a:spAutoFit/>
+          </a:bodyPr>
+          <a:lstStyle/>
+          <a:p>
+            <a:pPr algn="l"/>
+            <a:r>
+              <a:rPr sz="1100" b="1">
+                <a:solidFill>
+                  <a:srgbClr val="232F3E"/>
+                </a:solidFill>
+                <a:latin typeface="Calibri"/>
+              </a:rPr>
+              <a:t>57 pull requests  ·  49 merged  ·  93 review comments  ·  </a:t>
+            </a:r>
+            <a:r>
+              <a:rPr sz="1100" b="0">
+                <a:solidFill>
+                  <a:srgbClr val="232F3E"/>
+                </a:solidFill>
+                <a:latin typeface="Calibri"/>
+              </a:rPr>
+              <a:t>I wrote none of the application code.</a:t>
             </a:r>
           </a:p>
         </p:txBody>
@@ -29989,328 +35293,6 @@
         <p14:creationId xmlns:p14="http://schemas.microsoft.com/office/powerpoint/2010/main" val="3652100840"/>
       </p:ext>
     </p:extLst>
-  </p:cSld>
-  <p:clrMapOvr>
-    <a:masterClrMapping/>
-  </p:clrMapOvr>
-</p:sld>
-</file>
-
-<file path=ppt/slides/slide7.xml><?xml version="1.0" encoding="utf-8"?>
-<p:sld xmlns:a="http://schemas.openxmlformats.org/drawingml/2006/main" xmlns:r="http://schemas.openxmlformats.org/officeDocument/2006/relationships" xmlns:p="http://schemas.openxmlformats.org/presentationml/2006/main">
-  <p:cSld>
-    <p:spTree>
-      <p:nvGrpSpPr>
-        <p:cNvPr id="1" name=""/>
-        <p:cNvGrpSpPr/>
-        <p:nvPr/>
-      </p:nvGrpSpPr>
-      <p:grpSpPr>
-        <a:xfrm>
-          <a:off x="0" y="0"/>
-          <a:ext cx="0" cy="0"/>
-          <a:chOff x="0" y="0"/>
-          <a:chExt cx="0" cy="0"/>
-        </a:xfrm>
-      </p:grpSpPr>
-      <p:sp>
-        <p:nvSpPr>
-          <p:cNvPr id="2" name="Rectangle 1"/>
-          <p:cNvSpPr/>
-          <p:nvPr/>
-        </p:nvSpPr>
-        <p:spPr>
-          <a:xfrm>
-            <a:off x="0" y="0"/>
-            <a:ext cx="12191969" cy="6858000"/>
-          </a:xfrm>
-          <a:prstGeom prst="rect">
-            <a:avLst/>
-          </a:prstGeom>
-          <a:solidFill>
-            <a:srgbClr val="FFFFFF"/>
-          </a:solidFill>
-          <a:ln>
-            <a:noFill/>
-          </a:ln>
-          <a:effectLst/>
-        </p:spPr>
-        <p:style>
-          <a:lnRef idx="1">
-            <a:schemeClr val="accent1"/>
-          </a:lnRef>
-          <a:fillRef idx="3">
-            <a:schemeClr val="accent1"/>
-          </a:fillRef>
-          <a:effectRef idx="2">
-            <a:schemeClr val="accent1"/>
-          </a:effectRef>
-          <a:fontRef idx="minor">
-            <a:schemeClr val="lt1"/>
-          </a:fontRef>
-        </p:style>
-        <p:txBody>
-          <a:bodyPr rtlCol="0" anchor="ctr"/>
-          <a:lstStyle/>
-          <a:p>
-            <a:pPr algn="ctr"/>
-            <a:endParaRPr/>
-          </a:p>
-        </p:txBody>
-      </p:sp>
-      <p:pic>
-        <p:nvPicPr>
-          <p:cNvPr id="3" name="Picture 2" descr="Deep-dive: AgentCore Runtime — cost. Two bills split into what is fixed and what grows with usage."/>
-          <p:cNvPicPr>
-            <a:picLocks noChangeAspect="1"/>
-          </p:cNvPicPr>
-          <p:nvPr/>
-        </p:nvPicPr>
-        <p:blipFill>
-          <a:blip r:embed="rId3"/>
-          <a:srcRect t="33535"/>
-          <a:stretch>
-            <a:fillRect/>
-          </a:stretch>
-        </p:blipFill>
-        <p:spPr>
-          <a:xfrm>
-            <a:off x="0" y="2299854"/>
-            <a:ext cx="12192000" cy="4558145"/>
-          </a:xfrm>
-          <a:prstGeom prst="rect">
-            <a:avLst/>
-          </a:prstGeom>
-        </p:spPr>
-      </p:pic>
-      <p:sp>
-        <p:nvSpPr>
-          <p:cNvPr id="4" name="Oval 3"/>
-          <p:cNvSpPr/>
-          <p:nvPr/>
-        </p:nvSpPr>
-        <p:spPr>
-          <a:xfrm>
-            <a:off x="502920" y="365760"/>
-            <a:ext cx="594360" cy="594360"/>
-          </a:xfrm>
-          <a:prstGeom prst="ellipse">
-            <a:avLst/>
-          </a:prstGeom>
-          <a:solidFill>
-            <a:srgbClr val="232F3E"/>
-          </a:solidFill>
-          <a:ln>
-            <a:noFill/>
-          </a:ln>
-          <a:effectLst/>
-        </p:spPr>
-        <p:style>
-          <a:lnRef idx="1">
-            <a:schemeClr val="accent1"/>
-          </a:lnRef>
-          <a:fillRef idx="3">
-            <a:schemeClr val="accent1"/>
-          </a:fillRef>
-          <a:effectRef idx="2">
-            <a:schemeClr val="accent1"/>
-          </a:effectRef>
-          <a:fontRef idx="minor">
-            <a:schemeClr val="lt1"/>
-          </a:fontRef>
-        </p:style>
-        <p:txBody>
-          <a:bodyPr rtlCol="0" anchor="ctr"/>
-          <a:lstStyle/>
-          <a:p>
-            <a:pPr algn="ctr"/>
-            <a:endParaRPr/>
-          </a:p>
-        </p:txBody>
-      </p:sp>
-      <p:sp>
-        <p:nvSpPr>
-          <p:cNvPr id="5" name="TextBox 4"/>
-          <p:cNvSpPr txBox="1"/>
-          <p:nvPr/>
-        </p:nvSpPr>
-        <p:spPr>
-          <a:xfrm>
-            <a:off x="502920" y="365760"/>
-            <a:ext cx="594360" cy="594360"/>
-          </a:xfrm>
-          <a:prstGeom prst="rect">
-            <a:avLst/>
-          </a:prstGeom>
-          <a:noFill/>
-        </p:spPr>
-        <p:txBody>
-          <a:bodyPr wrap="square" lIns="0" tIns="0" rIns="0" bIns="0" anchor="ctr">
-            <a:spAutoFit/>
-          </a:bodyPr>
-          <a:lstStyle/>
-          <a:p>
-            <a:pPr algn="ctr"/>
-            <a:r>
-              <a:rPr sz="2600" b="1">
-                <a:solidFill>
-                  <a:srgbClr val="FF9900"/>
-                </a:solidFill>
-                <a:latin typeface="Calibri"/>
-              </a:rPr>
-              <a:t>7</a:t>
-            </a:r>
-          </a:p>
-        </p:txBody>
-      </p:sp>
-      <p:sp>
-        <p:nvSpPr>
-          <p:cNvPr id="6" name="TextBox 5"/>
-          <p:cNvSpPr txBox="1"/>
-          <p:nvPr/>
-        </p:nvSpPr>
-        <p:spPr>
-          <a:xfrm>
-            <a:off x="502920" y="6446520"/>
-            <a:ext cx="8229600" cy="320040"/>
-          </a:xfrm>
-          <a:prstGeom prst="rect">
-            <a:avLst/>
-          </a:prstGeom>
-          <a:noFill/>
-        </p:spPr>
-        <p:txBody>
-          <a:bodyPr wrap="square" lIns="0" tIns="0" rIns="0" bIns="0" anchor="ctr">
-            <a:spAutoFit/>
-          </a:bodyPr>
-          <a:lstStyle/>
-          <a:p>
-            <a:pPr algn="l"/>
-            <a:r>
-              <a:rPr sz="1000" b="1">
-                <a:solidFill>
-                  <a:srgbClr val="545B64"/>
-                </a:solidFill>
-                <a:latin typeface="Calibri"/>
-              </a:rPr>
-              <a:t>VALENTIN   ·   GenAI TFC Capstone Deep-Dive</a:t>
-            </a:r>
-          </a:p>
-        </p:txBody>
-      </p:sp>
-      <p:sp>
-        <p:nvSpPr>
-          <p:cNvPr id="7" name="TextBox 6"/>
-          <p:cNvSpPr txBox="1"/>
-          <p:nvPr/>
-        </p:nvSpPr>
-        <p:spPr>
-          <a:xfrm>
-            <a:off x="10332720" y="6446520"/>
-            <a:ext cx="1371600" cy="320040"/>
-          </a:xfrm>
-          <a:prstGeom prst="rect">
-            <a:avLst/>
-          </a:prstGeom>
-          <a:noFill/>
-        </p:spPr>
-        <p:txBody>
-          <a:bodyPr wrap="square" lIns="0" tIns="0" rIns="0" bIns="0" anchor="ctr">
-            <a:spAutoFit/>
-          </a:bodyPr>
-          <a:lstStyle/>
-          <a:p>
-            <a:pPr algn="r"/>
-            <a:r>
-              <a:rPr sz="1000" b="0">
-                <a:solidFill>
-                  <a:srgbClr val="545B64"/>
-                </a:solidFill>
-                <a:latin typeface="Calibri"/>
-              </a:rPr>
-              <a:t>8 / 17</a:t>
-            </a:r>
-          </a:p>
-        </p:txBody>
-      </p:sp>
-      <p:sp>
-        <p:nvSpPr>
-          <p:cNvPr id="9" name="TextBox 8">
-            <a:extLst>
-              <a:ext uri="{FF2B5EF4-FFF2-40B4-BE49-F238E27FC236}">
-                <a16:creationId xmlns:a16="http://schemas.microsoft.com/office/drawing/2014/main" id="{BEBE1A9C-9247-6911-23F1-5FF33C61AEE8}"/>
-              </a:ext>
-            </a:extLst>
-          </p:cNvPr>
-          <p:cNvSpPr txBox="1"/>
-          <p:nvPr/>
-        </p:nvSpPr>
-        <p:spPr>
-          <a:xfrm>
-            <a:off x="1280160" y="478274"/>
-            <a:ext cx="10058400" cy="369332"/>
-          </a:xfrm>
-          <a:prstGeom prst="rect">
-            <a:avLst/>
-          </a:prstGeom>
-          <a:noFill/>
-        </p:spPr>
-        <p:txBody>
-          <a:bodyPr wrap="square" lIns="0" tIns="0" rIns="0" bIns="0" anchor="ctr">
-            <a:spAutoFit/>
-          </a:bodyPr>
-          <a:lstStyle/>
-          <a:p>
-            <a:pPr algn="l"/>
-            <a:r>
-              <a:rPr lang="en-US" sz="2400" b="1" dirty="0">
-                <a:solidFill>
-                  <a:srgbClr val="232F3E"/>
-                </a:solidFill>
-                <a:highlight>
-                  <a:srgbClr val="FFFF00"/>
-                </a:highlight>
-                <a:latin typeface="Calibri"/>
-              </a:rPr>
-              <a:t>Cost — the bill, itemised</a:t>
-            </a:r>
-            <a:r>
-              <a:rPr sz="2400" b="1" dirty="0">
-                <a:solidFill>
-                  <a:srgbClr val="232F3E"/>
-                </a:solidFill>
-                <a:highlight>
-                  <a:srgbClr val="FFFF00"/>
-                </a:highlight>
-                <a:latin typeface="Calibri"/>
-              </a:rPr>
-              <a:t/>
-            </a:r>
-            <a:r>
-              <a:rPr lang="en-US" sz="2400" b="1" dirty="0">
-                <a:solidFill>
-                  <a:srgbClr val="232F3E"/>
-                </a:solidFill>
-                <a:highlight>
-                  <a:srgbClr val="FFFF00"/>
-                </a:highlight>
-                <a:latin typeface="Calibri"/>
-              </a:rPr>
-              <a:t/>
-            </a:r>
-            <a:endParaRPr sz="2400" b="1" dirty="0">
-              <a:solidFill>
-                <a:srgbClr val="232F3E"/>
-              </a:solidFill>
-              <a:highlight>
-                <a:srgbClr val="FFFF00"/>
-              </a:highlight>
-              <a:latin typeface="Calibri"/>
-            </a:endParaRPr>
-          </a:p>
-        </p:txBody>
-      </p:sp>
-    </p:spTree>
   </p:cSld>
   <p:clrMapOvr>
     <a:masterClrMapping/>
